--- a/slides/datasets-in-10-minutes-fineweb.pptx
+++ b/slides/datasets-in-10-minutes-fineweb.pptx
@@ -31,12 +31,12 @@
     <p:sldId id="279" r:id="rId29"/>
     <p:sldId id="280" r:id="rId30"/>
     <p:sldId id="281" r:id="rId31"/>
-    <p:sldId id="282" r:id="rId32"/>
-    <p:sldId id="283" r:id="rId33"/>
     <p:sldId id="284" r:id="rId34"/>
     <p:sldId id="285" r:id="rId35"/>
     <p:sldId id="286" r:id="rId36"/>
     <p:sldId id="287" r:id="rId37"/>
+    <p:sldId id="282" r:id="rId32"/>
+    <p:sldId id="283" r:id="rId33"/>
     <p:sldId id="288" r:id="rId38"/>
     <p:sldId id="289" r:id="rId39"/>
     <p:sldId id="290" r:id="rId40"/>
@@ -15011,7 +15011,7 @@
         </p:nvSpPr>
         <p:spPr>
           <a:xfrm>
-            <a:off x="1051560" y="1143000"/>
+            <a:off x="1051560" y="1358062"/>
             <a:ext cx="7315200" cy="3566160"/>
           </a:xfrm>
         </p:spPr>
@@ -22634,7 +22634,7 @@
         </p:nvSpPr>
         <p:spPr>
           <a:xfrm>
-            <a:off x="1051560" y="1143000"/>
+            <a:off x="1051560" y="1172896"/>
             <a:ext cx="7315200" cy="3566160"/>
           </a:xfrm>
         </p:spPr>

--- a/slides/datasets-in-10-minutes-fineweb.pptx
+++ b/slides/datasets-in-10-minutes-fineweb.pptx
@@ -786,8 +786,8 @@
         </p:nvSpPr>
         <p:spPr>
           <a:xfrm>
-            <a:off x="8607898" y="-10450"/>
-            <a:ext cx="548701" cy="479700"/>
+            <a:off x="8412480" y="7937"/>
+            <a:ext cx="640080" cy="480059"/>
           </a:xfrm>
           <a:prstGeom prst="rect">
             <a:avLst/>
@@ -798,10 +798,20 @@
           </a:ln>
         </p:spPr>
         <p:txBody>
-          <a:bodyPr anchor="ctr"/>
-          <a:lstStyle/>
-          <a:p>
-            <a:pPr algn="ctr"/>
+          <a:bodyPr anchor="ctr" lIns="0" tIns="0" bIns="0"/>
+          <a:lstStyle/>
+          <a:p>
+            <a:pPr algn="r">
+              <a:lnSpc>
+                <a:spcPct val="100000"/>
+              </a:lnSpc>
+              <a:spcBef>
+                <a:spcPts val="0"/>
+              </a:spcBef>
+              <a:spcAft>
+                <a:spcPts val="0"/>
+              </a:spcAft>
+            </a:pPr>
             <a:fld id="{00000000-1234-1234-1234-000000000999}" type="slidenum">
               <a:rPr lang="ja-JP" sz="1800" b="1">
                 <a:solidFill>
@@ -2249,8 +2259,8 @@
         </p:nvSpPr>
         <p:spPr>
           <a:xfrm>
-            <a:off x="8501908" y="28683"/>
-            <a:ext cx="548700" cy="393600"/>
+            <a:off x="8412480" y="7937"/>
+            <a:ext cx="640080" cy="480059"/>
           </a:xfrm>
           <a:prstGeom prst="rect">
             <a:avLst/>
@@ -2261,10 +2271,20 @@
           </a:ln>
         </p:spPr>
         <p:txBody>
-          <a:bodyPr anchor="ctr"/>
-          <a:lstStyle/>
-          <a:p>
-            <a:pPr algn="r"/>
+          <a:bodyPr anchor="ctr" lIns="0" tIns="0" bIns="0"/>
+          <a:lstStyle/>
+          <a:p>
+            <a:pPr algn="r">
+              <a:lnSpc>
+                <a:spcPct val="100000"/>
+              </a:lnSpc>
+              <a:spcBef>
+                <a:spcPts val="0"/>
+              </a:spcBef>
+              <a:spcAft>
+                <a:spcPts val="0"/>
+              </a:spcAft>
+            </a:pPr>
             <a:fld id="{00000000-1234-1234-1234-000000000999}" type="slidenum">
               <a:rPr lang="ja-JP" sz="1800" b="1">
                 <a:solidFill>
@@ -2782,8 +2802,8 @@
         </p:nvSpPr>
         <p:spPr>
           <a:xfrm>
-            <a:off x="8501908" y="28683"/>
-            <a:ext cx="548700" cy="393600"/>
+            <a:off x="8412480" y="7937"/>
+            <a:ext cx="640080" cy="480059"/>
           </a:xfrm>
           <a:prstGeom prst="rect">
             <a:avLst/>
@@ -2794,10 +2814,20 @@
           </a:ln>
         </p:spPr>
         <p:txBody>
-          <a:bodyPr anchor="ctr"/>
-          <a:lstStyle/>
-          <a:p>
-            <a:pPr algn="r"/>
+          <a:bodyPr anchor="ctr" lIns="0" tIns="0" bIns="0"/>
+          <a:lstStyle/>
+          <a:p>
+            <a:pPr algn="r">
+              <a:lnSpc>
+                <a:spcPct val="100000"/>
+              </a:lnSpc>
+              <a:spcBef>
+                <a:spcPts val="0"/>
+              </a:spcBef>
+              <a:spcAft>
+                <a:spcPts val="0"/>
+              </a:spcAft>
+            </a:pPr>
             <a:fld id="{00000000-1234-1234-1234-000000000999}" type="slidenum">
               <a:rPr lang="ja-JP" sz="1800" b="1">
                 <a:solidFill>
@@ -3243,8 +3273,8 @@
         </p:nvSpPr>
         <p:spPr>
           <a:xfrm>
-            <a:off x="8501908" y="28683"/>
-            <a:ext cx="548700" cy="393600"/>
+            <a:off x="8412480" y="7937"/>
+            <a:ext cx="640080" cy="480059"/>
           </a:xfrm>
           <a:prstGeom prst="rect">
             <a:avLst/>
@@ -3255,10 +3285,20 @@
           </a:ln>
         </p:spPr>
         <p:txBody>
-          <a:bodyPr anchor="ctr"/>
-          <a:lstStyle/>
-          <a:p>
-            <a:pPr algn="r"/>
+          <a:bodyPr anchor="ctr" lIns="0" tIns="0" bIns="0"/>
+          <a:lstStyle/>
+          <a:p>
+            <a:pPr algn="r">
+              <a:lnSpc>
+                <a:spcPct val="100000"/>
+              </a:lnSpc>
+              <a:spcBef>
+                <a:spcPts val="0"/>
+              </a:spcBef>
+              <a:spcAft>
+                <a:spcPts val="0"/>
+              </a:spcAft>
+            </a:pPr>
             <a:fld id="{00000000-1234-1234-1234-000000000999}" type="slidenum">
               <a:rPr lang="ja-JP" sz="1800" b="1">
                 <a:solidFill>
@@ -3704,8 +3744,8 @@
         </p:nvSpPr>
         <p:spPr>
           <a:xfrm>
-            <a:off x="8501908" y="28683"/>
-            <a:ext cx="548700" cy="393600"/>
+            <a:off x="8412480" y="7937"/>
+            <a:ext cx="640080" cy="480059"/>
           </a:xfrm>
           <a:prstGeom prst="rect">
             <a:avLst/>
@@ -3716,10 +3756,20 @@
           </a:ln>
         </p:spPr>
         <p:txBody>
-          <a:bodyPr anchor="ctr"/>
-          <a:lstStyle/>
-          <a:p>
-            <a:pPr algn="r"/>
+          <a:bodyPr anchor="ctr" lIns="0" tIns="0" bIns="0"/>
+          <a:lstStyle/>
+          <a:p>
+            <a:pPr algn="r">
+              <a:lnSpc>
+                <a:spcPct val="100000"/>
+              </a:lnSpc>
+              <a:spcBef>
+                <a:spcPts val="0"/>
+              </a:spcBef>
+              <a:spcAft>
+                <a:spcPts val="0"/>
+              </a:spcAft>
+            </a:pPr>
             <a:fld id="{00000000-1234-1234-1234-000000000999}" type="slidenum">
               <a:rPr lang="ja-JP" sz="1800" b="1">
                 <a:solidFill>
@@ -4231,8 +4281,8 @@
         </p:nvSpPr>
         <p:spPr>
           <a:xfrm>
-            <a:off x="8501908" y="28683"/>
-            <a:ext cx="548700" cy="393600"/>
+            <a:off x="8412480" y="7937"/>
+            <a:ext cx="640080" cy="480059"/>
           </a:xfrm>
           <a:prstGeom prst="rect">
             <a:avLst/>
@@ -4243,10 +4293,20 @@
           </a:ln>
         </p:spPr>
         <p:txBody>
-          <a:bodyPr anchor="ctr"/>
-          <a:lstStyle/>
-          <a:p>
-            <a:pPr algn="r"/>
+          <a:bodyPr anchor="ctr" lIns="0" tIns="0" bIns="0"/>
+          <a:lstStyle/>
+          <a:p>
+            <a:pPr algn="r">
+              <a:lnSpc>
+                <a:spcPct val="100000"/>
+              </a:lnSpc>
+              <a:spcBef>
+                <a:spcPts val="0"/>
+              </a:spcBef>
+              <a:spcAft>
+                <a:spcPts val="0"/>
+              </a:spcAft>
+            </a:pPr>
             <a:fld id="{00000000-1234-1234-1234-000000000999}" type="slidenum">
               <a:rPr lang="ja-JP" sz="1800" b="1">
                 <a:solidFill>
@@ -4526,8 +4586,8 @@
         </p:nvSpPr>
         <p:spPr>
           <a:xfrm>
-            <a:off x="8501908" y="28683"/>
-            <a:ext cx="548700" cy="393600"/>
+            <a:off x="8412480" y="7937"/>
+            <a:ext cx="640080" cy="480059"/>
           </a:xfrm>
           <a:prstGeom prst="rect">
             <a:avLst/>
@@ -4538,10 +4598,20 @@
           </a:ln>
         </p:spPr>
         <p:txBody>
-          <a:bodyPr anchor="ctr"/>
-          <a:lstStyle/>
-          <a:p>
-            <a:pPr algn="r"/>
+          <a:bodyPr anchor="ctr" lIns="0" tIns="0" bIns="0"/>
+          <a:lstStyle/>
+          <a:p>
+            <a:pPr algn="r">
+              <a:lnSpc>
+                <a:spcPct val="100000"/>
+              </a:lnSpc>
+              <a:spcBef>
+                <a:spcPts val="0"/>
+              </a:spcBef>
+              <a:spcAft>
+                <a:spcPts val="0"/>
+              </a:spcAft>
+            </a:pPr>
             <a:fld id="{00000000-1234-1234-1234-000000000999}" type="slidenum">
               <a:rPr lang="ja-JP" sz="1800" b="1">
                 <a:solidFill>
@@ -5154,8 +5224,8 @@
         </p:nvSpPr>
         <p:spPr>
           <a:xfrm>
-            <a:off x="8501908" y="28683"/>
-            <a:ext cx="548700" cy="393600"/>
+            <a:off x="8412480" y="7937"/>
+            <a:ext cx="640080" cy="480059"/>
           </a:xfrm>
           <a:prstGeom prst="rect">
             <a:avLst/>
@@ -5166,10 +5236,20 @@
           </a:ln>
         </p:spPr>
         <p:txBody>
-          <a:bodyPr anchor="ctr"/>
-          <a:lstStyle/>
-          <a:p>
-            <a:pPr algn="r"/>
+          <a:bodyPr anchor="ctr" lIns="0" tIns="0" bIns="0"/>
+          <a:lstStyle/>
+          <a:p>
+            <a:pPr algn="r">
+              <a:lnSpc>
+                <a:spcPct val="100000"/>
+              </a:lnSpc>
+              <a:spcBef>
+                <a:spcPts val="0"/>
+              </a:spcBef>
+              <a:spcAft>
+                <a:spcPts val="0"/>
+              </a:spcAft>
+            </a:pPr>
             <a:fld id="{00000000-1234-1234-1234-000000000999}" type="slidenum">
               <a:rPr lang="ja-JP" sz="1800" b="1">
                 <a:solidFill>
@@ -5468,8 +5548,8 @@
         </p:nvSpPr>
         <p:spPr>
           <a:xfrm>
-            <a:off x="8472458" y="28683"/>
-            <a:ext cx="548700" cy="393600"/>
+            <a:off x="8412480" y="7937"/>
+            <a:ext cx="640080" cy="480059"/>
           </a:xfrm>
           <a:prstGeom prst="rect">
             <a:avLst/>
@@ -5480,10 +5560,20 @@
           </a:ln>
         </p:spPr>
         <p:txBody>
-          <a:bodyPr anchor="ctr"/>
-          <a:lstStyle/>
-          <a:p>
-            <a:pPr algn="r"/>
+          <a:bodyPr anchor="ctr" lIns="0" tIns="0" bIns="0"/>
+          <a:lstStyle/>
+          <a:p>
+            <a:pPr algn="r">
+              <a:lnSpc>
+                <a:spcPct val="100000"/>
+              </a:lnSpc>
+              <a:spcBef>
+                <a:spcPts val="0"/>
+              </a:spcBef>
+              <a:spcAft>
+                <a:spcPts val="0"/>
+              </a:spcAft>
+            </a:pPr>
             <a:fld id="{00000000-1234-1234-1234-000000000999}" type="slidenum">
               <a:rPr lang="ja-JP" sz="1800" b="1">
                 <a:solidFill>
@@ -6029,8 +6119,8 @@
         </p:nvSpPr>
         <p:spPr>
           <a:xfrm>
-            <a:off x="8472458" y="4663217"/>
-            <a:ext cx="548700" cy="393600"/>
+            <a:off x="8412480" y="7937"/>
+            <a:ext cx="640080" cy="480059"/>
           </a:xfrm>
           <a:prstGeom prst="rect">
             <a:avLst/>
@@ -6041,7 +6131,7 @@
           </a:ln>
         </p:spPr>
         <p:txBody>
-          <a:bodyPr spcFirstLastPara="1" wrap="square" lIns="91425" tIns="91425" rIns="91425" bIns="91425" anchor="ctr" anchorCtr="0">
+          <a:bodyPr spcFirstLastPara="1" wrap="square" lIns="0" tIns="0" bIns="0" anchor="ctr" anchorCtr="0">
             <a:normAutofit/>
           </a:bodyPr>
           <a:lstStyle>
@@ -6147,6 +6237,9 @@
           </a:lstStyle>
           <a:p>
             <a:pPr marL="0" lvl="0" indent="0" algn="r" rtl="0">
+              <a:lnSpc>
+                <a:spcPct val="100000"/>
+              </a:lnSpc>
               <a:spcBef>
                 <a:spcPts val="0"/>
               </a:spcBef>
@@ -15019,7 +15112,7 @@
           <a:bodyPr lIns="0" rIns="0" tIns="0" bIns="0"/>
           <a:lstStyle/>
           <a:p>
-            <a:pPr lvl="0" marL="457200" indent="-355600">
+            <a:pPr lvl="0" marL="558800" indent="-457200">
               <a:spcAft>
                 <a:spcPts val="2000"/>
               </a:spcAft>
@@ -15044,7 +15137,7 @@
             </a:r>
           </a:p>
           <a:p>
-            <a:pPr lvl="0" marL="457200" indent="-355600">
+            <a:pPr lvl="0" marL="558800" indent="-457200">
               <a:spcAft>
                 <a:spcPts val="2000"/>
               </a:spcAft>
@@ -15069,7 +15162,7 @@
             </a:r>
           </a:p>
           <a:p>
-            <a:pPr lvl="0" marL="457200" indent="-355600">
+            <a:pPr lvl="0" marL="558800" indent="-457200">
               <a:spcAft>
                 <a:spcPts val="2000"/>
               </a:spcAft>
@@ -15094,7 +15187,7 @@
             </a:r>
           </a:p>
           <a:p>
-            <a:pPr lvl="0" marL="457200" indent="-355600">
+            <a:pPr lvl="0" marL="558800" indent="-457200">
               <a:spcAft>
                 <a:spcPts val="2000"/>
               </a:spcAft>
@@ -22642,7 +22735,7 @@
           <a:bodyPr lIns="0" rIns="0" tIns="0" bIns="0"/>
           <a:lstStyle/>
           <a:p>
-            <a:pPr lvl="0" marL="457200" indent="-355600">
+            <a:pPr lvl="0" marL="558800" indent="-457200">
               <a:spcAft>
                 <a:spcPts val="1200"/>
               </a:spcAft>
@@ -22667,7 +22760,7 @@
             </a:r>
           </a:p>
           <a:p>
-            <a:pPr lvl="0" marL="457200" indent="-355600">
+            <a:pPr lvl="0" marL="558800" indent="-457200">
               <a:spcAft>
                 <a:spcPts val="1200"/>
               </a:spcAft>
@@ -22692,7 +22785,7 @@
             </a:r>
           </a:p>
           <a:p>
-            <a:pPr lvl="0" marL="457200" indent="-355600">
+            <a:pPr lvl="0" marL="558800" indent="-457200">
               <a:spcAft>
                 <a:spcPts val="1200"/>
               </a:spcAft>
@@ -22717,7 +22810,7 @@
             </a:r>
           </a:p>
           <a:p>
-            <a:pPr lvl="0" marL="457200" indent="-355600">
+            <a:pPr lvl="0" marL="558800" indent="-457200">
               <a:spcAft>
                 <a:spcPts val="1200"/>
               </a:spcAft>
@@ -22742,7 +22835,7 @@
             </a:r>
           </a:p>
           <a:p>
-            <a:pPr lvl="0" marL="457200" indent="-355600">
+            <a:pPr lvl="0" marL="558800" indent="-457200">
               <a:spcAft>
                 <a:spcPts val="1200"/>
               </a:spcAft>

--- a/slides/datasets-in-10-minutes-fineweb.pptx
+++ b/slides/datasets-in-10-minutes-fineweb.pptx
@@ -37,6 +37,7 @@
     <p:sldId id="287" r:id="rId37"/>
     <p:sldId id="282" r:id="rId32"/>
     <p:sldId id="283" r:id="rId33"/>
+    <p:sldId id="334" r:id="rId84"/>
     <p:sldId id="288" r:id="rId38"/>
     <p:sldId id="289" r:id="rId39"/>
     <p:sldId id="290" r:id="rId40"/>
@@ -72,6 +73,13 @@
     <p:sldId id="320" r:id="rId70"/>
     <p:sldId id="321" r:id="rId71"/>
     <p:sldId id="322" r:id="rId72"/>
+    <p:sldId id="335" r:id="rId85"/>
+    <p:sldId id="336" r:id="rId86"/>
+    <p:sldId id="337" r:id="rId87"/>
+    <p:sldId id="338" r:id="rId88"/>
+    <p:sldId id="339" r:id="rId89"/>
+    <p:sldId id="340" r:id="rId90"/>
+    <p:sldId id="341" r:id="rId91"/>
     <p:sldId id="323" r:id="rId73"/>
     <p:sldId id="324" r:id="rId74"/>
     <p:sldId id="325" r:id="rId75"/>
@@ -13069,7 +13077,7 @@
                 <a:ea typeface="Noto Sans CJK JP"/>
                 <a:cs typeface="Noto Sans"/>
               </a:rPr>
-              <a:t>3. 事前学習データの比較評価と限界</a:t>
+              <a:t>3. データ品質の評価と話題分布</a:t>
             </a:r>
           </a:p>
         </p:txBody>
@@ -13110,7 +13118,7 @@
                 <a:ea typeface="Noto Sans CJK JP"/>
                 <a:cs typeface="Noto Sans"/>
               </a:rPr>
-              <a:t>3. 事前学習データの比較評価と限界</a:t>
+              <a:t>3. データ品質の評価と話題分布</a:t>
             </a:r>
           </a:p>
         </p:txBody>
@@ -13317,7 +13325,7 @@
                 <a:ea typeface="Noto Sans CJK JP"/>
                 <a:cs typeface="Noto Sans"/>
               </a:rPr>
-              <a:t>3. 事前学習データの比較評価と限界</a:t>
+              <a:t>3. データ品質の評価と話題分布</a:t>
             </a:r>
           </a:p>
         </p:txBody>
@@ -13426,7 +13434,7 @@
                 <a:ea typeface="Noto Sans CJK JP"/>
                 <a:cs typeface="Noto Sans"/>
               </a:rPr>
-              <a:t>原著の比較実験に用いたモデル構成</a:t>
+              <a:t>選択式問題の正解率と集約得点</a:t>
             </a:r>
           </a:p>
         </p:txBody>
@@ -13467,867 +13475,7 @@
                 <a:ea typeface="Noto Sans CJK JP"/>
                 <a:cs typeface="Noto Sans"/>
               </a:rPr>
-              <a:t>3. 事前学習データの比較評価と限界</a:t>
-            </a:r>
-          </a:p>
-        </p:txBody>
-      </p:sp>
-      <p:graphicFrame>
-        <p:nvGraphicFramePr>
-          <p:cNvPr id="4" name="Table 3"/>
-          <p:cNvGraphicFramePr>
-            <a:graphicFrameLocks noGrp="1"/>
-          </p:cNvGraphicFramePr>
-          <p:nvPr/>
-        </p:nvGraphicFramePr>
-        <p:xfrm>
-          <a:off x="548640" y="1508760"/>
-          <a:ext cx="8046720" cy="1901952"/>
-        </p:xfrm>
-        <a:graphic>
-          <a:graphicData uri="http://schemas.openxmlformats.org/drawingml/2006/table">
-            <a:tbl>
-              <a:tblPr>
-                <a:tableStyleId>{5C22544A-7EE6-4342-B048-85BDC9FD1C3A}</a:tableStyleId>
-              </a:tblPr>
-              <a:tblGrid>
-                <a:gridCol w="3474720"/>
-                <a:gridCol w="4572000"/>
-              </a:tblGrid>
-              <a:tr h="475488">
-                <a:tc>
-                  <a:txBody>
-                    <a:bodyPr wrap="square" lIns="0" rIns="0" tIns="0" bIns="0"/>
-                    <a:lstStyle/>
-                    <a:p>
-                      <a:pPr algn="l">
-                        <a:lnSpc>
-                          <a:spcPct val="112000"/>
-                        </a:lnSpc>
-                        <a:spcAft>
-                          <a:spcPts val="0"/>
-                        </a:spcAft>
-                        <a:buNone/>
-                      </a:pPr>
-                      <a:r>
-                        <a:rPr sz="2100" b="0" lang="ja-JP">
-                          <a:solidFill>
-                            <a:srgbClr val="303437"/>
-                          </a:solidFill>
-                          <a:latin typeface="Noto Sans"/>
-                          <a:ea typeface="Noto Sans CJK JP"/>
-                          <a:cs typeface="Noto Sans"/>
-                        </a:rPr>
-                        <a:t>原著v2の構成</a:t>
-                      </a:r>
-                    </a:p>
-                  </a:txBody>
-                  <a:tcPr marL="82296" marR="82296" marT="36576" marB="36576" anchor="ctr">
-                    <a:lnL w="10160">
-                      <a:noFill/>
-                    </a:lnL>
-                    <a:lnR w="10160">
-                      <a:noFill/>
-                    </a:lnR>
-                    <a:lnT w="10160">
-                      <a:solidFill>
-                        <a:srgbClr val="626669"/>
-                      </a:solidFill>
-                    </a:lnT>
-                    <a:lnB w="10160">
-                      <a:solidFill>
-                        <a:srgbClr val="626669"/>
-                      </a:solidFill>
-                    </a:lnB>
-                    <a:solidFill>
-                      <a:srgbClr val="FFFEF8"/>
-                    </a:solidFill>
-                  </a:tcPr>
-                </a:tc>
-                <a:tc>
-                  <a:txBody>
-                    <a:bodyPr wrap="square" lIns="0" rIns="0" tIns="0" bIns="0"/>
-                    <a:lstStyle/>
-                    <a:p>
-                      <a:pPr algn="l">
-                        <a:lnSpc>
-                          <a:spcPct val="112000"/>
-                        </a:lnSpc>
-                        <a:spcAft>
-                          <a:spcPts val="0"/>
-                        </a:spcAft>
-                        <a:buNone/>
-                      </a:pPr>
-                      <a:r>
-                        <a:rPr sz="2100" b="0" lang="ja-JP">
-                          <a:solidFill>
-                            <a:srgbClr val="303437"/>
-                          </a:solidFill>
-                          <a:latin typeface="Noto Sans"/>
-                          <a:ea typeface="Noto Sans CJK JP"/>
-                          <a:cs typeface="Noto Sans"/>
-                        </a:rPr>
-                        <a:t>設定</a:t>
-                      </a:r>
-                    </a:p>
-                  </a:txBody>
-                  <a:tcPr marL="82296" marR="82296" marT="36576" marB="36576" anchor="ctr">
-                    <a:lnL w="10160">
-                      <a:noFill/>
-                    </a:lnL>
-                    <a:lnR w="10160">
-                      <a:noFill/>
-                    </a:lnR>
-                    <a:lnT w="10160">
-                      <a:solidFill>
-                        <a:srgbClr val="626669"/>
-                      </a:solidFill>
-                    </a:lnT>
-                    <a:lnB w="10160">
-                      <a:solidFill>
-                        <a:srgbClr val="626669"/>
-                      </a:solidFill>
-                    </a:lnB>
-                    <a:solidFill>
-                      <a:srgbClr val="FFFEF8"/>
-                    </a:solidFill>
-                  </a:tcPr>
-                </a:tc>
-              </a:tr>
-              <a:tr h="475488">
-                <a:tc>
-                  <a:txBody>
-                    <a:bodyPr wrap="square" lIns="0" rIns="0" tIns="0" bIns="0"/>
-                    <a:lstStyle/>
-                    <a:p>
-                      <a:pPr algn="l">
-                        <a:lnSpc>
-                          <a:spcPct val="112000"/>
-                        </a:lnSpc>
-                        <a:spcAft>
-                          <a:spcPts val="0"/>
-                        </a:spcAft>
-                        <a:buNone/>
-                      </a:pPr>
-                      <a:r>
-                        <a:rPr sz="2100" b="0" lang="ja-JP">
-                          <a:solidFill>
-                            <a:srgbClr val="303437"/>
-                          </a:solidFill>
-                          <a:latin typeface="Noto Sans"/>
-                          <a:ea typeface="Noto Sans CJK JP"/>
-                          <a:cs typeface="Noto Sans"/>
-                        </a:rPr>
-                        <a:t>モデル</a:t>
-                      </a:r>
-                    </a:p>
-                  </a:txBody>
-                  <a:tcPr marL="82296" marR="82296" marT="36576" marB="36576" anchor="ctr">
-                    <a:lnL w="10160">
-                      <a:noFill/>
-                    </a:lnL>
-                    <a:lnR w="10160">
-                      <a:noFill/>
-                    </a:lnR>
-                    <a:lnT w="10160">
-                      <a:solidFill>
-                        <a:srgbClr val="626669"/>
-                      </a:solidFill>
-                    </a:lnT>
-                    <a:lnB w="10160">
-                      <a:noFill/>
-                    </a:lnB>
-                    <a:solidFill>
-                      <a:srgbClr val="FFFEF8"/>
-                    </a:solidFill>
-                  </a:tcPr>
-                </a:tc>
-                <a:tc>
-                  <a:txBody>
-                    <a:bodyPr wrap="square" lIns="0" rIns="0" tIns="0" bIns="0"/>
-                    <a:lstStyle/>
-                    <a:p>
-                      <a:pPr algn="l">
-                        <a:lnSpc>
-                          <a:spcPct val="112000"/>
-                        </a:lnSpc>
-                        <a:spcAft>
-                          <a:spcPts val="0"/>
-                        </a:spcAft>
-                        <a:buNone/>
-                      </a:pPr>
-                      <a:r>
-                        <a:rPr sz="2100" b="0" lang="ja-JP">
-                          <a:solidFill>
-                            <a:srgbClr val="303437"/>
-                          </a:solidFill>
-                          <a:latin typeface="Noto Sans"/>
-                          <a:ea typeface="Noto Sans CJK JP"/>
-                          <a:cs typeface="Noto Sans"/>
-                        </a:rPr>
-                        <a:t>Llama型 / 1.71Bパラメータ</a:t>
-                      </a:r>
-                    </a:p>
-                  </a:txBody>
-                  <a:tcPr marL="82296" marR="82296" marT="36576" marB="36576" anchor="ctr">
-                    <a:lnL w="10160">
-                      <a:noFill/>
-                    </a:lnL>
-                    <a:lnR w="10160">
-                      <a:noFill/>
-                    </a:lnR>
-                    <a:lnT w="10160">
-                      <a:solidFill>
-                        <a:srgbClr val="626669"/>
-                      </a:solidFill>
-                    </a:lnT>
-                    <a:lnB w="10160">
-                      <a:noFill/>
-                    </a:lnB>
-                    <a:solidFill>
-                      <a:srgbClr val="FFFEF8"/>
-                    </a:solidFill>
-                  </a:tcPr>
-                </a:tc>
-              </a:tr>
-              <a:tr h="475488">
-                <a:tc>
-                  <a:txBody>
-                    <a:bodyPr wrap="square" lIns="0" rIns="0" tIns="0" bIns="0"/>
-                    <a:lstStyle/>
-                    <a:p>
-                      <a:pPr algn="l">
-                        <a:lnSpc>
-                          <a:spcPct val="112000"/>
-                        </a:lnSpc>
-                        <a:spcAft>
-                          <a:spcPts val="0"/>
-                        </a:spcAft>
-                        <a:buNone/>
-                      </a:pPr>
-                      <a:r>
-                        <a:rPr sz="2100" b="0" lang="ja-JP">
-                          <a:solidFill>
-                            <a:srgbClr val="303437"/>
-                          </a:solidFill>
-                          <a:latin typeface="Noto Sans"/>
-                          <a:ea typeface="Noto Sans CJK JP"/>
-                          <a:cs typeface="Noto Sans"/>
-                        </a:rPr>
-                        <a:t>文脈長 / 区切り方</a:t>
-                      </a:r>
-                    </a:p>
-                  </a:txBody>
-                  <a:tcPr marL="82296" marR="82296" marT="36576" marB="36576" anchor="ctr">
-                    <a:lnL w="10160">
-                      <a:noFill/>
-                    </a:lnL>
-                    <a:lnR w="10160">
-                      <a:noFill/>
-                    </a:lnR>
-                    <a:lnT w="10160">
-                      <a:noFill/>
-                    </a:lnT>
-                    <a:lnB w="10160">
-                      <a:noFill/>
-                    </a:lnB>
-                    <a:solidFill>
-                      <a:srgbClr val="FFFEF8"/>
-                    </a:solidFill>
-                  </a:tcPr>
-                </a:tc>
-                <a:tc>
-                  <a:txBody>
-                    <a:bodyPr wrap="square" lIns="0" rIns="0" tIns="0" bIns="0"/>
-                    <a:lstStyle/>
-                    <a:p>
-                      <a:pPr algn="l">
-                        <a:lnSpc>
-                          <a:spcPct val="112000"/>
-                        </a:lnSpc>
-                        <a:spcAft>
-                          <a:spcPts val="0"/>
-                        </a:spcAft>
-                        <a:buNone/>
-                      </a:pPr>
-                      <a:r>
-                        <a:rPr sz="2100" b="0" lang="ja-JP">
-                          <a:solidFill>
-                            <a:srgbClr val="303437"/>
-                          </a:solidFill>
-                          <a:latin typeface="Noto Sans"/>
-                          <a:ea typeface="Noto Sans CJK JP"/>
-                          <a:cs typeface="Noto Sans"/>
-                        </a:rPr>
-                        <a:t>2,048トークン / GPT-2</a:t>
-                      </a:r>
-                    </a:p>
-                  </a:txBody>
-                  <a:tcPr marL="82296" marR="82296" marT="36576" marB="36576" anchor="ctr">
-                    <a:lnL w="10160">
-                      <a:noFill/>
-                    </a:lnL>
-                    <a:lnR w="10160">
-                      <a:noFill/>
-                    </a:lnR>
-                    <a:lnT w="10160">
-                      <a:noFill/>
-                    </a:lnT>
-                    <a:lnB w="10160">
-                      <a:noFill/>
-                    </a:lnB>
-                    <a:solidFill>
-                      <a:srgbClr val="FFFEF8"/>
-                    </a:solidFill>
-                  </a:tcPr>
-                </a:tc>
-              </a:tr>
-              <a:tr h="475488">
-                <a:tc>
-                  <a:txBody>
-                    <a:bodyPr wrap="square" lIns="0" rIns="0" tIns="0" bIns="0"/>
-                    <a:lstStyle/>
-                    <a:p>
-                      <a:pPr algn="l">
-                        <a:lnSpc>
-                          <a:spcPct val="112000"/>
-                        </a:lnSpc>
-                        <a:spcAft>
-                          <a:spcPts val="0"/>
-                        </a:spcAft>
-                        <a:buNone/>
-                      </a:pPr>
-                      <a:r>
-                        <a:rPr sz="2100" b="0" lang="ja-JP">
-                          <a:solidFill>
-                            <a:srgbClr val="303437"/>
-                          </a:solidFill>
-                          <a:latin typeface="Noto Sans"/>
-                          <a:ea typeface="Noto Sans CJK JP"/>
-                          <a:cs typeface="Noto Sans"/>
-                        </a:rPr>
-                        <a:t>比較する条件</a:t>
-                      </a:r>
-                    </a:p>
-                  </a:txBody>
-                  <a:tcPr marL="82296" marR="82296" marT="36576" marB="36576" anchor="ctr">
-                    <a:lnL w="10160">
-                      <a:noFill/>
-                    </a:lnL>
-                    <a:lnR w="10160">
-                      <a:noFill/>
-                    </a:lnR>
-                    <a:lnT w="10160">
-                      <a:noFill/>
-                    </a:lnT>
-                    <a:lnB w="10160">
-                      <a:solidFill>
-                        <a:srgbClr val="626669"/>
-                      </a:solidFill>
-                    </a:lnB>
-                    <a:solidFill>
-                      <a:srgbClr val="FFFEF8"/>
-                    </a:solidFill>
-                  </a:tcPr>
-                </a:tc>
-                <a:tc>
-                  <a:txBody>
-                    <a:bodyPr wrap="square" lIns="0" rIns="0" tIns="0" bIns="0"/>
-                    <a:lstStyle/>
-                    <a:p>
-                      <a:pPr algn="l">
-                        <a:lnSpc>
-                          <a:spcPct val="112000"/>
-                        </a:lnSpc>
-                        <a:spcAft>
-                          <a:spcPts val="0"/>
-                        </a:spcAft>
-                        <a:buNone/>
-                      </a:pPr>
-                      <a:r>
-                        <a:rPr sz="2100" b="0" lang="ja-JP">
-                          <a:solidFill>
-                            <a:srgbClr val="303437"/>
-                          </a:solidFill>
-                          <a:latin typeface="Noto Sans"/>
-                          <a:ea typeface="Noto Sans CJK JP"/>
-                          <a:cs typeface="Noto Sans"/>
-                        </a:rPr>
-                        <a:t>実験内で学習量とステップ数を統一</a:t>
-                      </a:r>
-                    </a:p>
-                  </a:txBody>
-                  <a:tcPr marL="82296" marR="82296" marT="36576" marB="36576" anchor="ctr">
-                    <a:lnL w="10160">
-                      <a:noFill/>
-                    </a:lnL>
-                    <a:lnR w="10160">
-                      <a:noFill/>
-                    </a:lnR>
-                    <a:lnT w="10160">
-                      <a:noFill/>
-                    </a:lnT>
-                    <a:lnB w="10160">
-                      <a:solidFill>
-                        <a:srgbClr val="626669"/>
-                      </a:solidFill>
-                    </a:lnB>
-                    <a:solidFill>
-                      <a:srgbClr val="FFFEF8"/>
-                    </a:solidFill>
-                  </a:tcPr>
-                </a:tc>
-              </a:tr>
-            </a:tbl>
-          </a:graphicData>
-        </a:graphic>
-      </p:graphicFrame>
-      <p:sp>
-        <p:nvSpPr>
-          <p:cNvPr id="5" name="TextBox 4"/>
-          <p:cNvSpPr txBox="1"/>
-          <p:nvPr/>
-        </p:nvSpPr>
-        <p:spPr>
-          <a:xfrm>
-            <a:off x="548640" y="3575304"/>
-            <a:ext cx="8046720" cy="640080"/>
-          </a:xfrm>
-          <a:prstGeom prst="rect">
-            <a:avLst/>
-          </a:prstGeom>
-          <a:noFill/>
-        </p:spPr>
-        <p:txBody>
-          <a:bodyPr wrap="square" lIns="0" rIns="0" tIns="0" bIns="0">
-            <a:spAutoFit/>
-          </a:bodyPr>
-          <a:lstStyle/>
-          <a:p>
-            <a:pPr algn="l">
-              <a:lnSpc>
-                <a:spcPct val="112000"/>
-              </a:lnSpc>
-              <a:spcAft>
-                <a:spcPts val="0"/>
-              </a:spcAft>
-              <a:buNone/>
-            </a:pPr>
-            <a:r>
-              <a:rPr sz="1900" b="0" lang="ja-JP">
-                <a:solidFill>
-                  <a:srgbClr val="303437"/>
-                </a:solidFill>
-                <a:latin typeface="Noto Sans"/>
-                <a:ea typeface="Noto Sans CJK JP"/>
-                <a:cs typeface="Noto Sans"/>
-              </a:rPr>
-              <a:t>データの選び方と初期値を変えた2モデルを学習し、得点を平均して偶然の影響を抑えた [1]。</a:t>
-            </a:r>
-          </a:p>
-        </p:txBody>
-      </p:sp>
-      <p:sp>
-        <p:nvSpPr>
-          <p:cNvPr id="6" name="TextBox 5"/>
-          <p:cNvSpPr txBox="1"/>
-          <p:nvPr/>
-        </p:nvSpPr>
-        <p:spPr>
-          <a:xfrm>
-            <a:off x="548640" y="4928616"/>
-            <a:ext cx="8046720" cy="155448"/>
-          </a:xfrm>
-          <a:prstGeom prst="rect">
-            <a:avLst/>
-          </a:prstGeom>
-          <a:noFill/>
-        </p:spPr>
-        <p:txBody>
-          <a:bodyPr wrap="none" lIns="0" rIns="0" tIns="0" bIns="0">
-            <a:spAutoFit/>
-          </a:bodyPr>
-          <a:lstStyle/>
-          <a:p>
-            <a:r>
-              <a:rPr sz="800" b="0" lang="ja-JP">
-                <a:solidFill>
-                  <a:srgbClr val="626669"/>
-                </a:solidFill>
-                <a:latin typeface="Noto Sans"/>
-                <a:ea typeface="Noto Sans CJK JP"/>
-                <a:cs typeface="Noto Sans"/>
-              </a:rPr>
-              <a:t>[1] Guilherme Penedo et al. (2024). The FineWeb Datasets: Decanting the Web for the Finest Text Data at Scale. NeurIPS. §3.1  </a:t>
-            </a:r>
-            <a:r>
-              <a:rPr sz="800" b="0" lang="en-US">
-                <a:solidFill>
-                  <a:srgbClr val="626669"/>
-                </a:solidFill>
-                <a:latin typeface="Noto Sans"/>
-                <a:ea typeface="Noto Sans CJK JP"/>
-                <a:cs typeface="Noto Sans"/>
-                <a:hlinkClick r:id="rId2"/>
-              </a:rPr>
-              <a:t>https://arxiv.org/abs/2406.17557</a:t>
-            </a:r>
-          </a:p>
-        </p:txBody>
-      </p:sp>
-    </p:spTree>
-  </p:cSld>
-  <p:clrMapOvr>
-    <a:masterClrMapping/>
-  </p:clrMapOvr>
-</p:sld>
-</file>
-
-<file path=ppt/slides/slide28.xml><?xml version="1.0" encoding="utf-8"?>
-<p:sld xmlns:a="http://schemas.openxmlformats.org/drawingml/2006/main" xmlns:p="http://schemas.openxmlformats.org/presentationml/2006/main" xmlns:r="http://schemas.openxmlformats.org/officeDocument/2006/relationships">
-  <p:cSld>
-    <p:spTree>
-      <p:nvGrpSpPr>
-        <p:cNvPr id="1" name=""/>
-        <p:cNvGrpSpPr/>
-        <p:nvPr/>
-      </p:nvGrpSpPr>
-      <p:grpSpPr/>
-      <p:sp>
-        <p:nvSpPr>
-          <p:cNvPr id="2" name="Title 1"/>
-          <p:cNvSpPr>
-            <a:spLocks noGrp="1"/>
-          </p:cNvSpPr>
-          <p:nvPr>
-            <p:ph type="title"/>
-          </p:nvPr>
-        </p:nvSpPr>
-        <p:spPr>
-          <a:xfrm>
-            <a:off x="548640" y="786384"/>
-            <a:ext cx="8046720" cy="502920"/>
-          </a:xfrm>
-        </p:spPr>
-        <p:txBody>
-          <a:bodyPr wrap="square" lIns="0" rIns="0" tIns="0" bIns="0"/>
-          <a:lstStyle/>
-          <a:p>
-            <a:pPr algn="l">
-              <a:lnSpc>
-                <a:spcPct val="112000"/>
-              </a:lnSpc>
-              <a:spcAft>
-                <a:spcPts val="0"/>
-              </a:spcAft>
-              <a:buNone/>
-            </a:pPr>
-            <a:r>
-              <a:rPr sz="2800" b="1" lang="ja-JP">
-                <a:solidFill>
-                  <a:srgbClr val="303437"/>
-                </a:solidFill>
-                <a:latin typeface="Noto Sans"/>
-                <a:ea typeface="Noto Sans CJK JP"/>
-                <a:cs typeface="Noto Sans"/>
-              </a:rPr>
-              <a:t>選択肢の尤度に基づく回答の決定</a:t>
-            </a:r>
-          </a:p>
-        </p:txBody>
-      </p:sp>
-      <p:sp>
-        <p:nvSpPr>
-          <p:cNvPr id="3" name="Text Placeholder 2"/>
-          <p:cNvSpPr>
-            <a:spLocks noGrp="1"/>
-          </p:cNvSpPr>
-          <p:nvPr>
-            <p:ph type="body" idx="1"/>
-          </p:nvPr>
-        </p:nvSpPr>
-        <p:spPr>
-          <a:xfrm>
-            <a:off x="548640" y="1508760"/>
-            <a:ext cx="8046720" cy="2971800"/>
-          </a:xfrm>
-        </p:spPr>
-        <p:txBody>
-          <a:bodyPr wrap="square" lIns="0" rIns="0" tIns="0" bIns="0"/>
-          <a:lstStyle/>
-          <a:p>
-            <a:pPr lvl="0" marL="457200" indent="-355600">
-              <a:lnSpc>
-                <a:spcPct val="115000"/>
-              </a:lnSpc>
-              <a:spcAft>
-                <a:spcPts val="1500"/>
-              </a:spcAft>
-              <a:buSzPct val="57826"/>
-              <a:buFont typeface="Noto Sans CJK JP"/>
-              <a:buChar char="●"/>
-              <a:defRPr sz="2300" lang="ja-JP">
-                <a:latin typeface="Noto Sans"/>
-                <a:ea typeface="Noto Sans CJK JP"/>
-              </a:defRPr>
-            </a:pPr>
-            <a:r>
-              <a:rPr sz="2300" b="0" lang="ja-JP">
-                <a:solidFill>
-                  <a:srgbClr val="303437"/>
-                </a:solidFill>
-                <a:latin typeface="Noto Sans"/>
-                <a:ea typeface="Noto Sans CJK JP"/>
-                <a:cs typeface="Noto Sans"/>
-              </a:rPr>
-              <a:t>評価では、問題文に対して各選択肢の全文がどれだけ続きやすいかを、モデルの尤度で比べる [1]。</a:t>
-            </a:r>
-          </a:p>
-          <a:p>
-            <a:pPr lvl="0" marL="457200" indent="-355600">
-              <a:lnSpc>
-                <a:spcPct val="115000"/>
-              </a:lnSpc>
-              <a:spcAft>
-                <a:spcPts val="1500"/>
-              </a:spcAft>
-              <a:buSzPct val="57826"/>
-              <a:buFont typeface="Noto Sans CJK JP"/>
-              <a:buChar char="●"/>
-              <a:defRPr sz="2300" lang="ja-JP">
-                <a:latin typeface="Noto Sans"/>
-                <a:ea typeface="Noto Sans CJK JP"/>
-              </a:defRPr>
-            </a:pPr>
-            <a:r>
-              <a:rPr sz="2300" b="0" lang="ja-JP">
-                <a:solidFill>
-                  <a:srgbClr val="303437"/>
-                </a:solidFill>
-                <a:latin typeface="Noto Sans"/>
-                <a:ea typeface="Noto Sans CJK JP"/>
-                <a:cs typeface="Noto Sans"/>
-              </a:rPr>
-              <a:t>短い選択肢が有利になる影響を抑えるため、課題に応じた長さの正規化も用いる。</a:t>
-            </a:r>
-          </a:p>
-          <a:p>
-            <a:pPr lvl="0" marL="457200" indent="-355600">
-              <a:lnSpc>
-                <a:spcPct val="115000"/>
-              </a:lnSpc>
-              <a:spcAft>
-                <a:spcPts val="1500"/>
-              </a:spcAft>
-              <a:buSzPct val="57826"/>
-              <a:buFont typeface="Noto Sans CJK JP"/>
-              <a:buChar char="●"/>
-              <a:defRPr sz="2300" lang="ja-JP">
-                <a:latin typeface="Noto Sans"/>
-                <a:ea typeface="Noto Sans CJK JP"/>
-              </a:defRPr>
-            </a:pPr>
-            <a:r>
-              <a:rPr sz="2300" b="0" lang="ja-JP">
-                <a:solidFill>
-                  <a:srgbClr val="303437"/>
-                </a:solidFill>
-                <a:latin typeface="Noto Sans"/>
-                <a:ea typeface="Noto Sans CJK JP"/>
-                <a:cs typeface="Noto Sans"/>
-              </a:rPr>
-              <a:t>正解率は、その方法で選んだ回答が正解と一致した割合。課題の実装や選び方によって集約得点も変わる。</a:t>
-            </a:r>
-          </a:p>
-        </p:txBody>
-      </p:sp>
-      <p:sp>
-        <p:nvSpPr>
-          <p:cNvPr id="4" name="Title 3"/>
-          <p:cNvSpPr>
-            <a:spLocks noGrp="1"/>
-          </p:cNvSpPr>
-          <p:nvPr>
-            <p:ph type="title" idx="2"/>
-          </p:nvPr>
-        </p:nvSpPr>
-        <p:spPr/>
-        <p:txBody>
-          <a:bodyPr wrap="square" lIns="0" rIns="0" tIns="0" bIns="0" anchor="ctr"/>
-          <a:lstStyle/>
-          <a:p>
-            <a:pPr algn="l">
-              <a:lnSpc>
-                <a:spcPct val="100000"/>
-              </a:lnSpc>
-              <a:spcBef>
-                <a:spcPts val="0"/>
-              </a:spcBef>
-              <a:spcAft>
-                <a:spcPts val="0"/>
-              </a:spcAft>
-              <a:buNone/>
-            </a:pPr>
-            <a:r>
-              <a:rPr sz="1400" b="1" lang="ja-JP">
-                <a:solidFill>
-                  <a:srgbClr val="FFFEF8"/>
-                </a:solidFill>
-                <a:latin typeface="Noto Sans"/>
-                <a:ea typeface="Noto Sans CJK JP"/>
-                <a:cs typeface="Noto Sans"/>
-              </a:rPr>
-              <a:t>3. 事前学習データの比較評価と限界</a:t>
-            </a:r>
-          </a:p>
-        </p:txBody>
-      </p:sp>
-      <p:sp>
-        <p:nvSpPr>
-          <p:cNvPr id="5" name="TextBox 4"/>
-          <p:cNvSpPr txBox="1"/>
-          <p:nvPr/>
-        </p:nvSpPr>
-        <p:spPr>
-          <a:xfrm>
-            <a:off x="548640" y="4928616"/>
-            <a:ext cx="8046720" cy="155448"/>
-          </a:xfrm>
-          <a:prstGeom prst="rect">
-            <a:avLst/>
-          </a:prstGeom>
-          <a:noFill/>
-        </p:spPr>
-        <p:txBody>
-          <a:bodyPr wrap="none" lIns="0" rIns="0" tIns="0" bIns="0">
-            <a:spAutoFit/>
-          </a:bodyPr>
-          <a:lstStyle/>
-          <a:p>
-            <a:r>
-              <a:rPr sz="800" b="0" lang="ja-JP">
-                <a:solidFill>
-                  <a:srgbClr val="626669"/>
-                </a:solidFill>
-                <a:latin typeface="Noto Sans"/>
-                <a:ea typeface="Noto Sans CJK JP"/>
-                <a:cs typeface="Noto Sans"/>
-              </a:rPr>
-              <a:t>[1] FineWebの公開評価実装  </a:t>
-            </a:r>
-            <a:r>
-              <a:rPr sz="800" b="0" lang="en-US">
-                <a:solidFill>
-                  <a:srgbClr val="626669"/>
-                </a:solidFill>
-                <a:latin typeface="Noto Sans"/>
-                <a:ea typeface="Noto Sans CJK JP"/>
-                <a:cs typeface="Noto Sans"/>
-                <a:hlinkClick r:id="rId2"/>
-              </a:rPr>
-              <a:t>https://huggingface.co/datasets/HuggingFaceFW/fineweb/blob/main/lighteval_tasks.py</a:t>
-            </a:r>
-          </a:p>
-        </p:txBody>
-      </p:sp>
-    </p:spTree>
-  </p:cSld>
-  <p:clrMapOvr>
-    <a:masterClrMapping/>
-  </p:clrMapOvr>
-</p:sld>
-</file>
-
-<file path=ppt/slides/slide29.xml><?xml version="1.0" encoding="utf-8"?>
-<p:sld xmlns:a="http://schemas.openxmlformats.org/drawingml/2006/main" xmlns:p="http://schemas.openxmlformats.org/presentationml/2006/main" xmlns:r="http://schemas.openxmlformats.org/officeDocument/2006/relationships">
-  <p:cSld>
-    <p:spTree>
-      <p:nvGrpSpPr>
-        <p:cNvPr id="1" name=""/>
-        <p:cNvGrpSpPr/>
-        <p:nvPr/>
-      </p:nvGrpSpPr>
-      <p:grpSpPr/>
-      <p:sp>
-        <p:nvSpPr>
-          <p:cNvPr id="2" name="Title 1"/>
-          <p:cNvSpPr>
-            <a:spLocks noGrp="1"/>
-          </p:cNvSpPr>
-          <p:nvPr>
-            <p:ph type="title"/>
-          </p:nvPr>
-        </p:nvSpPr>
-        <p:spPr>
-          <a:xfrm>
-            <a:off x="548640" y="786384"/>
-            <a:ext cx="8046720" cy="502920"/>
-          </a:xfrm>
-        </p:spPr>
-        <p:txBody>
-          <a:bodyPr wrap="square" lIns="0" rIns="0" tIns="0" bIns="0"/>
-          <a:lstStyle/>
-          <a:p>
-            <a:pPr algn="l">
-              <a:lnSpc>
-                <a:spcPct val="112000"/>
-              </a:lnSpc>
-              <a:spcAft>
-                <a:spcPts val="0"/>
-              </a:spcAft>
-              <a:buNone/>
-            </a:pPr>
-            <a:r>
-              <a:rPr sz="2800" b="1" lang="ja-JP">
-                <a:solidFill>
-                  <a:srgbClr val="303437"/>
-                </a:solidFill>
-                <a:latin typeface="Noto Sans"/>
-                <a:ea typeface="Noto Sans CJK JP"/>
-                <a:cs typeface="Noto Sans"/>
-              </a:rPr>
-              <a:t>選択式問題の正解率と集約得点</a:t>
-            </a:r>
-          </a:p>
-        </p:txBody>
-      </p:sp>
-      <p:sp>
-        <p:nvSpPr>
-          <p:cNvPr id="3" name="Title 2"/>
-          <p:cNvSpPr>
-            <a:spLocks noGrp="1"/>
-          </p:cNvSpPr>
-          <p:nvPr>
-            <p:ph type="title" idx="2"/>
-          </p:nvPr>
-        </p:nvSpPr>
-        <p:spPr/>
-        <p:txBody>
-          <a:bodyPr wrap="square" lIns="0" rIns="0" tIns="0" bIns="0" anchor="ctr"/>
-          <a:lstStyle/>
-          <a:p>
-            <a:pPr algn="l">
-              <a:lnSpc>
-                <a:spcPct val="100000"/>
-              </a:lnSpc>
-              <a:spcBef>
-                <a:spcPts val="0"/>
-              </a:spcBef>
-              <a:spcAft>
-                <a:spcPts val="0"/>
-              </a:spcAft>
-              <a:buNone/>
-            </a:pPr>
-            <a:r>
-              <a:rPr sz="1400" b="1" lang="ja-JP">
-                <a:solidFill>
-                  <a:srgbClr val="FFFEF8"/>
-                </a:solidFill>
-                <a:latin typeface="Noto Sans"/>
-                <a:ea typeface="Noto Sans CJK JP"/>
-                <a:cs typeface="Noto Sans"/>
-              </a:rPr>
-              <a:t>3. 事前学習データの比較評価と限界</a:t>
+              <a:t>3. データ品質の評価と話題分布</a:t>
             </a:r>
           </a:p>
         </p:txBody>
@@ -15039,7 +14187,7 @@
 </p:sld>
 </file>
 
-<file path=ppt/slides/slide3.xml><?xml version="1.0" encoding="utf-8"?>
+<file path=ppt/slides/slide28.xml><?xml version="1.0" encoding="utf-8"?>
 <p:sld xmlns:a="http://schemas.openxmlformats.org/drawingml/2006/main" xmlns:p="http://schemas.openxmlformats.org/presentationml/2006/main" xmlns:r="http://schemas.openxmlformats.org/officeDocument/2006/relationships">
   <p:cSld>
     <p:spTree>
@@ -15087,229 +14235,6 @@
                 <a:ea typeface="Noto Sans CJK JP"/>
                 <a:cs typeface="Noto Sans"/>
               </a:rPr>
-              <a:t/>
-            </a:r>
-          </a:p>
-        </p:txBody>
-      </p:sp>
-      <p:sp>
-        <p:nvSpPr>
-          <p:cNvPr id="3" name="Text Placeholder 2"/>
-          <p:cNvSpPr>
-            <a:spLocks noGrp="1"/>
-          </p:cNvSpPr>
-          <p:nvPr>
-            <p:ph type="body" idx="1"/>
-          </p:nvPr>
-        </p:nvSpPr>
-        <p:spPr>
-          <a:xfrm>
-            <a:off x="1051560" y="1358062"/>
-            <a:ext cx="7315200" cy="3566160"/>
-          </a:xfrm>
-        </p:spPr>
-        <p:txBody>
-          <a:bodyPr lIns="0" rIns="0" tIns="0" bIns="0"/>
-          <a:lstStyle/>
-          <a:p>
-            <a:pPr lvl="0" marL="558800" indent="-457200">
-              <a:spcAft>
-                <a:spcPts val="2000"/>
-              </a:spcAft>
-              <a:buSzPct val="100000"/>
-              <a:buFont typeface="Noto Sans CJK JP"/>
-              <a:buAutoNum type="arabicPeriod" startAt="1"/>
-              <a:defRPr sz="3000" lang="ja-JP">
-                <a:latin typeface="Noto Sans"/>
-                <a:ea typeface="Noto Sans CJK JP"/>
-              </a:defRPr>
-            </a:pPr>
-            <a:r>
-              <a:rPr sz="3000" b="1" lang="ja-JP">
-                <a:solidFill>
-                  <a:srgbClr val="303437"/>
-                </a:solidFill>
-                <a:latin typeface="Noto Sans"/>
-                <a:ea typeface="Noto Sans CJK JP"/>
-                <a:cs typeface="Noto Sans"/>
-              </a:rPr>
-              <a:t>FineWebの目的と収録文書</a:t>
-            </a:r>
-          </a:p>
-          <a:p>
-            <a:pPr lvl="0" marL="558800" indent="-457200">
-              <a:spcAft>
-                <a:spcPts val="2000"/>
-              </a:spcAft>
-              <a:buSzPct val="100000"/>
-              <a:buFont typeface="Noto Sans CJK JP"/>
-              <a:buAutoNum type="arabicPeriod" startAt="2"/>
-              <a:defRPr sz="3000" lang="ja-JP">
-                <a:latin typeface="Noto Sans"/>
-                <a:ea typeface="Noto Sans CJK JP"/>
-              </a:defRPr>
-            </a:pPr>
-            <a:r>
-              <a:rPr sz="3000" b="1" lang="ja-JP">
-                <a:solidFill>
-                  <a:srgbClr val="303437"/>
-                </a:solidFill>
-                <a:latin typeface="Noto Sans"/>
-                <a:ea typeface="Noto Sans CJK JP"/>
-                <a:cs typeface="Noto Sans"/>
-              </a:rPr>
-              <a:t>Web文書の収集・選別とデータ規模</a:t>
-            </a:r>
-          </a:p>
-          <a:p>
-            <a:pPr lvl="0" marL="558800" indent="-457200">
-              <a:spcAft>
-                <a:spcPts val="2000"/>
-              </a:spcAft>
-              <a:buSzPct val="100000"/>
-              <a:buFont typeface="Noto Sans CJK JP"/>
-              <a:buAutoNum type="arabicPeriod" startAt="3"/>
-              <a:defRPr sz="3000" lang="ja-JP">
-                <a:latin typeface="Noto Sans"/>
-                <a:ea typeface="Noto Sans CJK JP"/>
-              </a:defRPr>
-            </a:pPr>
-            <a:r>
-              <a:rPr sz="3000" b="1" lang="ja-JP">
-                <a:solidFill>
-                  <a:srgbClr val="303437"/>
-                </a:solidFill>
-                <a:latin typeface="Noto Sans"/>
-                <a:ea typeface="Noto Sans CJK JP"/>
-                <a:cs typeface="Noto Sans"/>
-              </a:rPr>
-              <a:t>事前学習データの比較評価と限界</a:t>
-            </a:r>
-          </a:p>
-          <a:p>
-            <a:pPr lvl="0" marL="558800" indent="-457200">
-              <a:spcAft>
-                <a:spcPts val="2000"/>
-              </a:spcAft>
-              <a:buSzPct val="100000"/>
-              <a:buFont typeface="Noto Sans CJK JP"/>
-              <a:buAutoNum type="arabicPeriod" startAt="4"/>
-              <a:defRPr sz="3000" lang="ja-JP">
-                <a:latin typeface="Noto Sans"/>
-                <a:ea typeface="Noto Sans CJK JP"/>
-              </a:defRPr>
-            </a:pPr>
-            <a:r>
-              <a:rPr sz="3000" b="1" lang="ja-JP">
-                <a:solidFill>
-                  <a:srgbClr val="303437"/>
-                </a:solidFill>
-                <a:latin typeface="Noto Sans"/>
-                <a:ea typeface="Noto Sans CJK JP"/>
-                <a:cs typeface="Noto Sans"/>
-              </a:rPr>
-              <a:t>Webコーパスの利用動向と入手方法</a:t>
-            </a:r>
-          </a:p>
-        </p:txBody>
-      </p:sp>
-      <p:sp>
-        <p:nvSpPr>
-          <p:cNvPr id="4" name="Title 3"/>
-          <p:cNvSpPr>
-            <a:spLocks noGrp="1"/>
-          </p:cNvSpPr>
-          <p:nvPr>
-            <p:ph type="title" idx="2"/>
-          </p:nvPr>
-        </p:nvSpPr>
-        <p:spPr/>
-        <p:txBody>
-          <a:bodyPr wrap="square" lIns="0" rIns="0" tIns="0" bIns="0" anchor="ctr"/>
-          <a:lstStyle/>
-          <a:p>
-            <a:pPr algn="l">
-              <a:lnSpc>
-                <a:spcPct val="100000"/>
-              </a:lnSpc>
-              <a:spcBef>
-                <a:spcPts val="0"/>
-              </a:spcBef>
-              <a:spcAft>
-                <a:spcPts val="0"/>
-              </a:spcAft>
-              <a:buNone/>
-            </a:pPr>
-            <a:r>
-              <a:rPr sz="1400" b="1" lang="ja-JP">
-                <a:solidFill>
-                  <a:srgbClr val="FFFEF8"/>
-                </a:solidFill>
-                <a:latin typeface="Noto Sans"/>
-                <a:ea typeface="Noto Sans CJK JP"/>
-                <a:cs typeface="Noto Sans"/>
-              </a:rPr>
-              <a:t>目次</a:t>
-            </a:r>
-          </a:p>
-        </p:txBody>
-      </p:sp>
-    </p:spTree>
-  </p:cSld>
-  <p:clrMapOvr>
-    <a:masterClrMapping/>
-  </p:clrMapOvr>
-</p:sld>
-</file>
-
-<file path=ppt/slides/slide30.xml><?xml version="1.0" encoding="utf-8"?>
-<p:sld xmlns:a="http://schemas.openxmlformats.org/drawingml/2006/main" xmlns:p="http://schemas.openxmlformats.org/presentationml/2006/main" xmlns:r="http://schemas.openxmlformats.org/officeDocument/2006/relationships">
-  <p:cSld>
-    <p:spTree>
-      <p:nvGrpSpPr>
-        <p:cNvPr id="1" name=""/>
-        <p:cNvGrpSpPr/>
-        <p:nvPr/>
-      </p:nvGrpSpPr>
-      <p:grpSpPr/>
-      <p:sp>
-        <p:nvSpPr>
-          <p:cNvPr id="2" name="Title 1"/>
-          <p:cNvSpPr>
-            <a:spLocks noGrp="1"/>
-          </p:cNvSpPr>
-          <p:nvPr>
-            <p:ph type="title"/>
-          </p:nvPr>
-        </p:nvSpPr>
-        <p:spPr>
-          <a:xfrm>
-            <a:off x="548640" y="786384"/>
-            <a:ext cx="8046720" cy="502920"/>
-          </a:xfrm>
-        </p:spPr>
-        <p:txBody>
-          <a:bodyPr wrap="square" lIns="0" rIns="0" tIns="0" bIns="0"/>
-          <a:lstStyle/>
-          <a:p>
-            <a:pPr algn="l">
-              <a:lnSpc>
-                <a:spcPct val="112000"/>
-              </a:lnSpc>
-              <a:spcAft>
-                <a:spcPts val="0"/>
-              </a:spcAft>
-              <a:buNone/>
-            </a:pPr>
-            <a:r>
-              <a:rPr sz="2800" b="1" lang="ja-JP">
-                <a:solidFill>
-                  <a:srgbClr val="303437"/>
-                </a:solidFill>
-                <a:latin typeface="Noto Sans"/>
-                <a:ea typeface="Noto Sans CJK JP"/>
-                <a:cs typeface="Noto Sans"/>
-              </a:rPr>
               <a:t>原著で採用した知識・推論の評価課題</a:t>
             </a:r>
           </a:p>
@@ -15351,7 +14276,7 @@
                 <a:ea typeface="Noto Sans CJK JP"/>
                 <a:cs typeface="Noto Sans"/>
               </a:rPr>
-              <a:t>3. 事前学習データの比較評価と限界</a:t>
+              <a:t>3. データ品質の評価と話題分布</a:t>
             </a:r>
           </a:p>
         </p:txBody>
@@ -15959,7 +14884,7 @@
 </p:sld>
 </file>
 
-<file path=ppt/slides/slide31.xml><?xml version="1.0" encoding="utf-8"?>
+<file path=ppt/slides/slide29.xml><?xml version="1.0" encoding="utf-8"?>
 <p:sld xmlns:a="http://schemas.openxmlformats.org/drawingml/2006/main" xmlns:p="http://schemas.openxmlformats.org/presentationml/2006/main" xmlns:r="http://schemas.openxmlformats.org/officeDocument/2006/relationships">
   <p:cSld>
     <p:spTree>
@@ -16048,7 +14973,7 @@
                 <a:ea typeface="Noto Sans CJK JP"/>
                 <a:cs typeface="Noto Sans"/>
               </a:rPr>
-              <a:t>3. 事前学習データの比較評価と限界</a:t>
+              <a:t>3. データ品質の評価と話題分布</a:t>
             </a:r>
           </a:p>
         </p:txBody>
@@ -16178,7 +15103,7 @@
 </p:sld>
 </file>
 
-<file path=ppt/slides/slide32.xml><?xml version="1.0" encoding="utf-8"?>
+<file path=ppt/slides/slide3.xml><?xml version="1.0" encoding="utf-8"?>
 <p:sld xmlns:a="http://schemas.openxmlformats.org/drawingml/2006/main" xmlns:p="http://schemas.openxmlformats.org/presentationml/2006/main" xmlns:r="http://schemas.openxmlformats.org/officeDocument/2006/relationships">
   <p:cSld>
     <p:spTree>
@@ -16226,6 +15151,229 @@
                 <a:ea typeface="Noto Sans CJK JP"/>
                 <a:cs typeface="Noto Sans"/>
               </a:rPr>
+              <a:t/>
+            </a:r>
+          </a:p>
+        </p:txBody>
+      </p:sp>
+      <p:sp>
+        <p:nvSpPr>
+          <p:cNvPr id="3" name="Text Placeholder 2"/>
+          <p:cNvSpPr>
+            <a:spLocks noGrp="1"/>
+          </p:cNvSpPr>
+          <p:nvPr>
+            <p:ph type="body" idx="1"/>
+          </p:nvPr>
+        </p:nvSpPr>
+        <p:spPr>
+          <a:xfrm>
+            <a:off x="1051560" y="1358062"/>
+            <a:ext cx="7315200" cy="3566160"/>
+          </a:xfrm>
+        </p:spPr>
+        <p:txBody>
+          <a:bodyPr lIns="0" rIns="0" tIns="0" bIns="0"/>
+          <a:lstStyle/>
+          <a:p>
+            <a:pPr lvl="0" marL="558800" indent="-457200">
+              <a:spcAft>
+                <a:spcPts val="2000"/>
+              </a:spcAft>
+              <a:buSzPct val="100000"/>
+              <a:buFont typeface="Noto Sans CJK JP"/>
+              <a:buAutoNum type="arabicPeriod" startAt="1"/>
+              <a:defRPr sz="3000" lang="ja-JP">
+                <a:latin typeface="Noto Sans"/>
+                <a:ea typeface="Noto Sans CJK JP"/>
+              </a:defRPr>
+            </a:pPr>
+            <a:r>
+              <a:rPr sz="3000" b="1" lang="ja-JP">
+                <a:solidFill>
+                  <a:srgbClr val="303437"/>
+                </a:solidFill>
+                <a:latin typeface="Noto Sans"/>
+                <a:ea typeface="Noto Sans CJK JP"/>
+                <a:cs typeface="Noto Sans"/>
+              </a:rPr>
+              <a:t>FineWebの目的と収録文書</a:t>
+            </a:r>
+          </a:p>
+          <a:p>
+            <a:pPr lvl="0" marL="558800" indent="-457200">
+              <a:spcAft>
+                <a:spcPts val="2000"/>
+              </a:spcAft>
+              <a:buSzPct val="100000"/>
+              <a:buFont typeface="Noto Sans CJK JP"/>
+              <a:buAutoNum type="arabicPeriod" startAt="2"/>
+              <a:defRPr sz="3000" lang="ja-JP">
+                <a:latin typeface="Noto Sans"/>
+                <a:ea typeface="Noto Sans CJK JP"/>
+              </a:defRPr>
+            </a:pPr>
+            <a:r>
+              <a:rPr sz="3000" b="1" lang="ja-JP">
+                <a:solidFill>
+                  <a:srgbClr val="303437"/>
+                </a:solidFill>
+                <a:latin typeface="Noto Sans"/>
+                <a:ea typeface="Noto Sans CJK JP"/>
+                <a:cs typeface="Noto Sans"/>
+              </a:rPr>
+              <a:t>Web文書の収集・選別とデータ規模</a:t>
+            </a:r>
+          </a:p>
+          <a:p>
+            <a:pPr lvl="0" marL="558800" indent="-457200">
+              <a:spcAft>
+                <a:spcPts val="2000"/>
+              </a:spcAft>
+              <a:buSzPct val="100000"/>
+              <a:buFont typeface="Noto Sans CJK JP"/>
+              <a:buAutoNum type="arabicPeriod" startAt="3"/>
+              <a:defRPr sz="3000" lang="ja-JP">
+                <a:latin typeface="Noto Sans"/>
+                <a:ea typeface="Noto Sans CJK JP"/>
+              </a:defRPr>
+            </a:pPr>
+            <a:r>
+              <a:rPr sz="3000" b="1" lang="ja-JP">
+                <a:solidFill>
+                  <a:srgbClr val="303437"/>
+                </a:solidFill>
+                <a:latin typeface="Noto Sans"/>
+                <a:ea typeface="Noto Sans CJK JP"/>
+                <a:cs typeface="Noto Sans"/>
+              </a:rPr>
+              <a:t>データ品質の評価と話題分布</a:t>
+            </a:r>
+          </a:p>
+          <a:p>
+            <a:pPr lvl="0" marL="558800" indent="-457200">
+              <a:spcAft>
+                <a:spcPts val="2000"/>
+              </a:spcAft>
+              <a:buSzPct val="100000"/>
+              <a:buFont typeface="Noto Sans CJK JP"/>
+              <a:buAutoNum type="arabicPeriod" startAt="4"/>
+              <a:defRPr sz="3000" lang="ja-JP">
+                <a:latin typeface="Noto Sans"/>
+                <a:ea typeface="Noto Sans CJK JP"/>
+              </a:defRPr>
+            </a:pPr>
+            <a:r>
+              <a:rPr sz="3000" b="1" lang="ja-JP">
+                <a:solidFill>
+                  <a:srgbClr val="303437"/>
+                </a:solidFill>
+                <a:latin typeface="Noto Sans"/>
+                <a:ea typeface="Noto Sans CJK JP"/>
+                <a:cs typeface="Noto Sans"/>
+              </a:rPr>
+              <a:t>Webコーパスの利用動向と入手方法</a:t>
+            </a:r>
+          </a:p>
+        </p:txBody>
+      </p:sp>
+      <p:sp>
+        <p:nvSpPr>
+          <p:cNvPr id="4" name="Title 3"/>
+          <p:cNvSpPr>
+            <a:spLocks noGrp="1"/>
+          </p:cNvSpPr>
+          <p:nvPr>
+            <p:ph type="title" idx="2"/>
+          </p:nvPr>
+        </p:nvSpPr>
+        <p:spPr/>
+        <p:txBody>
+          <a:bodyPr wrap="square" lIns="0" rIns="0" tIns="0" bIns="0" anchor="ctr"/>
+          <a:lstStyle/>
+          <a:p>
+            <a:pPr algn="l">
+              <a:lnSpc>
+                <a:spcPct val="100000"/>
+              </a:lnSpc>
+              <a:spcBef>
+                <a:spcPts val="0"/>
+              </a:spcBef>
+              <a:spcAft>
+                <a:spcPts val="0"/>
+              </a:spcAft>
+              <a:buNone/>
+            </a:pPr>
+            <a:r>
+              <a:rPr sz="1400" b="1" lang="ja-JP">
+                <a:solidFill>
+                  <a:srgbClr val="FFFEF8"/>
+                </a:solidFill>
+                <a:latin typeface="Noto Sans"/>
+                <a:ea typeface="Noto Sans CJK JP"/>
+                <a:cs typeface="Noto Sans"/>
+              </a:rPr>
+              <a:t>目次</a:t>
+            </a:r>
+          </a:p>
+        </p:txBody>
+      </p:sp>
+    </p:spTree>
+  </p:cSld>
+  <p:clrMapOvr>
+    <a:masterClrMapping/>
+  </p:clrMapOvr>
+</p:sld>
+</file>
+
+<file path=ppt/slides/slide30.xml><?xml version="1.0" encoding="utf-8"?>
+<p:sld xmlns:a="http://schemas.openxmlformats.org/drawingml/2006/main" xmlns:p="http://schemas.openxmlformats.org/presentationml/2006/main" xmlns:r="http://schemas.openxmlformats.org/officeDocument/2006/relationships">
+  <p:cSld>
+    <p:spTree>
+      <p:nvGrpSpPr>
+        <p:cNvPr id="1" name=""/>
+        <p:cNvGrpSpPr/>
+        <p:nvPr/>
+      </p:nvGrpSpPr>
+      <p:grpSpPr/>
+      <p:sp>
+        <p:nvSpPr>
+          <p:cNvPr id="2" name="Title 1"/>
+          <p:cNvSpPr>
+            <a:spLocks noGrp="1"/>
+          </p:cNvSpPr>
+          <p:nvPr>
+            <p:ph type="title"/>
+          </p:nvPr>
+        </p:nvSpPr>
+        <p:spPr>
+          <a:xfrm>
+            <a:off x="548640" y="786384"/>
+            <a:ext cx="8046720" cy="502920"/>
+          </a:xfrm>
+        </p:spPr>
+        <p:txBody>
+          <a:bodyPr wrap="square" lIns="0" rIns="0" tIns="0" bIns="0"/>
+          <a:lstStyle/>
+          <a:p>
+            <a:pPr algn="l">
+              <a:lnSpc>
+                <a:spcPct val="112000"/>
+              </a:lnSpc>
+              <a:spcAft>
+                <a:spcPts val="0"/>
+              </a:spcAft>
+              <a:buNone/>
+            </a:pPr>
+            <a:r>
+              <a:rPr sz="2800" b="1" lang="ja-JP">
+                <a:solidFill>
+                  <a:srgbClr val="303437"/>
+                </a:solidFill>
+                <a:latin typeface="Noto Sans"/>
+                <a:ea typeface="Noto Sans CJK JP"/>
+                <a:cs typeface="Noto Sans"/>
+              </a:rPr>
               <a:t>FineWeb-EduによるMMLU・ARCの改善</a:t>
             </a:r>
           </a:p>
@@ -16267,7 +15415,7 @@
                 <a:ea typeface="Noto Sans CJK JP"/>
                 <a:cs typeface="Noto Sans"/>
               </a:rPr>
-              <a:t>3. 事前学習データの比較評価と限界</a:t>
+              <a:t>3. データ品質の評価と話題分布</a:t>
             </a:r>
           </a:p>
         </p:txBody>
@@ -16835,6 +15983,866 @@
 </p:sld>
 </file>
 
+<file path=ppt/slides/slide31.xml><?xml version="1.0" encoding="utf-8"?>
+<p:sld xmlns:a="http://schemas.openxmlformats.org/drawingml/2006/main" xmlns:p="http://schemas.openxmlformats.org/presentationml/2006/main" xmlns:r="http://schemas.openxmlformats.org/officeDocument/2006/relationships">
+  <p:cSld>
+    <p:spTree>
+      <p:nvGrpSpPr>
+        <p:cNvPr id="1" name=""/>
+        <p:cNvGrpSpPr/>
+        <p:nvPr/>
+      </p:nvGrpSpPr>
+      <p:grpSpPr/>
+      <p:sp>
+        <p:nvSpPr>
+          <p:cNvPr id="2" name="Title 1"/>
+          <p:cNvSpPr>
+            <a:spLocks noGrp="1"/>
+          </p:cNvSpPr>
+          <p:nvPr>
+            <p:ph type="title"/>
+          </p:nvPr>
+        </p:nvSpPr>
+        <p:spPr>
+          <a:xfrm>
+            <a:off x="548640" y="786384"/>
+            <a:ext cx="8046720" cy="502920"/>
+          </a:xfrm>
+        </p:spPr>
+        <p:txBody>
+          <a:bodyPr wrap="square" lIns="0" rIns="0" tIns="0" bIns="0"/>
+          <a:lstStyle/>
+          <a:p>
+            <a:pPr algn="l">
+              <a:lnSpc>
+                <a:spcPct val="112000"/>
+              </a:lnSpc>
+              <a:spcAft>
+                <a:spcPts val="0"/>
+              </a:spcAft>
+              <a:buNone/>
+            </a:pPr>
+            <a:r>
+              <a:rPr sz="2800" b="1" lang="ja-JP">
+                <a:solidFill>
+                  <a:srgbClr val="303437"/>
+                </a:solidFill>
+                <a:latin typeface="Noto Sans"/>
+                <a:ea typeface="Noto Sans CJK JP"/>
+                <a:cs typeface="Noto Sans"/>
+              </a:rPr>
+              <a:t>原著の比較実験に用いたモデル構成</a:t>
+            </a:r>
+          </a:p>
+        </p:txBody>
+      </p:sp>
+      <p:sp>
+        <p:nvSpPr>
+          <p:cNvPr id="3" name="Title 2"/>
+          <p:cNvSpPr>
+            <a:spLocks noGrp="1"/>
+          </p:cNvSpPr>
+          <p:nvPr>
+            <p:ph type="title" idx="2"/>
+          </p:nvPr>
+        </p:nvSpPr>
+        <p:spPr/>
+        <p:txBody>
+          <a:bodyPr wrap="square" lIns="0" rIns="0" tIns="0" bIns="0" anchor="ctr"/>
+          <a:lstStyle/>
+          <a:p>
+            <a:pPr algn="l">
+              <a:lnSpc>
+                <a:spcPct val="100000"/>
+              </a:lnSpc>
+              <a:spcBef>
+                <a:spcPts val="0"/>
+              </a:spcBef>
+              <a:spcAft>
+                <a:spcPts val="0"/>
+              </a:spcAft>
+              <a:buNone/>
+            </a:pPr>
+            <a:r>
+              <a:rPr sz="1400" b="1" lang="ja-JP">
+                <a:solidFill>
+                  <a:srgbClr val="FFFEF8"/>
+                </a:solidFill>
+                <a:latin typeface="Noto Sans"/>
+                <a:ea typeface="Noto Sans CJK JP"/>
+                <a:cs typeface="Noto Sans"/>
+              </a:rPr>
+              <a:t>3. データ品質の評価と話題分布</a:t>
+            </a:r>
+          </a:p>
+        </p:txBody>
+      </p:sp>
+      <p:graphicFrame>
+        <p:nvGraphicFramePr>
+          <p:cNvPr id="4" name="Table 3"/>
+          <p:cNvGraphicFramePr>
+            <a:graphicFrameLocks noGrp="1"/>
+          </p:cNvGraphicFramePr>
+          <p:nvPr/>
+        </p:nvGraphicFramePr>
+        <p:xfrm>
+          <a:off x="548640" y="1508760"/>
+          <a:ext cx="8046720" cy="1901952"/>
+        </p:xfrm>
+        <a:graphic>
+          <a:graphicData uri="http://schemas.openxmlformats.org/drawingml/2006/table">
+            <a:tbl>
+              <a:tblPr>
+                <a:tableStyleId>{5C22544A-7EE6-4342-B048-85BDC9FD1C3A}</a:tableStyleId>
+              </a:tblPr>
+              <a:tblGrid>
+                <a:gridCol w="3474720"/>
+                <a:gridCol w="4572000"/>
+              </a:tblGrid>
+              <a:tr h="475488">
+                <a:tc>
+                  <a:txBody>
+                    <a:bodyPr wrap="square" lIns="0" rIns="0" tIns="0" bIns="0"/>
+                    <a:lstStyle/>
+                    <a:p>
+                      <a:pPr algn="l">
+                        <a:lnSpc>
+                          <a:spcPct val="112000"/>
+                        </a:lnSpc>
+                        <a:spcAft>
+                          <a:spcPts val="0"/>
+                        </a:spcAft>
+                        <a:buNone/>
+                      </a:pPr>
+                      <a:r>
+                        <a:rPr sz="2100" b="0" lang="ja-JP">
+                          <a:solidFill>
+                            <a:srgbClr val="303437"/>
+                          </a:solidFill>
+                          <a:latin typeface="Noto Sans"/>
+                          <a:ea typeface="Noto Sans CJK JP"/>
+                          <a:cs typeface="Noto Sans"/>
+                        </a:rPr>
+                        <a:t>原著v2の構成</a:t>
+                      </a:r>
+                    </a:p>
+                  </a:txBody>
+                  <a:tcPr marL="82296" marR="82296" marT="36576" marB="36576" anchor="ctr">
+                    <a:lnL w="10160">
+                      <a:noFill/>
+                    </a:lnL>
+                    <a:lnR w="10160">
+                      <a:noFill/>
+                    </a:lnR>
+                    <a:lnT w="10160">
+                      <a:solidFill>
+                        <a:srgbClr val="626669"/>
+                      </a:solidFill>
+                    </a:lnT>
+                    <a:lnB w="10160">
+                      <a:solidFill>
+                        <a:srgbClr val="626669"/>
+                      </a:solidFill>
+                    </a:lnB>
+                    <a:solidFill>
+                      <a:srgbClr val="FFFEF8"/>
+                    </a:solidFill>
+                  </a:tcPr>
+                </a:tc>
+                <a:tc>
+                  <a:txBody>
+                    <a:bodyPr wrap="square" lIns="0" rIns="0" tIns="0" bIns="0"/>
+                    <a:lstStyle/>
+                    <a:p>
+                      <a:pPr algn="l">
+                        <a:lnSpc>
+                          <a:spcPct val="112000"/>
+                        </a:lnSpc>
+                        <a:spcAft>
+                          <a:spcPts val="0"/>
+                        </a:spcAft>
+                        <a:buNone/>
+                      </a:pPr>
+                      <a:r>
+                        <a:rPr sz="2100" b="0" lang="ja-JP">
+                          <a:solidFill>
+                            <a:srgbClr val="303437"/>
+                          </a:solidFill>
+                          <a:latin typeface="Noto Sans"/>
+                          <a:ea typeface="Noto Sans CJK JP"/>
+                          <a:cs typeface="Noto Sans"/>
+                        </a:rPr>
+                        <a:t>設定</a:t>
+                      </a:r>
+                    </a:p>
+                  </a:txBody>
+                  <a:tcPr marL="82296" marR="82296" marT="36576" marB="36576" anchor="ctr">
+                    <a:lnL w="10160">
+                      <a:noFill/>
+                    </a:lnL>
+                    <a:lnR w="10160">
+                      <a:noFill/>
+                    </a:lnR>
+                    <a:lnT w="10160">
+                      <a:solidFill>
+                        <a:srgbClr val="626669"/>
+                      </a:solidFill>
+                    </a:lnT>
+                    <a:lnB w="10160">
+                      <a:solidFill>
+                        <a:srgbClr val="626669"/>
+                      </a:solidFill>
+                    </a:lnB>
+                    <a:solidFill>
+                      <a:srgbClr val="FFFEF8"/>
+                    </a:solidFill>
+                  </a:tcPr>
+                </a:tc>
+              </a:tr>
+              <a:tr h="475488">
+                <a:tc>
+                  <a:txBody>
+                    <a:bodyPr wrap="square" lIns="0" rIns="0" tIns="0" bIns="0"/>
+                    <a:lstStyle/>
+                    <a:p>
+                      <a:pPr algn="l">
+                        <a:lnSpc>
+                          <a:spcPct val="112000"/>
+                        </a:lnSpc>
+                        <a:spcAft>
+                          <a:spcPts val="0"/>
+                        </a:spcAft>
+                        <a:buNone/>
+                      </a:pPr>
+                      <a:r>
+                        <a:rPr sz="2100" b="0" lang="ja-JP">
+                          <a:solidFill>
+                            <a:srgbClr val="303437"/>
+                          </a:solidFill>
+                          <a:latin typeface="Noto Sans"/>
+                          <a:ea typeface="Noto Sans CJK JP"/>
+                          <a:cs typeface="Noto Sans"/>
+                        </a:rPr>
+                        <a:t>モデル</a:t>
+                      </a:r>
+                    </a:p>
+                  </a:txBody>
+                  <a:tcPr marL="82296" marR="82296" marT="36576" marB="36576" anchor="ctr">
+                    <a:lnL w="10160">
+                      <a:noFill/>
+                    </a:lnL>
+                    <a:lnR w="10160">
+                      <a:noFill/>
+                    </a:lnR>
+                    <a:lnT w="10160">
+                      <a:solidFill>
+                        <a:srgbClr val="626669"/>
+                      </a:solidFill>
+                    </a:lnT>
+                    <a:lnB w="10160">
+                      <a:noFill/>
+                    </a:lnB>
+                    <a:solidFill>
+                      <a:srgbClr val="FFFEF8"/>
+                    </a:solidFill>
+                  </a:tcPr>
+                </a:tc>
+                <a:tc>
+                  <a:txBody>
+                    <a:bodyPr wrap="square" lIns="0" rIns="0" tIns="0" bIns="0"/>
+                    <a:lstStyle/>
+                    <a:p>
+                      <a:pPr algn="l">
+                        <a:lnSpc>
+                          <a:spcPct val="112000"/>
+                        </a:lnSpc>
+                        <a:spcAft>
+                          <a:spcPts val="0"/>
+                        </a:spcAft>
+                        <a:buNone/>
+                      </a:pPr>
+                      <a:r>
+                        <a:rPr sz="2100" b="0" lang="ja-JP">
+                          <a:solidFill>
+                            <a:srgbClr val="303437"/>
+                          </a:solidFill>
+                          <a:latin typeface="Noto Sans"/>
+                          <a:ea typeface="Noto Sans CJK JP"/>
+                          <a:cs typeface="Noto Sans"/>
+                        </a:rPr>
+                        <a:t>Llama型 / 1.71Bパラメータ</a:t>
+                      </a:r>
+                    </a:p>
+                  </a:txBody>
+                  <a:tcPr marL="82296" marR="82296" marT="36576" marB="36576" anchor="ctr">
+                    <a:lnL w="10160">
+                      <a:noFill/>
+                    </a:lnL>
+                    <a:lnR w="10160">
+                      <a:noFill/>
+                    </a:lnR>
+                    <a:lnT w="10160">
+                      <a:solidFill>
+                        <a:srgbClr val="626669"/>
+                      </a:solidFill>
+                    </a:lnT>
+                    <a:lnB w="10160">
+                      <a:noFill/>
+                    </a:lnB>
+                    <a:solidFill>
+                      <a:srgbClr val="FFFEF8"/>
+                    </a:solidFill>
+                  </a:tcPr>
+                </a:tc>
+              </a:tr>
+              <a:tr h="475488">
+                <a:tc>
+                  <a:txBody>
+                    <a:bodyPr wrap="square" lIns="0" rIns="0" tIns="0" bIns="0"/>
+                    <a:lstStyle/>
+                    <a:p>
+                      <a:pPr algn="l">
+                        <a:lnSpc>
+                          <a:spcPct val="112000"/>
+                        </a:lnSpc>
+                        <a:spcAft>
+                          <a:spcPts val="0"/>
+                        </a:spcAft>
+                        <a:buNone/>
+                      </a:pPr>
+                      <a:r>
+                        <a:rPr sz="2100" b="0" lang="ja-JP">
+                          <a:solidFill>
+                            <a:srgbClr val="303437"/>
+                          </a:solidFill>
+                          <a:latin typeface="Noto Sans"/>
+                          <a:ea typeface="Noto Sans CJK JP"/>
+                          <a:cs typeface="Noto Sans"/>
+                        </a:rPr>
+                        <a:t>文脈長 / 区切り方</a:t>
+                      </a:r>
+                    </a:p>
+                  </a:txBody>
+                  <a:tcPr marL="82296" marR="82296" marT="36576" marB="36576" anchor="ctr">
+                    <a:lnL w="10160">
+                      <a:noFill/>
+                    </a:lnL>
+                    <a:lnR w="10160">
+                      <a:noFill/>
+                    </a:lnR>
+                    <a:lnT w="10160">
+                      <a:noFill/>
+                    </a:lnT>
+                    <a:lnB w="10160">
+                      <a:noFill/>
+                    </a:lnB>
+                    <a:solidFill>
+                      <a:srgbClr val="FFFEF8"/>
+                    </a:solidFill>
+                  </a:tcPr>
+                </a:tc>
+                <a:tc>
+                  <a:txBody>
+                    <a:bodyPr wrap="square" lIns="0" rIns="0" tIns="0" bIns="0"/>
+                    <a:lstStyle/>
+                    <a:p>
+                      <a:pPr algn="l">
+                        <a:lnSpc>
+                          <a:spcPct val="112000"/>
+                        </a:lnSpc>
+                        <a:spcAft>
+                          <a:spcPts val="0"/>
+                        </a:spcAft>
+                        <a:buNone/>
+                      </a:pPr>
+                      <a:r>
+                        <a:rPr sz="2100" b="0" lang="ja-JP">
+                          <a:solidFill>
+                            <a:srgbClr val="303437"/>
+                          </a:solidFill>
+                          <a:latin typeface="Noto Sans"/>
+                          <a:ea typeface="Noto Sans CJK JP"/>
+                          <a:cs typeface="Noto Sans"/>
+                        </a:rPr>
+                        <a:t>2,048トークン / GPT-2</a:t>
+                      </a:r>
+                    </a:p>
+                  </a:txBody>
+                  <a:tcPr marL="82296" marR="82296" marT="36576" marB="36576" anchor="ctr">
+                    <a:lnL w="10160">
+                      <a:noFill/>
+                    </a:lnL>
+                    <a:lnR w="10160">
+                      <a:noFill/>
+                    </a:lnR>
+                    <a:lnT w="10160">
+                      <a:noFill/>
+                    </a:lnT>
+                    <a:lnB w="10160">
+                      <a:noFill/>
+                    </a:lnB>
+                    <a:solidFill>
+                      <a:srgbClr val="FFFEF8"/>
+                    </a:solidFill>
+                  </a:tcPr>
+                </a:tc>
+              </a:tr>
+              <a:tr h="475488">
+                <a:tc>
+                  <a:txBody>
+                    <a:bodyPr wrap="square" lIns="0" rIns="0" tIns="0" bIns="0"/>
+                    <a:lstStyle/>
+                    <a:p>
+                      <a:pPr algn="l">
+                        <a:lnSpc>
+                          <a:spcPct val="112000"/>
+                        </a:lnSpc>
+                        <a:spcAft>
+                          <a:spcPts val="0"/>
+                        </a:spcAft>
+                        <a:buNone/>
+                      </a:pPr>
+                      <a:r>
+                        <a:rPr sz="2100" b="0" lang="ja-JP">
+                          <a:solidFill>
+                            <a:srgbClr val="303437"/>
+                          </a:solidFill>
+                          <a:latin typeface="Noto Sans"/>
+                          <a:ea typeface="Noto Sans CJK JP"/>
+                          <a:cs typeface="Noto Sans"/>
+                        </a:rPr>
+                        <a:t>比較する条件</a:t>
+                      </a:r>
+                    </a:p>
+                  </a:txBody>
+                  <a:tcPr marL="82296" marR="82296" marT="36576" marB="36576" anchor="ctr">
+                    <a:lnL w="10160">
+                      <a:noFill/>
+                    </a:lnL>
+                    <a:lnR w="10160">
+                      <a:noFill/>
+                    </a:lnR>
+                    <a:lnT w="10160">
+                      <a:noFill/>
+                    </a:lnT>
+                    <a:lnB w="10160">
+                      <a:solidFill>
+                        <a:srgbClr val="626669"/>
+                      </a:solidFill>
+                    </a:lnB>
+                    <a:solidFill>
+                      <a:srgbClr val="FFFEF8"/>
+                    </a:solidFill>
+                  </a:tcPr>
+                </a:tc>
+                <a:tc>
+                  <a:txBody>
+                    <a:bodyPr wrap="square" lIns="0" rIns="0" tIns="0" bIns="0"/>
+                    <a:lstStyle/>
+                    <a:p>
+                      <a:pPr algn="l">
+                        <a:lnSpc>
+                          <a:spcPct val="112000"/>
+                        </a:lnSpc>
+                        <a:spcAft>
+                          <a:spcPts val="0"/>
+                        </a:spcAft>
+                        <a:buNone/>
+                      </a:pPr>
+                      <a:r>
+                        <a:rPr sz="2100" b="0" lang="ja-JP">
+                          <a:solidFill>
+                            <a:srgbClr val="303437"/>
+                          </a:solidFill>
+                          <a:latin typeface="Noto Sans"/>
+                          <a:ea typeface="Noto Sans CJK JP"/>
+                          <a:cs typeface="Noto Sans"/>
+                        </a:rPr>
+                        <a:t>実験内で学習量とステップ数を統一</a:t>
+                      </a:r>
+                    </a:p>
+                  </a:txBody>
+                  <a:tcPr marL="82296" marR="82296" marT="36576" marB="36576" anchor="ctr">
+                    <a:lnL w="10160">
+                      <a:noFill/>
+                    </a:lnL>
+                    <a:lnR w="10160">
+                      <a:noFill/>
+                    </a:lnR>
+                    <a:lnT w="10160">
+                      <a:noFill/>
+                    </a:lnT>
+                    <a:lnB w="10160">
+                      <a:solidFill>
+                        <a:srgbClr val="626669"/>
+                      </a:solidFill>
+                    </a:lnB>
+                    <a:solidFill>
+                      <a:srgbClr val="FFFEF8"/>
+                    </a:solidFill>
+                  </a:tcPr>
+                </a:tc>
+              </a:tr>
+            </a:tbl>
+          </a:graphicData>
+        </a:graphic>
+      </p:graphicFrame>
+      <p:sp>
+        <p:nvSpPr>
+          <p:cNvPr id="5" name="TextBox 4"/>
+          <p:cNvSpPr txBox="1"/>
+          <p:nvPr/>
+        </p:nvSpPr>
+        <p:spPr>
+          <a:xfrm>
+            <a:off x="548640" y="3575304"/>
+            <a:ext cx="8046720" cy="640080"/>
+          </a:xfrm>
+          <a:prstGeom prst="rect">
+            <a:avLst/>
+          </a:prstGeom>
+          <a:noFill/>
+        </p:spPr>
+        <p:txBody>
+          <a:bodyPr wrap="square" lIns="0" rIns="0" tIns="0" bIns="0">
+            <a:spAutoFit/>
+          </a:bodyPr>
+          <a:lstStyle/>
+          <a:p>
+            <a:pPr algn="l">
+              <a:lnSpc>
+                <a:spcPct val="112000"/>
+              </a:lnSpc>
+              <a:spcAft>
+                <a:spcPts val="0"/>
+              </a:spcAft>
+              <a:buNone/>
+            </a:pPr>
+            <a:r>
+              <a:rPr sz="1900" b="0" lang="ja-JP">
+                <a:solidFill>
+                  <a:srgbClr val="303437"/>
+                </a:solidFill>
+                <a:latin typeface="Noto Sans"/>
+                <a:ea typeface="Noto Sans CJK JP"/>
+                <a:cs typeface="Noto Sans"/>
+              </a:rPr>
+              <a:t>データの選び方と初期値を変えた2モデルを学習し、得点を平均して偶然の影響を抑えた [1]。</a:t>
+            </a:r>
+          </a:p>
+        </p:txBody>
+      </p:sp>
+      <p:sp>
+        <p:nvSpPr>
+          <p:cNvPr id="6" name="TextBox 5"/>
+          <p:cNvSpPr txBox="1"/>
+          <p:nvPr/>
+        </p:nvSpPr>
+        <p:spPr>
+          <a:xfrm>
+            <a:off x="548640" y="4928616"/>
+            <a:ext cx="8046720" cy="155448"/>
+          </a:xfrm>
+          <a:prstGeom prst="rect">
+            <a:avLst/>
+          </a:prstGeom>
+          <a:noFill/>
+        </p:spPr>
+        <p:txBody>
+          <a:bodyPr wrap="none" lIns="0" rIns="0" tIns="0" bIns="0">
+            <a:spAutoFit/>
+          </a:bodyPr>
+          <a:lstStyle/>
+          <a:p>
+            <a:r>
+              <a:rPr sz="800" b="0" lang="ja-JP">
+                <a:solidFill>
+                  <a:srgbClr val="626669"/>
+                </a:solidFill>
+                <a:latin typeface="Noto Sans"/>
+                <a:ea typeface="Noto Sans CJK JP"/>
+                <a:cs typeface="Noto Sans"/>
+              </a:rPr>
+              <a:t>[1] Guilherme Penedo et al. (2024). The FineWeb Datasets: Decanting the Web for the Finest Text Data at Scale. NeurIPS. §3.1  </a:t>
+            </a:r>
+            <a:r>
+              <a:rPr sz="800" b="0" lang="en-US">
+                <a:solidFill>
+                  <a:srgbClr val="626669"/>
+                </a:solidFill>
+                <a:latin typeface="Noto Sans"/>
+                <a:ea typeface="Noto Sans CJK JP"/>
+                <a:cs typeface="Noto Sans"/>
+                <a:hlinkClick r:id="rId2"/>
+              </a:rPr>
+              <a:t>https://arxiv.org/abs/2406.17557</a:t>
+            </a:r>
+          </a:p>
+        </p:txBody>
+      </p:sp>
+    </p:spTree>
+  </p:cSld>
+  <p:clrMapOvr>
+    <a:masterClrMapping/>
+  </p:clrMapOvr>
+</p:sld>
+</file>
+
+<file path=ppt/slides/slide32.xml><?xml version="1.0" encoding="utf-8"?>
+<p:sld xmlns:a="http://schemas.openxmlformats.org/drawingml/2006/main" xmlns:p="http://schemas.openxmlformats.org/presentationml/2006/main" xmlns:r="http://schemas.openxmlformats.org/officeDocument/2006/relationships">
+  <p:cSld>
+    <p:spTree>
+      <p:nvGrpSpPr>
+        <p:cNvPr id="1" name=""/>
+        <p:cNvGrpSpPr/>
+        <p:nvPr/>
+      </p:nvGrpSpPr>
+      <p:grpSpPr/>
+      <p:sp>
+        <p:nvSpPr>
+          <p:cNvPr id="2" name="Title 1"/>
+          <p:cNvSpPr>
+            <a:spLocks noGrp="1"/>
+          </p:cNvSpPr>
+          <p:nvPr>
+            <p:ph type="title"/>
+          </p:nvPr>
+        </p:nvSpPr>
+        <p:spPr>
+          <a:xfrm>
+            <a:off x="548640" y="786384"/>
+            <a:ext cx="8046720" cy="502920"/>
+          </a:xfrm>
+        </p:spPr>
+        <p:txBody>
+          <a:bodyPr wrap="square" lIns="0" rIns="0" tIns="0" bIns="0"/>
+          <a:lstStyle/>
+          <a:p>
+            <a:pPr algn="l">
+              <a:lnSpc>
+                <a:spcPct val="112000"/>
+              </a:lnSpc>
+              <a:spcAft>
+                <a:spcPts val="0"/>
+              </a:spcAft>
+              <a:buNone/>
+            </a:pPr>
+            <a:r>
+              <a:rPr sz="2800" b="1" lang="ja-JP">
+                <a:solidFill>
+                  <a:srgbClr val="303437"/>
+                </a:solidFill>
+                <a:latin typeface="Noto Sans"/>
+                <a:ea typeface="Noto Sans CJK JP"/>
+                <a:cs typeface="Noto Sans"/>
+              </a:rPr>
+              <a:t>選択肢の尤度に基づく回答の決定</a:t>
+            </a:r>
+          </a:p>
+        </p:txBody>
+      </p:sp>
+      <p:sp>
+        <p:nvSpPr>
+          <p:cNvPr id="3" name="Text Placeholder 2"/>
+          <p:cNvSpPr>
+            <a:spLocks noGrp="1"/>
+          </p:cNvSpPr>
+          <p:nvPr>
+            <p:ph type="body" idx="1"/>
+          </p:nvPr>
+        </p:nvSpPr>
+        <p:spPr>
+          <a:xfrm>
+            <a:off x="548640" y="1508760"/>
+            <a:ext cx="8046720" cy="2971800"/>
+          </a:xfrm>
+        </p:spPr>
+        <p:txBody>
+          <a:bodyPr wrap="square" lIns="0" rIns="0" tIns="0" bIns="0"/>
+          <a:lstStyle/>
+          <a:p>
+            <a:pPr lvl="0" marL="457200" indent="-355600">
+              <a:lnSpc>
+                <a:spcPct val="115000"/>
+              </a:lnSpc>
+              <a:spcAft>
+                <a:spcPts val="1500"/>
+              </a:spcAft>
+              <a:buSzPct val="57826"/>
+              <a:buFont typeface="Noto Sans CJK JP"/>
+              <a:buChar char="●"/>
+              <a:defRPr sz="2300" lang="ja-JP">
+                <a:latin typeface="Noto Sans"/>
+                <a:ea typeface="Noto Sans CJK JP"/>
+              </a:defRPr>
+            </a:pPr>
+            <a:r>
+              <a:rPr sz="2300" b="0" lang="ja-JP">
+                <a:solidFill>
+                  <a:srgbClr val="303437"/>
+                </a:solidFill>
+                <a:latin typeface="Noto Sans"/>
+                <a:ea typeface="Noto Sans CJK JP"/>
+                <a:cs typeface="Noto Sans"/>
+              </a:rPr>
+              <a:t>評価では、問題文に対して各選択肢の全文がどれだけ続きやすいかを、モデルの尤度で比べる [1]。</a:t>
+            </a:r>
+          </a:p>
+          <a:p>
+            <a:pPr lvl="0" marL="457200" indent="-355600">
+              <a:lnSpc>
+                <a:spcPct val="115000"/>
+              </a:lnSpc>
+              <a:spcAft>
+                <a:spcPts val="1500"/>
+              </a:spcAft>
+              <a:buSzPct val="57826"/>
+              <a:buFont typeface="Noto Sans CJK JP"/>
+              <a:buChar char="●"/>
+              <a:defRPr sz="2300" lang="ja-JP">
+                <a:latin typeface="Noto Sans"/>
+                <a:ea typeface="Noto Sans CJK JP"/>
+              </a:defRPr>
+            </a:pPr>
+            <a:r>
+              <a:rPr sz="2300" b="0" lang="ja-JP">
+                <a:solidFill>
+                  <a:srgbClr val="303437"/>
+                </a:solidFill>
+                <a:latin typeface="Noto Sans"/>
+                <a:ea typeface="Noto Sans CJK JP"/>
+                <a:cs typeface="Noto Sans"/>
+              </a:rPr>
+              <a:t>短い選択肢が有利になる影響を抑えるため、課題に応じた長さの正規化も用いる。</a:t>
+            </a:r>
+          </a:p>
+          <a:p>
+            <a:pPr lvl="0" marL="457200" indent="-355600">
+              <a:lnSpc>
+                <a:spcPct val="115000"/>
+              </a:lnSpc>
+              <a:spcAft>
+                <a:spcPts val="1500"/>
+              </a:spcAft>
+              <a:buSzPct val="57826"/>
+              <a:buFont typeface="Noto Sans CJK JP"/>
+              <a:buChar char="●"/>
+              <a:defRPr sz="2300" lang="ja-JP">
+                <a:latin typeface="Noto Sans"/>
+                <a:ea typeface="Noto Sans CJK JP"/>
+              </a:defRPr>
+            </a:pPr>
+            <a:r>
+              <a:rPr sz="2300" b="0" lang="ja-JP">
+                <a:solidFill>
+                  <a:srgbClr val="303437"/>
+                </a:solidFill>
+                <a:latin typeface="Noto Sans"/>
+                <a:ea typeface="Noto Sans CJK JP"/>
+                <a:cs typeface="Noto Sans"/>
+              </a:rPr>
+              <a:t>正解率は、その方法で選んだ回答が正解と一致した割合。課題の実装や選び方によって集約得点も変わる。</a:t>
+            </a:r>
+          </a:p>
+        </p:txBody>
+      </p:sp>
+      <p:sp>
+        <p:nvSpPr>
+          <p:cNvPr id="4" name="Title 3"/>
+          <p:cNvSpPr>
+            <a:spLocks noGrp="1"/>
+          </p:cNvSpPr>
+          <p:nvPr>
+            <p:ph type="title" idx="2"/>
+          </p:nvPr>
+        </p:nvSpPr>
+        <p:spPr/>
+        <p:txBody>
+          <a:bodyPr wrap="square" lIns="0" rIns="0" tIns="0" bIns="0" anchor="ctr"/>
+          <a:lstStyle/>
+          <a:p>
+            <a:pPr algn="l">
+              <a:lnSpc>
+                <a:spcPct val="100000"/>
+              </a:lnSpc>
+              <a:spcBef>
+                <a:spcPts val="0"/>
+              </a:spcBef>
+              <a:spcAft>
+                <a:spcPts val="0"/>
+              </a:spcAft>
+              <a:buNone/>
+            </a:pPr>
+            <a:r>
+              <a:rPr sz="1400" b="1" lang="ja-JP">
+                <a:solidFill>
+                  <a:srgbClr val="FFFEF8"/>
+                </a:solidFill>
+                <a:latin typeface="Noto Sans"/>
+                <a:ea typeface="Noto Sans CJK JP"/>
+                <a:cs typeface="Noto Sans"/>
+              </a:rPr>
+              <a:t>3. データ品質の評価と話題分布</a:t>
+            </a:r>
+          </a:p>
+        </p:txBody>
+      </p:sp>
+      <p:sp>
+        <p:nvSpPr>
+          <p:cNvPr id="5" name="TextBox 4"/>
+          <p:cNvSpPr txBox="1"/>
+          <p:nvPr/>
+        </p:nvSpPr>
+        <p:spPr>
+          <a:xfrm>
+            <a:off x="548640" y="4928616"/>
+            <a:ext cx="8046720" cy="155448"/>
+          </a:xfrm>
+          <a:prstGeom prst="rect">
+            <a:avLst/>
+          </a:prstGeom>
+          <a:noFill/>
+        </p:spPr>
+        <p:txBody>
+          <a:bodyPr wrap="none" lIns="0" rIns="0" tIns="0" bIns="0">
+            <a:spAutoFit/>
+          </a:bodyPr>
+          <a:lstStyle/>
+          <a:p>
+            <a:r>
+              <a:rPr sz="800" b="0" lang="ja-JP">
+                <a:solidFill>
+                  <a:srgbClr val="626669"/>
+                </a:solidFill>
+                <a:latin typeface="Noto Sans"/>
+                <a:ea typeface="Noto Sans CJK JP"/>
+                <a:cs typeface="Noto Sans"/>
+              </a:rPr>
+              <a:t>[1] FineWebの公開評価実装  </a:t>
+            </a:r>
+            <a:r>
+              <a:rPr sz="800" b="0" lang="en-US">
+                <a:solidFill>
+                  <a:srgbClr val="626669"/>
+                </a:solidFill>
+                <a:latin typeface="Noto Sans"/>
+                <a:ea typeface="Noto Sans CJK JP"/>
+                <a:cs typeface="Noto Sans"/>
+                <a:hlinkClick r:id="rId2"/>
+              </a:rPr>
+              <a:t>https://huggingface.co/datasets/HuggingFaceFW/fineweb/blob/main/lighteval_tasks.py</a:t>
+            </a:r>
+          </a:p>
+        </p:txBody>
+      </p:sp>
+    </p:spTree>
+  </p:cSld>
+  <p:clrMapOvr>
+    <a:masterClrMapping/>
+  </p:clrMapOvr>
+</p:sld>
+</file>
+
 <file path=ppt/slides/slide33.xml><?xml version="1.0" encoding="utf-8"?>
 <p:sld xmlns:a="http://schemas.openxmlformats.org/drawingml/2006/main" xmlns:p="http://schemas.openxmlformats.org/presentationml/2006/main" xmlns:r="http://schemas.openxmlformats.org/officeDocument/2006/relationships">
   <p:cSld>
@@ -16883,7 +16891,7 @@
                 <a:ea typeface="Noto Sans CJK JP"/>
                 <a:cs typeface="Noto Sans"/>
               </a:rPr>
-              <a:t>教育的な選別による話題の分布の変化</a:t>
+              <a:t>話題の比較は各5万文書の自動分類に基づく</a:t>
             </a:r>
           </a:p>
         </p:txBody>
@@ -16901,7 +16909,7 @@
         <p:spPr>
           <a:xfrm>
             <a:off x="548640" y="1508760"/>
-            <a:ext cx="8046720" cy="2971800"/>
+            <a:ext cx="8046720" cy="3200400"/>
           </a:xfrm>
         </p:spPr>
         <p:txBody>
@@ -16932,7 +16940,7 @@
                 <a:ea typeface="Noto Sans CJK JP"/>
                 <a:cs typeface="Noto Sans"/>
               </a:rPr>
-              <a:t>FineWebとEduから各5万文書を取り、意味が近い文書をまとめた原著の分析では、教育・歴史などの比重がEdu側で高かった [1]。</a:t>
+              <a:t>FineWebとFineWeb-Eduから各5万文書を抽出し、文の意味を数値化するモデルで文書を表現した [1]。</a:t>
             </a:r>
           </a:p>
           <a:p>
@@ -16960,7 +16968,7 @@
                 <a:ea typeface="Noto Sans CJK JP"/>
                 <a:cs typeface="Noto Sans"/>
               </a:rPr>
-              <a:t>一方で、商業・娯楽・旅行などの比重は下がった。教育的な価値で選ぶ操作は、話題を一様に保つ操作ではない。</a:t>
+              <a:t>似た文書を自動でまとめ、密度の高い100クラスタを抽出し、Llama 3.1 70Bで話題名を付けた。</a:t>
             </a:r>
           </a:p>
           <a:p>
@@ -16988,7 +16996,7 @@
                 <a:ea typeface="Noto Sans CJK JP"/>
                 <a:cs typeface="Noto Sans"/>
               </a:rPr>
-              <a:t>分野別コーパスへの適合を測るPalomaの分析でも、一般Webと学術的な文章で得意分野が異なった [1]。</a:t>
+              <a:t>図18は構成比の差の絶対値が0.5ポイント以上の39分類を示す。各データ単独の構成比や、全体の文書数は示していない。</a:t>
             </a:r>
           </a:p>
         </p:txBody>
@@ -17029,7 +17037,7 @@
                 <a:ea typeface="Noto Sans CJK JP"/>
                 <a:cs typeface="Noto Sans"/>
               </a:rPr>
-              <a:t>3. 事前学習データの比較評価と限界</a:t>
+              <a:t>3. データ品質の評価と話題分布</a:t>
             </a:r>
           </a:p>
         </p:txBody>
@@ -17284,7 +17292,7 @@
                 <a:ea typeface="Noto Sans CJK JP"/>
                 <a:cs typeface="Noto Sans"/>
               </a:rPr>
-              <a:t>3. 事前学習データの比較評価と限界</a:t>
+              <a:t>3. データ品質の評価と話題分布</a:t>
             </a:r>
           </a:p>
         </p:txBody>
@@ -22806,7 +22814,7 @@
                 <a:ea typeface="Noto Sans CJK JP"/>
                 <a:cs typeface="Noto Sans"/>
               </a:rPr>
-              <a:t>文書選別と評価実験の詳細</a:t>
+              <a:t>文書選別・話題分布と評価実験の詳細</a:t>
             </a:r>
           </a:p>
           <a:p>
@@ -32126,7 +32134,7 @@
                 <a:ea typeface="Noto Sans CJK JP"/>
                 <a:cs typeface="Noto Sans"/>
               </a:rPr>
-              <a:t>Appendix 3. 文書選別と評価実験の詳細</a:t>
+              <a:t>Appendix 3. 文書選別・話題分布と評価実験の詳細</a:t>
             </a:r>
           </a:p>
         </p:txBody>
@@ -32381,7 +32389,7 @@
                 <a:ea typeface="Noto Sans CJK JP"/>
                 <a:cs typeface="Noto Sans"/>
               </a:rPr>
-              <a:t>Appendix 3. 文書選別と評価実験の詳細</a:t>
+              <a:t>Appendix 3. 文書選別・話題分布と評価実験の詳細</a:t>
             </a:r>
           </a:p>
         </p:txBody>
@@ -32531,7 +32539,7 @@
                 <a:ea typeface="Noto Sans CJK JP"/>
                 <a:cs typeface="Noto Sans"/>
               </a:rPr>
-              <a:t>Appendix 3. 文書選別と評価実験の詳細</a:t>
+              <a:t>Appendix 3. 文書選別・話題分布と評価実験の詳細</a:t>
             </a:r>
           </a:p>
         </p:txBody>
@@ -33381,7 +33389,7 @@
                 <a:ea typeface="Noto Sans CJK JP"/>
                 <a:cs typeface="Noto Sans"/>
               </a:rPr>
-              <a:t>Appendix 3. 文書選別と評価実験の詳細</a:t>
+              <a:t>Appendix 3. 文書選別・話題分布と評価実験の詳細</a:t>
             </a:r>
           </a:p>
         </p:txBody>
@@ -33684,7 +33692,7 @@
                 <a:ea typeface="Noto Sans CJK JP"/>
                 <a:cs typeface="Noto Sans"/>
               </a:rPr>
-              <a:t>Appendix 3. 文書選別と評価実験の詳細</a:t>
+              <a:t>Appendix 3. 文書選別・話題分布と評価実験の詳細</a:t>
             </a:r>
           </a:p>
         </p:txBody>
@@ -39294,6 +39302,310 @@
 </p:sld>
 </file>
 
+<file path=ppt/slides/slide79.xml><?xml version="1.0" encoding="utf-8"?>
+<p:sld xmlns:a="http://schemas.openxmlformats.org/drawingml/2006/main" xmlns:p="http://schemas.openxmlformats.org/presentationml/2006/main" xmlns:r="http://schemas.openxmlformats.org/officeDocument/2006/relationships">
+  <p:cSld>
+    <p:spTree>
+      <p:nvGrpSpPr>
+        <p:cNvPr id="1" name=""/>
+        <p:cNvGrpSpPr/>
+        <p:nvPr/>
+      </p:nvGrpSpPr>
+      <p:grpSpPr/>
+      <p:sp>
+        <p:nvSpPr>
+          <p:cNvPr id="2" name="Title 1"/>
+          <p:cNvSpPr>
+            <a:spLocks noGrp="1"/>
+          </p:cNvSpPr>
+          <p:nvPr>
+            <p:ph type="title"/>
+          </p:nvPr>
+        </p:nvSpPr>
+        <p:spPr>
+          <a:xfrm>
+            <a:off x="468172" y="650138"/>
+            <a:ext cx="8206740" cy="616305"/>
+          </a:xfrm>
+        </p:spPr>
+        <p:txBody>
+          <a:bodyPr wrap="square" lIns="0" rIns="0" tIns="0" bIns="0"/>
+          <a:lstStyle/>
+          <a:p>
+            <a:pPr>
+              <a:lnSpc>
+                <a:spcPct val="100000"/>
+              </a:lnSpc>
+              <a:spcBef>
+                <a:spcPts val="0"/>
+              </a:spcBef>
+              <a:spcAft>
+                <a:spcPts val="0"/>
+              </a:spcAft>
+              <a:buNone/>
+            </a:pPr>
+            <a:r>
+              <a:rPr sz="2800" b="1" lang="ja-JP">
+                <a:solidFill>
+                  <a:srgbClr val="303437"/>
+                </a:solidFill>
+                <a:latin typeface="Noto Sans"/>
+                <a:ea typeface="Noto Sans CJK JP"/>
+                <a:cs typeface="Noto Sans"/>
+              </a:rPr>
+              <a:t>FineWeb-Eduで増減する話題の構成比</a:t>
+            </a:r>
+          </a:p>
+        </p:txBody>
+      </p:sp>
+      <p:sp>
+        <p:nvSpPr>
+          <p:cNvPr id="3" name="Title 2"/>
+          <p:cNvSpPr>
+            <a:spLocks noGrp="1"/>
+          </p:cNvSpPr>
+          <p:nvPr>
+            <p:ph type="title" idx="2"/>
+          </p:nvPr>
+        </p:nvSpPr>
+        <p:spPr>
+          <a:xfrm>
+            <a:off x="75895" y="0"/>
+            <a:ext cx="8115300" cy="480059"/>
+          </a:xfrm>
+        </p:spPr>
+        <p:txBody>
+          <a:bodyPr wrap="square" lIns="0" rIns="0" tIns="0" bIns="0" anchor="ctr"/>
+          <a:lstStyle/>
+          <a:p>
+            <a:pPr>
+              <a:lnSpc>
+                <a:spcPct val="100000"/>
+              </a:lnSpc>
+              <a:spcBef>
+                <a:spcPts val="0"/>
+              </a:spcBef>
+              <a:spcAft>
+                <a:spcPts val="0"/>
+              </a:spcAft>
+              <a:buNone/>
+            </a:pPr>
+            <a:r>
+              <a:rPr sz="1400" b="1" lang="ja-JP">
+                <a:solidFill>
+                  <a:srgbClr val="FFFEF8"/>
+                </a:solidFill>
+                <a:latin typeface="Noto Sans"/>
+                <a:ea typeface="Noto Sans CJK JP"/>
+                <a:cs typeface="Noto Sans"/>
+              </a:rPr>
+              <a:t>3. データ品質の評価と話題分布</a:t>
+            </a:r>
+          </a:p>
+        </p:txBody>
+      </p:sp>
+      <p:pic>
+        <p:nvPicPr>
+          <p:cNvPr id="4" name="Picture 3" descr="topic-shifts.png"/>
+          <p:cNvPicPr>
+            <a:picLocks noChangeAspect="1"/>
+          </p:cNvPicPr>
+          <p:nvPr/>
+        </p:nvPicPr>
+        <p:blipFill>
+          <a:blip r:embed="rId2"/>
+          <a:stretch>
+            <a:fillRect/>
+          </a:stretch>
+        </p:blipFill>
+        <p:spPr>
+          <a:xfrm>
+            <a:off x="457200" y="1333500"/>
+            <a:ext cx="8229600" cy="2743200"/>
+          </a:xfrm>
+          <a:prstGeom prst="rect">
+            <a:avLst/>
+          </a:prstGeom>
+        </p:spPr>
+      </p:pic>
+      <p:sp>
+        <p:nvSpPr>
+          <p:cNvPr id="5" name="TextBox 4"/>
+          <p:cNvSpPr txBox="1"/>
+          <p:nvPr/>
+        </p:nvSpPr>
+        <p:spPr>
+          <a:xfrm>
+            <a:off x="548640" y="4076700"/>
+            <a:ext cx="8046720" cy="558800"/>
+          </a:xfrm>
+          <a:prstGeom prst="rect">
+            <a:avLst/>
+          </a:prstGeom>
+          <a:noFill/>
+        </p:spPr>
+        <p:txBody>
+          <a:bodyPr wrap="square" lIns="0" rIns="0" tIns="0" bIns="0">
+            <a:spAutoFit/>
+          </a:bodyPr>
+          <a:lstStyle/>
+          <a:p>
+            <a:pPr>
+              <a:lnSpc>
+                <a:spcPct val="100000"/>
+              </a:lnSpc>
+              <a:spcBef>
+                <a:spcPts val="0"/>
+              </a:spcBef>
+              <a:spcAft>
+                <a:spcPts val="0"/>
+              </a:spcAft>
+              <a:buNone/>
+            </a:pPr>
+            <a:r>
+              <a:rPr sz="1700" b="0" lang="ja-JP">
+                <a:solidFill>
+                  <a:srgbClr val="303437"/>
+                </a:solidFill>
+                <a:latin typeface="Noto Sans"/>
+                <a:ea typeface="Noto Sans CJK JP"/>
+                <a:cs typeface="Noto Sans"/>
+              </a:rPr>
+              <a:t>差はFineWeb-Edu − FineWeb。各5万文書の標本に基づく。</a:t>
+            </a:r>
+          </a:p>
+          <a:p>
+            <a:pPr>
+              <a:lnSpc>
+                <a:spcPct val="100000"/>
+              </a:lnSpc>
+              <a:spcBef>
+                <a:spcPts val="0"/>
+              </a:spcBef>
+              <a:spcAft>
+                <a:spcPts val="0"/>
+              </a:spcAft>
+              <a:buNone/>
+            </a:pPr>
+            <a:r>
+              <a:rPr sz="1700" b="0" lang="ja-JP">
+                <a:solidFill>
+                  <a:srgbClr val="303437"/>
+                </a:solidFill>
+                <a:latin typeface="Noto Sans"/>
+                <a:ea typeface="Noto Sans CJK JP"/>
+                <a:cs typeface="Noto Sans"/>
+              </a:rPr>
+              <a:t>原著掲載39分類から、増加側・減少側の上位3分類ずつを例示 [1]。</a:t>
+            </a:r>
+          </a:p>
+        </p:txBody>
+      </p:sp>
+      <p:sp>
+        <p:nvSpPr>
+          <p:cNvPr id="6" name="TextBox 5"/>
+          <p:cNvSpPr txBox="1"/>
+          <p:nvPr/>
+        </p:nvSpPr>
+        <p:spPr>
+          <a:xfrm>
+            <a:off x="548640" y="4737100"/>
+            <a:ext cx="8046720" cy="152400"/>
+          </a:xfrm>
+          <a:prstGeom prst="rect">
+            <a:avLst/>
+          </a:prstGeom>
+          <a:noFill/>
+        </p:spPr>
+        <p:txBody>
+          <a:bodyPr wrap="square" lIns="0" rIns="0" tIns="0" bIns="0">
+            <a:spAutoFit/>
+          </a:bodyPr>
+          <a:lstStyle/>
+          <a:p>
+            <a:pPr>
+              <a:lnSpc>
+                <a:spcPct val="100000"/>
+              </a:lnSpc>
+              <a:spcBef>
+                <a:spcPts val="0"/>
+              </a:spcBef>
+              <a:spcAft>
+                <a:spcPts val="0"/>
+              </a:spcAft>
+              <a:buNone/>
+            </a:pPr>
+            <a:r>
+              <a:rPr sz="800" b="0" lang="ja-JP">
+                <a:solidFill>
+                  <a:srgbClr val="626669"/>
+                </a:solidFill>
+                <a:latin typeface="Noto Sans"/>
+                <a:ea typeface="Noto Sans CJK JP"/>
+                <a:cs typeface="Noto Sans"/>
+              </a:rPr>
+              <a:t>[1] Penedo et al. (2024). The FineWeb Datasets: Decanting the Web for the Finest Text Data at Scale. NeurIPS. Fig. 18.</a:t>
+            </a:r>
+          </a:p>
+        </p:txBody>
+      </p:sp>
+      <p:sp>
+        <p:nvSpPr>
+          <p:cNvPr id="7" name="TextBox 6"/>
+          <p:cNvSpPr txBox="1"/>
+          <p:nvPr/>
+        </p:nvSpPr>
+        <p:spPr>
+          <a:xfrm>
+            <a:off x="6124769" y="4737100"/>
+            <a:ext cx="2470590" cy="152400"/>
+          </a:xfrm>
+          <a:prstGeom prst="rect">
+            <a:avLst/>
+          </a:prstGeom>
+          <a:noFill/>
+        </p:spPr>
+        <p:txBody>
+          <a:bodyPr wrap="none" lIns="0" rIns="0" tIns="0" bIns="0">
+            <a:spAutoFit/>
+          </a:bodyPr>
+          <a:lstStyle/>
+          <a:p>
+            <a:pPr>
+              <a:lnSpc>
+                <a:spcPct val="100000"/>
+              </a:lnSpc>
+              <a:spcBef>
+                <a:spcPts val="0"/>
+              </a:spcBef>
+              <a:spcAft>
+                <a:spcPts val="0"/>
+              </a:spcAft>
+              <a:buNone/>
+            </a:pPr>
+            <a:r>
+              <a:rPr sz="800" b="0" lang="ja-JP">
+                <a:solidFill>
+                  <a:srgbClr val="626669"/>
+                </a:solidFill>
+                <a:latin typeface="Noto Sans"/>
+                <a:ea typeface="Noto Sans CJK JP"/>
+                <a:cs typeface="Noto Sans"/>
+                <a:hlinkClick r:id="rId3"/>
+              </a:rPr>
+              <a:t>https://arxiv.org/abs/2406.17557v2</a:t>
+            </a:r>
+          </a:p>
+        </p:txBody>
+      </p:sp>
+    </p:spTree>
+  </p:cSld>
+  <p:clrMapOvr>
+    <a:masterClrMapping/>
+  </p:clrMapOvr>
+</p:sld>
+</file>
+
 <file path=ppt/slides/slide8.xml><?xml version="1.0" encoding="utf-8"?>
 <p:sld xmlns:a="http://schemas.openxmlformats.org/drawingml/2006/main" xmlns:p="http://schemas.openxmlformats.org/presentationml/2006/main" xmlns:r="http://schemas.openxmlformats.org/officeDocument/2006/relationships">
   <p:cSld>
@@ -39746,6 +40058,6579 @@
                 <a:hlinkClick r:id="rId3"/>
               </a:rPr>
               <a:t>http://money.cnn.com/2012/08/03/news/economy/michigan-unemployment/index.htm?section=money_topstories</a:t>
+            </a:r>
+          </a:p>
+        </p:txBody>
+      </p:sp>
+    </p:spTree>
+  </p:cSld>
+  <p:clrMapOvr>
+    <a:masterClrMapping/>
+  </p:clrMapOvr>
+</p:sld>
+</file>
+
+<file path=ppt/slides/slide80.xml><?xml version="1.0" encoding="utf-8"?>
+<p:sld xmlns:a="http://schemas.openxmlformats.org/drawingml/2006/main" xmlns:p="http://schemas.openxmlformats.org/presentationml/2006/main" xmlns:r="http://schemas.openxmlformats.org/officeDocument/2006/relationships">
+  <p:cSld>
+    <p:spTree>
+      <p:nvGrpSpPr>
+        <p:cNvPr id="1" name=""/>
+        <p:cNvGrpSpPr/>
+        <p:nvPr/>
+      </p:nvGrpSpPr>
+      <p:grpSpPr/>
+      <p:sp>
+        <p:nvSpPr>
+          <p:cNvPr id="2" name="Title 1"/>
+          <p:cNvSpPr>
+            <a:spLocks noGrp="1"/>
+          </p:cNvSpPr>
+          <p:nvPr>
+            <p:ph type="title"/>
+          </p:nvPr>
+        </p:nvSpPr>
+        <p:spPr>
+          <a:xfrm>
+            <a:off x="468172" y="650138"/>
+            <a:ext cx="8206740" cy="616305"/>
+          </a:xfrm>
+        </p:spPr>
+        <p:txBody>
+          <a:bodyPr wrap="square" lIns="0" rIns="0" tIns="0" bIns="0"/>
+          <a:lstStyle/>
+          <a:p>
+            <a:pPr>
+              <a:lnSpc>
+                <a:spcPct val="100000"/>
+              </a:lnSpc>
+              <a:spcBef>
+                <a:spcPts val="0"/>
+              </a:spcBef>
+              <a:spcAft>
+                <a:spcPts val="0"/>
+              </a:spcAft>
+              <a:buNone/>
+            </a:pPr>
+            <a:r>
+              <a:rPr sz="2800" b="1" lang="ja-JP">
+                <a:solidFill>
+                  <a:srgbClr val="303437"/>
+                </a:solidFill>
+                <a:latin typeface="Noto Sans"/>
+                <a:ea typeface="Noto Sans CJK JP"/>
+                <a:cs typeface="Noto Sans"/>
+              </a:rPr>
+              <a:t>FineWeb-Edu側で多い話題（1/3）</a:t>
+            </a:r>
+          </a:p>
+        </p:txBody>
+      </p:sp>
+      <p:sp>
+        <p:nvSpPr>
+          <p:cNvPr id="3" name="Title 2"/>
+          <p:cNvSpPr>
+            <a:spLocks noGrp="1"/>
+          </p:cNvSpPr>
+          <p:nvPr>
+            <p:ph type="title" idx="2"/>
+          </p:nvPr>
+        </p:nvSpPr>
+        <p:spPr>
+          <a:xfrm>
+            <a:off x="75895" y="0"/>
+            <a:ext cx="8115300" cy="480059"/>
+          </a:xfrm>
+        </p:spPr>
+        <p:txBody>
+          <a:bodyPr wrap="square" lIns="0" rIns="0" tIns="0" bIns="0" anchor="ctr"/>
+          <a:lstStyle/>
+          <a:p>
+            <a:pPr>
+              <a:lnSpc>
+                <a:spcPct val="100000"/>
+              </a:lnSpc>
+              <a:spcBef>
+                <a:spcPts val="0"/>
+              </a:spcBef>
+              <a:spcAft>
+                <a:spcPts val="0"/>
+              </a:spcAft>
+              <a:buNone/>
+            </a:pPr>
+            <a:r>
+              <a:rPr sz="1400" b="1" lang="ja-JP">
+                <a:solidFill>
+                  <a:srgbClr val="FFFEF8"/>
+                </a:solidFill>
+                <a:latin typeface="Noto Sans"/>
+                <a:ea typeface="Noto Sans CJK JP"/>
+                <a:cs typeface="Noto Sans"/>
+              </a:rPr>
+              <a:t>Appendix 3. 文書選別・話題分布と評価実験の詳細</a:t>
+            </a:r>
+          </a:p>
+        </p:txBody>
+      </p:sp>
+      <p:graphicFrame>
+        <p:nvGraphicFramePr>
+          <p:cNvPr id="4" name="Table 3"/>
+          <p:cNvGraphicFramePr>
+            <a:graphicFrameLocks noGrp="1"/>
+          </p:cNvGraphicFramePr>
+          <p:nvPr/>
+        </p:nvGraphicFramePr>
+        <p:xfrm>
+          <a:off x="548640" y="1371600"/>
+          <a:ext cx="8046720" cy="3022600"/>
+        </p:xfrm>
+        <a:graphic>
+          <a:graphicData uri="http://schemas.openxmlformats.org/drawingml/2006/table">
+            <a:tbl>
+              <a:tblPr firstRow="1" bandRow="1"/>
+              <a:tblGrid>
+                <a:gridCol w="5887720"/>
+                <a:gridCol w="2159000"/>
+              </a:tblGrid>
+              <a:tr h="431800">
+                <a:tc>
+                  <a:txBody>
+                    <a:bodyPr wrap="square" lIns="0" rIns="0" tIns="0" bIns="0"/>
+                    <a:lstStyle/>
+                    <a:p>
+                      <a:pPr algn="l">
+                        <a:lnSpc>
+                          <a:spcPct val="100000"/>
+                        </a:lnSpc>
+                        <a:spcBef>
+                          <a:spcPts val="0"/>
+                        </a:spcBef>
+                        <a:spcAft>
+                          <a:spcPts val="0"/>
+                        </a:spcAft>
+                        <a:buNone/>
+                      </a:pPr>
+                      <a:r>
+                        <a:rPr sz="2000" b="0" lang="ja-JP">
+                          <a:solidFill>
+                            <a:srgbClr val="303437"/>
+                          </a:solidFill>
+                          <a:latin typeface="Noto Sans"/>
+                          <a:ea typeface="Noto Sans CJK JP"/>
+                          <a:cs typeface="Noto Sans"/>
+                        </a:rPr>
+                        <a:t>話題（原著ラベルの和訳）</a:t>
+                      </a:r>
+                    </a:p>
+                  </a:txBody>
+                  <a:tcPr marL="63500" marR="63500" marT="25400" marB="25400" anchor="ctr">
+                    <a:lnL w="10160">
+                      <a:noFill/>
+                    </a:lnL>
+                    <a:lnR w="10160">
+                      <a:noFill/>
+                    </a:lnR>
+                    <a:lnT w="10160">
+                      <a:solidFill>
+                        <a:srgbClr val="626669"/>
+                      </a:solidFill>
+                    </a:lnT>
+                    <a:lnB w="10160">
+                      <a:solidFill>
+                        <a:srgbClr val="626669"/>
+                      </a:solidFill>
+                    </a:lnB>
+                    <a:solidFill>
+                      <a:srgbClr val="FFFEF8"/>
+                    </a:solidFill>
+                  </a:tcPr>
+                </a:tc>
+                <a:tc>
+                  <a:txBody>
+                    <a:bodyPr wrap="square" lIns="0" rIns="0" tIns="0" bIns="0"/>
+                    <a:lstStyle/>
+                    <a:p>
+                      <a:pPr algn="r">
+                        <a:lnSpc>
+                          <a:spcPct val="100000"/>
+                        </a:lnSpc>
+                        <a:spcBef>
+                          <a:spcPts val="0"/>
+                        </a:spcBef>
+                        <a:spcAft>
+                          <a:spcPts val="0"/>
+                        </a:spcAft>
+                        <a:buNone/>
+                      </a:pPr>
+                      <a:r>
+                        <a:rPr sz="2000" b="0" lang="ja-JP">
+                          <a:solidFill>
+                            <a:srgbClr val="303437"/>
+                          </a:solidFill>
+                          <a:latin typeface="Noto Sans"/>
+                          <a:ea typeface="Noto Sans CJK JP"/>
+                          <a:cs typeface="Noto Sans"/>
+                        </a:rPr>
+                        <a:t>差（ポイント）</a:t>
+                      </a:r>
+                    </a:p>
+                  </a:txBody>
+                  <a:tcPr marL="63500" marR="63500" marT="25400" marB="25400" anchor="ctr">
+                    <a:lnL w="10160">
+                      <a:noFill/>
+                    </a:lnL>
+                    <a:lnR w="10160">
+                      <a:noFill/>
+                    </a:lnR>
+                    <a:lnT w="10160">
+                      <a:solidFill>
+                        <a:srgbClr val="626669"/>
+                      </a:solidFill>
+                    </a:lnT>
+                    <a:lnB w="10160">
+                      <a:solidFill>
+                        <a:srgbClr val="626669"/>
+                      </a:solidFill>
+                    </a:lnB>
+                    <a:solidFill>
+                      <a:srgbClr val="FFFEF8"/>
+                    </a:solidFill>
+                  </a:tcPr>
+                </a:tc>
+              </a:tr>
+              <a:tr h="431800">
+                <a:tc>
+                  <a:txBody>
+                    <a:bodyPr wrap="square" lIns="0" rIns="0" tIns="0" bIns="0"/>
+                    <a:lstStyle/>
+                    <a:p>
+                      <a:pPr algn="l">
+                        <a:lnSpc>
+                          <a:spcPct val="100000"/>
+                        </a:lnSpc>
+                        <a:spcBef>
+                          <a:spcPts val="0"/>
+                        </a:spcBef>
+                        <a:spcAft>
+                          <a:spcPts val="0"/>
+                        </a:spcAft>
+                        <a:buNone/>
+                      </a:pPr>
+                      <a:r>
+                        <a:rPr sz="2000" b="0" lang="ja-JP">
+                          <a:solidFill>
+                            <a:srgbClr val="303437"/>
+                          </a:solidFill>
+                          <a:latin typeface="Noto Sans"/>
+                          <a:ea typeface="Noto Sans CJK JP"/>
+                          <a:cs typeface="Noto Sans"/>
+                        </a:rPr>
+                        <a:t>教育・学習・指導</a:t>
+                      </a:r>
+                    </a:p>
+                  </a:txBody>
+                  <a:tcPr marL="63500" marR="63500" marT="25400" marB="25400" anchor="ctr">
+                    <a:lnL w="10160">
+                      <a:noFill/>
+                    </a:lnL>
+                    <a:lnR w="10160">
+                      <a:noFill/>
+                    </a:lnR>
+                    <a:lnT w="10160">
+                      <a:solidFill>
+                        <a:srgbClr val="626669"/>
+                      </a:solidFill>
+                    </a:lnT>
+                    <a:lnB w="10160">
+                      <a:noFill/>
+                    </a:lnB>
+                    <a:solidFill>
+                      <a:srgbClr val="FFFEF8"/>
+                    </a:solidFill>
+                  </a:tcPr>
+                </a:tc>
+                <a:tc>
+                  <a:txBody>
+                    <a:bodyPr wrap="square" lIns="0" rIns="0" tIns="0" bIns="0"/>
+                    <a:lstStyle/>
+                    <a:p>
+                      <a:pPr algn="r">
+                        <a:lnSpc>
+                          <a:spcPct val="100000"/>
+                        </a:lnSpc>
+                        <a:spcBef>
+                          <a:spcPts val="0"/>
+                        </a:spcBef>
+                        <a:spcAft>
+                          <a:spcPts val="0"/>
+                        </a:spcAft>
+                        <a:buNone/>
+                      </a:pPr>
+                      <a:r>
+                        <a:rPr sz="2000" b="0" lang="ja-JP">
+                          <a:solidFill>
+                            <a:srgbClr val="303437"/>
+                          </a:solidFill>
+                          <a:latin typeface="Noto Sans"/>
+                          <a:ea typeface="Noto Sans CJK JP"/>
+                          <a:cs typeface="Noto Sans"/>
+                        </a:rPr>
+                        <a:t>+3.2</a:t>
+                      </a:r>
+                    </a:p>
+                  </a:txBody>
+                  <a:tcPr marL="63500" marR="63500" marT="25400" marB="25400" anchor="ctr">
+                    <a:lnL w="10160">
+                      <a:noFill/>
+                    </a:lnL>
+                    <a:lnR w="10160">
+                      <a:noFill/>
+                    </a:lnR>
+                    <a:lnT w="10160">
+                      <a:solidFill>
+                        <a:srgbClr val="626669"/>
+                      </a:solidFill>
+                    </a:lnT>
+                    <a:lnB w="10160">
+                      <a:noFill/>
+                    </a:lnB>
+                    <a:solidFill>
+                      <a:srgbClr val="FFFEF8"/>
+                    </a:solidFill>
+                  </a:tcPr>
+                </a:tc>
+              </a:tr>
+              <a:tr h="431800">
+                <a:tc>
+                  <a:txBody>
+                    <a:bodyPr wrap="square" lIns="0" rIns="0" tIns="0" bIns="0"/>
+                    <a:lstStyle/>
+                    <a:p>
+                      <a:pPr algn="l">
+                        <a:lnSpc>
+                          <a:spcPct val="100000"/>
+                        </a:lnSpc>
+                        <a:spcBef>
+                          <a:spcPts val="0"/>
+                        </a:spcBef>
+                        <a:spcAft>
+                          <a:spcPts val="0"/>
+                        </a:spcAft>
+                        <a:buNone/>
+                      </a:pPr>
+                      <a:r>
+                        <a:rPr sz="2000" b="0" lang="ja-JP">
+                          <a:solidFill>
+                            <a:srgbClr val="303437"/>
+                          </a:solidFill>
+                          <a:latin typeface="Noto Sans"/>
+                          <a:ea typeface="Noto Sans CJK JP"/>
+                          <a:cs typeface="Noto Sans"/>
+                        </a:rPr>
+                        <a:t>歴史・文化・政治</a:t>
+                      </a:r>
+                    </a:p>
+                  </a:txBody>
+                  <a:tcPr marL="63500" marR="63500" marT="25400" marB="25400" anchor="ctr">
+                    <a:lnL w="10160">
+                      <a:noFill/>
+                    </a:lnL>
+                    <a:lnR w="10160">
+                      <a:noFill/>
+                    </a:lnR>
+                    <a:lnT w="10160">
+                      <a:noFill/>
+                    </a:lnT>
+                    <a:lnB w="10160">
+                      <a:noFill/>
+                    </a:lnB>
+                    <a:solidFill>
+                      <a:srgbClr val="FFFEF8"/>
+                    </a:solidFill>
+                  </a:tcPr>
+                </a:tc>
+                <a:tc>
+                  <a:txBody>
+                    <a:bodyPr wrap="square" lIns="0" rIns="0" tIns="0" bIns="0"/>
+                    <a:lstStyle/>
+                    <a:p>
+                      <a:pPr algn="r">
+                        <a:lnSpc>
+                          <a:spcPct val="100000"/>
+                        </a:lnSpc>
+                        <a:spcBef>
+                          <a:spcPts val="0"/>
+                        </a:spcBef>
+                        <a:spcAft>
+                          <a:spcPts val="0"/>
+                        </a:spcAft>
+                        <a:buNone/>
+                      </a:pPr>
+                      <a:r>
+                        <a:rPr sz="2000" b="0" lang="ja-JP">
+                          <a:solidFill>
+                            <a:srgbClr val="303437"/>
+                          </a:solidFill>
+                          <a:latin typeface="Noto Sans"/>
+                          <a:ea typeface="Noto Sans CJK JP"/>
+                          <a:cs typeface="Noto Sans"/>
+                        </a:rPr>
+                        <a:t>+2.2</a:t>
+                      </a:r>
+                    </a:p>
+                  </a:txBody>
+                  <a:tcPr marL="63500" marR="63500" marT="25400" marB="25400" anchor="ctr">
+                    <a:lnL w="10160">
+                      <a:noFill/>
+                    </a:lnL>
+                    <a:lnR w="10160">
+                      <a:noFill/>
+                    </a:lnR>
+                    <a:lnT w="10160">
+                      <a:noFill/>
+                    </a:lnT>
+                    <a:lnB w="10160">
+                      <a:noFill/>
+                    </a:lnB>
+                    <a:solidFill>
+                      <a:srgbClr val="FFFEF8"/>
+                    </a:solidFill>
+                  </a:tcPr>
+                </a:tc>
+              </a:tr>
+              <a:tr h="431800">
+                <a:tc>
+                  <a:txBody>
+                    <a:bodyPr wrap="square" lIns="0" rIns="0" tIns="0" bIns="0"/>
+                    <a:lstStyle/>
+                    <a:p>
+                      <a:pPr algn="l">
+                        <a:lnSpc>
+                          <a:spcPct val="100000"/>
+                        </a:lnSpc>
+                        <a:spcBef>
+                          <a:spcPts val="0"/>
+                        </a:spcBef>
+                        <a:spcAft>
+                          <a:spcPts val="0"/>
+                        </a:spcAft>
+                        <a:buNone/>
+                      </a:pPr>
+                      <a:r>
+                        <a:rPr sz="2000" b="0" lang="ja-JP">
+                          <a:solidFill>
+                            <a:srgbClr val="303437"/>
+                          </a:solidFill>
+                          <a:latin typeface="Noto Sans"/>
+                          <a:ea typeface="Noto Sans CJK JP"/>
+                          <a:cs typeface="Noto Sans"/>
+                        </a:rPr>
+                        <a:t>健康・医学・生物学</a:t>
+                      </a:r>
+                    </a:p>
+                  </a:txBody>
+                  <a:tcPr marL="63500" marR="63500" marT="25400" marB="25400" anchor="ctr">
+                    <a:lnL w="10160">
+                      <a:noFill/>
+                    </a:lnL>
+                    <a:lnR w="10160">
+                      <a:noFill/>
+                    </a:lnR>
+                    <a:lnT w="10160">
+                      <a:noFill/>
+                    </a:lnT>
+                    <a:lnB w="10160">
+                      <a:noFill/>
+                    </a:lnB>
+                    <a:solidFill>
+                      <a:srgbClr val="FFFEF8"/>
+                    </a:solidFill>
+                  </a:tcPr>
+                </a:tc>
+                <a:tc>
+                  <a:txBody>
+                    <a:bodyPr wrap="square" lIns="0" rIns="0" tIns="0" bIns="0"/>
+                    <a:lstStyle/>
+                    <a:p>
+                      <a:pPr algn="r">
+                        <a:lnSpc>
+                          <a:spcPct val="100000"/>
+                        </a:lnSpc>
+                        <a:spcBef>
+                          <a:spcPts val="0"/>
+                        </a:spcBef>
+                        <a:spcAft>
+                          <a:spcPts val="0"/>
+                        </a:spcAft>
+                        <a:buNone/>
+                      </a:pPr>
+                      <a:r>
+                        <a:rPr sz="2000" b="0" lang="ja-JP">
+                          <a:solidFill>
+                            <a:srgbClr val="303437"/>
+                          </a:solidFill>
+                          <a:latin typeface="Noto Sans"/>
+                          <a:ea typeface="Noto Sans CJK JP"/>
+                          <a:cs typeface="Noto Sans"/>
+                        </a:rPr>
+                        <a:t>+1.8</a:t>
+                      </a:r>
+                    </a:p>
+                  </a:txBody>
+                  <a:tcPr marL="63500" marR="63500" marT="25400" marB="25400" anchor="ctr">
+                    <a:lnL w="10160">
+                      <a:noFill/>
+                    </a:lnL>
+                    <a:lnR w="10160">
+                      <a:noFill/>
+                    </a:lnR>
+                    <a:lnT w="10160">
+                      <a:noFill/>
+                    </a:lnT>
+                    <a:lnB w="10160">
+                      <a:noFill/>
+                    </a:lnB>
+                    <a:solidFill>
+                      <a:srgbClr val="FFFEF8"/>
+                    </a:solidFill>
+                  </a:tcPr>
+                </a:tc>
+              </a:tr>
+              <a:tr h="431800">
+                <a:tc>
+                  <a:txBody>
+                    <a:bodyPr wrap="square" lIns="0" rIns="0" tIns="0" bIns="0"/>
+                    <a:lstStyle/>
+                    <a:p>
+                      <a:pPr algn="l">
+                        <a:lnSpc>
+                          <a:spcPct val="100000"/>
+                        </a:lnSpc>
+                        <a:spcBef>
+                          <a:spcPts val="0"/>
+                        </a:spcBef>
+                        <a:spcAft>
+                          <a:spcPts val="0"/>
+                        </a:spcAft>
+                        <a:buNone/>
+                      </a:pPr>
+                      <a:r>
+                        <a:rPr sz="2000" b="0" lang="ja-JP">
+                          <a:solidFill>
+                            <a:srgbClr val="303437"/>
+                          </a:solidFill>
+                          <a:latin typeface="Noto Sans"/>
+                          <a:ea typeface="Noto Sans CJK JP"/>
+                          <a:cs typeface="Noto Sans"/>
+                        </a:rPr>
+                        <a:t>エネルギー・環境・気候</a:t>
+                      </a:r>
+                    </a:p>
+                  </a:txBody>
+                  <a:tcPr marL="63500" marR="63500" marT="25400" marB="25400" anchor="ctr">
+                    <a:lnL w="10160">
+                      <a:noFill/>
+                    </a:lnL>
+                    <a:lnR w="10160">
+                      <a:noFill/>
+                    </a:lnR>
+                    <a:lnT w="10160">
+                      <a:noFill/>
+                    </a:lnT>
+                    <a:lnB w="10160">
+                      <a:noFill/>
+                    </a:lnB>
+                    <a:solidFill>
+                      <a:srgbClr val="FFFEF8"/>
+                    </a:solidFill>
+                  </a:tcPr>
+                </a:tc>
+                <a:tc>
+                  <a:txBody>
+                    <a:bodyPr wrap="square" lIns="0" rIns="0" tIns="0" bIns="0"/>
+                    <a:lstStyle/>
+                    <a:p>
+                      <a:pPr algn="r">
+                        <a:lnSpc>
+                          <a:spcPct val="100000"/>
+                        </a:lnSpc>
+                        <a:spcBef>
+                          <a:spcPts val="0"/>
+                        </a:spcBef>
+                        <a:spcAft>
+                          <a:spcPts val="0"/>
+                        </a:spcAft>
+                        <a:buNone/>
+                      </a:pPr>
+                      <a:r>
+                        <a:rPr sz="2000" b="0" lang="ja-JP">
+                          <a:solidFill>
+                            <a:srgbClr val="303437"/>
+                          </a:solidFill>
+                          <a:latin typeface="Noto Sans"/>
+                          <a:ea typeface="Noto Sans CJK JP"/>
+                          <a:cs typeface="Noto Sans"/>
+                        </a:rPr>
+                        <a:t>+1.2</a:t>
+                      </a:r>
+                    </a:p>
+                  </a:txBody>
+                  <a:tcPr marL="63500" marR="63500" marT="25400" marB="25400" anchor="ctr">
+                    <a:lnL w="10160">
+                      <a:noFill/>
+                    </a:lnL>
+                    <a:lnR w="10160">
+                      <a:noFill/>
+                    </a:lnR>
+                    <a:lnT w="10160">
+                      <a:noFill/>
+                    </a:lnT>
+                    <a:lnB w="10160">
+                      <a:noFill/>
+                    </a:lnB>
+                    <a:solidFill>
+                      <a:srgbClr val="FFFEF8"/>
+                    </a:solidFill>
+                  </a:tcPr>
+                </a:tc>
+              </a:tr>
+              <a:tr h="431800">
+                <a:tc>
+                  <a:txBody>
+                    <a:bodyPr wrap="square" lIns="0" rIns="0" tIns="0" bIns="0"/>
+                    <a:lstStyle/>
+                    <a:p>
+                      <a:pPr algn="l">
+                        <a:lnSpc>
+                          <a:spcPct val="100000"/>
+                        </a:lnSpc>
+                        <a:spcBef>
+                          <a:spcPts val="0"/>
+                        </a:spcBef>
+                        <a:spcAft>
+                          <a:spcPts val="0"/>
+                        </a:spcAft>
+                        <a:buNone/>
+                      </a:pPr>
+                      <a:r>
+                        <a:rPr sz="2000" b="0" lang="ja-JP">
+                          <a:solidFill>
+                            <a:srgbClr val="303437"/>
+                          </a:solidFill>
+                          <a:latin typeface="Noto Sans"/>
+                          <a:ea typeface="Noto Sans CJK JP"/>
+                          <a:cs typeface="Noto Sans"/>
+                        </a:rPr>
+                        <a:t>水・環境・保全</a:t>
+                      </a:r>
+                    </a:p>
+                  </a:txBody>
+                  <a:tcPr marL="63500" marR="63500" marT="25400" marB="25400" anchor="ctr">
+                    <a:lnL w="10160">
+                      <a:noFill/>
+                    </a:lnL>
+                    <a:lnR w="10160">
+                      <a:noFill/>
+                    </a:lnR>
+                    <a:lnT w="10160">
+                      <a:noFill/>
+                    </a:lnT>
+                    <a:lnB w="10160">
+                      <a:noFill/>
+                    </a:lnB>
+                    <a:solidFill>
+                      <a:srgbClr val="FFFEF8"/>
+                    </a:solidFill>
+                  </a:tcPr>
+                </a:tc>
+                <a:tc>
+                  <a:txBody>
+                    <a:bodyPr wrap="square" lIns="0" rIns="0" tIns="0" bIns="0"/>
+                    <a:lstStyle/>
+                    <a:p>
+                      <a:pPr algn="r">
+                        <a:lnSpc>
+                          <a:spcPct val="100000"/>
+                        </a:lnSpc>
+                        <a:spcBef>
+                          <a:spcPts val="0"/>
+                        </a:spcBef>
+                        <a:spcAft>
+                          <a:spcPts val="0"/>
+                        </a:spcAft>
+                        <a:buNone/>
+                      </a:pPr>
+                      <a:r>
+                        <a:rPr sz="2000" b="0" lang="ja-JP">
+                          <a:solidFill>
+                            <a:srgbClr val="303437"/>
+                          </a:solidFill>
+                          <a:latin typeface="Noto Sans"/>
+                          <a:ea typeface="Noto Sans CJK JP"/>
+                          <a:cs typeface="Noto Sans"/>
+                        </a:rPr>
+                        <a:t>+1.2</a:t>
+                      </a:r>
+                    </a:p>
+                  </a:txBody>
+                  <a:tcPr marL="63500" marR="63500" marT="25400" marB="25400" anchor="ctr">
+                    <a:lnL w="10160">
+                      <a:noFill/>
+                    </a:lnL>
+                    <a:lnR w="10160">
+                      <a:noFill/>
+                    </a:lnR>
+                    <a:lnT w="10160">
+                      <a:noFill/>
+                    </a:lnT>
+                    <a:lnB w="10160">
+                      <a:noFill/>
+                    </a:lnB>
+                    <a:solidFill>
+                      <a:srgbClr val="FFFEF8"/>
+                    </a:solidFill>
+                  </a:tcPr>
+                </a:tc>
+              </a:tr>
+              <a:tr h="431800">
+                <a:tc>
+                  <a:txBody>
+                    <a:bodyPr wrap="square" lIns="0" rIns="0" tIns="0" bIns="0"/>
+                    <a:lstStyle/>
+                    <a:p>
+                      <a:pPr algn="l">
+                        <a:lnSpc>
+                          <a:spcPct val="100000"/>
+                        </a:lnSpc>
+                        <a:spcBef>
+                          <a:spcPts val="0"/>
+                        </a:spcBef>
+                        <a:spcAft>
+                          <a:spcPts val="0"/>
+                        </a:spcAft>
+                        <a:buNone/>
+                      </a:pPr>
+                      <a:r>
+                        <a:rPr sz="2000" b="0" lang="ja-JP">
+                          <a:solidFill>
+                            <a:srgbClr val="303437"/>
+                          </a:solidFill>
+                          <a:latin typeface="Noto Sans"/>
+                          <a:ea typeface="Noto Sans CJK JP"/>
+                          <a:cs typeface="Noto Sans"/>
+                        </a:rPr>
+                        <a:t>歴史・王族・哲学</a:t>
+                      </a:r>
+                    </a:p>
+                  </a:txBody>
+                  <a:tcPr marL="63500" marR="63500" marT="25400" marB="25400" anchor="ctr">
+                    <a:lnL w="10160">
+                      <a:noFill/>
+                    </a:lnL>
+                    <a:lnR w="10160">
+                      <a:noFill/>
+                    </a:lnR>
+                    <a:lnT w="10160">
+                      <a:noFill/>
+                    </a:lnT>
+                    <a:lnB w="10160">
+                      <a:solidFill>
+                        <a:srgbClr val="626669"/>
+                      </a:solidFill>
+                    </a:lnB>
+                    <a:solidFill>
+                      <a:srgbClr val="FFFEF8"/>
+                    </a:solidFill>
+                  </a:tcPr>
+                </a:tc>
+                <a:tc>
+                  <a:txBody>
+                    <a:bodyPr wrap="square" lIns="0" rIns="0" tIns="0" bIns="0"/>
+                    <a:lstStyle/>
+                    <a:p>
+                      <a:pPr algn="r">
+                        <a:lnSpc>
+                          <a:spcPct val="100000"/>
+                        </a:lnSpc>
+                        <a:spcBef>
+                          <a:spcPts val="0"/>
+                        </a:spcBef>
+                        <a:spcAft>
+                          <a:spcPts val="0"/>
+                        </a:spcAft>
+                        <a:buNone/>
+                      </a:pPr>
+                      <a:r>
+                        <a:rPr sz="2000" b="0" lang="ja-JP">
+                          <a:solidFill>
+                            <a:srgbClr val="303437"/>
+                          </a:solidFill>
+                          <a:latin typeface="Noto Sans"/>
+                          <a:ea typeface="Noto Sans CJK JP"/>
+                          <a:cs typeface="Noto Sans"/>
+                        </a:rPr>
+                        <a:t>+1.2</a:t>
+                      </a:r>
+                    </a:p>
+                  </a:txBody>
+                  <a:tcPr marL="63500" marR="63500" marT="25400" marB="25400" anchor="ctr">
+                    <a:lnL w="10160">
+                      <a:noFill/>
+                    </a:lnL>
+                    <a:lnR w="10160">
+                      <a:noFill/>
+                    </a:lnR>
+                    <a:lnT w="10160">
+                      <a:noFill/>
+                    </a:lnT>
+                    <a:lnB w="10160">
+                      <a:solidFill>
+                        <a:srgbClr val="626669"/>
+                      </a:solidFill>
+                    </a:lnB>
+                    <a:solidFill>
+                      <a:srgbClr val="FFFEF8"/>
+                    </a:solidFill>
+                  </a:tcPr>
+                </a:tc>
+              </a:tr>
+            </a:tbl>
+          </a:graphicData>
+        </a:graphic>
+      </p:graphicFrame>
+      <p:sp>
+        <p:nvSpPr>
+          <p:cNvPr id="5" name="TextBox 4"/>
+          <p:cNvSpPr txBox="1"/>
+          <p:nvPr/>
+        </p:nvSpPr>
+        <p:spPr>
+          <a:xfrm>
+            <a:off x="548640" y="4495800"/>
+            <a:ext cx="8046720" cy="165100"/>
+          </a:xfrm>
+          <a:prstGeom prst="rect">
+            <a:avLst/>
+          </a:prstGeom>
+          <a:noFill/>
+        </p:spPr>
+        <p:txBody>
+          <a:bodyPr wrap="square" lIns="0" rIns="0" tIns="0" bIns="0">
+            <a:spAutoFit/>
+          </a:bodyPr>
+          <a:lstStyle/>
+          <a:p>
+            <a:pPr>
+              <a:lnSpc>
+                <a:spcPct val="100000"/>
+              </a:lnSpc>
+              <a:spcBef>
+                <a:spcPts val="0"/>
+              </a:spcBef>
+              <a:spcAft>
+                <a:spcPts val="0"/>
+              </a:spcAft>
+              <a:buNone/>
+            </a:pPr>
+            <a:r>
+              <a:rPr sz="800" b="0" lang="ja-JP">
+                <a:solidFill>
+                  <a:srgbClr val="626669"/>
+                </a:solidFill>
+                <a:latin typeface="Noto Sans"/>
+                <a:ea typeface="Noto Sans CJK JP"/>
+                <a:cs typeface="Noto Sans"/>
+              </a:rPr>
+              <a:t>各5万文書。差＝FineWeb-Edu − FineWeb。絶対差0.5ポイント以上の39分類から6分類 [1]。</a:t>
+            </a:r>
+          </a:p>
+        </p:txBody>
+      </p:sp>
+      <p:sp>
+        <p:nvSpPr>
+          <p:cNvPr id="6" name="TextBox 5"/>
+          <p:cNvSpPr txBox="1"/>
+          <p:nvPr/>
+        </p:nvSpPr>
+        <p:spPr>
+          <a:xfrm>
+            <a:off x="548640" y="4686300"/>
+            <a:ext cx="8046720" cy="177800"/>
+          </a:xfrm>
+          <a:prstGeom prst="rect">
+            <a:avLst/>
+          </a:prstGeom>
+          <a:noFill/>
+        </p:spPr>
+        <p:txBody>
+          <a:bodyPr wrap="square" lIns="0" rIns="0" tIns="0" bIns="0">
+            <a:spAutoFit/>
+          </a:bodyPr>
+          <a:lstStyle/>
+          <a:p>
+            <a:pPr>
+              <a:lnSpc>
+                <a:spcPct val="100000"/>
+              </a:lnSpc>
+              <a:spcBef>
+                <a:spcPts val="0"/>
+              </a:spcBef>
+              <a:spcAft>
+                <a:spcPts val="0"/>
+              </a:spcAft>
+              <a:buNone/>
+            </a:pPr>
+            <a:r>
+              <a:rPr sz="800" b="0" lang="ja-JP">
+                <a:solidFill>
+                  <a:srgbClr val="626669"/>
+                </a:solidFill>
+                <a:latin typeface="Noto Sans"/>
+                <a:ea typeface="Noto Sans CJK JP"/>
+                <a:cs typeface="Noto Sans"/>
+              </a:rPr>
+              <a:t>[1] Penedo et al. (2024). The FineWeb Datasets: Decanting the Web for the Finest Text Data at Scale. NeurIPS. §4.1, Fig. 18.</a:t>
+            </a:r>
+          </a:p>
+        </p:txBody>
+      </p:sp>
+      <p:sp>
+        <p:nvSpPr>
+          <p:cNvPr id="7" name="TextBox 6"/>
+          <p:cNvSpPr txBox="1"/>
+          <p:nvPr/>
+        </p:nvSpPr>
+        <p:spPr>
+          <a:xfrm>
+            <a:off x="6373995" y="4686300"/>
+            <a:ext cx="2221364" cy="177800"/>
+          </a:xfrm>
+          <a:prstGeom prst="rect">
+            <a:avLst/>
+          </a:prstGeom>
+          <a:noFill/>
+        </p:spPr>
+        <p:txBody>
+          <a:bodyPr wrap="none" lIns="0" rIns="0" tIns="0" bIns="0">
+            <a:spAutoFit/>
+          </a:bodyPr>
+          <a:lstStyle/>
+          <a:p>
+            <a:pPr>
+              <a:lnSpc>
+                <a:spcPct val="100000"/>
+              </a:lnSpc>
+              <a:spcBef>
+                <a:spcPts val="0"/>
+              </a:spcBef>
+              <a:spcAft>
+                <a:spcPts val="0"/>
+              </a:spcAft>
+              <a:buNone/>
+            </a:pPr>
+            <a:r>
+              <a:rPr sz="800" b="0" lang="ja-JP">
+                <a:solidFill>
+                  <a:srgbClr val="626669"/>
+                </a:solidFill>
+                <a:latin typeface="Noto Sans"/>
+                <a:ea typeface="Noto Sans CJK JP"/>
+                <a:cs typeface="Noto Sans"/>
+                <a:hlinkClick r:id="rId2"/>
+              </a:rPr>
+              <a:t>https://arxiv.org/abs/2406.17557v2</a:t>
+            </a:r>
+          </a:p>
+        </p:txBody>
+      </p:sp>
+    </p:spTree>
+  </p:cSld>
+  <p:clrMapOvr>
+    <a:masterClrMapping/>
+  </p:clrMapOvr>
+</p:sld>
+</file>
+
+<file path=ppt/slides/slide81.xml><?xml version="1.0" encoding="utf-8"?>
+<p:sld xmlns:a="http://schemas.openxmlformats.org/drawingml/2006/main" xmlns:p="http://schemas.openxmlformats.org/presentationml/2006/main" xmlns:r="http://schemas.openxmlformats.org/officeDocument/2006/relationships">
+  <p:cSld>
+    <p:spTree>
+      <p:nvGrpSpPr>
+        <p:cNvPr id="1" name=""/>
+        <p:cNvGrpSpPr/>
+        <p:nvPr/>
+      </p:nvGrpSpPr>
+      <p:grpSpPr/>
+      <p:sp>
+        <p:nvSpPr>
+          <p:cNvPr id="2" name="Title 1"/>
+          <p:cNvSpPr>
+            <a:spLocks noGrp="1"/>
+          </p:cNvSpPr>
+          <p:nvPr>
+            <p:ph type="title"/>
+          </p:nvPr>
+        </p:nvSpPr>
+        <p:spPr>
+          <a:xfrm>
+            <a:off x="468172" y="650138"/>
+            <a:ext cx="8206740" cy="616305"/>
+          </a:xfrm>
+        </p:spPr>
+        <p:txBody>
+          <a:bodyPr wrap="square" lIns="0" rIns="0" tIns="0" bIns="0"/>
+          <a:lstStyle/>
+          <a:p>
+            <a:pPr>
+              <a:lnSpc>
+                <a:spcPct val="100000"/>
+              </a:lnSpc>
+              <a:spcBef>
+                <a:spcPts val="0"/>
+              </a:spcBef>
+              <a:spcAft>
+                <a:spcPts val="0"/>
+              </a:spcAft>
+              <a:buNone/>
+            </a:pPr>
+            <a:r>
+              <a:rPr sz="2800" b="1" lang="ja-JP">
+                <a:solidFill>
+                  <a:srgbClr val="303437"/>
+                </a:solidFill>
+                <a:latin typeface="Noto Sans"/>
+                <a:ea typeface="Noto Sans CJK JP"/>
+                <a:cs typeface="Noto Sans"/>
+              </a:rPr>
+              <a:t>FineWeb-Edu側で多い話題（2/3）</a:t>
+            </a:r>
+          </a:p>
+        </p:txBody>
+      </p:sp>
+      <p:sp>
+        <p:nvSpPr>
+          <p:cNvPr id="3" name="Title 2"/>
+          <p:cNvSpPr>
+            <a:spLocks noGrp="1"/>
+          </p:cNvSpPr>
+          <p:nvPr>
+            <p:ph type="title" idx="2"/>
+          </p:nvPr>
+        </p:nvSpPr>
+        <p:spPr>
+          <a:xfrm>
+            <a:off x="75895" y="0"/>
+            <a:ext cx="8115300" cy="480059"/>
+          </a:xfrm>
+        </p:spPr>
+        <p:txBody>
+          <a:bodyPr wrap="square" lIns="0" rIns="0" tIns="0" bIns="0" anchor="ctr"/>
+          <a:lstStyle/>
+          <a:p>
+            <a:pPr>
+              <a:lnSpc>
+                <a:spcPct val="100000"/>
+              </a:lnSpc>
+              <a:spcBef>
+                <a:spcPts val="0"/>
+              </a:spcBef>
+              <a:spcAft>
+                <a:spcPts val="0"/>
+              </a:spcAft>
+              <a:buNone/>
+            </a:pPr>
+            <a:r>
+              <a:rPr sz="1400" b="1" lang="ja-JP">
+                <a:solidFill>
+                  <a:srgbClr val="FFFEF8"/>
+                </a:solidFill>
+                <a:latin typeface="Noto Sans"/>
+                <a:ea typeface="Noto Sans CJK JP"/>
+                <a:cs typeface="Noto Sans"/>
+              </a:rPr>
+              <a:t>Appendix 3. 文書選別・話題分布と評価実験の詳細</a:t>
+            </a:r>
+          </a:p>
+        </p:txBody>
+      </p:sp>
+      <p:graphicFrame>
+        <p:nvGraphicFramePr>
+          <p:cNvPr id="4" name="Table 3"/>
+          <p:cNvGraphicFramePr>
+            <a:graphicFrameLocks noGrp="1"/>
+          </p:cNvGraphicFramePr>
+          <p:nvPr/>
+        </p:nvGraphicFramePr>
+        <p:xfrm>
+          <a:off x="548640" y="1371600"/>
+          <a:ext cx="8046720" cy="3022600"/>
+        </p:xfrm>
+        <a:graphic>
+          <a:graphicData uri="http://schemas.openxmlformats.org/drawingml/2006/table">
+            <a:tbl>
+              <a:tblPr firstRow="1" bandRow="1"/>
+              <a:tblGrid>
+                <a:gridCol w="5887720"/>
+                <a:gridCol w="2159000"/>
+              </a:tblGrid>
+              <a:tr h="431800">
+                <a:tc>
+                  <a:txBody>
+                    <a:bodyPr wrap="square" lIns="0" rIns="0" tIns="0" bIns="0"/>
+                    <a:lstStyle/>
+                    <a:p>
+                      <a:pPr algn="l">
+                        <a:lnSpc>
+                          <a:spcPct val="100000"/>
+                        </a:lnSpc>
+                        <a:spcBef>
+                          <a:spcPts val="0"/>
+                        </a:spcBef>
+                        <a:spcAft>
+                          <a:spcPts val="0"/>
+                        </a:spcAft>
+                        <a:buNone/>
+                      </a:pPr>
+                      <a:r>
+                        <a:rPr sz="2000" b="0" lang="ja-JP">
+                          <a:solidFill>
+                            <a:srgbClr val="303437"/>
+                          </a:solidFill>
+                          <a:latin typeface="Noto Sans"/>
+                          <a:ea typeface="Noto Sans CJK JP"/>
+                          <a:cs typeface="Noto Sans"/>
+                        </a:rPr>
+                        <a:t>話題（原著ラベルの和訳）</a:t>
+                      </a:r>
+                    </a:p>
+                  </a:txBody>
+                  <a:tcPr marL="63500" marR="63500" marT="25400" marB="25400" anchor="ctr">
+                    <a:lnL w="10160">
+                      <a:noFill/>
+                    </a:lnL>
+                    <a:lnR w="10160">
+                      <a:noFill/>
+                    </a:lnR>
+                    <a:lnT w="10160">
+                      <a:solidFill>
+                        <a:srgbClr val="626669"/>
+                      </a:solidFill>
+                    </a:lnT>
+                    <a:lnB w="10160">
+                      <a:solidFill>
+                        <a:srgbClr val="626669"/>
+                      </a:solidFill>
+                    </a:lnB>
+                    <a:solidFill>
+                      <a:srgbClr val="FFFEF8"/>
+                    </a:solidFill>
+                  </a:tcPr>
+                </a:tc>
+                <a:tc>
+                  <a:txBody>
+                    <a:bodyPr wrap="square" lIns="0" rIns="0" tIns="0" bIns="0"/>
+                    <a:lstStyle/>
+                    <a:p>
+                      <a:pPr algn="r">
+                        <a:lnSpc>
+                          <a:spcPct val="100000"/>
+                        </a:lnSpc>
+                        <a:spcBef>
+                          <a:spcPts val="0"/>
+                        </a:spcBef>
+                        <a:spcAft>
+                          <a:spcPts val="0"/>
+                        </a:spcAft>
+                        <a:buNone/>
+                      </a:pPr>
+                      <a:r>
+                        <a:rPr sz="2000" b="0" lang="ja-JP">
+                          <a:solidFill>
+                            <a:srgbClr val="303437"/>
+                          </a:solidFill>
+                          <a:latin typeface="Noto Sans"/>
+                          <a:ea typeface="Noto Sans CJK JP"/>
+                          <a:cs typeface="Noto Sans"/>
+                        </a:rPr>
+                        <a:t>差（ポイント）</a:t>
+                      </a:r>
+                    </a:p>
+                  </a:txBody>
+                  <a:tcPr marL="63500" marR="63500" marT="25400" marB="25400" anchor="ctr">
+                    <a:lnL w="10160">
+                      <a:noFill/>
+                    </a:lnL>
+                    <a:lnR w="10160">
+                      <a:noFill/>
+                    </a:lnR>
+                    <a:lnT w="10160">
+                      <a:solidFill>
+                        <a:srgbClr val="626669"/>
+                      </a:solidFill>
+                    </a:lnT>
+                    <a:lnB w="10160">
+                      <a:solidFill>
+                        <a:srgbClr val="626669"/>
+                      </a:solidFill>
+                    </a:lnB>
+                    <a:solidFill>
+                      <a:srgbClr val="FFFEF8"/>
+                    </a:solidFill>
+                  </a:tcPr>
+                </a:tc>
+              </a:tr>
+              <a:tr h="431800">
+                <a:tc>
+                  <a:txBody>
+                    <a:bodyPr wrap="square" lIns="0" rIns="0" tIns="0" bIns="0"/>
+                    <a:lstStyle/>
+                    <a:p>
+                      <a:pPr algn="l">
+                        <a:lnSpc>
+                          <a:spcPct val="100000"/>
+                        </a:lnSpc>
+                        <a:spcBef>
+                          <a:spcPts val="0"/>
+                        </a:spcBef>
+                        <a:spcAft>
+                          <a:spcPts val="0"/>
+                        </a:spcAft>
+                        <a:buNone/>
+                      </a:pPr>
+                      <a:r>
+                        <a:rPr sz="2000" b="0" lang="ja-JP">
+                          <a:solidFill>
+                            <a:srgbClr val="303437"/>
+                          </a:solidFill>
+                          <a:latin typeface="Noto Sans"/>
+                          <a:ea typeface="Noto Sans CJK JP"/>
+                          <a:cs typeface="Noto Sans"/>
+                        </a:rPr>
+                        <a:t>野生生物・動物・自然</a:t>
+                      </a:r>
+                    </a:p>
+                  </a:txBody>
+                  <a:tcPr marL="63500" marR="63500" marT="25400" marB="25400" anchor="ctr">
+                    <a:lnL w="10160">
+                      <a:noFill/>
+                    </a:lnL>
+                    <a:lnR w="10160">
+                      <a:noFill/>
+                    </a:lnR>
+                    <a:lnT w="10160">
+                      <a:solidFill>
+                        <a:srgbClr val="626669"/>
+                      </a:solidFill>
+                    </a:lnT>
+                    <a:lnB w="10160">
+                      <a:noFill/>
+                    </a:lnB>
+                    <a:solidFill>
+                      <a:srgbClr val="FFFEF8"/>
+                    </a:solidFill>
+                  </a:tcPr>
+                </a:tc>
+                <a:tc>
+                  <a:txBody>
+                    <a:bodyPr wrap="square" lIns="0" rIns="0" tIns="0" bIns="0"/>
+                    <a:lstStyle/>
+                    <a:p>
+                      <a:pPr algn="r">
+                        <a:lnSpc>
+                          <a:spcPct val="100000"/>
+                        </a:lnSpc>
+                        <a:spcBef>
+                          <a:spcPts val="0"/>
+                        </a:spcBef>
+                        <a:spcAft>
+                          <a:spcPts val="0"/>
+                        </a:spcAft>
+                        <a:buNone/>
+                      </a:pPr>
+                      <a:r>
+                        <a:rPr sz="2000" b="0" lang="ja-JP">
+                          <a:solidFill>
+                            <a:srgbClr val="303437"/>
+                          </a:solidFill>
+                          <a:latin typeface="Noto Sans"/>
+                          <a:ea typeface="Noto Sans CJK JP"/>
+                          <a:cs typeface="Noto Sans"/>
+                        </a:rPr>
+                        <a:t>+1.2</a:t>
+                      </a:r>
+                    </a:p>
+                  </a:txBody>
+                  <a:tcPr marL="63500" marR="63500" marT="25400" marB="25400" anchor="ctr">
+                    <a:lnL w="10160">
+                      <a:noFill/>
+                    </a:lnL>
+                    <a:lnR w="10160">
+                      <a:noFill/>
+                    </a:lnR>
+                    <a:lnT w="10160">
+                      <a:solidFill>
+                        <a:srgbClr val="626669"/>
+                      </a:solidFill>
+                    </a:lnT>
+                    <a:lnB w="10160">
+                      <a:noFill/>
+                    </a:lnB>
+                    <a:solidFill>
+                      <a:srgbClr val="FFFEF8"/>
+                    </a:solidFill>
+                  </a:tcPr>
+                </a:tc>
+              </a:tr>
+              <a:tr h="431800">
+                <a:tc>
+                  <a:txBody>
+                    <a:bodyPr wrap="square" lIns="0" rIns="0" tIns="0" bIns="0"/>
+                    <a:lstStyle/>
+                    <a:p>
+                      <a:pPr algn="l">
+                        <a:lnSpc>
+                          <a:spcPct val="100000"/>
+                        </a:lnSpc>
+                        <a:spcBef>
+                          <a:spcPts val="0"/>
+                        </a:spcBef>
+                        <a:spcAft>
+                          <a:spcPts val="0"/>
+                        </a:spcAft>
+                        <a:buNone/>
+                      </a:pPr>
+                      <a:r>
+                        <a:rPr sz="2000" b="0" lang="ja-JP">
+                          <a:solidFill>
+                            <a:srgbClr val="303437"/>
+                          </a:solidFill>
+                          <a:latin typeface="Noto Sans"/>
+                          <a:ea typeface="Noto Sans CJK JP"/>
+                          <a:cs typeface="Noto Sans"/>
+                        </a:rPr>
+                        <a:t>宇宙・天文学・科学</a:t>
+                      </a:r>
+                    </a:p>
+                  </a:txBody>
+                  <a:tcPr marL="63500" marR="63500" marT="25400" marB="25400" anchor="ctr">
+                    <a:lnL w="10160">
+                      <a:noFill/>
+                    </a:lnL>
+                    <a:lnR w="10160">
+                      <a:noFill/>
+                    </a:lnR>
+                    <a:lnT w="10160">
+                      <a:noFill/>
+                    </a:lnT>
+                    <a:lnB w="10160">
+                      <a:noFill/>
+                    </a:lnB>
+                    <a:solidFill>
+                      <a:srgbClr val="FFFEF8"/>
+                    </a:solidFill>
+                  </a:tcPr>
+                </a:tc>
+                <a:tc>
+                  <a:txBody>
+                    <a:bodyPr wrap="square" lIns="0" rIns="0" tIns="0" bIns="0"/>
+                    <a:lstStyle/>
+                    <a:p>
+                      <a:pPr algn="r">
+                        <a:lnSpc>
+                          <a:spcPct val="100000"/>
+                        </a:lnSpc>
+                        <a:spcBef>
+                          <a:spcPts val="0"/>
+                        </a:spcBef>
+                        <a:spcAft>
+                          <a:spcPts val="0"/>
+                        </a:spcAft>
+                        <a:buNone/>
+                      </a:pPr>
+                      <a:r>
+                        <a:rPr sz="2000" b="0" lang="ja-JP">
+                          <a:solidFill>
+                            <a:srgbClr val="303437"/>
+                          </a:solidFill>
+                          <a:latin typeface="Noto Sans"/>
+                          <a:ea typeface="Noto Sans CJK JP"/>
+                          <a:cs typeface="Noto Sans"/>
+                        </a:rPr>
+                        <a:t>+1.1</a:t>
+                      </a:r>
+                    </a:p>
+                  </a:txBody>
+                  <a:tcPr marL="63500" marR="63500" marT="25400" marB="25400" anchor="ctr">
+                    <a:lnL w="10160">
+                      <a:noFill/>
+                    </a:lnL>
+                    <a:lnR w="10160">
+                      <a:noFill/>
+                    </a:lnR>
+                    <a:lnT w="10160">
+                      <a:noFill/>
+                    </a:lnT>
+                    <a:lnB w="10160">
+                      <a:noFill/>
+                    </a:lnB>
+                    <a:solidFill>
+                      <a:srgbClr val="FFFEF8"/>
+                    </a:solidFill>
+                  </a:tcPr>
+                </a:tc>
+              </a:tr>
+              <a:tr h="431800">
+                <a:tc>
+                  <a:txBody>
+                    <a:bodyPr wrap="square" lIns="0" rIns="0" tIns="0" bIns="0"/>
+                    <a:lstStyle/>
+                    <a:p>
+                      <a:pPr algn="l">
+                        <a:lnSpc>
+                          <a:spcPct val="100000"/>
+                        </a:lnSpc>
+                        <a:spcBef>
+                          <a:spcPts val="0"/>
+                        </a:spcBef>
+                        <a:spcAft>
+                          <a:spcPts val="0"/>
+                        </a:spcAft>
+                        <a:buNone/>
+                      </a:pPr>
+                      <a:r>
+                        <a:rPr sz="2000" b="0" lang="ja-JP">
+                          <a:solidFill>
+                            <a:srgbClr val="303437"/>
+                          </a:solidFill>
+                          <a:latin typeface="Noto Sans"/>
+                          <a:ea typeface="Noto Sans CJK JP"/>
+                          <a:cs typeface="Noto Sans"/>
+                        </a:rPr>
+                        <a:t>歴史・宗教・文化</a:t>
+                      </a:r>
+                    </a:p>
+                  </a:txBody>
+                  <a:tcPr marL="63500" marR="63500" marT="25400" marB="25400" anchor="ctr">
+                    <a:lnL w="10160">
+                      <a:noFill/>
+                    </a:lnL>
+                    <a:lnR w="10160">
+                      <a:noFill/>
+                    </a:lnR>
+                    <a:lnT w="10160">
+                      <a:noFill/>
+                    </a:lnT>
+                    <a:lnB w="10160">
+                      <a:noFill/>
+                    </a:lnB>
+                    <a:solidFill>
+                      <a:srgbClr val="FFFEF8"/>
+                    </a:solidFill>
+                  </a:tcPr>
+                </a:tc>
+                <a:tc>
+                  <a:txBody>
+                    <a:bodyPr wrap="square" lIns="0" rIns="0" tIns="0" bIns="0"/>
+                    <a:lstStyle/>
+                    <a:p>
+                      <a:pPr algn="r">
+                        <a:lnSpc>
+                          <a:spcPct val="100000"/>
+                        </a:lnSpc>
+                        <a:spcBef>
+                          <a:spcPts val="0"/>
+                        </a:spcBef>
+                        <a:spcAft>
+                          <a:spcPts val="0"/>
+                        </a:spcAft>
+                        <a:buNone/>
+                      </a:pPr>
+                      <a:r>
+                        <a:rPr sz="2000" b="0" lang="ja-JP">
+                          <a:solidFill>
+                            <a:srgbClr val="303437"/>
+                          </a:solidFill>
+                          <a:latin typeface="Noto Sans"/>
+                          <a:ea typeface="Noto Sans CJK JP"/>
+                          <a:cs typeface="Noto Sans"/>
+                        </a:rPr>
+                        <a:t>+1.0</a:t>
+                      </a:r>
+                    </a:p>
+                  </a:txBody>
+                  <a:tcPr marL="63500" marR="63500" marT="25400" marB="25400" anchor="ctr">
+                    <a:lnL w="10160">
+                      <a:noFill/>
+                    </a:lnL>
+                    <a:lnR w="10160">
+                      <a:noFill/>
+                    </a:lnR>
+                    <a:lnT w="10160">
+                      <a:noFill/>
+                    </a:lnT>
+                    <a:lnB w="10160">
+                      <a:noFill/>
+                    </a:lnB>
+                    <a:solidFill>
+                      <a:srgbClr val="FFFEF8"/>
+                    </a:solidFill>
+                  </a:tcPr>
+                </a:tc>
+              </a:tr>
+              <a:tr h="431800">
+                <a:tc>
+                  <a:txBody>
+                    <a:bodyPr wrap="square" lIns="0" rIns="0" tIns="0" bIns="0"/>
+                    <a:lstStyle/>
+                    <a:p>
+                      <a:pPr algn="l">
+                        <a:lnSpc>
+                          <a:spcPct val="100000"/>
+                        </a:lnSpc>
+                        <a:spcBef>
+                          <a:spcPts val="0"/>
+                        </a:spcBef>
+                        <a:spcAft>
+                          <a:spcPts val="0"/>
+                        </a:spcAft>
+                        <a:buNone/>
+                      </a:pPr>
+                      <a:r>
+                        <a:rPr sz="2000" b="0" lang="ja-JP">
+                          <a:solidFill>
+                            <a:srgbClr val="303437"/>
+                          </a:solidFill>
+                          <a:latin typeface="Noto Sans"/>
+                          <a:ea typeface="Noto Sans CJK JP"/>
+                          <a:cs typeface="Noto Sans"/>
+                        </a:rPr>
+                        <a:t>魚・環境・保全</a:t>
+                      </a:r>
+                    </a:p>
+                  </a:txBody>
+                  <a:tcPr marL="63500" marR="63500" marT="25400" marB="25400" anchor="ctr">
+                    <a:lnL w="10160">
+                      <a:noFill/>
+                    </a:lnL>
+                    <a:lnR w="10160">
+                      <a:noFill/>
+                    </a:lnR>
+                    <a:lnT w="10160">
+                      <a:noFill/>
+                    </a:lnT>
+                    <a:lnB w="10160">
+                      <a:noFill/>
+                    </a:lnB>
+                    <a:solidFill>
+                      <a:srgbClr val="FFFEF8"/>
+                    </a:solidFill>
+                  </a:tcPr>
+                </a:tc>
+                <a:tc>
+                  <a:txBody>
+                    <a:bodyPr wrap="square" lIns="0" rIns="0" tIns="0" bIns="0"/>
+                    <a:lstStyle/>
+                    <a:p>
+                      <a:pPr algn="r">
+                        <a:lnSpc>
+                          <a:spcPct val="100000"/>
+                        </a:lnSpc>
+                        <a:spcBef>
+                          <a:spcPts val="0"/>
+                        </a:spcBef>
+                        <a:spcAft>
+                          <a:spcPts val="0"/>
+                        </a:spcAft>
+                        <a:buNone/>
+                      </a:pPr>
+                      <a:r>
+                        <a:rPr sz="2000" b="0" lang="ja-JP">
+                          <a:solidFill>
+                            <a:srgbClr val="303437"/>
+                          </a:solidFill>
+                          <a:latin typeface="Noto Sans"/>
+                          <a:ea typeface="Noto Sans CJK JP"/>
+                          <a:cs typeface="Noto Sans"/>
+                        </a:rPr>
+                        <a:t>+0.9</a:t>
+                      </a:r>
+                    </a:p>
+                  </a:txBody>
+                  <a:tcPr marL="63500" marR="63500" marT="25400" marB="25400" anchor="ctr">
+                    <a:lnL w="10160">
+                      <a:noFill/>
+                    </a:lnL>
+                    <a:lnR w="10160">
+                      <a:noFill/>
+                    </a:lnR>
+                    <a:lnT w="10160">
+                      <a:noFill/>
+                    </a:lnT>
+                    <a:lnB w="10160">
+                      <a:noFill/>
+                    </a:lnB>
+                    <a:solidFill>
+                      <a:srgbClr val="FFFEF8"/>
+                    </a:solidFill>
+                  </a:tcPr>
+                </a:tc>
+              </a:tr>
+              <a:tr h="431800">
+                <a:tc>
+                  <a:txBody>
+                    <a:bodyPr wrap="square" lIns="0" rIns="0" tIns="0" bIns="0"/>
+                    <a:lstStyle/>
+                    <a:p>
+                      <a:pPr algn="l">
+                        <a:lnSpc>
+                          <a:spcPct val="100000"/>
+                        </a:lnSpc>
+                        <a:spcBef>
+                          <a:spcPts val="0"/>
+                        </a:spcBef>
+                        <a:spcAft>
+                          <a:spcPts val="0"/>
+                        </a:spcAft>
+                        <a:buNone/>
+                      </a:pPr>
+                      <a:r>
+                        <a:rPr sz="2000" b="0" lang="ja-JP">
+                          <a:solidFill>
+                            <a:srgbClr val="303437"/>
+                          </a:solidFill>
+                          <a:latin typeface="Noto Sans"/>
+                          <a:ea typeface="Noto Sans CJK JP"/>
+                          <a:cs typeface="Noto Sans"/>
+                        </a:rPr>
+                        <a:t>歴史・戦争・軍事</a:t>
+                      </a:r>
+                    </a:p>
+                  </a:txBody>
+                  <a:tcPr marL="63500" marR="63500" marT="25400" marB="25400" anchor="ctr">
+                    <a:lnL w="10160">
+                      <a:noFill/>
+                    </a:lnL>
+                    <a:lnR w="10160">
+                      <a:noFill/>
+                    </a:lnR>
+                    <a:lnT w="10160">
+                      <a:noFill/>
+                    </a:lnT>
+                    <a:lnB w="10160">
+                      <a:noFill/>
+                    </a:lnB>
+                    <a:solidFill>
+                      <a:srgbClr val="FFFEF8"/>
+                    </a:solidFill>
+                  </a:tcPr>
+                </a:tc>
+                <a:tc>
+                  <a:txBody>
+                    <a:bodyPr wrap="square" lIns="0" rIns="0" tIns="0" bIns="0"/>
+                    <a:lstStyle/>
+                    <a:p>
+                      <a:pPr algn="r">
+                        <a:lnSpc>
+                          <a:spcPct val="100000"/>
+                        </a:lnSpc>
+                        <a:spcBef>
+                          <a:spcPts val="0"/>
+                        </a:spcBef>
+                        <a:spcAft>
+                          <a:spcPts val="0"/>
+                        </a:spcAft>
+                        <a:buNone/>
+                      </a:pPr>
+                      <a:r>
+                        <a:rPr sz="2000" b="0" lang="ja-JP">
+                          <a:solidFill>
+                            <a:srgbClr val="303437"/>
+                          </a:solidFill>
+                          <a:latin typeface="Noto Sans"/>
+                          <a:ea typeface="Noto Sans CJK JP"/>
+                          <a:cs typeface="Noto Sans"/>
+                        </a:rPr>
+                        <a:t>+0.9</a:t>
+                      </a:r>
+                    </a:p>
+                  </a:txBody>
+                  <a:tcPr marL="63500" marR="63500" marT="25400" marB="25400" anchor="ctr">
+                    <a:lnL w="10160">
+                      <a:noFill/>
+                    </a:lnL>
+                    <a:lnR w="10160">
+                      <a:noFill/>
+                    </a:lnR>
+                    <a:lnT w="10160">
+                      <a:noFill/>
+                    </a:lnT>
+                    <a:lnB w="10160">
+                      <a:noFill/>
+                    </a:lnB>
+                    <a:solidFill>
+                      <a:srgbClr val="FFFEF8"/>
+                    </a:solidFill>
+                  </a:tcPr>
+                </a:tc>
+              </a:tr>
+              <a:tr h="431800">
+                <a:tc>
+                  <a:txBody>
+                    <a:bodyPr wrap="square" lIns="0" rIns="0" tIns="0" bIns="0"/>
+                    <a:lstStyle/>
+                    <a:p>
+                      <a:pPr algn="l">
+                        <a:lnSpc>
+                          <a:spcPct val="100000"/>
+                        </a:lnSpc>
+                        <a:spcBef>
+                          <a:spcPts val="0"/>
+                        </a:spcBef>
+                        <a:spcAft>
+                          <a:spcPts val="0"/>
+                        </a:spcAft>
+                        <a:buNone/>
+                      </a:pPr>
+                      <a:r>
+                        <a:rPr sz="2000" b="0" lang="ja-JP">
+                          <a:solidFill>
+                            <a:srgbClr val="303437"/>
+                          </a:solidFill>
+                          <a:latin typeface="Noto Sans"/>
+                          <a:ea typeface="Noto Sans CJK JP"/>
+                          <a:cs typeface="Noto Sans"/>
+                        </a:rPr>
+                        <a:t>天気・気候・科学</a:t>
+                      </a:r>
+                    </a:p>
+                  </a:txBody>
+                  <a:tcPr marL="63500" marR="63500" marT="25400" marB="25400" anchor="ctr">
+                    <a:lnL w="10160">
+                      <a:noFill/>
+                    </a:lnL>
+                    <a:lnR w="10160">
+                      <a:noFill/>
+                    </a:lnR>
+                    <a:lnT w="10160">
+                      <a:noFill/>
+                    </a:lnT>
+                    <a:lnB w="10160">
+                      <a:solidFill>
+                        <a:srgbClr val="626669"/>
+                      </a:solidFill>
+                    </a:lnB>
+                    <a:solidFill>
+                      <a:srgbClr val="FFFEF8"/>
+                    </a:solidFill>
+                  </a:tcPr>
+                </a:tc>
+                <a:tc>
+                  <a:txBody>
+                    <a:bodyPr wrap="square" lIns="0" rIns="0" tIns="0" bIns="0"/>
+                    <a:lstStyle/>
+                    <a:p>
+                      <a:pPr algn="r">
+                        <a:lnSpc>
+                          <a:spcPct val="100000"/>
+                        </a:lnSpc>
+                        <a:spcBef>
+                          <a:spcPts val="0"/>
+                        </a:spcBef>
+                        <a:spcAft>
+                          <a:spcPts val="0"/>
+                        </a:spcAft>
+                        <a:buNone/>
+                      </a:pPr>
+                      <a:r>
+                        <a:rPr sz="2000" b="0" lang="ja-JP">
+                          <a:solidFill>
+                            <a:srgbClr val="303437"/>
+                          </a:solidFill>
+                          <a:latin typeface="Noto Sans"/>
+                          <a:ea typeface="Noto Sans CJK JP"/>
+                          <a:cs typeface="Noto Sans"/>
+                        </a:rPr>
+                        <a:t>+0.8</a:t>
+                      </a:r>
+                    </a:p>
+                  </a:txBody>
+                  <a:tcPr marL="63500" marR="63500" marT="25400" marB="25400" anchor="ctr">
+                    <a:lnL w="10160">
+                      <a:noFill/>
+                    </a:lnL>
+                    <a:lnR w="10160">
+                      <a:noFill/>
+                    </a:lnR>
+                    <a:lnT w="10160">
+                      <a:noFill/>
+                    </a:lnT>
+                    <a:lnB w="10160">
+                      <a:solidFill>
+                        <a:srgbClr val="626669"/>
+                      </a:solidFill>
+                    </a:lnB>
+                    <a:solidFill>
+                      <a:srgbClr val="FFFEF8"/>
+                    </a:solidFill>
+                  </a:tcPr>
+                </a:tc>
+              </a:tr>
+            </a:tbl>
+          </a:graphicData>
+        </a:graphic>
+      </p:graphicFrame>
+      <p:sp>
+        <p:nvSpPr>
+          <p:cNvPr id="5" name="TextBox 4"/>
+          <p:cNvSpPr txBox="1"/>
+          <p:nvPr/>
+        </p:nvSpPr>
+        <p:spPr>
+          <a:xfrm>
+            <a:off x="548640" y="4495800"/>
+            <a:ext cx="8046720" cy="165100"/>
+          </a:xfrm>
+          <a:prstGeom prst="rect">
+            <a:avLst/>
+          </a:prstGeom>
+          <a:noFill/>
+        </p:spPr>
+        <p:txBody>
+          <a:bodyPr wrap="square" lIns="0" rIns="0" tIns="0" bIns="0">
+            <a:spAutoFit/>
+          </a:bodyPr>
+          <a:lstStyle/>
+          <a:p>
+            <a:pPr>
+              <a:lnSpc>
+                <a:spcPct val="100000"/>
+              </a:lnSpc>
+              <a:spcBef>
+                <a:spcPts val="0"/>
+              </a:spcBef>
+              <a:spcAft>
+                <a:spcPts val="0"/>
+              </a:spcAft>
+              <a:buNone/>
+            </a:pPr>
+            <a:r>
+              <a:rPr sz="800" b="0" lang="ja-JP">
+                <a:solidFill>
+                  <a:srgbClr val="626669"/>
+                </a:solidFill>
+                <a:latin typeface="Noto Sans"/>
+                <a:ea typeface="Noto Sans CJK JP"/>
+                <a:cs typeface="Noto Sans"/>
+              </a:rPr>
+              <a:t>各5万文書。差＝FineWeb-Edu − FineWeb。絶対差0.5ポイント以上の39分類から6分類 [1]。</a:t>
+            </a:r>
+          </a:p>
+        </p:txBody>
+      </p:sp>
+      <p:sp>
+        <p:nvSpPr>
+          <p:cNvPr id="6" name="TextBox 5"/>
+          <p:cNvSpPr txBox="1"/>
+          <p:nvPr/>
+        </p:nvSpPr>
+        <p:spPr>
+          <a:xfrm>
+            <a:off x="548640" y="4686300"/>
+            <a:ext cx="8046720" cy="177800"/>
+          </a:xfrm>
+          <a:prstGeom prst="rect">
+            <a:avLst/>
+          </a:prstGeom>
+          <a:noFill/>
+        </p:spPr>
+        <p:txBody>
+          <a:bodyPr wrap="square" lIns="0" rIns="0" tIns="0" bIns="0">
+            <a:spAutoFit/>
+          </a:bodyPr>
+          <a:lstStyle/>
+          <a:p>
+            <a:pPr>
+              <a:lnSpc>
+                <a:spcPct val="100000"/>
+              </a:lnSpc>
+              <a:spcBef>
+                <a:spcPts val="0"/>
+              </a:spcBef>
+              <a:spcAft>
+                <a:spcPts val="0"/>
+              </a:spcAft>
+              <a:buNone/>
+            </a:pPr>
+            <a:r>
+              <a:rPr sz="800" b="0" lang="ja-JP">
+                <a:solidFill>
+                  <a:srgbClr val="626669"/>
+                </a:solidFill>
+                <a:latin typeface="Noto Sans"/>
+                <a:ea typeface="Noto Sans CJK JP"/>
+                <a:cs typeface="Noto Sans"/>
+              </a:rPr>
+              <a:t>[1] Penedo et al. (2024). The FineWeb Datasets: Decanting the Web for the Finest Text Data at Scale. NeurIPS. §4.1, Fig. 18.</a:t>
+            </a:r>
+          </a:p>
+        </p:txBody>
+      </p:sp>
+      <p:sp>
+        <p:nvSpPr>
+          <p:cNvPr id="7" name="TextBox 6"/>
+          <p:cNvSpPr txBox="1"/>
+          <p:nvPr/>
+        </p:nvSpPr>
+        <p:spPr>
+          <a:xfrm>
+            <a:off x="6373995" y="4686300"/>
+            <a:ext cx="2221364" cy="177800"/>
+          </a:xfrm>
+          <a:prstGeom prst="rect">
+            <a:avLst/>
+          </a:prstGeom>
+          <a:noFill/>
+        </p:spPr>
+        <p:txBody>
+          <a:bodyPr wrap="none" lIns="0" rIns="0" tIns="0" bIns="0">
+            <a:spAutoFit/>
+          </a:bodyPr>
+          <a:lstStyle/>
+          <a:p>
+            <a:pPr>
+              <a:lnSpc>
+                <a:spcPct val="100000"/>
+              </a:lnSpc>
+              <a:spcBef>
+                <a:spcPts val="0"/>
+              </a:spcBef>
+              <a:spcAft>
+                <a:spcPts val="0"/>
+              </a:spcAft>
+              <a:buNone/>
+            </a:pPr>
+            <a:r>
+              <a:rPr sz="800" b="0" lang="ja-JP">
+                <a:solidFill>
+                  <a:srgbClr val="626669"/>
+                </a:solidFill>
+                <a:latin typeface="Noto Sans"/>
+                <a:ea typeface="Noto Sans CJK JP"/>
+                <a:cs typeface="Noto Sans"/>
+                <a:hlinkClick r:id="rId2"/>
+              </a:rPr>
+              <a:t>https://arxiv.org/abs/2406.17557v2</a:t>
+            </a:r>
+          </a:p>
+        </p:txBody>
+      </p:sp>
+    </p:spTree>
+  </p:cSld>
+  <p:clrMapOvr>
+    <a:masterClrMapping/>
+  </p:clrMapOvr>
+</p:sld>
+</file>
+
+<file path=ppt/slides/slide82.xml><?xml version="1.0" encoding="utf-8"?>
+<p:sld xmlns:a="http://schemas.openxmlformats.org/drawingml/2006/main" xmlns:p="http://schemas.openxmlformats.org/presentationml/2006/main" xmlns:r="http://schemas.openxmlformats.org/officeDocument/2006/relationships">
+  <p:cSld>
+    <p:spTree>
+      <p:nvGrpSpPr>
+        <p:cNvPr id="1" name=""/>
+        <p:cNvGrpSpPr/>
+        <p:nvPr/>
+      </p:nvGrpSpPr>
+      <p:grpSpPr/>
+      <p:sp>
+        <p:nvSpPr>
+          <p:cNvPr id="2" name="Title 1"/>
+          <p:cNvSpPr>
+            <a:spLocks noGrp="1"/>
+          </p:cNvSpPr>
+          <p:nvPr>
+            <p:ph type="title"/>
+          </p:nvPr>
+        </p:nvSpPr>
+        <p:spPr>
+          <a:xfrm>
+            <a:off x="468172" y="650138"/>
+            <a:ext cx="8206740" cy="616305"/>
+          </a:xfrm>
+        </p:spPr>
+        <p:txBody>
+          <a:bodyPr wrap="square" lIns="0" rIns="0" tIns="0" bIns="0"/>
+          <a:lstStyle/>
+          <a:p>
+            <a:pPr>
+              <a:lnSpc>
+                <a:spcPct val="100000"/>
+              </a:lnSpc>
+              <a:spcBef>
+                <a:spcPts val="0"/>
+              </a:spcBef>
+              <a:spcAft>
+                <a:spcPts val="0"/>
+              </a:spcAft>
+              <a:buNone/>
+            </a:pPr>
+            <a:r>
+              <a:rPr sz="2800" b="1" lang="ja-JP">
+                <a:solidFill>
+                  <a:srgbClr val="303437"/>
+                </a:solidFill>
+                <a:latin typeface="Noto Sans"/>
+                <a:ea typeface="Noto Sans CJK JP"/>
+                <a:cs typeface="Noto Sans"/>
+              </a:rPr>
+              <a:t>FineWeb-Edu側で多い話題（3/3）</a:t>
+            </a:r>
+          </a:p>
+        </p:txBody>
+      </p:sp>
+      <p:sp>
+        <p:nvSpPr>
+          <p:cNvPr id="3" name="Title 2"/>
+          <p:cNvSpPr>
+            <a:spLocks noGrp="1"/>
+          </p:cNvSpPr>
+          <p:nvPr>
+            <p:ph type="title" idx="2"/>
+          </p:nvPr>
+        </p:nvSpPr>
+        <p:spPr>
+          <a:xfrm>
+            <a:off x="75895" y="0"/>
+            <a:ext cx="8115300" cy="480059"/>
+          </a:xfrm>
+        </p:spPr>
+        <p:txBody>
+          <a:bodyPr wrap="square" lIns="0" rIns="0" tIns="0" bIns="0" anchor="ctr"/>
+          <a:lstStyle/>
+          <a:p>
+            <a:pPr>
+              <a:lnSpc>
+                <a:spcPct val="100000"/>
+              </a:lnSpc>
+              <a:spcBef>
+                <a:spcPts val="0"/>
+              </a:spcBef>
+              <a:spcAft>
+                <a:spcPts val="0"/>
+              </a:spcAft>
+              <a:buNone/>
+            </a:pPr>
+            <a:r>
+              <a:rPr sz="1400" b="1" lang="ja-JP">
+                <a:solidFill>
+                  <a:srgbClr val="FFFEF8"/>
+                </a:solidFill>
+                <a:latin typeface="Noto Sans"/>
+                <a:ea typeface="Noto Sans CJK JP"/>
+                <a:cs typeface="Noto Sans"/>
+              </a:rPr>
+              <a:t>Appendix 3. 文書選別・話題分布と評価実験の詳細</a:t>
+            </a:r>
+          </a:p>
+        </p:txBody>
+      </p:sp>
+      <p:graphicFrame>
+        <p:nvGraphicFramePr>
+          <p:cNvPr id="4" name="Table 3"/>
+          <p:cNvGraphicFramePr>
+            <a:graphicFrameLocks noGrp="1"/>
+          </p:cNvGraphicFramePr>
+          <p:nvPr/>
+        </p:nvGraphicFramePr>
+        <p:xfrm>
+          <a:off x="548640" y="1371600"/>
+          <a:ext cx="8046720" cy="3022600"/>
+        </p:xfrm>
+        <a:graphic>
+          <a:graphicData uri="http://schemas.openxmlformats.org/drawingml/2006/table">
+            <a:tbl>
+              <a:tblPr firstRow="1" bandRow="1"/>
+              <a:tblGrid>
+                <a:gridCol w="5887720"/>
+                <a:gridCol w="2159000"/>
+              </a:tblGrid>
+              <a:tr h="431800">
+                <a:tc>
+                  <a:txBody>
+                    <a:bodyPr wrap="square" lIns="0" rIns="0" tIns="0" bIns="0"/>
+                    <a:lstStyle/>
+                    <a:p>
+                      <a:pPr algn="l">
+                        <a:lnSpc>
+                          <a:spcPct val="100000"/>
+                        </a:lnSpc>
+                        <a:spcBef>
+                          <a:spcPts val="0"/>
+                        </a:spcBef>
+                        <a:spcAft>
+                          <a:spcPts val="0"/>
+                        </a:spcAft>
+                        <a:buNone/>
+                      </a:pPr>
+                      <a:r>
+                        <a:rPr sz="2000" b="0" lang="ja-JP">
+                          <a:solidFill>
+                            <a:srgbClr val="303437"/>
+                          </a:solidFill>
+                          <a:latin typeface="Noto Sans"/>
+                          <a:ea typeface="Noto Sans CJK JP"/>
+                          <a:cs typeface="Noto Sans"/>
+                        </a:rPr>
+                        <a:t>話題（原著ラベルの和訳）</a:t>
+                      </a:r>
+                    </a:p>
+                  </a:txBody>
+                  <a:tcPr marL="63500" marR="63500" marT="25400" marB="25400" anchor="ctr">
+                    <a:lnL w="10160">
+                      <a:noFill/>
+                    </a:lnL>
+                    <a:lnR w="10160">
+                      <a:noFill/>
+                    </a:lnR>
+                    <a:lnT w="10160">
+                      <a:solidFill>
+                        <a:srgbClr val="626669"/>
+                      </a:solidFill>
+                    </a:lnT>
+                    <a:lnB w="10160">
+                      <a:solidFill>
+                        <a:srgbClr val="626669"/>
+                      </a:solidFill>
+                    </a:lnB>
+                    <a:solidFill>
+                      <a:srgbClr val="FFFEF8"/>
+                    </a:solidFill>
+                  </a:tcPr>
+                </a:tc>
+                <a:tc>
+                  <a:txBody>
+                    <a:bodyPr wrap="square" lIns="0" rIns="0" tIns="0" bIns="0"/>
+                    <a:lstStyle/>
+                    <a:p>
+                      <a:pPr algn="r">
+                        <a:lnSpc>
+                          <a:spcPct val="100000"/>
+                        </a:lnSpc>
+                        <a:spcBef>
+                          <a:spcPts val="0"/>
+                        </a:spcBef>
+                        <a:spcAft>
+                          <a:spcPts val="0"/>
+                        </a:spcAft>
+                        <a:buNone/>
+                      </a:pPr>
+                      <a:r>
+                        <a:rPr sz="2000" b="0" lang="ja-JP">
+                          <a:solidFill>
+                            <a:srgbClr val="303437"/>
+                          </a:solidFill>
+                          <a:latin typeface="Noto Sans"/>
+                          <a:ea typeface="Noto Sans CJK JP"/>
+                          <a:cs typeface="Noto Sans"/>
+                        </a:rPr>
+                        <a:t>差（ポイント）</a:t>
+                      </a:r>
+                    </a:p>
+                  </a:txBody>
+                  <a:tcPr marL="63500" marR="63500" marT="25400" marB="25400" anchor="ctr">
+                    <a:lnL w="10160">
+                      <a:noFill/>
+                    </a:lnL>
+                    <a:lnR w="10160">
+                      <a:noFill/>
+                    </a:lnR>
+                    <a:lnT w="10160">
+                      <a:solidFill>
+                        <a:srgbClr val="626669"/>
+                      </a:solidFill>
+                    </a:lnT>
+                    <a:lnB w="10160">
+                      <a:solidFill>
+                        <a:srgbClr val="626669"/>
+                      </a:solidFill>
+                    </a:lnB>
+                    <a:solidFill>
+                      <a:srgbClr val="FFFEF8"/>
+                    </a:solidFill>
+                  </a:tcPr>
+                </a:tc>
+              </a:tr>
+              <a:tr h="431800">
+                <a:tc>
+                  <a:txBody>
+                    <a:bodyPr wrap="square" lIns="0" rIns="0" tIns="0" bIns="0"/>
+                    <a:lstStyle/>
+                    <a:p>
+                      <a:pPr algn="l">
+                        <a:lnSpc>
+                          <a:spcPct val="100000"/>
+                        </a:lnSpc>
+                        <a:spcBef>
+                          <a:spcPts val="0"/>
+                        </a:spcBef>
+                        <a:spcAft>
+                          <a:spcPts val="0"/>
+                        </a:spcAft>
+                        <a:buNone/>
+                      </a:pPr>
+                      <a:r>
+                        <a:rPr sz="2000" b="0" lang="ja-JP">
+                          <a:solidFill>
+                            <a:srgbClr val="303437"/>
+                          </a:solidFill>
+                          <a:latin typeface="Noto Sans"/>
+                          <a:ea typeface="Noto Sans CJK JP"/>
+                          <a:cs typeface="Noto Sans"/>
+                        </a:rPr>
+                        <a:t>植物・園芸・自然</a:t>
+                      </a:r>
+                    </a:p>
+                  </a:txBody>
+                  <a:tcPr marL="63500" marR="63500" marT="25400" marB="25400" anchor="ctr">
+                    <a:lnL w="10160">
+                      <a:noFill/>
+                    </a:lnL>
+                    <a:lnR w="10160">
+                      <a:noFill/>
+                    </a:lnR>
+                    <a:lnT w="10160">
+                      <a:solidFill>
+                        <a:srgbClr val="626669"/>
+                      </a:solidFill>
+                    </a:lnT>
+                    <a:lnB w="10160">
+                      <a:noFill/>
+                    </a:lnB>
+                    <a:solidFill>
+                      <a:srgbClr val="FFFEF8"/>
+                    </a:solidFill>
+                  </a:tcPr>
+                </a:tc>
+                <a:tc>
+                  <a:txBody>
+                    <a:bodyPr wrap="square" lIns="0" rIns="0" tIns="0" bIns="0"/>
+                    <a:lstStyle/>
+                    <a:p>
+                      <a:pPr algn="r">
+                        <a:lnSpc>
+                          <a:spcPct val="100000"/>
+                        </a:lnSpc>
+                        <a:spcBef>
+                          <a:spcPts val="0"/>
+                        </a:spcBef>
+                        <a:spcAft>
+                          <a:spcPts val="0"/>
+                        </a:spcAft>
+                        <a:buNone/>
+                      </a:pPr>
+                      <a:r>
+                        <a:rPr sz="2000" b="0" lang="ja-JP">
+                          <a:solidFill>
+                            <a:srgbClr val="303437"/>
+                          </a:solidFill>
+                          <a:latin typeface="Noto Sans"/>
+                          <a:ea typeface="Noto Sans CJK JP"/>
+                          <a:cs typeface="Noto Sans"/>
+                        </a:rPr>
+                        <a:t>+0.8</a:t>
+                      </a:r>
+                    </a:p>
+                  </a:txBody>
+                  <a:tcPr marL="63500" marR="63500" marT="25400" marB="25400" anchor="ctr">
+                    <a:lnL w="10160">
+                      <a:noFill/>
+                    </a:lnL>
+                    <a:lnR w="10160">
+                      <a:noFill/>
+                    </a:lnR>
+                    <a:lnT w="10160">
+                      <a:solidFill>
+                        <a:srgbClr val="626669"/>
+                      </a:solidFill>
+                    </a:lnT>
+                    <a:lnB w="10160">
+                      <a:noFill/>
+                    </a:lnB>
+                    <a:solidFill>
+                      <a:srgbClr val="FFFEF8"/>
+                    </a:solidFill>
+                  </a:tcPr>
+                </a:tc>
+              </a:tr>
+              <a:tr h="431800">
+                <a:tc>
+                  <a:txBody>
+                    <a:bodyPr wrap="square" lIns="0" rIns="0" tIns="0" bIns="0"/>
+                    <a:lstStyle/>
+                    <a:p>
+                      <a:pPr algn="l">
+                        <a:lnSpc>
+                          <a:spcPct val="100000"/>
+                        </a:lnSpc>
+                        <a:spcBef>
+                          <a:spcPts val="0"/>
+                        </a:spcBef>
+                        <a:spcAft>
+                          <a:spcPts val="0"/>
+                        </a:spcAft>
+                        <a:buNone/>
+                      </a:pPr>
+                      <a:r>
+                        <a:rPr sz="2000" b="0" lang="ja-JP">
+                          <a:solidFill>
+                            <a:srgbClr val="303437"/>
+                          </a:solidFill>
+                          <a:latin typeface="Noto Sans"/>
+                          <a:ea typeface="Noto Sans CJK JP"/>
+                          <a:cs typeface="Noto Sans"/>
+                        </a:rPr>
+                        <a:t>健康・栄養・食生活</a:t>
+                      </a:r>
+                    </a:p>
+                  </a:txBody>
+                  <a:tcPr marL="63500" marR="63500" marT="25400" marB="25400" anchor="ctr">
+                    <a:lnL w="10160">
+                      <a:noFill/>
+                    </a:lnL>
+                    <a:lnR w="10160">
+                      <a:noFill/>
+                    </a:lnR>
+                    <a:lnT w="10160">
+                      <a:noFill/>
+                    </a:lnT>
+                    <a:lnB w="10160">
+                      <a:noFill/>
+                    </a:lnB>
+                    <a:solidFill>
+                      <a:srgbClr val="FFFEF8"/>
+                    </a:solidFill>
+                  </a:tcPr>
+                </a:tc>
+                <a:tc>
+                  <a:txBody>
+                    <a:bodyPr wrap="square" lIns="0" rIns="0" tIns="0" bIns="0"/>
+                    <a:lstStyle/>
+                    <a:p>
+                      <a:pPr algn="r">
+                        <a:lnSpc>
+                          <a:spcPct val="100000"/>
+                        </a:lnSpc>
+                        <a:spcBef>
+                          <a:spcPts val="0"/>
+                        </a:spcBef>
+                        <a:spcAft>
+                          <a:spcPts val="0"/>
+                        </a:spcAft>
+                        <a:buNone/>
+                      </a:pPr>
+                      <a:r>
+                        <a:rPr sz="2000" b="0" lang="ja-JP">
+                          <a:solidFill>
+                            <a:srgbClr val="303437"/>
+                          </a:solidFill>
+                          <a:latin typeface="Noto Sans"/>
+                          <a:ea typeface="Noto Sans CJK JP"/>
+                          <a:cs typeface="Noto Sans"/>
+                        </a:rPr>
+                        <a:t>+0.7</a:t>
+                      </a:r>
+                    </a:p>
+                  </a:txBody>
+                  <a:tcPr marL="63500" marR="63500" marT="25400" marB="25400" anchor="ctr">
+                    <a:lnL w="10160">
+                      <a:noFill/>
+                    </a:lnL>
+                    <a:lnR w="10160">
+                      <a:noFill/>
+                    </a:lnR>
+                    <a:lnT w="10160">
+                      <a:noFill/>
+                    </a:lnT>
+                    <a:lnB w="10160">
+                      <a:noFill/>
+                    </a:lnB>
+                    <a:solidFill>
+                      <a:srgbClr val="FFFEF8"/>
+                    </a:solidFill>
+                  </a:tcPr>
+                </a:tc>
+              </a:tr>
+              <a:tr h="431800">
+                <a:tc>
+                  <a:txBody>
+                    <a:bodyPr wrap="square" lIns="0" rIns="0" tIns="0" bIns="0"/>
+                    <a:lstStyle/>
+                    <a:p>
+                      <a:pPr algn="l">
+                        <a:lnSpc>
+                          <a:spcPct val="100000"/>
+                        </a:lnSpc>
+                        <a:spcBef>
+                          <a:spcPts val="0"/>
+                        </a:spcBef>
+                        <a:spcAft>
+                          <a:spcPts val="0"/>
+                        </a:spcAft>
+                        <a:buNone/>
+                      </a:pPr>
+                      <a:r>
+                        <a:rPr sz="2000" b="0" lang="ja-JP">
+                          <a:solidFill>
+                            <a:srgbClr val="303437"/>
+                          </a:solidFill>
+                          <a:latin typeface="Noto Sans"/>
+                          <a:ea typeface="Noto Sans CJK JP"/>
+                          <a:cs typeface="Noto Sans"/>
+                        </a:rPr>
+                        <a:t>文化・インド・精神性</a:t>
+                      </a:r>
+                    </a:p>
+                  </a:txBody>
+                  <a:tcPr marL="63500" marR="63500" marT="25400" marB="25400" anchor="ctr">
+                    <a:lnL w="10160">
+                      <a:noFill/>
+                    </a:lnL>
+                    <a:lnR w="10160">
+                      <a:noFill/>
+                    </a:lnR>
+                    <a:lnT w="10160">
+                      <a:noFill/>
+                    </a:lnT>
+                    <a:lnB w="10160">
+                      <a:noFill/>
+                    </a:lnB>
+                    <a:solidFill>
+                      <a:srgbClr val="FFFEF8"/>
+                    </a:solidFill>
+                  </a:tcPr>
+                </a:tc>
+                <a:tc>
+                  <a:txBody>
+                    <a:bodyPr wrap="square" lIns="0" rIns="0" tIns="0" bIns="0"/>
+                    <a:lstStyle/>
+                    <a:p>
+                      <a:pPr algn="r">
+                        <a:lnSpc>
+                          <a:spcPct val="100000"/>
+                        </a:lnSpc>
+                        <a:spcBef>
+                          <a:spcPts val="0"/>
+                        </a:spcBef>
+                        <a:spcAft>
+                          <a:spcPts val="0"/>
+                        </a:spcAft>
+                        <a:buNone/>
+                      </a:pPr>
+                      <a:r>
+                        <a:rPr sz="2000" b="0" lang="ja-JP">
+                          <a:solidFill>
+                            <a:srgbClr val="303437"/>
+                          </a:solidFill>
+                          <a:latin typeface="Noto Sans"/>
+                          <a:ea typeface="Noto Sans CJK JP"/>
+                          <a:cs typeface="Noto Sans"/>
+                        </a:rPr>
+                        <a:t>+0.6</a:t>
+                      </a:r>
+                    </a:p>
+                  </a:txBody>
+                  <a:tcPr marL="63500" marR="63500" marT="25400" marB="25400" anchor="ctr">
+                    <a:lnL w="10160">
+                      <a:noFill/>
+                    </a:lnL>
+                    <a:lnR w="10160">
+                      <a:noFill/>
+                    </a:lnR>
+                    <a:lnT w="10160">
+                      <a:noFill/>
+                    </a:lnT>
+                    <a:lnB w="10160">
+                      <a:noFill/>
+                    </a:lnB>
+                    <a:solidFill>
+                      <a:srgbClr val="FFFEF8"/>
+                    </a:solidFill>
+                  </a:tcPr>
+                </a:tc>
+              </a:tr>
+              <a:tr h="431800">
+                <a:tc>
+                  <a:txBody>
+                    <a:bodyPr wrap="square" lIns="0" rIns="0" tIns="0" bIns="0"/>
+                    <a:lstStyle/>
+                    <a:p>
+                      <a:pPr algn="l">
+                        <a:lnSpc>
+                          <a:spcPct val="100000"/>
+                        </a:lnSpc>
+                        <a:spcBef>
+                          <a:spcPts val="0"/>
+                        </a:spcBef>
+                        <a:spcAft>
+                          <a:spcPts val="0"/>
+                        </a:spcAft>
+                        <a:buNone/>
+                      </a:pPr>
+                      <a:r>
+                        <a:rPr sz="2000" b="0" lang="ja-JP">
+                          <a:solidFill>
+                            <a:srgbClr val="303437"/>
+                          </a:solidFill>
+                          <a:latin typeface="Noto Sans"/>
+                          <a:ea typeface="Noto Sans CJK JP"/>
+                          <a:cs typeface="Noto Sans"/>
+                        </a:rPr>
+                        <a:t>健康・医学・疾患</a:t>
+                      </a:r>
+                    </a:p>
+                  </a:txBody>
+                  <a:tcPr marL="63500" marR="63500" marT="25400" marB="25400" anchor="ctr">
+                    <a:lnL w="10160">
+                      <a:noFill/>
+                    </a:lnL>
+                    <a:lnR w="10160">
+                      <a:noFill/>
+                    </a:lnR>
+                    <a:lnT w="10160">
+                      <a:noFill/>
+                    </a:lnT>
+                    <a:lnB w="10160">
+                      <a:noFill/>
+                    </a:lnB>
+                    <a:solidFill>
+                      <a:srgbClr val="FFFEF8"/>
+                    </a:solidFill>
+                  </a:tcPr>
+                </a:tc>
+                <a:tc>
+                  <a:txBody>
+                    <a:bodyPr wrap="square" lIns="0" rIns="0" tIns="0" bIns="0"/>
+                    <a:lstStyle/>
+                    <a:p>
+                      <a:pPr algn="r">
+                        <a:lnSpc>
+                          <a:spcPct val="100000"/>
+                        </a:lnSpc>
+                        <a:spcBef>
+                          <a:spcPts val="0"/>
+                        </a:spcBef>
+                        <a:spcAft>
+                          <a:spcPts val="0"/>
+                        </a:spcAft>
+                        <a:buNone/>
+                      </a:pPr>
+                      <a:r>
+                        <a:rPr sz="2000" b="0" lang="ja-JP">
+                          <a:solidFill>
+                            <a:srgbClr val="303437"/>
+                          </a:solidFill>
+                          <a:latin typeface="Noto Sans"/>
+                          <a:ea typeface="Noto Sans CJK JP"/>
+                          <a:cs typeface="Noto Sans"/>
+                        </a:rPr>
+                        <a:t>+0.5</a:t>
+                      </a:r>
+                    </a:p>
+                  </a:txBody>
+                  <a:tcPr marL="63500" marR="63500" marT="25400" marB="25400" anchor="ctr">
+                    <a:lnL w="10160">
+                      <a:noFill/>
+                    </a:lnL>
+                    <a:lnR w="10160">
+                      <a:noFill/>
+                    </a:lnR>
+                    <a:lnT w="10160">
+                      <a:noFill/>
+                    </a:lnT>
+                    <a:lnB w="10160">
+                      <a:noFill/>
+                    </a:lnB>
+                    <a:solidFill>
+                      <a:srgbClr val="FFFEF8"/>
+                    </a:solidFill>
+                  </a:tcPr>
+                </a:tc>
+              </a:tr>
+              <a:tr h="431800">
+                <a:tc>
+                  <a:txBody>
+                    <a:bodyPr wrap="square" lIns="0" rIns="0" tIns="0" bIns="0"/>
+                    <a:lstStyle/>
+                    <a:p>
+                      <a:pPr algn="l">
+                        <a:lnSpc>
+                          <a:spcPct val="100000"/>
+                        </a:lnSpc>
+                        <a:spcBef>
+                          <a:spcPts val="0"/>
+                        </a:spcBef>
+                        <a:spcAft>
+                          <a:spcPts val="0"/>
+                        </a:spcAft>
+                        <a:buNone/>
+                      </a:pPr>
+                      <a:r>
+                        <a:rPr sz="2000" b="0" lang="ja-JP">
+                          <a:solidFill>
+                            <a:srgbClr val="303437"/>
+                          </a:solidFill>
+                          <a:latin typeface="Noto Sans"/>
+                          <a:ea typeface="Noto Sans CJK JP"/>
+                          <a:cs typeface="Noto Sans"/>
+                        </a:rPr>
+                        <a:t>数学・数式・教育</a:t>
+                      </a:r>
+                    </a:p>
+                  </a:txBody>
+                  <a:tcPr marL="63500" marR="63500" marT="25400" marB="25400" anchor="ctr">
+                    <a:lnL w="10160">
+                      <a:noFill/>
+                    </a:lnL>
+                    <a:lnR w="10160">
+                      <a:noFill/>
+                    </a:lnR>
+                    <a:lnT w="10160">
+                      <a:noFill/>
+                    </a:lnT>
+                    <a:lnB w="10160">
+                      <a:noFill/>
+                    </a:lnB>
+                    <a:solidFill>
+                      <a:srgbClr val="FFFEF8"/>
+                    </a:solidFill>
+                  </a:tcPr>
+                </a:tc>
+                <a:tc>
+                  <a:txBody>
+                    <a:bodyPr wrap="square" lIns="0" rIns="0" tIns="0" bIns="0"/>
+                    <a:lstStyle/>
+                    <a:p>
+                      <a:pPr algn="r">
+                        <a:lnSpc>
+                          <a:spcPct val="100000"/>
+                        </a:lnSpc>
+                        <a:spcBef>
+                          <a:spcPts val="0"/>
+                        </a:spcBef>
+                        <a:spcAft>
+                          <a:spcPts val="0"/>
+                        </a:spcAft>
+                        <a:buNone/>
+                      </a:pPr>
+                      <a:r>
+                        <a:rPr sz="2000" b="0" lang="ja-JP">
+                          <a:solidFill>
+                            <a:srgbClr val="303437"/>
+                          </a:solidFill>
+                          <a:latin typeface="Noto Sans"/>
+                          <a:ea typeface="Noto Sans CJK JP"/>
+                          <a:cs typeface="Noto Sans"/>
+                        </a:rPr>
+                        <a:t>+0.5</a:t>
+                      </a:r>
+                    </a:p>
+                  </a:txBody>
+                  <a:tcPr marL="63500" marR="63500" marT="25400" marB="25400" anchor="ctr">
+                    <a:lnL w="10160">
+                      <a:noFill/>
+                    </a:lnL>
+                    <a:lnR w="10160">
+                      <a:noFill/>
+                    </a:lnR>
+                    <a:lnT w="10160">
+                      <a:noFill/>
+                    </a:lnT>
+                    <a:lnB w="10160">
+                      <a:noFill/>
+                    </a:lnB>
+                    <a:solidFill>
+                      <a:srgbClr val="FFFEF8"/>
+                    </a:solidFill>
+                  </a:tcPr>
+                </a:tc>
+              </a:tr>
+              <a:tr h="431800">
+                <a:tc>
+                  <a:txBody>
+                    <a:bodyPr wrap="square" lIns="0" rIns="0" tIns="0" bIns="0"/>
+                    <a:lstStyle/>
+                    <a:p>
+                      <a:pPr algn="l">
+                        <a:lnSpc>
+                          <a:spcPct val="100000"/>
+                        </a:lnSpc>
+                        <a:spcBef>
+                          <a:spcPts val="0"/>
+                        </a:spcBef>
+                        <a:spcAft>
+                          <a:spcPts val="0"/>
+                        </a:spcAft>
+                        <a:buNone/>
+                      </a:pPr>
+                      <a:r>
+                        <a:rPr sz="2000" b="0" lang="ja-JP">
+                          <a:solidFill>
+                            <a:srgbClr val="303437"/>
+                          </a:solidFill>
+                          <a:latin typeface="Noto Sans"/>
+                          <a:ea typeface="Noto Sans CJK JP"/>
+                          <a:cs typeface="Noto Sans"/>
+                        </a:rPr>
+                        <a:t>数学・教育・指導</a:t>
+                      </a:r>
+                    </a:p>
+                  </a:txBody>
+                  <a:tcPr marL="63500" marR="63500" marT="25400" marB="25400" anchor="ctr">
+                    <a:lnL w="10160">
+                      <a:noFill/>
+                    </a:lnL>
+                    <a:lnR w="10160">
+                      <a:noFill/>
+                    </a:lnR>
+                    <a:lnT w="10160">
+                      <a:noFill/>
+                    </a:lnT>
+                    <a:lnB w="10160">
+                      <a:solidFill>
+                        <a:srgbClr val="626669"/>
+                      </a:solidFill>
+                    </a:lnB>
+                    <a:solidFill>
+                      <a:srgbClr val="FFFEF8"/>
+                    </a:solidFill>
+                  </a:tcPr>
+                </a:tc>
+                <a:tc>
+                  <a:txBody>
+                    <a:bodyPr wrap="square" lIns="0" rIns="0" tIns="0" bIns="0"/>
+                    <a:lstStyle/>
+                    <a:p>
+                      <a:pPr algn="r">
+                        <a:lnSpc>
+                          <a:spcPct val="100000"/>
+                        </a:lnSpc>
+                        <a:spcBef>
+                          <a:spcPts val="0"/>
+                        </a:spcBef>
+                        <a:spcAft>
+                          <a:spcPts val="0"/>
+                        </a:spcAft>
+                        <a:buNone/>
+                      </a:pPr>
+                      <a:r>
+                        <a:rPr sz="2000" b="0" lang="ja-JP">
+                          <a:solidFill>
+                            <a:srgbClr val="303437"/>
+                          </a:solidFill>
+                          <a:latin typeface="Noto Sans"/>
+                          <a:ea typeface="Noto Sans CJK JP"/>
+                          <a:cs typeface="Noto Sans"/>
+                        </a:rPr>
+                        <a:t>+0.5</a:t>
+                      </a:r>
+                    </a:p>
+                  </a:txBody>
+                  <a:tcPr marL="63500" marR="63500" marT="25400" marB="25400" anchor="ctr">
+                    <a:lnL w="10160">
+                      <a:noFill/>
+                    </a:lnL>
+                    <a:lnR w="10160">
+                      <a:noFill/>
+                    </a:lnR>
+                    <a:lnT w="10160">
+                      <a:noFill/>
+                    </a:lnT>
+                    <a:lnB w="10160">
+                      <a:solidFill>
+                        <a:srgbClr val="626669"/>
+                      </a:solidFill>
+                    </a:lnB>
+                    <a:solidFill>
+                      <a:srgbClr val="FFFEF8"/>
+                    </a:solidFill>
+                  </a:tcPr>
+                </a:tc>
+              </a:tr>
+            </a:tbl>
+          </a:graphicData>
+        </a:graphic>
+      </p:graphicFrame>
+      <p:sp>
+        <p:nvSpPr>
+          <p:cNvPr id="5" name="TextBox 4"/>
+          <p:cNvSpPr txBox="1"/>
+          <p:nvPr/>
+        </p:nvSpPr>
+        <p:spPr>
+          <a:xfrm>
+            <a:off x="548640" y="4495800"/>
+            <a:ext cx="8046720" cy="165100"/>
+          </a:xfrm>
+          <a:prstGeom prst="rect">
+            <a:avLst/>
+          </a:prstGeom>
+          <a:noFill/>
+        </p:spPr>
+        <p:txBody>
+          <a:bodyPr wrap="square" lIns="0" rIns="0" tIns="0" bIns="0">
+            <a:spAutoFit/>
+          </a:bodyPr>
+          <a:lstStyle/>
+          <a:p>
+            <a:pPr>
+              <a:lnSpc>
+                <a:spcPct val="100000"/>
+              </a:lnSpc>
+              <a:spcBef>
+                <a:spcPts val="0"/>
+              </a:spcBef>
+              <a:spcAft>
+                <a:spcPts val="0"/>
+              </a:spcAft>
+              <a:buNone/>
+            </a:pPr>
+            <a:r>
+              <a:rPr sz="800" b="0" lang="ja-JP">
+                <a:solidFill>
+                  <a:srgbClr val="626669"/>
+                </a:solidFill>
+                <a:latin typeface="Noto Sans"/>
+                <a:ea typeface="Noto Sans CJK JP"/>
+                <a:cs typeface="Noto Sans"/>
+              </a:rPr>
+              <a:t>各5万文書。差＝FineWeb-Edu − FineWeb。絶対差0.5ポイント以上の39分類から6分類 [1]。</a:t>
+            </a:r>
+          </a:p>
+        </p:txBody>
+      </p:sp>
+      <p:sp>
+        <p:nvSpPr>
+          <p:cNvPr id="6" name="TextBox 5"/>
+          <p:cNvSpPr txBox="1"/>
+          <p:nvPr/>
+        </p:nvSpPr>
+        <p:spPr>
+          <a:xfrm>
+            <a:off x="548640" y="4686300"/>
+            <a:ext cx="8046720" cy="177800"/>
+          </a:xfrm>
+          <a:prstGeom prst="rect">
+            <a:avLst/>
+          </a:prstGeom>
+          <a:noFill/>
+        </p:spPr>
+        <p:txBody>
+          <a:bodyPr wrap="square" lIns="0" rIns="0" tIns="0" bIns="0">
+            <a:spAutoFit/>
+          </a:bodyPr>
+          <a:lstStyle/>
+          <a:p>
+            <a:pPr>
+              <a:lnSpc>
+                <a:spcPct val="100000"/>
+              </a:lnSpc>
+              <a:spcBef>
+                <a:spcPts val="0"/>
+              </a:spcBef>
+              <a:spcAft>
+                <a:spcPts val="0"/>
+              </a:spcAft>
+              <a:buNone/>
+            </a:pPr>
+            <a:r>
+              <a:rPr sz="800" b="0" lang="ja-JP">
+                <a:solidFill>
+                  <a:srgbClr val="626669"/>
+                </a:solidFill>
+                <a:latin typeface="Noto Sans"/>
+                <a:ea typeface="Noto Sans CJK JP"/>
+                <a:cs typeface="Noto Sans"/>
+              </a:rPr>
+              <a:t>[1] Penedo et al. (2024). The FineWeb Datasets: Decanting the Web for the Finest Text Data at Scale. NeurIPS. §4.1, Fig. 18.</a:t>
+            </a:r>
+          </a:p>
+        </p:txBody>
+      </p:sp>
+      <p:sp>
+        <p:nvSpPr>
+          <p:cNvPr id="7" name="TextBox 6"/>
+          <p:cNvSpPr txBox="1"/>
+          <p:nvPr/>
+        </p:nvSpPr>
+        <p:spPr>
+          <a:xfrm>
+            <a:off x="6373995" y="4686300"/>
+            <a:ext cx="2221364" cy="177800"/>
+          </a:xfrm>
+          <a:prstGeom prst="rect">
+            <a:avLst/>
+          </a:prstGeom>
+          <a:noFill/>
+        </p:spPr>
+        <p:txBody>
+          <a:bodyPr wrap="none" lIns="0" rIns="0" tIns="0" bIns="0">
+            <a:spAutoFit/>
+          </a:bodyPr>
+          <a:lstStyle/>
+          <a:p>
+            <a:pPr>
+              <a:lnSpc>
+                <a:spcPct val="100000"/>
+              </a:lnSpc>
+              <a:spcBef>
+                <a:spcPts val="0"/>
+              </a:spcBef>
+              <a:spcAft>
+                <a:spcPts val="0"/>
+              </a:spcAft>
+              <a:buNone/>
+            </a:pPr>
+            <a:r>
+              <a:rPr sz="800" b="0" lang="ja-JP">
+                <a:solidFill>
+                  <a:srgbClr val="626669"/>
+                </a:solidFill>
+                <a:latin typeface="Noto Sans"/>
+                <a:ea typeface="Noto Sans CJK JP"/>
+                <a:cs typeface="Noto Sans"/>
+                <a:hlinkClick r:id="rId2"/>
+              </a:rPr>
+              <a:t>https://arxiv.org/abs/2406.17557v2</a:t>
+            </a:r>
+          </a:p>
+        </p:txBody>
+      </p:sp>
+    </p:spTree>
+  </p:cSld>
+  <p:clrMapOvr>
+    <a:masterClrMapping/>
+  </p:clrMapOvr>
+</p:sld>
+</file>
+
+<file path=ppt/slides/slide83.xml><?xml version="1.0" encoding="utf-8"?>
+<p:sld xmlns:a="http://schemas.openxmlformats.org/drawingml/2006/main" xmlns:p="http://schemas.openxmlformats.org/presentationml/2006/main" xmlns:r="http://schemas.openxmlformats.org/officeDocument/2006/relationships">
+  <p:cSld>
+    <p:spTree>
+      <p:nvGrpSpPr>
+        <p:cNvPr id="1" name=""/>
+        <p:cNvGrpSpPr/>
+        <p:nvPr/>
+      </p:nvGrpSpPr>
+      <p:grpSpPr/>
+      <p:sp>
+        <p:nvSpPr>
+          <p:cNvPr id="2" name="Title 1"/>
+          <p:cNvSpPr>
+            <a:spLocks noGrp="1"/>
+          </p:cNvSpPr>
+          <p:nvPr>
+            <p:ph type="title"/>
+          </p:nvPr>
+        </p:nvSpPr>
+        <p:spPr>
+          <a:xfrm>
+            <a:off x="468172" y="650138"/>
+            <a:ext cx="8206740" cy="616305"/>
+          </a:xfrm>
+        </p:spPr>
+        <p:txBody>
+          <a:bodyPr wrap="square" lIns="0" rIns="0" tIns="0" bIns="0"/>
+          <a:lstStyle/>
+          <a:p>
+            <a:pPr>
+              <a:lnSpc>
+                <a:spcPct val="100000"/>
+              </a:lnSpc>
+              <a:spcBef>
+                <a:spcPts val="0"/>
+              </a:spcBef>
+              <a:spcAft>
+                <a:spcPts val="0"/>
+              </a:spcAft>
+              <a:buNone/>
+            </a:pPr>
+            <a:r>
+              <a:rPr sz="2800" b="1" lang="ja-JP">
+                <a:solidFill>
+                  <a:srgbClr val="303437"/>
+                </a:solidFill>
+                <a:latin typeface="Noto Sans"/>
+                <a:ea typeface="Noto Sans CJK JP"/>
+                <a:cs typeface="Noto Sans"/>
+              </a:rPr>
+              <a:t>FineWeb側で多い話題（1/4）</a:t>
+            </a:r>
+          </a:p>
+        </p:txBody>
+      </p:sp>
+      <p:sp>
+        <p:nvSpPr>
+          <p:cNvPr id="3" name="Title 2"/>
+          <p:cNvSpPr>
+            <a:spLocks noGrp="1"/>
+          </p:cNvSpPr>
+          <p:nvPr>
+            <p:ph type="title" idx="2"/>
+          </p:nvPr>
+        </p:nvSpPr>
+        <p:spPr>
+          <a:xfrm>
+            <a:off x="75895" y="0"/>
+            <a:ext cx="8115300" cy="480059"/>
+          </a:xfrm>
+        </p:spPr>
+        <p:txBody>
+          <a:bodyPr wrap="square" lIns="0" rIns="0" tIns="0" bIns="0" anchor="ctr"/>
+          <a:lstStyle/>
+          <a:p>
+            <a:pPr>
+              <a:lnSpc>
+                <a:spcPct val="100000"/>
+              </a:lnSpc>
+              <a:spcBef>
+                <a:spcPts val="0"/>
+              </a:spcBef>
+              <a:spcAft>
+                <a:spcPts val="0"/>
+              </a:spcAft>
+              <a:buNone/>
+            </a:pPr>
+            <a:r>
+              <a:rPr sz="1400" b="1" lang="ja-JP">
+                <a:solidFill>
+                  <a:srgbClr val="FFFEF8"/>
+                </a:solidFill>
+                <a:latin typeface="Noto Sans"/>
+                <a:ea typeface="Noto Sans CJK JP"/>
+                <a:cs typeface="Noto Sans"/>
+              </a:rPr>
+              <a:t>Appendix 3. 文書選別・話題分布と評価実験の詳細</a:t>
+            </a:r>
+          </a:p>
+        </p:txBody>
+      </p:sp>
+      <p:graphicFrame>
+        <p:nvGraphicFramePr>
+          <p:cNvPr id="4" name="Table 3"/>
+          <p:cNvGraphicFramePr>
+            <a:graphicFrameLocks noGrp="1"/>
+          </p:cNvGraphicFramePr>
+          <p:nvPr/>
+        </p:nvGraphicFramePr>
+        <p:xfrm>
+          <a:off x="548640" y="1371600"/>
+          <a:ext cx="8046720" cy="3022600"/>
+        </p:xfrm>
+        <a:graphic>
+          <a:graphicData uri="http://schemas.openxmlformats.org/drawingml/2006/table">
+            <a:tbl>
+              <a:tblPr firstRow="1" bandRow="1"/>
+              <a:tblGrid>
+                <a:gridCol w="5887720"/>
+                <a:gridCol w="2159000"/>
+              </a:tblGrid>
+              <a:tr h="431800">
+                <a:tc>
+                  <a:txBody>
+                    <a:bodyPr wrap="square" lIns="0" rIns="0" tIns="0" bIns="0"/>
+                    <a:lstStyle/>
+                    <a:p>
+                      <a:pPr algn="l">
+                        <a:lnSpc>
+                          <a:spcPct val="100000"/>
+                        </a:lnSpc>
+                        <a:spcBef>
+                          <a:spcPts val="0"/>
+                        </a:spcBef>
+                        <a:spcAft>
+                          <a:spcPts val="0"/>
+                        </a:spcAft>
+                        <a:buNone/>
+                      </a:pPr>
+                      <a:r>
+                        <a:rPr sz="2000" b="0" lang="ja-JP">
+                          <a:solidFill>
+                            <a:srgbClr val="303437"/>
+                          </a:solidFill>
+                          <a:latin typeface="Noto Sans"/>
+                          <a:ea typeface="Noto Sans CJK JP"/>
+                          <a:cs typeface="Noto Sans"/>
+                        </a:rPr>
+                        <a:t>話題（原著ラベルの和訳）</a:t>
+                      </a:r>
+                    </a:p>
+                  </a:txBody>
+                  <a:tcPr marL="63500" marR="63500" marT="25400" marB="25400" anchor="ctr">
+                    <a:lnL w="10160">
+                      <a:noFill/>
+                    </a:lnL>
+                    <a:lnR w="10160">
+                      <a:noFill/>
+                    </a:lnR>
+                    <a:lnT w="10160">
+                      <a:solidFill>
+                        <a:srgbClr val="626669"/>
+                      </a:solidFill>
+                    </a:lnT>
+                    <a:lnB w="10160">
+                      <a:solidFill>
+                        <a:srgbClr val="626669"/>
+                      </a:solidFill>
+                    </a:lnB>
+                    <a:solidFill>
+                      <a:srgbClr val="FFFEF8"/>
+                    </a:solidFill>
+                  </a:tcPr>
+                </a:tc>
+                <a:tc>
+                  <a:txBody>
+                    <a:bodyPr wrap="square" lIns="0" rIns="0" tIns="0" bIns="0"/>
+                    <a:lstStyle/>
+                    <a:p>
+                      <a:pPr algn="r">
+                        <a:lnSpc>
+                          <a:spcPct val="100000"/>
+                        </a:lnSpc>
+                        <a:spcBef>
+                          <a:spcPts val="0"/>
+                        </a:spcBef>
+                        <a:spcAft>
+                          <a:spcPts val="0"/>
+                        </a:spcAft>
+                        <a:buNone/>
+                      </a:pPr>
+                      <a:r>
+                        <a:rPr sz="2000" b="0" lang="ja-JP">
+                          <a:solidFill>
+                            <a:srgbClr val="303437"/>
+                          </a:solidFill>
+                          <a:latin typeface="Noto Sans"/>
+                          <a:ea typeface="Noto Sans CJK JP"/>
+                          <a:cs typeface="Noto Sans"/>
+                        </a:rPr>
+                        <a:t>差（ポイント）</a:t>
+                      </a:r>
+                    </a:p>
+                  </a:txBody>
+                  <a:tcPr marL="63500" marR="63500" marT="25400" marB="25400" anchor="ctr">
+                    <a:lnL w="10160">
+                      <a:noFill/>
+                    </a:lnL>
+                    <a:lnR w="10160">
+                      <a:noFill/>
+                    </a:lnR>
+                    <a:lnT w="10160">
+                      <a:solidFill>
+                        <a:srgbClr val="626669"/>
+                      </a:solidFill>
+                    </a:lnT>
+                    <a:lnB w="10160">
+                      <a:solidFill>
+                        <a:srgbClr val="626669"/>
+                      </a:solidFill>
+                    </a:lnB>
+                    <a:solidFill>
+                      <a:srgbClr val="FFFEF8"/>
+                    </a:solidFill>
+                  </a:tcPr>
+                </a:tc>
+              </a:tr>
+              <a:tr h="431800">
+                <a:tc>
+                  <a:txBody>
+                    <a:bodyPr wrap="square" lIns="0" rIns="0" tIns="0" bIns="0"/>
+                    <a:lstStyle/>
+                    <a:p>
+                      <a:pPr algn="l">
+                        <a:lnSpc>
+                          <a:spcPct val="100000"/>
+                        </a:lnSpc>
+                        <a:spcBef>
+                          <a:spcPts val="0"/>
+                        </a:spcBef>
+                        <a:spcAft>
+                          <a:spcPts val="0"/>
+                        </a:spcAft>
+                        <a:buNone/>
+                      </a:pPr>
+                      <a:r>
+                        <a:rPr sz="2000" b="0" lang="ja-JP">
+                          <a:solidFill>
+                            <a:srgbClr val="303437"/>
+                          </a:solidFill>
+                          <a:latin typeface="Noto Sans"/>
+                          <a:ea typeface="Noto Sans CJK JP"/>
+                          <a:cs typeface="Noto Sans"/>
+                        </a:rPr>
+                        <a:t>ビジネス・金融・法律</a:t>
+                      </a:r>
+                    </a:p>
+                  </a:txBody>
+                  <a:tcPr marL="63500" marR="63500" marT="25400" marB="25400" anchor="ctr">
+                    <a:lnL w="10160">
+                      <a:noFill/>
+                    </a:lnL>
+                    <a:lnR w="10160">
+                      <a:noFill/>
+                    </a:lnR>
+                    <a:lnT w="10160">
+                      <a:solidFill>
+                        <a:srgbClr val="626669"/>
+                      </a:solidFill>
+                    </a:lnT>
+                    <a:lnB w="10160">
+                      <a:noFill/>
+                    </a:lnB>
+                    <a:solidFill>
+                      <a:srgbClr val="FFFEF8"/>
+                    </a:solidFill>
+                  </a:tcPr>
+                </a:tc>
+                <a:tc>
+                  <a:txBody>
+                    <a:bodyPr wrap="square" lIns="0" rIns="0" tIns="0" bIns="0"/>
+                    <a:lstStyle/>
+                    <a:p>
+                      <a:pPr algn="r">
+                        <a:lnSpc>
+                          <a:spcPct val="100000"/>
+                        </a:lnSpc>
+                        <a:spcBef>
+                          <a:spcPts val="0"/>
+                        </a:spcBef>
+                        <a:spcAft>
+                          <a:spcPts val="0"/>
+                        </a:spcAft>
+                        <a:buNone/>
+                      </a:pPr>
+                      <a:r>
+                        <a:rPr sz="2000" b="0" lang="ja-JP">
+                          <a:solidFill>
+                            <a:srgbClr val="303437"/>
+                          </a:solidFill>
+                          <a:latin typeface="Noto Sans"/>
+                          <a:ea typeface="Noto Sans CJK JP"/>
+                          <a:cs typeface="Noto Sans"/>
+                        </a:rPr>
+                        <a:t>-3.2</a:t>
+                      </a:r>
+                    </a:p>
+                  </a:txBody>
+                  <a:tcPr marL="63500" marR="63500" marT="25400" marB="25400" anchor="ctr">
+                    <a:lnL w="10160">
+                      <a:noFill/>
+                    </a:lnL>
+                    <a:lnR w="10160">
+                      <a:noFill/>
+                    </a:lnR>
+                    <a:lnT w="10160">
+                      <a:solidFill>
+                        <a:srgbClr val="626669"/>
+                      </a:solidFill>
+                    </a:lnT>
+                    <a:lnB w="10160">
+                      <a:noFill/>
+                    </a:lnB>
+                    <a:solidFill>
+                      <a:srgbClr val="FFFEF8"/>
+                    </a:solidFill>
+                  </a:tcPr>
+                </a:tc>
+              </a:tr>
+              <a:tr h="431800">
+                <a:tc>
+                  <a:txBody>
+                    <a:bodyPr wrap="square" lIns="0" rIns="0" tIns="0" bIns="0"/>
+                    <a:lstStyle/>
+                    <a:p>
+                      <a:pPr algn="l">
+                        <a:lnSpc>
+                          <a:spcPct val="100000"/>
+                        </a:lnSpc>
+                        <a:spcBef>
+                          <a:spcPts val="0"/>
+                        </a:spcBef>
+                        <a:spcAft>
+                          <a:spcPts val="0"/>
+                        </a:spcAft>
+                        <a:buNone/>
+                      </a:pPr>
+                      <a:r>
+                        <a:rPr sz="2000" b="0" lang="ja-JP">
+                          <a:solidFill>
+                            <a:srgbClr val="303437"/>
+                          </a:solidFill>
+                          <a:latin typeface="Noto Sans"/>
+                          <a:ea typeface="Noto Sans CJK JP"/>
+                          <a:cs typeface="Noto Sans"/>
+                        </a:rPr>
+                        <a:t>娯楽・映画・演劇</a:t>
+                      </a:r>
+                    </a:p>
+                  </a:txBody>
+                  <a:tcPr marL="63500" marR="63500" marT="25400" marB="25400" anchor="ctr">
+                    <a:lnL w="10160">
+                      <a:noFill/>
+                    </a:lnL>
+                    <a:lnR w="10160">
+                      <a:noFill/>
+                    </a:lnR>
+                    <a:lnT w="10160">
+                      <a:noFill/>
+                    </a:lnT>
+                    <a:lnB w="10160">
+                      <a:noFill/>
+                    </a:lnB>
+                    <a:solidFill>
+                      <a:srgbClr val="FFFEF8"/>
+                    </a:solidFill>
+                  </a:tcPr>
+                </a:tc>
+                <a:tc>
+                  <a:txBody>
+                    <a:bodyPr wrap="square" lIns="0" rIns="0" tIns="0" bIns="0"/>
+                    <a:lstStyle/>
+                    <a:p>
+                      <a:pPr algn="r">
+                        <a:lnSpc>
+                          <a:spcPct val="100000"/>
+                        </a:lnSpc>
+                        <a:spcBef>
+                          <a:spcPts val="0"/>
+                        </a:spcBef>
+                        <a:spcAft>
+                          <a:spcPts val="0"/>
+                        </a:spcAft>
+                        <a:buNone/>
+                      </a:pPr>
+                      <a:r>
+                        <a:rPr sz="2000" b="0" lang="ja-JP">
+                          <a:solidFill>
+                            <a:srgbClr val="303437"/>
+                          </a:solidFill>
+                          <a:latin typeface="Noto Sans"/>
+                          <a:ea typeface="Noto Sans CJK JP"/>
+                          <a:cs typeface="Noto Sans"/>
+                        </a:rPr>
+                        <a:t>-2.8</a:t>
+                      </a:r>
+                    </a:p>
+                  </a:txBody>
+                  <a:tcPr marL="63500" marR="63500" marT="25400" marB="25400" anchor="ctr">
+                    <a:lnL w="10160">
+                      <a:noFill/>
+                    </a:lnL>
+                    <a:lnR w="10160">
+                      <a:noFill/>
+                    </a:lnR>
+                    <a:lnT w="10160">
+                      <a:noFill/>
+                    </a:lnT>
+                    <a:lnB w="10160">
+                      <a:noFill/>
+                    </a:lnB>
+                    <a:solidFill>
+                      <a:srgbClr val="FFFEF8"/>
+                    </a:solidFill>
+                  </a:tcPr>
+                </a:tc>
+              </a:tr>
+              <a:tr h="431800">
+                <a:tc>
+                  <a:txBody>
+                    <a:bodyPr wrap="square" lIns="0" rIns="0" tIns="0" bIns="0"/>
+                    <a:lstStyle/>
+                    <a:p>
+                      <a:pPr algn="l">
+                        <a:lnSpc>
+                          <a:spcPct val="100000"/>
+                        </a:lnSpc>
+                        <a:spcBef>
+                          <a:spcPts val="0"/>
+                        </a:spcBef>
+                        <a:spcAft>
+                          <a:spcPts val="0"/>
+                        </a:spcAft>
+                        <a:buNone/>
+                      </a:pPr>
+                      <a:r>
+                        <a:rPr sz="2000" b="0" lang="ja-JP">
+                          <a:solidFill>
+                            <a:srgbClr val="303437"/>
+                          </a:solidFill>
+                          <a:latin typeface="Noto Sans"/>
+                          <a:ea typeface="Noto Sans CJK JP"/>
+                          <a:cs typeface="Noto Sans"/>
+                        </a:rPr>
+                        <a:t>場所・旅行・不動産</a:t>
+                      </a:r>
+                    </a:p>
+                  </a:txBody>
+                  <a:tcPr marL="63500" marR="63500" marT="25400" marB="25400" anchor="ctr">
+                    <a:lnL w="10160">
+                      <a:noFill/>
+                    </a:lnL>
+                    <a:lnR w="10160">
+                      <a:noFill/>
+                    </a:lnR>
+                    <a:lnT w="10160">
+                      <a:noFill/>
+                    </a:lnT>
+                    <a:lnB w="10160">
+                      <a:noFill/>
+                    </a:lnB>
+                    <a:solidFill>
+                      <a:srgbClr val="FFFEF8"/>
+                    </a:solidFill>
+                  </a:tcPr>
+                </a:tc>
+                <a:tc>
+                  <a:txBody>
+                    <a:bodyPr wrap="square" lIns="0" rIns="0" tIns="0" bIns="0"/>
+                    <a:lstStyle/>
+                    <a:p>
+                      <a:pPr algn="r">
+                        <a:lnSpc>
+                          <a:spcPct val="100000"/>
+                        </a:lnSpc>
+                        <a:spcBef>
+                          <a:spcPts val="0"/>
+                        </a:spcBef>
+                        <a:spcAft>
+                          <a:spcPts val="0"/>
+                        </a:spcAft>
+                        <a:buNone/>
+                      </a:pPr>
+                      <a:r>
+                        <a:rPr sz="2000" b="0" lang="ja-JP">
+                          <a:solidFill>
+                            <a:srgbClr val="303437"/>
+                          </a:solidFill>
+                          <a:latin typeface="Noto Sans"/>
+                          <a:ea typeface="Noto Sans CJK JP"/>
+                          <a:cs typeface="Noto Sans"/>
+                        </a:rPr>
+                        <a:t>-2.5</a:t>
+                      </a:r>
+                    </a:p>
+                  </a:txBody>
+                  <a:tcPr marL="63500" marR="63500" marT="25400" marB="25400" anchor="ctr">
+                    <a:lnL w="10160">
+                      <a:noFill/>
+                    </a:lnL>
+                    <a:lnR w="10160">
+                      <a:noFill/>
+                    </a:lnR>
+                    <a:lnT w="10160">
+                      <a:noFill/>
+                    </a:lnT>
+                    <a:lnB w="10160">
+                      <a:noFill/>
+                    </a:lnB>
+                    <a:solidFill>
+                      <a:srgbClr val="FFFEF8"/>
+                    </a:solidFill>
+                  </a:tcPr>
+                </a:tc>
+              </a:tr>
+              <a:tr h="431800">
+                <a:tc>
+                  <a:txBody>
+                    <a:bodyPr wrap="square" lIns="0" rIns="0" tIns="0" bIns="0"/>
+                    <a:lstStyle/>
+                    <a:p>
+                      <a:pPr algn="l">
+                        <a:lnSpc>
+                          <a:spcPct val="100000"/>
+                        </a:lnSpc>
+                        <a:spcBef>
+                          <a:spcPts val="0"/>
+                        </a:spcBef>
+                        <a:spcAft>
+                          <a:spcPts val="0"/>
+                        </a:spcAft>
+                        <a:buNone/>
+                      </a:pPr>
+                      <a:r>
+                        <a:rPr sz="2000" b="0" lang="ja-JP">
+                          <a:solidFill>
+                            <a:srgbClr val="303437"/>
+                          </a:solidFill>
+                          <a:latin typeface="Noto Sans"/>
+                          <a:ea typeface="Noto Sans CJK JP"/>
+                          <a:cs typeface="Noto Sans"/>
+                        </a:rPr>
+                        <a:t>食・夏・レシピ</a:t>
+                      </a:r>
+                    </a:p>
+                  </a:txBody>
+                  <a:tcPr marL="63500" marR="63500" marT="25400" marB="25400" anchor="ctr">
+                    <a:lnL w="10160">
+                      <a:noFill/>
+                    </a:lnL>
+                    <a:lnR w="10160">
+                      <a:noFill/>
+                    </a:lnR>
+                    <a:lnT w="10160">
+                      <a:noFill/>
+                    </a:lnT>
+                    <a:lnB w="10160">
+                      <a:noFill/>
+                    </a:lnB>
+                    <a:solidFill>
+                      <a:srgbClr val="FFFEF8"/>
+                    </a:solidFill>
+                  </a:tcPr>
+                </a:tc>
+                <a:tc>
+                  <a:txBody>
+                    <a:bodyPr wrap="square" lIns="0" rIns="0" tIns="0" bIns="0"/>
+                    <a:lstStyle/>
+                    <a:p>
+                      <a:pPr algn="r">
+                        <a:lnSpc>
+                          <a:spcPct val="100000"/>
+                        </a:lnSpc>
+                        <a:spcBef>
+                          <a:spcPts val="0"/>
+                        </a:spcBef>
+                        <a:spcAft>
+                          <a:spcPts val="0"/>
+                        </a:spcAft>
+                        <a:buNone/>
+                      </a:pPr>
+                      <a:r>
+                        <a:rPr sz="2000" b="0" lang="ja-JP">
+                          <a:solidFill>
+                            <a:srgbClr val="303437"/>
+                          </a:solidFill>
+                          <a:latin typeface="Noto Sans"/>
+                          <a:ea typeface="Noto Sans CJK JP"/>
+                          <a:cs typeface="Noto Sans"/>
+                        </a:rPr>
+                        <a:t>-2.1</a:t>
+                      </a:r>
+                    </a:p>
+                  </a:txBody>
+                  <a:tcPr marL="63500" marR="63500" marT="25400" marB="25400" anchor="ctr">
+                    <a:lnL w="10160">
+                      <a:noFill/>
+                    </a:lnL>
+                    <a:lnR w="10160">
+                      <a:noFill/>
+                    </a:lnR>
+                    <a:lnT w="10160">
+                      <a:noFill/>
+                    </a:lnT>
+                    <a:lnB w="10160">
+                      <a:noFill/>
+                    </a:lnB>
+                    <a:solidFill>
+                      <a:srgbClr val="FFFEF8"/>
+                    </a:solidFill>
+                  </a:tcPr>
+                </a:tc>
+              </a:tr>
+              <a:tr h="431800">
+                <a:tc>
+                  <a:txBody>
+                    <a:bodyPr wrap="square" lIns="0" rIns="0" tIns="0" bIns="0"/>
+                    <a:lstStyle/>
+                    <a:p>
+                      <a:pPr algn="l">
+                        <a:lnSpc>
+                          <a:spcPct val="100000"/>
+                        </a:lnSpc>
+                        <a:spcBef>
+                          <a:spcPts val="0"/>
+                        </a:spcBef>
+                        <a:spcAft>
+                          <a:spcPts val="0"/>
+                        </a:spcAft>
+                        <a:buNone/>
+                      </a:pPr>
+                      <a:r>
+                        <a:rPr sz="2000" b="0" lang="ja-JP">
+                          <a:solidFill>
+                            <a:srgbClr val="303437"/>
+                          </a:solidFill>
+                          <a:latin typeface="Noto Sans"/>
+                          <a:ea typeface="Noto Sans CJK JP"/>
+                          <a:cs typeface="Noto Sans"/>
+                        </a:rPr>
+                        <a:t>スポーツ・チーム・試合</a:t>
+                      </a:r>
+                    </a:p>
+                  </a:txBody>
+                  <a:tcPr marL="63500" marR="63500" marT="25400" marB="25400" anchor="ctr">
+                    <a:lnL w="10160">
+                      <a:noFill/>
+                    </a:lnL>
+                    <a:lnR w="10160">
+                      <a:noFill/>
+                    </a:lnR>
+                    <a:lnT w="10160">
+                      <a:noFill/>
+                    </a:lnT>
+                    <a:lnB w="10160">
+                      <a:noFill/>
+                    </a:lnB>
+                    <a:solidFill>
+                      <a:srgbClr val="FFFEF8"/>
+                    </a:solidFill>
+                  </a:tcPr>
+                </a:tc>
+                <a:tc>
+                  <a:txBody>
+                    <a:bodyPr wrap="square" lIns="0" rIns="0" tIns="0" bIns="0"/>
+                    <a:lstStyle/>
+                    <a:p>
+                      <a:pPr algn="r">
+                        <a:lnSpc>
+                          <a:spcPct val="100000"/>
+                        </a:lnSpc>
+                        <a:spcBef>
+                          <a:spcPts val="0"/>
+                        </a:spcBef>
+                        <a:spcAft>
+                          <a:spcPts val="0"/>
+                        </a:spcAft>
+                        <a:buNone/>
+                      </a:pPr>
+                      <a:r>
+                        <a:rPr sz="2000" b="0" lang="ja-JP">
+                          <a:solidFill>
+                            <a:srgbClr val="303437"/>
+                          </a:solidFill>
+                          <a:latin typeface="Noto Sans"/>
+                          <a:ea typeface="Noto Sans CJK JP"/>
+                          <a:cs typeface="Noto Sans"/>
+                        </a:rPr>
+                        <a:t>-2.1</a:t>
+                      </a:r>
+                    </a:p>
+                  </a:txBody>
+                  <a:tcPr marL="63500" marR="63500" marT="25400" marB="25400" anchor="ctr">
+                    <a:lnL w="10160">
+                      <a:noFill/>
+                    </a:lnL>
+                    <a:lnR w="10160">
+                      <a:noFill/>
+                    </a:lnR>
+                    <a:lnT w="10160">
+                      <a:noFill/>
+                    </a:lnT>
+                    <a:lnB w="10160">
+                      <a:noFill/>
+                    </a:lnB>
+                    <a:solidFill>
+                      <a:srgbClr val="FFFEF8"/>
+                    </a:solidFill>
+                  </a:tcPr>
+                </a:tc>
+              </a:tr>
+              <a:tr h="431800">
+                <a:tc>
+                  <a:txBody>
+                    <a:bodyPr wrap="square" lIns="0" rIns="0" tIns="0" bIns="0"/>
+                    <a:lstStyle/>
+                    <a:p>
+                      <a:pPr algn="l">
+                        <a:lnSpc>
+                          <a:spcPct val="100000"/>
+                        </a:lnSpc>
+                        <a:spcBef>
+                          <a:spcPts val="0"/>
+                        </a:spcBef>
+                        <a:spcAft>
+                          <a:spcPts val="0"/>
+                        </a:spcAft>
+                        <a:buNone/>
+                      </a:pPr>
+                      <a:r>
+                        <a:rPr sz="2000" b="0" lang="ja-JP">
+                          <a:solidFill>
+                            <a:srgbClr val="303437"/>
+                          </a:solidFill>
+                          <a:latin typeface="Noto Sans"/>
+                          <a:ea typeface="Noto Sans CJK JP"/>
+                          <a:cs typeface="Noto Sans"/>
+                        </a:rPr>
+                        <a:t>音楽・娯楽・芸術</a:t>
+                      </a:r>
+                    </a:p>
+                  </a:txBody>
+                  <a:tcPr marL="63500" marR="63500" marT="25400" marB="25400" anchor="ctr">
+                    <a:lnL w="10160">
+                      <a:noFill/>
+                    </a:lnL>
+                    <a:lnR w="10160">
+                      <a:noFill/>
+                    </a:lnR>
+                    <a:lnT w="10160">
+                      <a:noFill/>
+                    </a:lnT>
+                    <a:lnB w="10160">
+                      <a:solidFill>
+                        <a:srgbClr val="626669"/>
+                      </a:solidFill>
+                    </a:lnB>
+                    <a:solidFill>
+                      <a:srgbClr val="FFFEF8"/>
+                    </a:solidFill>
+                  </a:tcPr>
+                </a:tc>
+                <a:tc>
+                  <a:txBody>
+                    <a:bodyPr wrap="square" lIns="0" rIns="0" tIns="0" bIns="0"/>
+                    <a:lstStyle/>
+                    <a:p>
+                      <a:pPr algn="r">
+                        <a:lnSpc>
+                          <a:spcPct val="100000"/>
+                        </a:lnSpc>
+                        <a:spcBef>
+                          <a:spcPts val="0"/>
+                        </a:spcBef>
+                        <a:spcAft>
+                          <a:spcPts val="0"/>
+                        </a:spcAft>
+                        <a:buNone/>
+                      </a:pPr>
+                      <a:r>
+                        <a:rPr sz="2000" b="0" lang="ja-JP">
+                          <a:solidFill>
+                            <a:srgbClr val="303437"/>
+                          </a:solidFill>
+                          <a:latin typeface="Noto Sans"/>
+                          <a:ea typeface="Noto Sans CJK JP"/>
+                          <a:cs typeface="Noto Sans"/>
+                        </a:rPr>
+                        <a:t>-2.1</a:t>
+                      </a:r>
+                    </a:p>
+                  </a:txBody>
+                  <a:tcPr marL="63500" marR="63500" marT="25400" marB="25400" anchor="ctr">
+                    <a:lnL w="10160">
+                      <a:noFill/>
+                    </a:lnL>
+                    <a:lnR w="10160">
+                      <a:noFill/>
+                    </a:lnR>
+                    <a:lnT w="10160">
+                      <a:noFill/>
+                    </a:lnT>
+                    <a:lnB w="10160">
+                      <a:solidFill>
+                        <a:srgbClr val="626669"/>
+                      </a:solidFill>
+                    </a:lnB>
+                    <a:solidFill>
+                      <a:srgbClr val="FFFEF8"/>
+                    </a:solidFill>
+                  </a:tcPr>
+                </a:tc>
+              </a:tr>
+            </a:tbl>
+          </a:graphicData>
+        </a:graphic>
+      </p:graphicFrame>
+      <p:sp>
+        <p:nvSpPr>
+          <p:cNvPr id="5" name="TextBox 4"/>
+          <p:cNvSpPr txBox="1"/>
+          <p:nvPr/>
+        </p:nvSpPr>
+        <p:spPr>
+          <a:xfrm>
+            <a:off x="548640" y="4495800"/>
+            <a:ext cx="8046720" cy="165100"/>
+          </a:xfrm>
+          <a:prstGeom prst="rect">
+            <a:avLst/>
+          </a:prstGeom>
+          <a:noFill/>
+        </p:spPr>
+        <p:txBody>
+          <a:bodyPr wrap="square" lIns="0" rIns="0" tIns="0" bIns="0">
+            <a:spAutoFit/>
+          </a:bodyPr>
+          <a:lstStyle/>
+          <a:p>
+            <a:pPr>
+              <a:lnSpc>
+                <a:spcPct val="100000"/>
+              </a:lnSpc>
+              <a:spcBef>
+                <a:spcPts val="0"/>
+              </a:spcBef>
+              <a:spcAft>
+                <a:spcPts val="0"/>
+              </a:spcAft>
+              <a:buNone/>
+            </a:pPr>
+            <a:r>
+              <a:rPr sz="800" b="0" lang="ja-JP">
+                <a:solidFill>
+                  <a:srgbClr val="626669"/>
+                </a:solidFill>
+                <a:latin typeface="Noto Sans"/>
+                <a:ea typeface="Noto Sans CJK JP"/>
+                <a:cs typeface="Noto Sans"/>
+              </a:rPr>
+              <a:t>各5万文書。差＝FineWeb-Edu − FineWeb。絶対差0.5ポイント以上の39分類から6分類 [1]。</a:t>
+            </a:r>
+          </a:p>
+        </p:txBody>
+      </p:sp>
+      <p:sp>
+        <p:nvSpPr>
+          <p:cNvPr id="6" name="TextBox 5"/>
+          <p:cNvSpPr txBox="1"/>
+          <p:nvPr/>
+        </p:nvSpPr>
+        <p:spPr>
+          <a:xfrm>
+            <a:off x="548640" y="4686300"/>
+            <a:ext cx="8046720" cy="177800"/>
+          </a:xfrm>
+          <a:prstGeom prst="rect">
+            <a:avLst/>
+          </a:prstGeom>
+          <a:noFill/>
+        </p:spPr>
+        <p:txBody>
+          <a:bodyPr wrap="square" lIns="0" rIns="0" tIns="0" bIns="0">
+            <a:spAutoFit/>
+          </a:bodyPr>
+          <a:lstStyle/>
+          <a:p>
+            <a:pPr>
+              <a:lnSpc>
+                <a:spcPct val="100000"/>
+              </a:lnSpc>
+              <a:spcBef>
+                <a:spcPts val="0"/>
+              </a:spcBef>
+              <a:spcAft>
+                <a:spcPts val="0"/>
+              </a:spcAft>
+              <a:buNone/>
+            </a:pPr>
+            <a:r>
+              <a:rPr sz="800" b="0" lang="ja-JP">
+                <a:solidFill>
+                  <a:srgbClr val="626669"/>
+                </a:solidFill>
+                <a:latin typeface="Noto Sans"/>
+                <a:ea typeface="Noto Sans CJK JP"/>
+                <a:cs typeface="Noto Sans"/>
+              </a:rPr>
+              <a:t>[1] Penedo et al. (2024). The FineWeb Datasets: Decanting the Web for the Finest Text Data at Scale. NeurIPS. §4.1, Fig. 18.</a:t>
+            </a:r>
+          </a:p>
+        </p:txBody>
+      </p:sp>
+      <p:sp>
+        <p:nvSpPr>
+          <p:cNvPr id="7" name="TextBox 6"/>
+          <p:cNvSpPr txBox="1"/>
+          <p:nvPr/>
+        </p:nvSpPr>
+        <p:spPr>
+          <a:xfrm>
+            <a:off x="6373995" y="4686300"/>
+            <a:ext cx="2221364" cy="177800"/>
+          </a:xfrm>
+          <a:prstGeom prst="rect">
+            <a:avLst/>
+          </a:prstGeom>
+          <a:noFill/>
+        </p:spPr>
+        <p:txBody>
+          <a:bodyPr wrap="none" lIns="0" rIns="0" tIns="0" bIns="0">
+            <a:spAutoFit/>
+          </a:bodyPr>
+          <a:lstStyle/>
+          <a:p>
+            <a:pPr>
+              <a:lnSpc>
+                <a:spcPct val="100000"/>
+              </a:lnSpc>
+              <a:spcBef>
+                <a:spcPts val="0"/>
+              </a:spcBef>
+              <a:spcAft>
+                <a:spcPts val="0"/>
+              </a:spcAft>
+              <a:buNone/>
+            </a:pPr>
+            <a:r>
+              <a:rPr sz="800" b="0" lang="ja-JP">
+                <a:solidFill>
+                  <a:srgbClr val="626669"/>
+                </a:solidFill>
+                <a:latin typeface="Noto Sans"/>
+                <a:ea typeface="Noto Sans CJK JP"/>
+                <a:cs typeface="Noto Sans"/>
+                <a:hlinkClick r:id="rId2"/>
+              </a:rPr>
+              <a:t>https://arxiv.org/abs/2406.17557v2</a:t>
+            </a:r>
+          </a:p>
+        </p:txBody>
+      </p:sp>
+    </p:spTree>
+  </p:cSld>
+  <p:clrMapOvr>
+    <a:masterClrMapping/>
+  </p:clrMapOvr>
+</p:sld>
+</file>
+
+<file path=ppt/slides/slide84.xml><?xml version="1.0" encoding="utf-8"?>
+<p:sld xmlns:a="http://schemas.openxmlformats.org/drawingml/2006/main" xmlns:p="http://schemas.openxmlformats.org/presentationml/2006/main" xmlns:r="http://schemas.openxmlformats.org/officeDocument/2006/relationships">
+  <p:cSld>
+    <p:spTree>
+      <p:nvGrpSpPr>
+        <p:cNvPr id="1" name=""/>
+        <p:cNvGrpSpPr/>
+        <p:nvPr/>
+      </p:nvGrpSpPr>
+      <p:grpSpPr/>
+      <p:sp>
+        <p:nvSpPr>
+          <p:cNvPr id="2" name="Title 1"/>
+          <p:cNvSpPr>
+            <a:spLocks noGrp="1"/>
+          </p:cNvSpPr>
+          <p:nvPr>
+            <p:ph type="title"/>
+          </p:nvPr>
+        </p:nvSpPr>
+        <p:spPr>
+          <a:xfrm>
+            <a:off x="468172" y="650138"/>
+            <a:ext cx="8206740" cy="616305"/>
+          </a:xfrm>
+        </p:spPr>
+        <p:txBody>
+          <a:bodyPr wrap="square" lIns="0" rIns="0" tIns="0" bIns="0"/>
+          <a:lstStyle/>
+          <a:p>
+            <a:pPr>
+              <a:lnSpc>
+                <a:spcPct val="100000"/>
+              </a:lnSpc>
+              <a:spcBef>
+                <a:spcPts val="0"/>
+              </a:spcBef>
+              <a:spcAft>
+                <a:spcPts val="0"/>
+              </a:spcAft>
+              <a:buNone/>
+            </a:pPr>
+            <a:r>
+              <a:rPr sz="2800" b="1" lang="ja-JP">
+                <a:solidFill>
+                  <a:srgbClr val="303437"/>
+                </a:solidFill>
+                <a:latin typeface="Noto Sans"/>
+                <a:ea typeface="Noto Sans CJK JP"/>
+                <a:cs typeface="Noto Sans"/>
+              </a:rPr>
+              <a:t>FineWeb側で多い話題（2/4）</a:t>
+            </a:r>
+          </a:p>
+        </p:txBody>
+      </p:sp>
+      <p:sp>
+        <p:nvSpPr>
+          <p:cNvPr id="3" name="Title 2"/>
+          <p:cNvSpPr>
+            <a:spLocks noGrp="1"/>
+          </p:cNvSpPr>
+          <p:nvPr>
+            <p:ph type="title" idx="2"/>
+          </p:nvPr>
+        </p:nvSpPr>
+        <p:spPr>
+          <a:xfrm>
+            <a:off x="75895" y="0"/>
+            <a:ext cx="8115300" cy="480059"/>
+          </a:xfrm>
+        </p:spPr>
+        <p:txBody>
+          <a:bodyPr wrap="square" lIns="0" rIns="0" tIns="0" bIns="0" anchor="ctr"/>
+          <a:lstStyle/>
+          <a:p>
+            <a:pPr>
+              <a:lnSpc>
+                <a:spcPct val="100000"/>
+              </a:lnSpc>
+              <a:spcBef>
+                <a:spcPts val="0"/>
+              </a:spcBef>
+              <a:spcAft>
+                <a:spcPts val="0"/>
+              </a:spcAft>
+              <a:buNone/>
+            </a:pPr>
+            <a:r>
+              <a:rPr sz="1400" b="1" lang="ja-JP">
+                <a:solidFill>
+                  <a:srgbClr val="FFFEF8"/>
+                </a:solidFill>
+                <a:latin typeface="Noto Sans"/>
+                <a:ea typeface="Noto Sans CJK JP"/>
+                <a:cs typeface="Noto Sans"/>
+              </a:rPr>
+              <a:t>Appendix 3. 文書選別・話題分布と評価実験の詳細</a:t>
+            </a:r>
+          </a:p>
+        </p:txBody>
+      </p:sp>
+      <p:graphicFrame>
+        <p:nvGraphicFramePr>
+          <p:cNvPr id="4" name="Table 3"/>
+          <p:cNvGraphicFramePr>
+            <a:graphicFrameLocks noGrp="1"/>
+          </p:cNvGraphicFramePr>
+          <p:nvPr/>
+        </p:nvGraphicFramePr>
+        <p:xfrm>
+          <a:off x="548640" y="1371600"/>
+          <a:ext cx="8046720" cy="3022600"/>
+        </p:xfrm>
+        <a:graphic>
+          <a:graphicData uri="http://schemas.openxmlformats.org/drawingml/2006/table">
+            <a:tbl>
+              <a:tblPr firstRow="1" bandRow="1"/>
+              <a:tblGrid>
+                <a:gridCol w="5887720"/>
+                <a:gridCol w="2159000"/>
+              </a:tblGrid>
+              <a:tr h="431800">
+                <a:tc>
+                  <a:txBody>
+                    <a:bodyPr wrap="square" lIns="0" rIns="0" tIns="0" bIns="0"/>
+                    <a:lstStyle/>
+                    <a:p>
+                      <a:pPr algn="l">
+                        <a:lnSpc>
+                          <a:spcPct val="100000"/>
+                        </a:lnSpc>
+                        <a:spcBef>
+                          <a:spcPts val="0"/>
+                        </a:spcBef>
+                        <a:spcAft>
+                          <a:spcPts val="0"/>
+                        </a:spcAft>
+                        <a:buNone/>
+                      </a:pPr>
+                      <a:r>
+                        <a:rPr sz="2000" b="0" lang="ja-JP">
+                          <a:solidFill>
+                            <a:srgbClr val="303437"/>
+                          </a:solidFill>
+                          <a:latin typeface="Noto Sans"/>
+                          <a:ea typeface="Noto Sans CJK JP"/>
+                          <a:cs typeface="Noto Sans"/>
+                        </a:rPr>
+                        <a:t>話題（原著ラベルの和訳）</a:t>
+                      </a:r>
+                    </a:p>
+                  </a:txBody>
+                  <a:tcPr marL="63500" marR="63500" marT="25400" marB="25400" anchor="ctr">
+                    <a:lnL w="10160">
+                      <a:noFill/>
+                    </a:lnL>
+                    <a:lnR w="10160">
+                      <a:noFill/>
+                    </a:lnR>
+                    <a:lnT w="10160">
+                      <a:solidFill>
+                        <a:srgbClr val="626669"/>
+                      </a:solidFill>
+                    </a:lnT>
+                    <a:lnB w="10160">
+                      <a:solidFill>
+                        <a:srgbClr val="626669"/>
+                      </a:solidFill>
+                    </a:lnB>
+                    <a:solidFill>
+                      <a:srgbClr val="FFFEF8"/>
+                    </a:solidFill>
+                  </a:tcPr>
+                </a:tc>
+                <a:tc>
+                  <a:txBody>
+                    <a:bodyPr wrap="square" lIns="0" rIns="0" tIns="0" bIns="0"/>
+                    <a:lstStyle/>
+                    <a:p>
+                      <a:pPr algn="r">
+                        <a:lnSpc>
+                          <a:spcPct val="100000"/>
+                        </a:lnSpc>
+                        <a:spcBef>
+                          <a:spcPts val="0"/>
+                        </a:spcBef>
+                        <a:spcAft>
+                          <a:spcPts val="0"/>
+                        </a:spcAft>
+                        <a:buNone/>
+                      </a:pPr>
+                      <a:r>
+                        <a:rPr sz="2000" b="0" lang="ja-JP">
+                          <a:solidFill>
+                            <a:srgbClr val="303437"/>
+                          </a:solidFill>
+                          <a:latin typeface="Noto Sans"/>
+                          <a:ea typeface="Noto Sans CJK JP"/>
+                          <a:cs typeface="Noto Sans"/>
+                        </a:rPr>
+                        <a:t>差（ポイント）</a:t>
+                      </a:r>
+                    </a:p>
+                  </a:txBody>
+                  <a:tcPr marL="63500" marR="63500" marT="25400" marB="25400" anchor="ctr">
+                    <a:lnL w="10160">
+                      <a:noFill/>
+                    </a:lnL>
+                    <a:lnR w="10160">
+                      <a:noFill/>
+                    </a:lnR>
+                    <a:lnT w="10160">
+                      <a:solidFill>
+                        <a:srgbClr val="626669"/>
+                      </a:solidFill>
+                    </a:lnT>
+                    <a:lnB w="10160">
+                      <a:solidFill>
+                        <a:srgbClr val="626669"/>
+                      </a:solidFill>
+                    </a:lnB>
+                    <a:solidFill>
+                      <a:srgbClr val="FFFEF8"/>
+                    </a:solidFill>
+                  </a:tcPr>
+                </a:tc>
+              </a:tr>
+              <a:tr h="431800">
+                <a:tc>
+                  <a:txBody>
+                    <a:bodyPr wrap="square" lIns="0" rIns="0" tIns="0" bIns="0"/>
+                    <a:lstStyle/>
+                    <a:p>
+                      <a:pPr algn="l">
+                        <a:lnSpc>
+                          <a:spcPct val="100000"/>
+                        </a:lnSpc>
+                        <a:spcBef>
+                          <a:spcPts val="0"/>
+                        </a:spcBef>
+                        <a:spcAft>
+                          <a:spcPts val="0"/>
+                        </a:spcAft>
+                        <a:buNone/>
+                      </a:pPr>
+                      <a:r>
+                        <a:rPr sz="2000" b="0" lang="ja-JP">
+                          <a:solidFill>
+                            <a:srgbClr val="303437"/>
+                          </a:solidFill>
+                          <a:latin typeface="Noto Sans"/>
+                          <a:ea typeface="Noto Sans CJK JP"/>
+                          <a:cs typeface="Noto Sans"/>
+                        </a:rPr>
+                        <a:t>個人生活・家族・余暇</a:t>
+                      </a:r>
+                    </a:p>
+                  </a:txBody>
+                  <a:tcPr marL="63500" marR="63500" marT="25400" marB="25400" anchor="ctr">
+                    <a:lnL w="10160">
+                      <a:noFill/>
+                    </a:lnL>
+                    <a:lnR w="10160">
+                      <a:noFill/>
+                    </a:lnR>
+                    <a:lnT w="10160">
+                      <a:solidFill>
+                        <a:srgbClr val="626669"/>
+                      </a:solidFill>
+                    </a:lnT>
+                    <a:lnB w="10160">
+                      <a:noFill/>
+                    </a:lnB>
+                    <a:solidFill>
+                      <a:srgbClr val="FFFEF8"/>
+                    </a:solidFill>
+                  </a:tcPr>
+                </a:tc>
+                <a:tc>
+                  <a:txBody>
+                    <a:bodyPr wrap="square" lIns="0" rIns="0" tIns="0" bIns="0"/>
+                    <a:lstStyle/>
+                    <a:p>
+                      <a:pPr algn="r">
+                        <a:lnSpc>
+                          <a:spcPct val="100000"/>
+                        </a:lnSpc>
+                        <a:spcBef>
+                          <a:spcPts val="0"/>
+                        </a:spcBef>
+                        <a:spcAft>
+                          <a:spcPts val="0"/>
+                        </a:spcAft>
+                        <a:buNone/>
+                      </a:pPr>
+                      <a:r>
+                        <a:rPr sz="2000" b="0" lang="ja-JP">
+                          <a:solidFill>
+                            <a:srgbClr val="303437"/>
+                          </a:solidFill>
+                          <a:latin typeface="Noto Sans"/>
+                          <a:ea typeface="Noto Sans CJK JP"/>
+                          <a:cs typeface="Noto Sans"/>
+                        </a:rPr>
+                        <a:t>-1.4</a:t>
+                      </a:r>
+                    </a:p>
+                  </a:txBody>
+                  <a:tcPr marL="63500" marR="63500" marT="25400" marB="25400" anchor="ctr">
+                    <a:lnL w="10160">
+                      <a:noFill/>
+                    </a:lnL>
+                    <a:lnR w="10160">
+                      <a:noFill/>
+                    </a:lnR>
+                    <a:lnT w="10160">
+                      <a:solidFill>
+                        <a:srgbClr val="626669"/>
+                      </a:solidFill>
+                    </a:lnT>
+                    <a:lnB w="10160">
+                      <a:noFill/>
+                    </a:lnB>
+                    <a:solidFill>
+                      <a:srgbClr val="FFFEF8"/>
+                    </a:solidFill>
+                  </a:tcPr>
+                </a:tc>
+              </a:tr>
+              <a:tr h="431800">
+                <a:tc>
+                  <a:txBody>
+                    <a:bodyPr wrap="square" lIns="0" rIns="0" tIns="0" bIns="0"/>
+                    <a:lstStyle/>
+                    <a:p>
+                      <a:pPr algn="l">
+                        <a:lnSpc>
+                          <a:spcPct val="100000"/>
+                        </a:lnSpc>
+                        <a:spcBef>
+                          <a:spcPts val="0"/>
+                        </a:spcBef>
+                        <a:spcAft>
+                          <a:spcPts val="0"/>
+                        </a:spcAft>
+                        <a:buNone/>
+                      </a:pPr>
+                      <a:r>
+                        <a:rPr sz="2000" b="0" lang="ja-JP">
+                          <a:solidFill>
+                            <a:srgbClr val="303437"/>
+                          </a:solidFill>
+                          <a:latin typeface="Noto Sans"/>
+                          <a:ea typeface="Noto Sans CJK JP"/>
+                          <a:cs typeface="Noto Sans"/>
+                        </a:rPr>
+                        <a:t>ファッション・衣服・アクセサリー</a:t>
+                      </a:r>
+                    </a:p>
+                  </a:txBody>
+                  <a:tcPr marL="63500" marR="63500" marT="25400" marB="25400" anchor="ctr">
+                    <a:lnL w="10160">
+                      <a:noFill/>
+                    </a:lnL>
+                    <a:lnR w="10160">
+                      <a:noFill/>
+                    </a:lnR>
+                    <a:lnT w="10160">
+                      <a:noFill/>
+                    </a:lnT>
+                    <a:lnB w="10160">
+                      <a:noFill/>
+                    </a:lnB>
+                    <a:solidFill>
+                      <a:srgbClr val="FFFEF8"/>
+                    </a:solidFill>
+                  </a:tcPr>
+                </a:tc>
+                <a:tc>
+                  <a:txBody>
+                    <a:bodyPr wrap="square" lIns="0" rIns="0" tIns="0" bIns="0"/>
+                    <a:lstStyle/>
+                    <a:p>
+                      <a:pPr algn="r">
+                        <a:lnSpc>
+                          <a:spcPct val="100000"/>
+                        </a:lnSpc>
+                        <a:spcBef>
+                          <a:spcPts val="0"/>
+                        </a:spcBef>
+                        <a:spcAft>
+                          <a:spcPts val="0"/>
+                        </a:spcAft>
+                        <a:buNone/>
+                      </a:pPr>
+                      <a:r>
+                        <a:rPr sz="2000" b="0" lang="ja-JP">
+                          <a:solidFill>
+                            <a:srgbClr val="303437"/>
+                          </a:solidFill>
+                          <a:latin typeface="Noto Sans"/>
+                          <a:ea typeface="Noto Sans CJK JP"/>
+                          <a:cs typeface="Noto Sans"/>
+                        </a:rPr>
+                        <a:t>-1.3</a:t>
+                      </a:r>
+                    </a:p>
+                  </a:txBody>
+                  <a:tcPr marL="63500" marR="63500" marT="25400" marB="25400" anchor="ctr">
+                    <a:lnL w="10160">
+                      <a:noFill/>
+                    </a:lnL>
+                    <a:lnR w="10160">
+                      <a:noFill/>
+                    </a:lnR>
+                    <a:lnT w="10160">
+                      <a:noFill/>
+                    </a:lnT>
+                    <a:lnB w="10160">
+                      <a:noFill/>
+                    </a:lnB>
+                    <a:solidFill>
+                      <a:srgbClr val="FFFEF8"/>
+                    </a:solidFill>
+                  </a:tcPr>
+                </a:tc>
+              </a:tr>
+              <a:tr h="431800">
+                <a:tc>
+                  <a:txBody>
+                    <a:bodyPr wrap="square" lIns="0" rIns="0" tIns="0" bIns="0"/>
+                    <a:lstStyle/>
+                    <a:p>
+                      <a:pPr algn="l">
+                        <a:lnSpc>
+                          <a:spcPct val="100000"/>
+                        </a:lnSpc>
+                        <a:spcBef>
+                          <a:spcPts val="0"/>
+                        </a:spcBef>
+                        <a:spcAft>
+                          <a:spcPts val="0"/>
+                        </a:spcAft>
+                        <a:buNone/>
+                      </a:pPr>
+                      <a:r>
+                        <a:rPr sz="2000" b="0" lang="ja-JP">
+                          <a:solidFill>
+                            <a:srgbClr val="303437"/>
+                          </a:solidFill>
+                          <a:latin typeface="Noto Sans"/>
+                          <a:ea typeface="Noto Sans CJK JP"/>
+                          <a:cs typeface="Noto Sans"/>
+                        </a:rPr>
+                        <a:t>犯罪・法律・警察</a:t>
+                      </a:r>
+                    </a:p>
+                  </a:txBody>
+                  <a:tcPr marL="63500" marR="63500" marT="25400" marB="25400" anchor="ctr">
+                    <a:lnL w="10160">
+                      <a:noFill/>
+                    </a:lnL>
+                    <a:lnR w="10160">
+                      <a:noFill/>
+                    </a:lnR>
+                    <a:lnT w="10160">
+                      <a:noFill/>
+                    </a:lnT>
+                    <a:lnB w="10160">
+                      <a:noFill/>
+                    </a:lnB>
+                    <a:solidFill>
+                      <a:srgbClr val="FFFEF8"/>
+                    </a:solidFill>
+                  </a:tcPr>
+                </a:tc>
+                <a:tc>
+                  <a:txBody>
+                    <a:bodyPr wrap="square" lIns="0" rIns="0" tIns="0" bIns="0"/>
+                    <a:lstStyle/>
+                    <a:p>
+                      <a:pPr algn="r">
+                        <a:lnSpc>
+                          <a:spcPct val="100000"/>
+                        </a:lnSpc>
+                        <a:spcBef>
+                          <a:spcPts val="0"/>
+                        </a:spcBef>
+                        <a:spcAft>
+                          <a:spcPts val="0"/>
+                        </a:spcAft>
+                        <a:buNone/>
+                      </a:pPr>
+                      <a:r>
+                        <a:rPr sz="2000" b="0" lang="ja-JP">
+                          <a:solidFill>
+                            <a:srgbClr val="303437"/>
+                          </a:solidFill>
+                          <a:latin typeface="Noto Sans"/>
+                          <a:ea typeface="Noto Sans CJK JP"/>
+                          <a:cs typeface="Noto Sans"/>
+                        </a:rPr>
+                        <a:t>-1.2</a:t>
+                      </a:r>
+                    </a:p>
+                  </a:txBody>
+                  <a:tcPr marL="63500" marR="63500" marT="25400" marB="25400" anchor="ctr">
+                    <a:lnL w="10160">
+                      <a:noFill/>
+                    </a:lnL>
+                    <a:lnR w="10160">
+                      <a:noFill/>
+                    </a:lnR>
+                    <a:lnT w="10160">
+                      <a:noFill/>
+                    </a:lnT>
+                    <a:lnB w="10160">
+                      <a:noFill/>
+                    </a:lnB>
+                    <a:solidFill>
+                      <a:srgbClr val="FFFEF8"/>
+                    </a:solidFill>
+                  </a:tcPr>
+                </a:tc>
+              </a:tr>
+              <a:tr h="431800">
+                <a:tc>
+                  <a:txBody>
+                    <a:bodyPr wrap="square" lIns="0" rIns="0" tIns="0" bIns="0"/>
+                    <a:lstStyle/>
+                    <a:p>
+                      <a:pPr algn="l">
+                        <a:lnSpc>
+                          <a:spcPct val="100000"/>
+                        </a:lnSpc>
+                        <a:spcBef>
+                          <a:spcPts val="0"/>
+                        </a:spcBef>
+                        <a:spcAft>
+                          <a:spcPts val="0"/>
+                        </a:spcAft>
+                        <a:buNone/>
+                      </a:pPr>
+                      <a:r>
+                        <a:rPr sz="2000" b="0" lang="ja-JP">
+                          <a:solidFill>
+                            <a:srgbClr val="303437"/>
+                          </a:solidFill>
+                          <a:latin typeface="Noto Sans"/>
+                          <a:ea typeface="Noto Sans CJK JP"/>
+                          <a:cs typeface="Noto Sans"/>
+                        </a:rPr>
+                        <a:t>ゲーム・技術・ゲーム作品</a:t>
+                      </a:r>
+                    </a:p>
+                  </a:txBody>
+                  <a:tcPr marL="63500" marR="63500" marT="25400" marB="25400" anchor="ctr">
+                    <a:lnL w="10160">
+                      <a:noFill/>
+                    </a:lnL>
+                    <a:lnR w="10160">
+                      <a:noFill/>
+                    </a:lnR>
+                    <a:lnT w="10160">
+                      <a:noFill/>
+                    </a:lnT>
+                    <a:lnB w="10160">
+                      <a:noFill/>
+                    </a:lnB>
+                    <a:solidFill>
+                      <a:srgbClr val="FFFEF8"/>
+                    </a:solidFill>
+                  </a:tcPr>
+                </a:tc>
+                <a:tc>
+                  <a:txBody>
+                    <a:bodyPr wrap="square" lIns="0" rIns="0" tIns="0" bIns="0"/>
+                    <a:lstStyle/>
+                    <a:p>
+                      <a:pPr algn="r">
+                        <a:lnSpc>
+                          <a:spcPct val="100000"/>
+                        </a:lnSpc>
+                        <a:spcBef>
+                          <a:spcPts val="0"/>
+                        </a:spcBef>
+                        <a:spcAft>
+                          <a:spcPts val="0"/>
+                        </a:spcAft>
+                        <a:buNone/>
+                      </a:pPr>
+                      <a:r>
+                        <a:rPr sz="2000" b="0" lang="ja-JP">
+                          <a:solidFill>
+                            <a:srgbClr val="303437"/>
+                          </a:solidFill>
+                          <a:latin typeface="Noto Sans"/>
+                          <a:ea typeface="Noto Sans CJK JP"/>
+                          <a:cs typeface="Noto Sans"/>
+                        </a:rPr>
+                        <a:t>-1.2</a:t>
+                      </a:r>
+                    </a:p>
+                  </a:txBody>
+                  <a:tcPr marL="63500" marR="63500" marT="25400" marB="25400" anchor="ctr">
+                    <a:lnL w="10160">
+                      <a:noFill/>
+                    </a:lnL>
+                    <a:lnR w="10160">
+                      <a:noFill/>
+                    </a:lnR>
+                    <a:lnT w="10160">
+                      <a:noFill/>
+                    </a:lnT>
+                    <a:lnB w="10160">
+                      <a:noFill/>
+                    </a:lnB>
+                    <a:solidFill>
+                      <a:srgbClr val="FFFEF8"/>
+                    </a:solidFill>
+                  </a:tcPr>
+                </a:tc>
+              </a:tr>
+              <a:tr h="431800">
+                <a:tc>
+                  <a:txBody>
+                    <a:bodyPr wrap="square" lIns="0" rIns="0" tIns="0" bIns="0"/>
+                    <a:lstStyle/>
+                    <a:p>
+                      <a:pPr algn="l">
+                        <a:lnSpc>
+                          <a:spcPct val="100000"/>
+                        </a:lnSpc>
+                        <a:spcBef>
+                          <a:spcPts val="0"/>
+                        </a:spcBef>
+                        <a:spcAft>
+                          <a:spcPts val="0"/>
+                        </a:spcAft>
+                        <a:buNone/>
+                      </a:pPr>
+                      <a:r>
+                        <a:rPr sz="2000" b="0" lang="ja-JP">
+                          <a:solidFill>
+                            <a:srgbClr val="303437"/>
+                          </a:solidFill>
+                          <a:latin typeface="Noto Sans"/>
+                          <a:ea typeface="Noto Sans CJK JP"/>
+                          <a:cs typeface="Noto Sans"/>
+                        </a:rPr>
+                        <a:t>技術・ガジェット・革新</a:t>
+                      </a:r>
+                    </a:p>
+                  </a:txBody>
+                  <a:tcPr marL="63500" marR="63500" marT="25400" marB="25400" anchor="ctr">
+                    <a:lnL w="10160">
+                      <a:noFill/>
+                    </a:lnL>
+                    <a:lnR w="10160">
+                      <a:noFill/>
+                    </a:lnR>
+                    <a:lnT w="10160">
+                      <a:noFill/>
+                    </a:lnT>
+                    <a:lnB w="10160">
+                      <a:noFill/>
+                    </a:lnB>
+                    <a:solidFill>
+                      <a:srgbClr val="FFFEF8"/>
+                    </a:solidFill>
+                  </a:tcPr>
+                </a:tc>
+                <a:tc>
+                  <a:txBody>
+                    <a:bodyPr wrap="square" lIns="0" rIns="0" tIns="0" bIns="0"/>
+                    <a:lstStyle/>
+                    <a:p>
+                      <a:pPr algn="r">
+                        <a:lnSpc>
+                          <a:spcPct val="100000"/>
+                        </a:lnSpc>
+                        <a:spcBef>
+                          <a:spcPts val="0"/>
+                        </a:spcBef>
+                        <a:spcAft>
+                          <a:spcPts val="0"/>
+                        </a:spcAft>
+                        <a:buNone/>
+                      </a:pPr>
+                      <a:r>
+                        <a:rPr sz="2000" b="0" lang="ja-JP">
+                          <a:solidFill>
+                            <a:srgbClr val="303437"/>
+                          </a:solidFill>
+                          <a:latin typeface="Noto Sans"/>
+                          <a:ea typeface="Noto Sans CJK JP"/>
+                          <a:cs typeface="Noto Sans"/>
+                        </a:rPr>
+                        <a:t>-1.1</a:t>
+                      </a:r>
+                    </a:p>
+                  </a:txBody>
+                  <a:tcPr marL="63500" marR="63500" marT="25400" marB="25400" anchor="ctr">
+                    <a:lnL w="10160">
+                      <a:noFill/>
+                    </a:lnL>
+                    <a:lnR w="10160">
+                      <a:noFill/>
+                    </a:lnR>
+                    <a:lnT w="10160">
+                      <a:noFill/>
+                    </a:lnT>
+                    <a:lnB w="10160">
+                      <a:noFill/>
+                    </a:lnB>
+                    <a:solidFill>
+                      <a:srgbClr val="FFFEF8"/>
+                    </a:solidFill>
+                  </a:tcPr>
+                </a:tc>
+              </a:tr>
+              <a:tr h="431800">
+                <a:tc>
+                  <a:txBody>
+                    <a:bodyPr wrap="square" lIns="0" rIns="0" tIns="0" bIns="0"/>
+                    <a:lstStyle/>
+                    <a:p>
+                      <a:pPr algn="l">
+                        <a:lnSpc>
+                          <a:spcPct val="100000"/>
+                        </a:lnSpc>
+                        <a:spcBef>
+                          <a:spcPts val="0"/>
+                        </a:spcBef>
+                        <a:spcAft>
+                          <a:spcPts val="0"/>
+                        </a:spcAft>
+                        <a:buNone/>
+                      </a:pPr>
+                      <a:r>
+                        <a:rPr sz="2000" b="0" lang="ja-JP">
+                          <a:solidFill>
+                            <a:srgbClr val="303437"/>
+                          </a:solidFill>
+                          <a:latin typeface="Noto Sans"/>
+                          <a:ea typeface="Noto Sans CJK JP"/>
+                          <a:cs typeface="Noto Sans"/>
+                        </a:rPr>
+                        <a:t>スポーツ・フットボール・サッカー</a:t>
+                      </a:r>
+                    </a:p>
+                  </a:txBody>
+                  <a:tcPr marL="63500" marR="63500" marT="25400" marB="25400" anchor="ctr">
+                    <a:lnL w="10160">
+                      <a:noFill/>
+                    </a:lnL>
+                    <a:lnR w="10160">
+                      <a:noFill/>
+                    </a:lnR>
+                    <a:lnT w="10160">
+                      <a:noFill/>
+                    </a:lnT>
+                    <a:lnB w="10160">
+                      <a:solidFill>
+                        <a:srgbClr val="626669"/>
+                      </a:solidFill>
+                    </a:lnB>
+                    <a:solidFill>
+                      <a:srgbClr val="FFFEF8"/>
+                    </a:solidFill>
+                  </a:tcPr>
+                </a:tc>
+                <a:tc>
+                  <a:txBody>
+                    <a:bodyPr wrap="square" lIns="0" rIns="0" tIns="0" bIns="0"/>
+                    <a:lstStyle/>
+                    <a:p>
+                      <a:pPr algn="r">
+                        <a:lnSpc>
+                          <a:spcPct val="100000"/>
+                        </a:lnSpc>
+                        <a:spcBef>
+                          <a:spcPts val="0"/>
+                        </a:spcBef>
+                        <a:spcAft>
+                          <a:spcPts val="0"/>
+                        </a:spcAft>
+                        <a:buNone/>
+                      </a:pPr>
+                      <a:r>
+                        <a:rPr sz="2000" b="0" lang="ja-JP">
+                          <a:solidFill>
+                            <a:srgbClr val="303437"/>
+                          </a:solidFill>
+                          <a:latin typeface="Noto Sans"/>
+                          <a:ea typeface="Noto Sans CJK JP"/>
+                          <a:cs typeface="Noto Sans"/>
+                        </a:rPr>
+                        <a:t>-1.0</a:t>
+                      </a:r>
+                    </a:p>
+                  </a:txBody>
+                  <a:tcPr marL="63500" marR="63500" marT="25400" marB="25400" anchor="ctr">
+                    <a:lnL w="10160">
+                      <a:noFill/>
+                    </a:lnL>
+                    <a:lnR w="10160">
+                      <a:noFill/>
+                    </a:lnR>
+                    <a:lnT w="10160">
+                      <a:noFill/>
+                    </a:lnT>
+                    <a:lnB w="10160">
+                      <a:solidFill>
+                        <a:srgbClr val="626669"/>
+                      </a:solidFill>
+                    </a:lnB>
+                    <a:solidFill>
+                      <a:srgbClr val="FFFEF8"/>
+                    </a:solidFill>
+                  </a:tcPr>
+                </a:tc>
+              </a:tr>
+            </a:tbl>
+          </a:graphicData>
+        </a:graphic>
+      </p:graphicFrame>
+      <p:sp>
+        <p:nvSpPr>
+          <p:cNvPr id="5" name="TextBox 4"/>
+          <p:cNvSpPr txBox="1"/>
+          <p:nvPr/>
+        </p:nvSpPr>
+        <p:spPr>
+          <a:xfrm>
+            <a:off x="548640" y="4495800"/>
+            <a:ext cx="8046720" cy="165100"/>
+          </a:xfrm>
+          <a:prstGeom prst="rect">
+            <a:avLst/>
+          </a:prstGeom>
+          <a:noFill/>
+        </p:spPr>
+        <p:txBody>
+          <a:bodyPr wrap="square" lIns="0" rIns="0" tIns="0" bIns="0">
+            <a:spAutoFit/>
+          </a:bodyPr>
+          <a:lstStyle/>
+          <a:p>
+            <a:pPr>
+              <a:lnSpc>
+                <a:spcPct val="100000"/>
+              </a:lnSpc>
+              <a:spcBef>
+                <a:spcPts val="0"/>
+              </a:spcBef>
+              <a:spcAft>
+                <a:spcPts val="0"/>
+              </a:spcAft>
+              <a:buNone/>
+            </a:pPr>
+            <a:r>
+              <a:rPr sz="800" b="0" lang="ja-JP">
+                <a:solidFill>
+                  <a:srgbClr val="626669"/>
+                </a:solidFill>
+                <a:latin typeface="Noto Sans"/>
+                <a:ea typeface="Noto Sans CJK JP"/>
+                <a:cs typeface="Noto Sans"/>
+              </a:rPr>
+              <a:t>各5万文書。差＝FineWeb-Edu − FineWeb。絶対差0.5ポイント以上の39分類から6分類 [1]。</a:t>
+            </a:r>
+          </a:p>
+        </p:txBody>
+      </p:sp>
+      <p:sp>
+        <p:nvSpPr>
+          <p:cNvPr id="6" name="TextBox 5"/>
+          <p:cNvSpPr txBox="1"/>
+          <p:nvPr/>
+        </p:nvSpPr>
+        <p:spPr>
+          <a:xfrm>
+            <a:off x="548640" y="4686300"/>
+            <a:ext cx="8046720" cy="177800"/>
+          </a:xfrm>
+          <a:prstGeom prst="rect">
+            <a:avLst/>
+          </a:prstGeom>
+          <a:noFill/>
+        </p:spPr>
+        <p:txBody>
+          <a:bodyPr wrap="square" lIns="0" rIns="0" tIns="0" bIns="0">
+            <a:spAutoFit/>
+          </a:bodyPr>
+          <a:lstStyle/>
+          <a:p>
+            <a:pPr>
+              <a:lnSpc>
+                <a:spcPct val="100000"/>
+              </a:lnSpc>
+              <a:spcBef>
+                <a:spcPts val="0"/>
+              </a:spcBef>
+              <a:spcAft>
+                <a:spcPts val="0"/>
+              </a:spcAft>
+              <a:buNone/>
+            </a:pPr>
+            <a:r>
+              <a:rPr sz="800" b="0" lang="ja-JP">
+                <a:solidFill>
+                  <a:srgbClr val="626669"/>
+                </a:solidFill>
+                <a:latin typeface="Noto Sans"/>
+                <a:ea typeface="Noto Sans CJK JP"/>
+                <a:cs typeface="Noto Sans"/>
+              </a:rPr>
+              <a:t>[1] Penedo et al. (2024). The FineWeb Datasets: Decanting the Web for the Finest Text Data at Scale. NeurIPS. §4.1, Fig. 18.</a:t>
+            </a:r>
+          </a:p>
+        </p:txBody>
+      </p:sp>
+      <p:sp>
+        <p:nvSpPr>
+          <p:cNvPr id="7" name="TextBox 6"/>
+          <p:cNvSpPr txBox="1"/>
+          <p:nvPr/>
+        </p:nvSpPr>
+        <p:spPr>
+          <a:xfrm>
+            <a:off x="6373995" y="4686300"/>
+            <a:ext cx="2221364" cy="177800"/>
+          </a:xfrm>
+          <a:prstGeom prst="rect">
+            <a:avLst/>
+          </a:prstGeom>
+          <a:noFill/>
+        </p:spPr>
+        <p:txBody>
+          <a:bodyPr wrap="none" lIns="0" rIns="0" tIns="0" bIns="0">
+            <a:spAutoFit/>
+          </a:bodyPr>
+          <a:lstStyle/>
+          <a:p>
+            <a:pPr>
+              <a:lnSpc>
+                <a:spcPct val="100000"/>
+              </a:lnSpc>
+              <a:spcBef>
+                <a:spcPts val="0"/>
+              </a:spcBef>
+              <a:spcAft>
+                <a:spcPts val="0"/>
+              </a:spcAft>
+              <a:buNone/>
+            </a:pPr>
+            <a:r>
+              <a:rPr sz="800" b="0" lang="ja-JP">
+                <a:solidFill>
+                  <a:srgbClr val="626669"/>
+                </a:solidFill>
+                <a:latin typeface="Noto Sans"/>
+                <a:ea typeface="Noto Sans CJK JP"/>
+                <a:cs typeface="Noto Sans"/>
+                <a:hlinkClick r:id="rId2"/>
+              </a:rPr>
+              <a:t>https://arxiv.org/abs/2406.17557v2</a:t>
+            </a:r>
+          </a:p>
+        </p:txBody>
+      </p:sp>
+    </p:spTree>
+  </p:cSld>
+  <p:clrMapOvr>
+    <a:masterClrMapping/>
+  </p:clrMapOvr>
+</p:sld>
+</file>
+
+<file path=ppt/slides/slide85.xml><?xml version="1.0" encoding="utf-8"?>
+<p:sld xmlns:a="http://schemas.openxmlformats.org/drawingml/2006/main" xmlns:p="http://schemas.openxmlformats.org/presentationml/2006/main" xmlns:r="http://schemas.openxmlformats.org/officeDocument/2006/relationships">
+  <p:cSld>
+    <p:spTree>
+      <p:nvGrpSpPr>
+        <p:cNvPr id="1" name=""/>
+        <p:cNvGrpSpPr/>
+        <p:nvPr/>
+      </p:nvGrpSpPr>
+      <p:grpSpPr/>
+      <p:sp>
+        <p:nvSpPr>
+          <p:cNvPr id="2" name="Title 1"/>
+          <p:cNvSpPr>
+            <a:spLocks noGrp="1"/>
+          </p:cNvSpPr>
+          <p:nvPr>
+            <p:ph type="title"/>
+          </p:nvPr>
+        </p:nvSpPr>
+        <p:spPr>
+          <a:xfrm>
+            <a:off x="468172" y="650138"/>
+            <a:ext cx="8206740" cy="616305"/>
+          </a:xfrm>
+        </p:spPr>
+        <p:txBody>
+          <a:bodyPr wrap="square" lIns="0" rIns="0" tIns="0" bIns="0"/>
+          <a:lstStyle/>
+          <a:p>
+            <a:pPr>
+              <a:lnSpc>
+                <a:spcPct val="100000"/>
+              </a:lnSpc>
+              <a:spcBef>
+                <a:spcPts val="0"/>
+              </a:spcBef>
+              <a:spcAft>
+                <a:spcPts val="0"/>
+              </a:spcAft>
+              <a:buNone/>
+            </a:pPr>
+            <a:r>
+              <a:rPr sz="2800" b="1" lang="ja-JP">
+                <a:solidFill>
+                  <a:srgbClr val="303437"/>
+                </a:solidFill>
+                <a:latin typeface="Noto Sans"/>
+                <a:ea typeface="Noto Sans CJK JP"/>
+                <a:cs typeface="Noto Sans"/>
+              </a:rPr>
+              <a:t>FineWeb側で多い話題（3/4）</a:t>
+            </a:r>
+          </a:p>
+        </p:txBody>
+      </p:sp>
+      <p:sp>
+        <p:nvSpPr>
+          <p:cNvPr id="3" name="Title 2"/>
+          <p:cNvSpPr>
+            <a:spLocks noGrp="1"/>
+          </p:cNvSpPr>
+          <p:nvPr>
+            <p:ph type="title" idx="2"/>
+          </p:nvPr>
+        </p:nvSpPr>
+        <p:spPr>
+          <a:xfrm>
+            <a:off x="75895" y="0"/>
+            <a:ext cx="8115300" cy="480059"/>
+          </a:xfrm>
+        </p:spPr>
+        <p:txBody>
+          <a:bodyPr wrap="square" lIns="0" rIns="0" tIns="0" bIns="0" anchor="ctr"/>
+          <a:lstStyle/>
+          <a:p>
+            <a:pPr>
+              <a:lnSpc>
+                <a:spcPct val="100000"/>
+              </a:lnSpc>
+              <a:spcBef>
+                <a:spcPts val="0"/>
+              </a:spcBef>
+              <a:spcAft>
+                <a:spcPts val="0"/>
+              </a:spcAft>
+              <a:buNone/>
+            </a:pPr>
+            <a:r>
+              <a:rPr sz="1400" b="1" lang="ja-JP">
+                <a:solidFill>
+                  <a:srgbClr val="FFFEF8"/>
+                </a:solidFill>
+                <a:latin typeface="Noto Sans"/>
+                <a:ea typeface="Noto Sans CJK JP"/>
+                <a:cs typeface="Noto Sans"/>
+              </a:rPr>
+              <a:t>Appendix 3. 文書選別・話題分布と評価実験の詳細</a:t>
+            </a:r>
+          </a:p>
+        </p:txBody>
+      </p:sp>
+      <p:graphicFrame>
+        <p:nvGraphicFramePr>
+          <p:cNvPr id="4" name="Table 3"/>
+          <p:cNvGraphicFramePr>
+            <a:graphicFrameLocks noGrp="1"/>
+          </p:cNvGraphicFramePr>
+          <p:nvPr/>
+        </p:nvGraphicFramePr>
+        <p:xfrm>
+          <a:off x="548640" y="1371600"/>
+          <a:ext cx="8046720" cy="3022600"/>
+        </p:xfrm>
+        <a:graphic>
+          <a:graphicData uri="http://schemas.openxmlformats.org/drawingml/2006/table">
+            <a:tbl>
+              <a:tblPr firstRow="1" bandRow="1"/>
+              <a:tblGrid>
+                <a:gridCol w="5887720"/>
+                <a:gridCol w="2159000"/>
+              </a:tblGrid>
+              <a:tr h="431800">
+                <a:tc>
+                  <a:txBody>
+                    <a:bodyPr wrap="square" lIns="0" rIns="0" tIns="0" bIns="0"/>
+                    <a:lstStyle/>
+                    <a:p>
+                      <a:pPr algn="l">
+                        <a:lnSpc>
+                          <a:spcPct val="100000"/>
+                        </a:lnSpc>
+                        <a:spcBef>
+                          <a:spcPts val="0"/>
+                        </a:spcBef>
+                        <a:spcAft>
+                          <a:spcPts val="0"/>
+                        </a:spcAft>
+                        <a:buNone/>
+                      </a:pPr>
+                      <a:r>
+                        <a:rPr sz="2000" b="0" lang="ja-JP">
+                          <a:solidFill>
+                            <a:srgbClr val="303437"/>
+                          </a:solidFill>
+                          <a:latin typeface="Noto Sans"/>
+                          <a:ea typeface="Noto Sans CJK JP"/>
+                          <a:cs typeface="Noto Sans"/>
+                        </a:rPr>
+                        <a:t>話題（原著ラベルの和訳）</a:t>
+                      </a:r>
+                    </a:p>
+                  </a:txBody>
+                  <a:tcPr marL="63500" marR="63500" marT="25400" marB="25400" anchor="ctr">
+                    <a:lnL w="10160">
+                      <a:noFill/>
+                    </a:lnL>
+                    <a:lnR w="10160">
+                      <a:noFill/>
+                    </a:lnR>
+                    <a:lnT w="10160">
+                      <a:solidFill>
+                        <a:srgbClr val="626669"/>
+                      </a:solidFill>
+                    </a:lnT>
+                    <a:lnB w="10160">
+                      <a:solidFill>
+                        <a:srgbClr val="626669"/>
+                      </a:solidFill>
+                    </a:lnB>
+                    <a:solidFill>
+                      <a:srgbClr val="FFFEF8"/>
+                    </a:solidFill>
+                  </a:tcPr>
+                </a:tc>
+                <a:tc>
+                  <a:txBody>
+                    <a:bodyPr wrap="square" lIns="0" rIns="0" tIns="0" bIns="0"/>
+                    <a:lstStyle/>
+                    <a:p>
+                      <a:pPr algn="r">
+                        <a:lnSpc>
+                          <a:spcPct val="100000"/>
+                        </a:lnSpc>
+                        <a:spcBef>
+                          <a:spcPts val="0"/>
+                        </a:spcBef>
+                        <a:spcAft>
+                          <a:spcPts val="0"/>
+                        </a:spcAft>
+                        <a:buNone/>
+                      </a:pPr>
+                      <a:r>
+                        <a:rPr sz="2000" b="0" lang="ja-JP">
+                          <a:solidFill>
+                            <a:srgbClr val="303437"/>
+                          </a:solidFill>
+                          <a:latin typeface="Noto Sans"/>
+                          <a:ea typeface="Noto Sans CJK JP"/>
+                          <a:cs typeface="Noto Sans"/>
+                        </a:rPr>
+                        <a:t>差（ポイント）</a:t>
+                      </a:r>
+                    </a:p>
+                  </a:txBody>
+                  <a:tcPr marL="63500" marR="63500" marT="25400" marB="25400" anchor="ctr">
+                    <a:lnL w="10160">
+                      <a:noFill/>
+                    </a:lnL>
+                    <a:lnR w="10160">
+                      <a:noFill/>
+                    </a:lnR>
+                    <a:lnT w="10160">
+                      <a:solidFill>
+                        <a:srgbClr val="626669"/>
+                      </a:solidFill>
+                    </a:lnT>
+                    <a:lnB w="10160">
+                      <a:solidFill>
+                        <a:srgbClr val="626669"/>
+                      </a:solidFill>
+                    </a:lnB>
+                    <a:solidFill>
+                      <a:srgbClr val="FFFEF8"/>
+                    </a:solidFill>
+                  </a:tcPr>
+                </a:tc>
+              </a:tr>
+              <a:tr h="431800">
+                <a:tc>
+                  <a:txBody>
+                    <a:bodyPr wrap="square" lIns="0" rIns="0" tIns="0" bIns="0"/>
+                    <a:lstStyle/>
+                    <a:p>
+                      <a:pPr algn="l">
+                        <a:lnSpc>
+                          <a:spcPct val="100000"/>
+                        </a:lnSpc>
+                        <a:spcBef>
+                          <a:spcPts val="0"/>
+                        </a:spcBef>
+                        <a:spcAft>
+                          <a:spcPts val="0"/>
+                        </a:spcAft>
+                        <a:buNone/>
+                      </a:pPr>
+                      <a:r>
+                        <a:rPr sz="2000" b="0" lang="ja-JP">
+                          <a:solidFill>
+                            <a:srgbClr val="303437"/>
+                          </a:solidFill>
+                          <a:latin typeface="Noto Sans"/>
+                          <a:ea typeface="Noto Sans CJK JP"/>
+                          <a:cs typeface="Noto Sans"/>
+                        </a:rPr>
+                        <a:t>自動車・自動車産業・産業</a:t>
+                      </a:r>
+                    </a:p>
+                  </a:txBody>
+                  <a:tcPr marL="63500" marR="63500" marT="25400" marB="25400" anchor="ctr">
+                    <a:lnL w="10160">
+                      <a:noFill/>
+                    </a:lnL>
+                    <a:lnR w="10160">
+                      <a:noFill/>
+                    </a:lnR>
+                    <a:lnT w="10160">
+                      <a:solidFill>
+                        <a:srgbClr val="626669"/>
+                      </a:solidFill>
+                    </a:lnT>
+                    <a:lnB w="10160">
+                      <a:noFill/>
+                    </a:lnB>
+                    <a:solidFill>
+                      <a:srgbClr val="FFFEF8"/>
+                    </a:solidFill>
+                  </a:tcPr>
+                </a:tc>
+                <a:tc>
+                  <a:txBody>
+                    <a:bodyPr wrap="square" lIns="0" rIns="0" tIns="0" bIns="0"/>
+                    <a:lstStyle/>
+                    <a:p>
+                      <a:pPr algn="r">
+                        <a:lnSpc>
+                          <a:spcPct val="100000"/>
+                        </a:lnSpc>
+                        <a:spcBef>
+                          <a:spcPts val="0"/>
+                        </a:spcBef>
+                        <a:spcAft>
+                          <a:spcPts val="0"/>
+                        </a:spcAft>
+                        <a:buNone/>
+                      </a:pPr>
+                      <a:r>
+                        <a:rPr sz="2000" b="0" lang="ja-JP">
+                          <a:solidFill>
+                            <a:srgbClr val="303437"/>
+                          </a:solidFill>
+                          <a:latin typeface="Noto Sans"/>
+                          <a:ea typeface="Noto Sans CJK JP"/>
+                          <a:cs typeface="Noto Sans"/>
+                        </a:rPr>
+                        <a:t>-1.0</a:t>
+                      </a:r>
+                    </a:p>
+                  </a:txBody>
+                  <a:tcPr marL="63500" marR="63500" marT="25400" marB="25400" anchor="ctr">
+                    <a:lnL w="10160">
+                      <a:noFill/>
+                    </a:lnL>
+                    <a:lnR w="10160">
+                      <a:noFill/>
+                    </a:lnR>
+                    <a:lnT w="10160">
+                      <a:solidFill>
+                        <a:srgbClr val="626669"/>
+                      </a:solidFill>
+                    </a:lnT>
+                    <a:lnB w="10160">
+                      <a:noFill/>
+                    </a:lnB>
+                    <a:solidFill>
+                      <a:srgbClr val="FFFEF8"/>
+                    </a:solidFill>
+                  </a:tcPr>
+                </a:tc>
+              </a:tr>
+              <a:tr h="431800">
+                <a:tc>
+                  <a:txBody>
+                    <a:bodyPr wrap="square" lIns="0" rIns="0" tIns="0" bIns="0"/>
+                    <a:lstStyle/>
+                    <a:p>
+                      <a:pPr algn="l">
+                        <a:lnSpc>
+                          <a:spcPct val="100000"/>
+                        </a:lnSpc>
+                        <a:spcBef>
+                          <a:spcPts val="0"/>
+                        </a:spcBef>
+                        <a:spcAft>
+                          <a:spcPts val="0"/>
+                        </a:spcAft>
+                        <a:buNone/>
+                      </a:pPr>
+                      <a:r>
+                        <a:rPr sz="2000" b="0" lang="ja-JP">
+                          <a:solidFill>
+                            <a:srgbClr val="303437"/>
+                          </a:solidFill>
+                          <a:latin typeface="Noto Sans"/>
+                          <a:ea typeface="Noto Sans CJK JP"/>
+                          <a:cs typeface="Noto Sans"/>
+                        </a:rPr>
+                        <a:t>文学・戦争・ファンタジー</a:t>
+                      </a:r>
+                    </a:p>
+                  </a:txBody>
+                  <a:tcPr marL="63500" marR="63500" marT="25400" marB="25400" anchor="ctr">
+                    <a:lnL w="10160">
+                      <a:noFill/>
+                    </a:lnL>
+                    <a:lnR w="10160">
+                      <a:noFill/>
+                    </a:lnR>
+                    <a:lnT w="10160">
+                      <a:noFill/>
+                    </a:lnT>
+                    <a:lnB w="10160">
+                      <a:noFill/>
+                    </a:lnB>
+                    <a:solidFill>
+                      <a:srgbClr val="FFFEF8"/>
+                    </a:solidFill>
+                  </a:tcPr>
+                </a:tc>
+                <a:tc>
+                  <a:txBody>
+                    <a:bodyPr wrap="square" lIns="0" rIns="0" tIns="0" bIns="0"/>
+                    <a:lstStyle/>
+                    <a:p>
+                      <a:pPr algn="r">
+                        <a:lnSpc>
+                          <a:spcPct val="100000"/>
+                        </a:lnSpc>
+                        <a:spcBef>
+                          <a:spcPts val="0"/>
+                        </a:spcBef>
+                        <a:spcAft>
+                          <a:spcPts val="0"/>
+                        </a:spcAft>
+                        <a:buNone/>
+                      </a:pPr>
+                      <a:r>
+                        <a:rPr sz="2000" b="0" lang="ja-JP">
+                          <a:solidFill>
+                            <a:srgbClr val="303437"/>
+                          </a:solidFill>
+                          <a:latin typeface="Noto Sans"/>
+                          <a:ea typeface="Noto Sans CJK JP"/>
+                          <a:cs typeface="Noto Sans"/>
+                        </a:rPr>
+                        <a:t>-0.8</a:t>
+                      </a:r>
+                    </a:p>
+                  </a:txBody>
+                  <a:tcPr marL="63500" marR="63500" marT="25400" marB="25400" anchor="ctr">
+                    <a:lnL w="10160">
+                      <a:noFill/>
+                    </a:lnL>
+                    <a:lnR w="10160">
+                      <a:noFill/>
+                    </a:lnR>
+                    <a:lnT w="10160">
+                      <a:noFill/>
+                    </a:lnT>
+                    <a:lnB w="10160">
+                      <a:noFill/>
+                    </a:lnB>
+                    <a:solidFill>
+                      <a:srgbClr val="FFFEF8"/>
+                    </a:solidFill>
+                  </a:tcPr>
+                </a:tc>
+              </a:tr>
+              <a:tr h="431800">
+                <a:tc>
+                  <a:txBody>
+                    <a:bodyPr wrap="square" lIns="0" rIns="0" tIns="0" bIns="0"/>
+                    <a:lstStyle/>
+                    <a:p>
+                      <a:pPr algn="l">
+                        <a:lnSpc>
+                          <a:spcPct val="100000"/>
+                        </a:lnSpc>
+                        <a:spcBef>
+                          <a:spcPts val="0"/>
+                        </a:spcBef>
+                        <a:spcAft>
+                          <a:spcPts val="0"/>
+                        </a:spcAft>
+                        <a:buNone/>
+                      </a:pPr>
+                      <a:r>
+                        <a:rPr sz="2000" b="0" lang="ja-JP">
+                          <a:solidFill>
+                            <a:srgbClr val="303437"/>
+                          </a:solidFill>
+                          <a:latin typeface="Noto Sans"/>
+                          <a:ea typeface="Noto Sans CJK JP"/>
+                          <a:cs typeface="Noto Sans"/>
+                        </a:rPr>
+                        <a:t>手芸・個人生活・日記</a:t>
+                      </a:r>
+                    </a:p>
+                  </a:txBody>
+                  <a:tcPr marL="63500" marR="63500" marT="25400" marB="25400" anchor="ctr">
+                    <a:lnL w="10160">
+                      <a:noFill/>
+                    </a:lnL>
+                    <a:lnR w="10160">
+                      <a:noFill/>
+                    </a:lnR>
+                    <a:lnT w="10160">
+                      <a:noFill/>
+                    </a:lnT>
+                    <a:lnB w="10160">
+                      <a:noFill/>
+                    </a:lnB>
+                    <a:solidFill>
+                      <a:srgbClr val="FFFEF8"/>
+                    </a:solidFill>
+                  </a:tcPr>
+                </a:tc>
+                <a:tc>
+                  <a:txBody>
+                    <a:bodyPr wrap="square" lIns="0" rIns="0" tIns="0" bIns="0"/>
+                    <a:lstStyle/>
+                    <a:p>
+                      <a:pPr algn="r">
+                        <a:lnSpc>
+                          <a:spcPct val="100000"/>
+                        </a:lnSpc>
+                        <a:spcBef>
+                          <a:spcPts val="0"/>
+                        </a:spcBef>
+                        <a:spcAft>
+                          <a:spcPts val="0"/>
+                        </a:spcAft>
+                        <a:buNone/>
+                      </a:pPr>
+                      <a:r>
+                        <a:rPr sz="2000" b="0" lang="ja-JP">
+                          <a:solidFill>
+                            <a:srgbClr val="303437"/>
+                          </a:solidFill>
+                          <a:latin typeface="Noto Sans"/>
+                          <a:ea typeface="Noto Sans CJK JP"/>
+                          <a:cs typeface="Noto Sans"/>
+                        </a:rPr>
+                        <a:t>-0.8</a:t>
+                      </a:r>
+                    </a:p>
+                  </a:txBody>
+                  <a:tcPr marL="63500" marR="63500" marT="25400" marB="25400" anchor="ctr">
+                    <a:lnL w="10160">
+                      <a:noFill/>
+                    </a:lnL>
+                    <a:lnR w="10160">
+                      <a:noFill/>
+                    </a:lnR>
+                    <a:lnT w="10160">
+                      <a:noFill/>
+                    </a:lnT>
+                    <a:lnB w="10160">
+                      <a:noFill/>
+                    </a:lnB>
+                    <a:solidFill>
+                      <a:srgbClr val="FFFEF8"/>
+                    </a:solidFill>
+                  </a:tcPr>
+                </a:tc>
+              </a:tr>
+              <a:tr h="431800">
+                <a:tc>
+                  <a:txBody>
+                    <a:bodyPr wrap="square" lIns="0" rIns="0" tIns="0" bIns="0"/>
+                    <a:lstStyle/>
+                    <a:p>
+                      <a:pPr algn="l">
+                        <a:lnSpc>
+                          <a:spcPct val="100000"/>
+                        </a:lnSpc>
+                        <a:spcBef>
+                          <a:spcPts val="0"/>
+                        </a:spcBef>
+                        <a:spcAft>
+                          <a:spcPts val="0"/>
+                        </a:spcAft>
+                        <a:buNone/>
+                      </a:pPr>
+                      <a:r>
+                        <a:rPr sz="2000" b="0" lang="ja-JP">
+                          <a:solidFill>
+                            <a:srgbClr val="303437"/>
+                          </a:solidFill>
+                          <a:latin typeface="Noto Sans"/>
+                          <a:ea typeface="Noto Sans CJK JP"/>
+                          <a:cs typeface="Noto Sans"/>
+                        </a:rPr>
+                        <a:t>家具・建築・デザイン</a:t>
+                      </a:r>
+                    </a:p>
+                  </a:txBody>
+                  <a:tcPr marL="63500" marR="63500" marT="25400" marB="25400" anchor="ctr">
+                    <a:lnL w="10160">
+                      <a:noFill/>
+                    </a:lnL>
+                    <a:lnR w="10160">
+                      <a:noFill/>
+                    </a:lnR>
+                    <a:lnT w="10160">
+                      <a:noFill/>
+                    </a:lnT>
+                    <a:lnB w="10160">
+                      <a:noFill/>
+                    </a:lnB>
+                    <a:solidFill>
+                      <a:srgbClr val="FFFEF8"/>
+                    </a:solidFill>
+                  </a:tcPr>
+                </a:tc>
+                <a:tc>
+                  <a:txBody>
+                    <a:bodyPr wrap="square" lIns="0" rIns="0" tIns="0" bIns="0"/>
+                    <a:lstStyle/>
+                    <a:p>
+                      <a:pPr algn="r">
+                        <a:lnSpc>
+                          <a:spcPct val="100000"/>
+                        </a:lnSpc>
+                        <a:spcBef>
+                          <a:spcPts val="0"/>
+                        </a:spcBef>
+                        <a:spcAft>
+                          <a:spcPts val="0"/>
+                        </a:spcAft>
+                        <a:buNone/>
+                      </a:pPr>
+                      <a:r>
+                        <a:rPr sz="2000" b="0" lang="ja-JP">
+                          <a:solidFill>
+                            <a:srgbClr val="303437"/>
+                          </a:solidFill>
+                          <a:latin typeface="Noto Sans"/>
+                          <a:ea typeface="Noto Sans CJK JP"/>
+                          <a:cs typeface="Noto Sans"/>
+                        </a:rPr>
+                        <a:t>-0.8</a:t>
+                      </a:r>
+                    </a:p>
+                  </a:txBody>
+                  <a:tcPr marL="63500" marR="63500" marT="25400" marB="25400" anchor="ctr">
+                    <a:lnL w="10160">
+                      <a:noFill/>
+                    </a:lnL>
+                    <a:lnR w="10160">
+                      <a:noFill/>
+                    </a:lnR>
+                    <a:lnT w="10160">
+                      <a:noFill/>
+                    </a:lnT>
+                    <a:lnB w="10160">
+                      <a:noFill/>
+                    </a:lnB>
+                    <a:solidFill>
+                      <a:srgbClr val="FFFEF8"/>
+                    </a:solidFill>
+                  </a:tcPr>
+                </a:tc>
+              </a:tr>
+              <a:tr h="431800">
+                <a:tc>
+                  <a:txBody>
+                    <a:bodyPr wrap="square" lIns="0" rIns="0" tIns="0" bIns="0"/>
+                    <a:lstStyle/>
+                    <a:p>
+                      <a:pPr algn="l">
+                        <a:lnSpc>
+                          <a:spcPct val="100000"/>
+                        </a:lnSpc>
+                        <a:spcBef>
+                          <a:spcPts val="0"/>
+                        </a:spcBef>
+                        <a:spcAft>
+                          <a:spcPts val="0"/>
+                        </a:spcAft>
+                        <a:buNone/>
+                      </a:pPr>
+                      <a:r>
+                        <a:rPr sz="2000" b="0" lang="ja-JP">
+                          <a:solidFill>
+                            <a:srgbClr val="303437"/>
+                          </a:solidFill>
+                          <a:latin typeface="Noto Sans"/>
+                          <a:ea typeface="Noto Sans CJK JP"/>
+                          <a:cs typeface="Noto Sans"/>
+                        </a:rPr>
+                        <a:t>宝飾品・アクセサリー・買い物</a:t>
+                      </a:r>
+                    </a:p>
+                  </a:txBody>
+                  <a:tcPr marL="63500" marR="63500" marT="25400" marB="25400" anchor="ctr">
+                    <a:lnL w="10160">
+                      <a:noFill/>
+                    </a:lnL>
+                    <a:lnR w="10160">
+                      <a:noFill/>
+                    </a:lnR>
+                    <a:lnT w="10160">
+                      <a:noFill/>
+                    </a:lnT>
+                    <a:lnB w="10160">
+                      <a:noFill/>
+                    </a:lnB>
+                    <a:solidFill>
+                      <a:srgbClr val="FFFEF8"/>
+                    </a:solidFill>
+                  </a:tcPr>
+                </a:tc>
+                <a:tc>
+                  <a:txBody>
+                    <a:bodyPr wrap="square" lIns="0" rIns="0" tIns="0" bIns="0"/>
+                    <a:lstStyle/>
+                    <a:p>
+                      <a:pPr algn="r">
+                        <a:lnSpc>
+                          <a:spcPct val="100000"/>
+                        </a:lnSpc>
+                        <a:spcBef>
+                          <a:spcPts val="0"/>
+                        </a:spcBef>
+                        <a:spcAft>
+                          <a:spcPts val="0"/>
+                        </a:spcAft>
+                        <a:buNone/>
+                      </a:pPr>
+                      <a:r>
+                        <a:rPr sz="2000" b="0" lang="ja-JP">
+                          <a:solidFill>
+                            <a:srgbClr val="303437"/>
+                          </a:solidFill>
+                          <a:latin typeface="Noto Sans"/>
+                          <a:ea typeface="Noto Sans CJK JP"/>
+                          <a:cs typeface="Noto Sans"/>
+                        </a:rPr>
+                        <a:t>-0.8</a:t>
+                      </a:r>
+                    </a:p>
+                  </a:txBody>
+                  <a:tcPr marL="63500" marR="63500" marT="25400" marB="25400" anchor="ctr">
+                    <a:lnL w="10160">
+                      <a:noFill/>
+                    </a:lnL>
+                    <a:lnR w="10160">
+                      <a:noFill/>
+                    </a:lnR>
+                    <a:lnT w="10160">
+                      <a:noFill/>
+                    </a:lnT>
+                    <a:lnB w="10160">
+                      <a:noFill/>
+                    </a:lnB>
+                    <a:solidFill>
+                      <a:srgbClr val="FFFEF8"/>
+                    </a:solidFill>
+                  </a:tcPr>
+                </a:tc>
+              </a:tr>
+              <a:tr h="431800">
+                <a:tc>
+                  <a:txBody>
+                    <a:bodyPr wrap="square" lIns="0" rIns="0" tIns="0" bIns="0"/>
+                    <a:lstStyle/>
+                    <a:p>
+                      <a:pPr algn="l">
+                        <a:lnSpc>
+                          <a:spcPct val="100000"/>
+                        </a:lnSpc>
+                        <a:spcBef>
+                          <a:spcPts val="0"/>
+                        </a:spcBef>
+                        <a:spcAft>
+                          <a:spcPts val="0"/>
+                        </a:spcAft>
+                        <a:buNone/>
+                      </a:pPr>
+                      <a:r>
+                        <a:rPr sz="2000" b="0" lang="ja-JP">
+                          <a:solidFill>
+                            <a:srgbClr val="303437"/>
+                          </a:solidFill>
+                          <a:latin typeface="Noto Sans"/>
+                          <a:ea typeface="Noto Sans CJK JP"/>
+                          <a:cs typeface="Noto Sans"/>
+                        </a:rPr>
+                        <a:t>政治・紛争・国際情勢</a:t>
+                      </a:r>
+                    </a:p>
+                  </a:txBody>
+                  <a:tcPr marL="63500" marR="63500" marT="25400" marB="25400" anchor="ctr">
+                    <a:lnL w="10160">
+                      <a:noFill/>
+                    </a:lnL>
+                    <a:lnR w="10160">
+                      <a:noFill/>
+                    </a:lnR>
+                    <a:lnT w="10160">
+                      <a:noFill/>
+                    </a:lnT>
+                    <a:lnB w="10160">
+                      <a:solidFill>
+                        <a:srgbClr val="626669"/>
+                      </a:solidFill>
+                    </a:lnB>
+                    <a:solidFill>
+                      <a:srgbClr val="FFFEF8"/>
+                    </a:solidFill>
+                  </a:tcPr>
+                </a:tc>
+                <a:tc>
+                  <a:txBody>
+                    <a:bodyPr wrap="square" lIns="0" rIns="0" tIns="0" bIns="0"/>
+                    <a:lstStyle/>
+                    <a:p>
+                      <a:pPr algn="r">
+                        <a:lnSpc>
+                          <a:spcPct val="100000"/>
+                        </a:lnSpc>
+                        <a:spcBef>
+                          <a:spcPts val="0"/>
+                        </a:spcBef>
+                        <a:spcAft>
+                          <a:spcPts val="0"/>
+                        </a:spcAft>
+                        <a:buNone/>
+                      </a:pPr>
+                      <a:r>
+                        <a:rPr sz="2000" b="0" lang="ja-JP">
+                          <a:solidFill>
+                            <a:srgbClr val="303437"/>
+                          </a:solidFill>
+                          <a:latin typeface="Noto Sans"/>
+                          <a:ea typeface="Noto Sans CJK JP"/>
+                          <a:cs typeface="Noto Sans"/>
+                        </a:rPr>
+                        <a:t>-0.7</a:t>
+                      </a:r>
+                    </a:p>
+                  </a:txBody>
+                  <a:tcPr marL="63500" marR="63500" marT="25400" marB="25400" anchor="ctr">
+                    <a:lnL w="10160">
+                      <a:noFill/>
+                    </a:lnL>
+                    <a:lnR w="10160">
+                      <a:noFill/>
+                    </a:lnR>
+                    <a:lnT w="10160">
+                      <a:noFill/>
+                    </a:lnT>
+                    <a:lnB w="10160">
+                      <a:solidFill>
+                        <a:srgbClr val="626669"/>
+                      </a:solidFill>
+                    </a:lnB>
+                    <a:solidFill>
+                      <a:srgbClr val="FFFEF8"/>
+                    </a:solidFill>
+                  </a:tcPr>
+                </a:tc>
+              </a:tr>
+            </a:tbl>
+          </a:graphicData>
+        </a:graphic>
+      </p:graphicFrame>
+      <p:sp>
+        <p:nvSpPr>
+          <p:cNvPr id="5" name="TextBox 4"/>
+          <p:cNvSpPr txBox="1"/>
+          <p:nvPr/>
+        </p:nvSpPr>
+        <p:spPr>
+          <a:xfrm>
+            <a:off x="548640" y="4495800"/>
+            <a:ext cx="8046720" cy="165100"/>
+          </a:xfrm>
+          <a:prstGeom prst="rect">
+            <a:avLst/>
+          </a:prstGeom>
+          <a:noFill/>
+        </p:spPr>
+        <p:txBody>
+          <a:bodyPr wrap="square" lIns="0" rIns="0" tIns="0" bIns="0">
+            <a:spAutoFit/>
+          </a:bodyPr>
+          <a:lstStyle/>
+          <a:p>
+            <a:pPr>
+              <a:lnSpc>
+                <a:spcPct val="100000"/>
+              </a:lnSpc>
+              <a:spcBef>
+                <a:spcPts val="0"/>
+              </a:spcBef>
+              <a:spcAft>
+                <a:spcPts val="0"/>
+              </a:spcAft>
+              <a:buNone/>
+            </a:pPr>
+            <a:r>
+              <a:rPr sz="800" b="0" lang="ja-JP">
+                <a:solidFill>
+                  <a:srgbClr val="626669"/>
+                </a:solidFill>
+                <a:latin typeface="Noto Sans"/>
+                <a:ea typeface="Noto Sans CJK JP"/>
+                <a:cs typeface="Noto Sans"/>
+              </a:rPr>
+              <a:t>各5万文書。差＝FineWeb-Edu − FineWeb。絶対差0.5ポイント以上の39分類から6分類 [1]。</a:t>
+            </a:r>
+          </a:p>
+        </p:txBody>
+      </p:sp>
+      <p:sp>
+        <p:nvSpPr>
+          <p:cNvPr id="6" name="TextBox 5"/>
+          <p:cNvSpPr txBox="1"/>
+          <p:nvPr/>
+        </p:nvSpPr>
+        <p:spPr>
+          <a:xfrm>
+            <a:off x="548640" y="4686300"/>
+            <a:ext cx="8046720" cy="177800"/>
+          </a:xfrm>
+          <a:prstGeom prst="rect">
+            <a:avLst/>
+          </a:prstGeom>
+          <a:noFill/>
+        </p:spPr>
+        <p:txBody>
+          <a:bodyPr wrap="square" lIns="0" rIns="0" tIns="0" bIns="0">
+            <a:spAutoFit/>
+          </a:bodyPr>
+          <a:lstStyle/>
+          <a:p>
+            <a:pPr>
+              <a:lnSpc>
+                <a:spcPct val="100000"/>
+              </a:lnSpc>
+              <a:spcBef>
+                <a:spcPts val="0"/>
+              </a:spcBef>
+              <a:spcAft>
+                <a:spcPts val="0"/>
+              </a:spcAft>
+              <a:buNone/>
+            </a:pPr>
+            <a:r>
+              <a:rPr sz="800" b="0" lang="ja-JP">
+                <a:solidFill>
+                  <a:srgbClr val="626669"/>
+                </a:solidFill>
+                <a:latin typeface="Noto Sans"/>
+                <a:ea typeface="Noto Sans CJK JP"/>
+                <a:cs typeface="Noto Sans"/>
+              </a:rPr>
+              <a:t>[1] Penedo et al. (2024). The FineWeb Datasets: Decanting the Web for the Finest Text Data at Scale. NeurIPS. §4.1, Fig. 18.</a:t>
+            </a:r>
+          </a:p>
+        </p:txBody>
+      </p:sp>
+      <p:sp>
+        <p:nvSpPr>
+          <p:cNvPr id="7" name="TextBox 6"/>
+          <p:cNvSpPr txBox="1"/>
+          <p:nvPr/>
+        </p:nvSpPr>
+        <p:spPr>
+          <a:xfrm>
+            <a:off x="6373995" y="4686300"/>
+            <a:ext cx="2221364" cy="177800"/>
+          </a:xfrm>
+          <a:prstGeom prst="rect">
+            <a:avLst/>
+          </a:prstGeom>
+          <a:noFill/>
+        </p:spPr>
+        <p:txBody>
+          <a:bodyPr wrap="none" lIns="0" rIns="0" tIns="0" bIns="0">
+            <a:spAutoFit/>
+          </a:bodyPr>
+          <a:lstStyle/>
+          <a:p>
+            <a:pPr>
+              <a:lnSpc>
+                <a:spcPct val="100000"/>
+              </a:lnSpc>
+              <a:spcBef>
+                <a:spcPts val="0"/>
+              </a:spcBef>
+              <a:spcAft>
+                <a:spcPts val="0"/>
+              </a:spcAft>
+              <a:buNone/>
+            </a:pPr>
+            <a:r>
+              <a:rPr sz="800" b="0" lang="ja-JP">
+                <a:solidFill>
+                  <a:srgbClr val="626669"/>
+                </a:solidFill>
+                <a:latin typeface="Noto Sans"/>
+                <a:ea typeface="Noto Sans CJK JP"/>
+                <a:cs typeface="Noto Sans"/>
+                <a:hlinkClick r:id="rId2"/>
+              </a:rPr>
+              <a:t>https://arxiv.org/abs/2406.17557v2</a:t>
+            </a:r>
+          </a:p>
+        </p:txBody>
+      </p:sp>
+    </p:spTree>
+  </p:cSld>
+  <p:clrMapOvr>
+    <a:masterClrMapping/>
+  </p:clrMapOvr>
+</p:sld>
+</file>
+
+<file path=ppt/slides/slide86.xml><?xml version="1.0" encoding="utf-8"?>
+<p:sld xmlns:a="http://schemas.openxmlformats.org/drawingml/2006/main" xmlns:p="http://schemas.openxmlformats.org/presentationml/2006/main" xmlns:r="http://schemas.openxmlformats.org/officeDocument/2006/relationships">
+  <p:cSld>
+    <p:spTree>
+      <p:nvGrpSpPr>
+        <p:cNvPr id="1" name=""/>
+        <p:cNvGrpSpPr/>
+        <p:nvPr/>
+      </p:nvGrpSpPr>
+      <p:grpSpPr/>
+      <p:sp>
+        <p:nvSpPr>
+          <p:cNvPr id="2" name="Title 1"/>
+          <p:cNvSpPr>
+            <a:spLocks noGrp="1"/>
+          </p:cNvSpPr>
+          <p:nvPr>
+            <p:ph type="title"/>
+          </p:nvPr>
+        </p:nvSpPr>
+        <p:spPr>
+          <a:xfrm>
+            <a:off x="468172" y="650138"/>
+            <a:ext cx="8206740" cy="616305"/>
+          </a:xfrm>
+        </p:spPr>
+        <p:txBody>
+          <a:bodyPr wrap="square" lIns="0" rIns="0" tIns="0" bIns="0"/>
+          <a:lstStyle/>
+          <a:p>
+            <a:pPr>
+              <a:lnSpc>
+                <a:spcPct val="100000"/>
+              </a:lnSpc>
+              <a:spcBef>
+                <a:spcPts val="0"/>
+              </a:spcBef>
+              <a:spcAft>
+                <a:spcPts val="0"/>
+              </a:spcAft>
+              <a:buNone/>
+            </a:pPr>
+            <a:r>
+              <a:rPr sz="2800" b="1" lang="ja-JP">
+                <a:solidFill>
+                  <a:srgbClr val="303437"/>
+                </a:solidFill>
+                <a:latin typeface="Noto Sans"/>
+                <a:ea typeface="Noto Sans CJK JP"/>
+                <a:cs typeface="Noto Sans"/>
+              </a:rPr>
+              <a:t>FineWeb側で多い話題（4/4）</a:t>
+            </a:r>
+          </a:p>
+        </p:txBody>
+      </p:sp>
+      <p:sp>
+        <p:nvSpPr>
+          <p:cNvPr id="3" name="Title 2"/>
+          <p:cNvSpPr>
+            <a:spLocks noGrp="1"/>
+          </p:cNvSpPr>
+          <p:nvPr>
+            <p:ph type="title" idx="2"/>
+          </p:nvPr>
+        </p:nvSpPr>
+        <p:spPr>
+          <a:xfrm>
+            <a:off x="75895" y="0"/>
+            <a:ext cx="8115300" cy="480059"/>
+          </a:xfrm>
+        </p:spPr>
+        <p:txBody>
+          <a:bodyPr wrap="square" lIns="0" rIns="0" tIns="0" bIns="0" anchor="ctr"/>
+          <a:lstStyle/>
+          <a:p>
+            <a:pPr>
+              <a:lnSpc>
+                <a:spcPct val="100000"/>
+              </a:lnSpc>
+              <a:spcBef>
+                <a:spcPts val="0"/>
+              </a:spcBef>
+              <a:spcAft>
+                <a:spcPts val="0"/>
+              </a:spcAft>
+              <a:buNone/>
+            </a:pPr>
+            <a:r>
+              <a:rPr sz="1400" b="1" lang="ja-JP">
+                <a:solidFill>
+                  <a:srgbClr val="FFFEF8"/>
+                </a:solidFill>
+                <a:latin typeface="Noto Sans"/>
+                <a:ea typeface="Noto Sans CJK JP"/>
+                <a:cs typeface="Noto Sans"/>
+              </a:rPr>
+              <a:t>Appendix 3. 文書選別・話題分布と評価実験の詳細</a:t>
+            </a:r>
+          </a:p>
+        </p:txBody>
+      </p:sp>
+      <p:graphicFrame>
+        <p:nvGraphicFramePr>
+          <p:cNvPr id="4" name="Table 3"/>
+          <p:cNvGraphicFramePr>
+            <a:graphicFrameLocks noGrp="1"/>
+          </p:cNvGraphicFramePr>
+          <p:nvPr/>
+        </p:nvGraphicFramePr>
+        <p:xfrm>
+          <a:off x="548640" y="1371600"/>
+          <a:ext cx="8046720" cy="2032000"/>
+        </p:xfrm>
+        <a:graphic>
+          <a:graphicData uri="http://schemas.openxmlformats.org/drawingml/2006/table">
+            <a:tbl>
+              <a:tblPr firstRow="1" bandRow="1"/>
+              <a:tblGrid>
+                <a:gridCol w="5887720"/>
+                <a:gridCol w="2159000"/>
+              </a:tblGrid>
+              <a:tr h="508000">
+                <a:tc>
+                  <a:txBody>
+                    <a:bodyPr wrap="square" lIns="0" rIns="0" tIns="0" bIns="0"/>
+                    <a:lstStyle/>
+                    <a:p>
+                      <a:pPr algn="l">
+                        <a:lnSpc>
+                          <a:spcPct val="100000"/>
+                        </a:lnSpc>
+                        <a:spcBef>
+                          <a:spcPts val="0"/>
+                        </a:spcBef>
+                        <a:spcAft>
+                          <a:spcPts val="0"/>
+                        </a:spcAft>
+                        <a:buNone/>
+                      </a:pPr>
+                      <a:r>
+                        <a:rPr sz="2200" b="0" lang="ja-JP">
+                          <a:solidFill>
+                            <a:srgbClr val="303437"/>
+                          </a:solidFill>
+                          <a:latin typeface="Noto Sans"/>
+                          <a:ea typeface="Noto Sans CJK JP"/>
+                          <a:cs typeface="Noto Sans"/>
+                        </a:rPr>
+                        <a:t>話題（原著ラベルの和訳）</a:t>
+                      </a:r>
+                    </a:p>
+                  </a:txBody>
+                  <a:tcPr marL="63500" marR="63500" marT="25400" marB="25400" anchor="ctr">
+                    <a:lnL w="10160">
+                      <a:noFill/>
+                    </a:lnL>
+                    <a:lnR w="10160">
+                      <a:noFill/>
+                    </a:lnR>
+                    <a:lnT w="10160">
+                      <a:solidFill>
+                        <a:srgbClr val="626669"/>
+                      </a:solidFill>
+                    </a:lnT>
+                    <a:lnB w="10160">
+                      <a:solidFill>
+                        <a:srgbClr val="626669"/>
+                      </a:solidFill>
+                    </a:lnB>
+                    <a:solidFill>
+                      <a:srgbClr val="FFFEF8"/>
+                    </a:solidFill>
+                  </a:tcPr>
+                </a:tc>
+                <a:tc>
+                  <a:txBody>
+                    <a:bodyPr wrap="square" lIns="0" rIns="0" tIns="0" bIns="0"/>
+                    <a:lstStyle/>
+                    <a:p>
+                      <a:pPr algn="r">
+                        <a:lnSpc>
+                          <a:spcPct val="100000"/>
+                        </a:lnSpc>
+                        <a:spcBef>
+                          <a:spcPts val="0"/>
+                        </a:spcBef>
+                        <a:spcAft>
+                          <a:spcPts val="0"/>
+                        </a:spcAft>
+                        <a:buNone/>
+                      </a:pPr>
+                      <a:r>
+                        <a:rPr sz="2200" b="0" lang="ja-JP">
+                          <a:solidFill>
+                            <a:srgbClr val="303437"/>
+                          </a:solidFill>
+                          <a:latin typeface="Noto Sans"/>
+                          <a:ea typeface="Noto Sans CJK JP"/>
+                          <a:cs typeface="Noto Sans"/>
+                        </a:rPr>
+                        <a:t>差（ポイント）</a:t>
+                      </a:r>
+                    </a:p>
+                  </a:txBody>
+                  <a:tcPr marL="63500" marR="63500" marT="25400" marB="25400" anchor="ctr">
+                    <a:lnL w="10160">
+                      <a:noFill/>
+                    </a:lnL>
+                    <a:lnR w="10160">
+                      <a:noFill/>
+                    </a:lnR>
+                    <a:lnT w="10160">
+                      <a:solidFill>
+                        <a:srgbClr val="626669"/>
+                      </a:solidFill>
+                    </a:lnT>
+                    <a:lnB w="10160">
+                      <a:solidFill>
+                        <a:srgbClr val="626669"/>
+                      </a:solidFill>
+                    </a:lnB>
+                    <a:solidFill>
+                      <a:srgbClr val="FFFEF8"/>
+                    </a:solidFill>
+                  </a:tcPr>
+                </a:tc>
+              </a:tr>
+              <a:tr h="508000">
+                <a:tc>
+                  <a:txBody>
+                    <a:bodyPr wrap="square" lIns="0" rIns="0" tIns="0" bIns="0"/>
+                    <a:lstStyle/>
+                    <a:p>
+                      <a:pPr algn="l">
+                        <a:lnSpc>
+                          <a:spcPct val="100000"/>
+                        </a:lnSpc>
+                        <a:spcBef>
+                          <a:spcPts val="0"/>
+                        </a:spcBef>
+                        <a:spcAft>
+                          <a:spcPts val="0"/>
+                        </a:spcAft>
+                        <a:buNone/>
+                      </a:pPr>
+                      <a:r>
+                        <a:rPr sz="2200" b="0" lang="ja-JP">
+                          <a:solidFill>
+                            <a:srgbClr val="303437"/>
+                          </a:solidFill>
+                          <a:latin typeface="Noto Sans"/>
+                          <a:ea typeface="Noto Sans CJK JP"/>
+                          <a:cs typeface="Noto Sans"/>
+                        </a:rPr>
+                        <a:t>野球・スポーツ・ニュース</a:t>
+                      </a:r>
+                    </a:p>
+                  </a:txBody>
+                  <a:tcPr marL="63500" marR="63500" marT="25400" marB="25400" anchor="ctr">
+                    <a:lnL w="10160">
+                      <a:noFill/>
+                    </a:lnL>
+                    <a:lnR w="10160">
+                      <a:noFill/>
+                    </a:lnR>
+                    <a:lnT w="10160">
+                      <a:solidFill>
+                        <a:srgbClr val="626669"/>
+                      </a:solidFill>
+                    </a:lnT>
+                    <a:lnB w="10160">
+                      <a:noFill/>
+                    </a:lnB>
+                    <a:solidFill>
+                      <a:srgbClr val="FFFEF8"/>
+                    </a:solidFill>
+                  </a:tcPr>
+                </a:tc>
+                <a:tc>
+                  <a:txBody>
+                    <a:bodyPr wrap="square" lIns="0" rIns="0" tIns="0" bIns="0"/>
+                    <a:lstStyle/>
+                    <a:p>
+                      <a:pPr algn="r">
+                        <a:lnSpc>
+                          <a:spcPct val="100000"/>
+                        </a:lnSpc>
+                        <a:spcBef>
+                          <a:spcPts val="0"/>
+                        </a:spcBef>
+                        <a:spcAft>
+                          <a:spcPts val="0"/>
+                        </a:spcAft>
+                        <a:buNone/>
+                      </a:pPr>
+                      <a:r>
+                        <a:rPr sz="2200" b="0" lang="ja-JP">
+                          <a:solidFill>
+                            <a:srgbClr val="303437"/>
+                          </a:solidFill>
+                          <a:latin typeface="Noto Sans"/>
+                          <a:ea typeface="Noto Sans CJK JP"/>
+                          <a:cs typeface="Noto Sans"/>
+                        </a:rPr>
+                        <a:t>-0.6</a:t>
+                      </a:r>
+                    </a:p>
+                  </a:txBody>
+                  <a:tcPr marL="63500" marR="63500" marT="25400" marB="25400" anchor="ctr">
+                    <a:lnL w="10160">
+                      <a:noFill/>
+                    </a:lnL>
+                    <a:lnR w="10160">
+                      <a:noFill/>
+                    </a:lnR>
+                    <a:lnT w="10160">
+                      <a:solidFill>
+                        <a:srgbClr val="626669"/>
+                      </a:solidFill>
+                    </a:lnT>
+                    <a:lnB w="10160">
+                      <a:noFill/>
+                    </a:lnB>
+                    <a:solidFill>
+                      <a:srgbClr val="FFFEF8"/>
+                    </a:solidFill>
+                  </a:tcPr>
+                </a:tc>
+              </a:tr>
+              <a:tr h="508000">
+                <a:tc>
+                  <a:txBody>
+                    <a:bodyPr wrap="square" lIns="0" rIns="0" tIns="0" bIns="0"/>
+                    <a:lstStyle/>
+                    <a:p>
+                      <a:pPr algn="l">
+                        <a:lnSpc>
+                          <a:spcPct val="100000"/>
+                        </a:lnSpc>
+                        <a:spcBef>
+                          <a:spcPts val="0"/>
+                        </a:spcBef>
+                        <a:spcAft>
+                          <a:spcPts val="0"/>
+                        </a:spcAft>
+                        <a:buNone/>
+                      </a:pPr>
+                      <a:r>
+                        <a:rPr sz="2200" b="0" lang="ja-JP">
+                          <a:solidFill>
+                            <a:srgbClr val="303437"/>
+                          </a:solidFill>
+                          <a:latin typeface="Noto Sans"/>
+                          <a:ea typeface="Noto Sans CJK JP"/>
+                          <a:cs typeface="Noto Sans"/>
+                        </a:rPr>
+                        <a:t>技術・サポート・マーケティング</a:t>
+                      </a:r>
+                    </a:p>
+                  </a:txBody>
+                  <a:tcPr marL="63500" marR="63500" marT="25400" marB="25400" anchor="ctr">
+                    <a:lnL w="10160">
+                      <a:noFill/>
+                    </a:lnL>
+                    <a:lnR w="10160">
+                      <a:noFill/>
+                    </a:lnR>
+                    <a:lnT w="10160">
+                      <a:noFill/>
+                    </a:lnT>
+                    <a:lnB w="10160">
+                      <a:noFill/>
+                    </a:lnB>
+                    <a:solidFill>
+                      <a:srgbClr val="FFFEF8"/>
+                    </a:solidFill>
+                  </a:tcPr>
+                </a:tc>
+                <a:tc>
+                  <a:txBody>
+                    <a:bodyPr wrap="square" lIns="0" rIns="0" tIns="0" bIns="0"/>
+                    <a:lstStyle/>
+                    <a:p>
+                      <a:pPr algn="r">
+                        <a:lnSpc>
+                          <a:spcPct val="100000"/>
+                        </a:lnSpc>
+                        <a:spcBef>
+                          <a:spcPts val="0"/>
+                        </a:spcBef>
+                        <a:spcAft>
+                          <a:spcPts val="0"/>
+                        </a:spcAft>
+                        <a:buNone/>
+                      </a:pPr>
+                      <a:r>
+                        <a:rPr sz="2200" b="0" lang="ja-JP">
+                          <a:solidFill>
+                            <a:srgbClr val="303437"/>
+                          </a:solidFill>
+                          <a:latin typeface="Noto Sans"/>
+                          <a:ea typeface="Noto Sans CJK JP"/>
+                          <a:cs typeface="Noto Sans"/>
+                        </a:rPr>
+                        <a:t>-0.6</a:t>
+                      </a:r>
+                    </a:p>
+                  </a:txBody>
+                  <a:tcPr marL="63500" marR="63500" marT="25400" marB="25400" anchor="ctr">
+                    <a:lnL w="10160">
+                      <a:noFill/>
+                    </a:lnL>
+                    <a:lnR w="10160">
+                      <a:noFill/>
+                    </a:lnR>
+                    <a:lnT w="10160">
+                      <a:noFill/>
+                    </a:lnT>
+                    <a:lnB w="10160">
+                      <a:noFill/>
+                    </a:lnB>
+                    <a:solidFill>
+                      <a:srgbClr val="FFFEF8"/>
+                    </a:solidFill>
+                  </a:tcPr>
+                </a:tc>
+              </a:tr>
+              <a:tr h="508000">
+                <a:tc>
+                  <a:txBody>
+                    <a:bodyPr wrap="square" lIns="0" rIns="0" tIns="0" bIns="0"/>
+                    <a:lstStyle/>
+                    <a:p>
+                      <a:pPr algn="l">
+                        <a:lnSpc>
+                          <a:spcPct val="100000"/>
+                        </a:lnSpc>
+                        <a:spcBef>
+                          <a:spcPts val="0"/>
+                        </a:spcBef>
+                        <a:spcAft>
+                          <a:spcPts val="0"/>
+                        </a:spcAft>
+                        <a:buNone/>
+                      </a:pPr>
+                      <a:r>
+                        <a:rPr sz="2200" b="0" lang="ja-JP">
+                          <a:solidFill>
+                            <a:srgbClr val="303437"/>
+                          </a:solidFill>
+                          <a:latin typeface="Noto Sans"/>
+                          <a:ea typeface="Noto Sans CJK JP"/>
+                          <a:cs typeface="Noto Sans"/>
+                        </a:rPr>
+                        <a:t>デート・人間関係・場所</a:t>
+                      </a:r>
+                    </a:p>
+                  </a:txBody>
+                  <a:tcPr marL="63500" marR="63500" marT="25400" marB="25400" anchor="ctr">
+                    <a:lnL w="10160">
+                      <a:noFill/>
+                    </a:lnL>
+                    <a:lnR w="10160">
+                      <a:noFill/>
+                    </a:lnR>
+                    <a:lnT w="10160">
+                      <a:noFill/>
+                    </a:lnT>
+                    <a:lnB w="10160">
+                      <a:solidFill>
+                        <a:srgbClr val="626669"/>
+                      </a:solidFill>
+                    </a:lnB>
+                    <a:solidFill>
+                      <a:srgbClr val="FFFEF8"/>
+                    </a:solidFill>
+                  </a:tcPr>
+                </a:tc>
+                <a:tc>
+                  <a:txBody>
+                    <a:bodyPr wrap="square" lIns="0" rIns="0" tIns="0" bIns="0"/>
+                    <a:lstStyle/>
+                    <a:p>
+                      <a:pPr algn="r">
+                        <a:lnSpc>
+                          <a:spcPct val="100000"/>
+                        </a:lnSpc>
+                        <a:spcBef>
+                          <a:spcPts val="0"/>
+                        </a:spcBef>
+                        <a:spcAft>
+                          <a:spcPts val="0"/>
+                        </a:spcAft>
+                        <a:buNone/>
+                      </a:pPr>
+                      <a:r>
+                        <a:rPr sz="2200" b="0" lang="ja-JP">
+                          <a:solidFill>
+                            <a:srgbClr val="303437"/>
+                          </a:solidFill>
+                          <a:latin typeface="Noto Sans"/>
+                          <a:ea typeface="Noto Sans CJK JP"/>
+                          <a:cs typeface="Noto Sans"/>
+                        </a:rPr>
+                        <a:t>-0.5</a:t>
+                      </a:r>
+                    </a:p>
+                  </a:txBody>
+                  <a:tcPr marL="63500" marR="63500" marT="25400" marB="25400" anchor="ctr">
+                    <a:lnL w="10160">
+                      <a:noFill/>
+                    </a:lnL>
+                    <a:lnR w="10160">
+                      <a:noFill/>
+                    </a:lnR>
+                    <a:lnT w="10160">
+                      <a:noFill/>
+                    </a:lnT>
+                    <a:lnB w="10160">
+                      <a:solidFill>
+                        <a:srgbClr val="626669"/>
+                      </a:solidFill>
+                    </a:lnB>
+                    <a:solidFill>
+                      <a:srgbClr val="FFFEF8"/>
+                    </a:solidFill>
+                  </a:tcPr>
+                </a:tc>
+              </a:tr>
+            </a:tbl>
+          </a:graphicData>
+        </a:graphic>
+      </p:graphicFrame>
+      <p:sp>
+        <p:nvSpPr>
+          <p:cNvPr id="5" name="TextBox 4"/>
+          <p:cNvSpPr txBox="1"/>
+          <p:nvPr/>
+        </p:nvSpPr>
+        <p:spPr>
+          <a:xfrm>
+            <a:off x="548640" y="4495800"/>
+            <a:ext cx="8046720" cy="165100"/>
+          </a:xfrm>
+          <a:prstGeom prst="rect">
+            <a:avLst/>
+          </a:prstGeom>
+          <a:noFill/>
+        </p:spPr>
+        <p:txBody>
+          <a:bodyPr wrap="square" lIns="0" rIns="0" tIns="0" bIns="0">
+            <a:spAutoFit/>
+          </a:bodyPr>
+          <a:lstStyle/>
+          <a:p>
+            <a:pPr>
+              <a:lnSpc>
+                <a:spcPct val="100000"/>
+              </a:lnSpc>
+              <a:spcBef>
+                <a:spcPts val="0"/>
+              </a:spcBef>
+              <a:spcAft>
+                <a:spcPts val="0"/>
+              </a:spcAft>
+              <a:buNone/>
+            </a:pPr>
+            <a:r>
+              <a:rPr sz="800" b="0" lang="ja-JP">
+                <a:solidFill>
+                  <a:srgbClr val="626669"/>
+                </a:solidFill>
+                <a:latin typeface="Noto Sans"/>
+                <a:ea typeface="Noto Sans CJK JP"/>
+                <a:cs typeface="Noto Sans"/>
+              </a:rPr>
+              <a:t>各5万文書。差＝FineWeb-Edu − FineWeb。絶対差0.5ポイント以上の39分類から3分類 [1]。</a:t>
+            </a:r>
+          </a:p>
+        </p:txBody>
+      </p:sp>
+      <p:sp>
+        <p:nvSpPr>
+          <p:cNvPr id="6" name="TextBox 5"/>
+          <p:cNvSpPr txBox="1"/>
+          <p:nvPr/>
+        </p:nvSpPr>
+        <p:spPr>
+          <a:xfrm>
+            <a:off x="548640" y="4686300"/>
+            <a:ext cx="8046720" cy="177800"/>
+          </a:xfrm>
+          <a:prstGeom prst="rect">
+            <a:avLst/>
+          </a:prstGeom>
+          <a:noFill/>
+        </p:spPr>
+        <p:txBody>
+          <a:bodyPr wrap="square" lIns="0" rIns="0" tIns="0" bIns="0">
+            <a:spAutoFit/>
+          </a:bodyPr>
+          <a:lstStyle/>
+          <a:p>
+            <a:pPr>
+              <a:lnSpc>
+                <a:spcPct val="100000"/>
+              </a:lnSpc>
+              <a:spcBef>
+                <a:spcPts val="0"/>
+              </a:spcBef>
+              <a:spcAft>
+                <a:spcPts val="0"/>
+              </a:spcAft>
+              <a:buNone/>
+            </a:pPr>
+            <a:r>
+              <a:rPr sz="800" b="0" lang="ja-JP">
+                <a:solidFill>
+                  <a:srgbClr val="626669"/>
+                </a:solidFill>
+                <a:latin typeface="Noto Sans"/>
+                <a:ea typeface="Noto Sans CJK JP"/>
+                <a:cs typeface="Noto Sans"/>
+              </a:rPr>
+              <a:t>[1] Penedo et al. (2024). The FineWeb Datasets: Decanting the Web for the Finest Text Data at Scale. NeurIPS. §4.1, Fig. 18.</a:t>
+            </a:r>
+          </a:p>
+        </p:txBody>
+      </p:sp>
+      <p:sp>
+        <p:nvSpPr>
+          <p:cNvPr id="7" name="TextBox 6"/>
+          <p:cNvSpPr txBox="1"/>
+          <p:nvPr/>
+        </p:nvSpPr>
+        <p:spPr>
+          <a:xfrm>
+            <a:off x="6373995" y="4686300"/>
+            <a:ext cx="2221364" cy="177800"/>
+          </a:xfrm>
+          <a:prstGeom prst="rect">
+            <a:avLst/>
+          </a:prstGeom>
+          <a:noFill/>
+        </p:spPr>
+        <p:txBody>
+          <a:bodyPr wrap="none" lIns="0" rIns="0" tIns="0" bIns="0">
+            <a:spAutoFit/>
+          </a:bodyPr>
+          <a:lstStyle/>
+          <a:p>
+            <a:pPr>
+              <a:lnSpc>
+                <a:spcPct val="100000"/>
+              </a:lnSpc>
+              <a:spcBef>
+                <a:spcPts val="0"/>
+              </a:spcBef>
+              <a:spcAft>
+                <a:spcPts val="0"/>
+              </a:spcAft>
+              <a:buNone/>
+            </a:pPr>
+            <a:r>
+              <a:rPr sz="800" b="0" lang="ja-JP">
+                <a:solidFill>
+                  <a:srgbClr val="626669"/>
+                </a:solidFill>
+                <a:latin typeface="Noto Sans"/>
+                <a:ea typeface="Noto Sans CJK JP"/>
+                <a:cs typeface="Noto Sans"/>
+                <a:hlinkClick r:id="rId2"/>
+              </a:rPr>
+              <a:t>https://arxiv.org/abs/2406.17557v2</a:t>
             </a:r>
           </a:p>
         </p:txBody>

--- a/slides/datasets-in-10-minutes-fineweb.pptx
+++ b/slides/datasets-in-10-minutes-fineweb.pptx
@@ -7765,12 +7765,12 @@
                     <a:lnR w="10160">
                       <a:noFill/>
                     </a:lnR>
-                    <a:lnT w="10160">
+                    <a:lnT w="15240">
                       <a:solidFill>
                         <a:srgbClr val="626669"/>
                       </a:solidFill>
                     </a:lnT>
-                    <a:lnB w="10160">
+                    <a:lnB w="7620">
                       <a:solidFill>
                         <a:srgbClr val="626669"/>
                       </a:solidFill>
@@ -7814,12 +7814,12 @@
                     <a:lnR w="10160">
                       <a:noFill/>
                     </a:lnR>
-                    <a:lnT w="10160">
+                    <a:lnT w="15240">
                       <a:solidFill>
                         <a:srgbClr val="626669"/>
                       </a:solidFill>
                     </a:lnT>
-                    <a:lnB w="10160">
+                    <a:lnB w="7620">
                       <a:solidFill>
                         <a:srgbClr val="626669"/>
                       </a:solidFill>
@@ -7865,7 +7865,7 @@
                     <a:lnR w="10160">
                       <a:noFill/>
                     </a:lnR>
-                    <a:lnT w="10160">
+                    <a:lnT w="7620">
                       <a:solidFill>
                         <a:srgbClr val="626669"/>
                       </a:solidFill>
@@ -7912,7 +7912,7 @@
                     <a:lnR w="10160">
                       <a:noFill/>
                     </a:lnR>
-                    <a:lnT w="10160">
+                    <a:lnT w="7620">
                       <a:solidFill>
                         <a:srgbClr val="626669"/>
                       </a:solidFill>
@@ -8056,7 +8056,7 @@
                     <a:lnT w="10160">
                       <a:noFill/>
                     </a:lnT>
-                    <a:lnB w="10160">
+                    <a:lnB w="15240">
                       <a:solidFill>
                         <a:srgbClr val="626669"/>
                       </a:solidFill>
@@ -8103,7 +8103,7 @@
                     <a:lnT w="10160">
                       <a:noFill/>
                     </a:lnT>
-                    <a:lnB w="10160">
+                    <a:lnB w="15240">
                       <a:solidFill>
                         <a:srgbClr val="626669"/>
                       </a:solidFill>
@@ -8472,12 +8472,12 @@
                     <a:lnR w="10160">
                       <a:noFill/>
                     </a:lnR>
-                    <a:lnT w="10160">
+                    <a:lnT w="15240">
                       <a:solidFill>
                         <a:srgbClr val="626669"/>
                       </a:solidFill>
                     </a:lnT>
-                    <a:lnB w="10160">
+                    <a:lnB w="7620">
                       <a:solidFill>
                         <a:srgbClr val="626669"/>
                       </a:solidFill>
@@ -8521,12 +8521,12 @@
                     <a:lnR w="10160">
                       <a:noFill/>
                     </a:lnR>
-                    <a:lnT w="10160">
+                    <a:lnT w="15240">
                       <a:solidFill>
                         <a:srgbClr val="626669"/>
                       </a:solidFill>
                     </a:lnT>
-                    <a:lnB w="10160">
+                    <a:lnB w="7620">
                       <a:solidFill>
                         <a:srgbClr val="626669"/>
                       </a:solidFill>
@@ -8572,7 +8572,7 @@
                     <a:lnR w="10160">
                       <a:noFill/>
                     </a:lnR>
-                    <a:lnT w="10160">
+                    <a:lnT w="7620">
                       <a:solidFill>
                         <a:srgbClr val="626669"/>
                       </a:solidFill>
@@ -8619,7 +8619,7 @@
                     <a:lnR w="10160">
                       <a:noFill/>
                     </a:lnR>
-                    <a:lnT w="10160">
+                    <a:lnT w="7620">
                       <a:solidFill>
                         <a:srgbClr val="626669"/>
                       </a:solidFill>
@@ -8947,7 +8947,7 @@
                     <a:lnT w="10160">
                       <a:noFill/>
                     </a:lnT>
-                    <a:lnB w="10160">
+                    <a:lnB w="15240">
                       <a:solidFill>
                         <a:srgbClr val="626669"/>
                       </a:solidFill>
@@ -8994,7 +8994,7 @@
                     <a:lnT w="10160">
                       <a:noFill/>
                     </a:lnT>
-                    <a:lnB w="10160">
+                    <a:lnB w="15240">
                       <a:solidFill>
                         <a:srgbClr val="626669"/>
                       </a:solidFill>
@@ -10921,12 +10921,12 @@
                     <a:lnR w="10160">
                       <a:noFill/>
                     </a:lnR>
-                    <a:lnT w="10160">
+                    <a:lnT w="15240">
                       <a:solidFill>
                         <a:srgbClr val="626669"/>
                       </a:solidFill>
                     </a:lnT>
-                    <a:lnB w="10160">
+                    <a:lnB w="7620">
                       <a:solidFill>
                         <a:srgbClr val="626669"/>
                       </a:solidFill>
@@ -10970,12 +10970,12 @@
                     <a:lnR w="10160">
                       <a:noFill/>
                     </a:lnR>
-                    <a:lnT w="10160">
+                    <a:lnT w="15240">
                       <a:solidFill>
                         <a:srgbClr val="626669"/>
                       </a:solidFill>
                     </a:lnT>
-                    <a:lnB w="10160">
+                    <a:lnB w="7620">
                       <a:solidFill>
                         <a:srgbClr val="626669"/>
                       </a:solidFill>
@@ -11019,12 +11019,12 @@
                     <a:lnR w="10160">
                       <a:noFill/>
                     </a:lnR>
-                    <a:lnT w="10160">
+                    <a:lnT w="15240">
                       <a:solidFill>
                         <a:srgbClr val="626669"/>
                       </a:solidFill>
                     </a:lnT>
-                    <a:lnB w="10160">
+                    <a:lnB w="7620">
                       <a:solidFill>
                         <a:srgbClr val="626669"/>
                       </a:solidFill>
@@ -11070,7 +11070,7 @@
                     <a:lnR w="10160">
                       <a:noFill/>
                     </a:lnR>
-                    <a:lnT w="10160">
+                    <a:lnT w="7620">
                       <a:solidFill>
                         <a:srgbClr val="626669"/>
                       </a:solidFill>
@@ -11117,7 +11117,7 @@
                     <a:lnR w="10160">
                       <a:noFill/>
                     </a:lnR>
-                    <a:lnT w="10160">
+                    <a:lnT w="7620">
                       <a:solidFill>
                         <a:srgbClr val="626669"/>
                       </a:solidFill>
@@ -11164,7 +11164,7 @@
                     <a:lnR w="10160">
                       <a:noFill/>
                     </a:lnR>
-                    <a:lnT w="10160">
+                    <a:lnT w="7620">
                       <a:solidFill>
                         <a:srgbClr val="626669"/>
                       </a:solidFill>
@@ -11353,7 +11353,7 @@
                     <a:lnT w="10160">
                       <a:noFill/>
                     </a:lnT>
-                    <a:lnB w="10160">
+                    <a:lnB w="15240">
                       <a:solidFill>
                         <a:srgbClr val="626669"/>
                       </a:solidFill>
@@ -11400,7 +11400,7 @@
                     <a:lnT w="10160">
                       <a:noFill/>
                     </a:lnT>
-                    <a:lnB w="10160">
+                    <a:lnB w="15240">
                       <a:solidFill>
                         <a:srgbClr val="626669"/>
                       </a:solidFill>
@@ -11447,7 +11447,7 @@
                     <a:lnT w="10160">
                       <a:noFill/>
                     </a:lnT>
-                    <a:lnB w="10160">
+                    <a:lnB w="15240">
                       <a:solidFill>
                         <a:srgbClr val="626669"/>
                       </a:solidFill>
@@ -11762,12 +11762,12 @@
                     <a:lnR w="10160">
                       <a:noFill/>
                     </a:lnR>
-                    <a:lnT w="10160">
+                    <a:lnT w="15240">
                       <a:solidFill>
                         <a:srgbClr val="626669"/>
                       </a:solidFill>
                     </a:lnT>
-                    <a:lnB w="10160">
+                    <a:lnB w="7620">
                       <a:solidFill>
                         <a:srgbClr val="626669"/>
                       </a:solidFill>
@@ -11811,12 +11811,12 @@
                     <a:lnR w="10160">
                       <a:noFill/>
                     </a:lnR>
-                    <a:lnT w="10160">
+                    <a:lnT w="15240">
                       <a:solidFill>
                         <a:srgbClr val="626669"/>
                       </a:solidFill>
                     </a:lnT>
-                    <a:lnB w="10160">
+                    <a:lnB w="7620">
                       <a:solidFill>
                         <a:srgbClr val="626669"/>
                       </a:solidFill>
@@ -11862,7 +11862,7 @@
                     <a:lnR w="10160">
                       <a:noFill/>
                     </a:lnR>
-                    <a:lnT w="10160">
+                    <a:lnT w="7620">
                       <a:solidFill>
                         <a:srgbClr val="626669"/>
                       </a:solidFill>
@@ -11909,7 +11909,7 @@
                     <a:lnR w="10160">
                       <a:noFill/>
                     </a:lnR>
-                    <a:lnT w="10160">
+                    <a:lnT w="7620">
                       <a:solidFill>
                         <a:srgbClr val="626669"/>
                       </a:solidFill>
@@ -12053,7 +12053,7 @@
                     <a:lnT w="10160">
                       <a:noFill/>
                     </a:lnT>
-                    <a:lnB w="10160">
+                    <a:lnB w="15240">
                       <a:solidFill>
                         <a:srgbClr val="626669"/>
                       </a:solidFill>
@@ -12100,7 +12100,7 @@
                     <a:lnT w="10160">
                       <a:noFill/>
                     </a:lnT>
-                    <a:lnB w="10160">
+                    <a:lnB w="15240">
                       <a:solidFill>
                         <a:srgbClr val="626669"/>
                       </a:solidFill>
@@ -13539,12 +13539,12 @@
                     <a:lnR w="10160">
                       <a:noFill/>
                     </a:lnR>
-                    <a:lnT w="10160">
+                    <a:lnT w="15240">
                       <a:solidFill>
                         <a:srgbClr val="626669"/>
                       </a:solidFill>
                     </a:lnT>
-                    <a:lnB w="10160">
+                    <a:lnB w="7620">
                       <a:solidFill>
                         <a:srgbClr val="626669"/>
                       </a:solidFill>
@@ -13588,12 +13588,12 @@
                     <a:lnR w="10160">
                       <a:noFill/>
                     </a:lnR>
-                    <a:lnT w="10160">
+                    <a:lnT w="15240">
                       <a:solidFill>
                         <a:srgbClr val="626669"/>
                       </a:solidFill>
                     </a:lnT>
-                    <a:lnB w="10160">
+                    <a:lnB w="7620">
                       <a:solidFill>
                         <a:srgbClr val="626669"/>
                       </a:solidFill>
@@ -13637,12 +13637,12 @@
                     <a:lnR w="10160">
                       <a:noFill/>
                     </a:lnR>
-                    <a:lnT w="10160">
+                    <a:lnT w="15240">
                       <a:solidFill>
                         <a:srgbClr val="626669"/>
                       </a:solidFill>
                     </a:lnT>
-                    <a:lnB w="10160">
+                    <a:lnB w="7620">
                       <a:solidFill>
                         <a:srgbClr val="626669"/>
                       </a:solidFill>
@@ -13686,12 +13686,12 @@
                     <a:lnR w="10160">
                       <a:noFill/>
                     </a:lnR>
-                    <a:lnT w="10160">
+                    <a:lnT w="15240">
                       <a:solidFill>
                         <a:srgbClr val="626669"/>
                       </a:solidFill>
                     </a:lnT>
-                    <a:lnB w="10160">
+                    <a:lnB w="7620">
                       <a:solidFill>
                         <a:srgbClr val="626669"/>
                       </a:solidFill>
@@ -13737,7 +13737,7 @@
                     <a:lnR w="10160">
                       <a:noFill/>
                     </a:lnR>
-                    <a:lnT w="10160">
+                    <a:lnT w="7620">
                       <a:solidFill>
                         <a:srgbClr val="626669"/>
                       </a:solidFill>
@@ -13784,7 +13784,7 @@
                     <a:lnR w="10160">
                       <a:noFill/>
                     </a:lnR>
-                    <a:lnT w="10160">
+                    <a:lnT w="7620">
                       <a:solidFill>
                         <a:srgbClr val="626669"/>
                       </a:solidFill>
@@ -13831,7 +13831,7 @@
                     <a:lnR w="10160">
                       <a:noFill/>
                     </a:lnR>
-                    <a:lnT w="10160">
+                    <a:lnT w="7620">
                       <a:solidFill>
                         <a:srgbClr val="626669"/>
                       </a:solidFill>
@@ -13878,7 +13878,7 @@
                     <a:lnR w="10160">
                       <a:noFill/>
                     </a:lnR>
-                    <a:lnT w="10160">
+                    <a:lnT w="7620">
                       <a:solidFill>
                         <a:srgbClr val="626669"/>
                       </a:solidFill>
@@ -13930,7 +13930,7 @@
                     <a:lnT w="10160">
                       <a:noFill/>
                     </a:lnT>
-                    <a:lnB w="10160">
+                    <a:lnB w="15240">
                       <a:solidFill>
                         <a:srgbClr val="626669"/>
                       </a:solidFill>
@@ -13977,7 +13977,7 @@
                     <a:lnT w="10160">
                       <a:noFill/>
                     </a:lnT>
-                    <a:lnB w="10160">
+                    <a:lnB w="15240">
                       <a:solidFill>
                         <a:srgbClr val="626669"/>
                       </a:solidFill>
@@ -14024,7 +14024,7 @@
                     <a:lnT w="10160">
                       <a:noFill/>
                     </a:lnT>
-                    <a:lnB w="10160">
+                    <a:lnB w="15240">
                       <a:solidFill>
                         <a:srgbClr val="626669"/>
                       </a:solidFill>
@@ -14071,7 +14071,7 @@
                     <a:lnT w="10160">
                       <a:noFill/>
                     </a:lnT>
-                    <a:lnB w="10160">
+                    <a:lnB w="15240">
                       <a:solidFill>
                         <a:srgbClr val="626669"/>
                       </a:solidFill>
@@ -14338,12 +14338,12 @@
                     <a:lnR w="10160">
                       <a:noFill/>
                     </a:lnR>
-                    <a:lnT w="10160">
+                    <a:lnT w="15240">
                       <a:solidFill>
                         <a:srgbClr val="626669"/>
                       </a:solidFill>
                     </a:lnT>
-                    <a:lnB w="10160">
+                    <a:lnB w="7620">
                       <a:solidFill>
                         <a:srgbClr val="626669"/>
                       </a:solidFill>
@@ -14387,12 +14387,12 @@
                     <a:lnR w="10160">
                       <a:noFill/>
                     </a:lnR>
-                    <a:lnT w="10160">
+                    <a:lnT w="15240">
                       <a:solidFill>
                         <a:srgbClr val="626669"/>
                       </a:solidFill>
                     </a:lnT>
-                    <a:lnB w="10160">
+                    <a:lnB w="7620">
                       <a:solidFill>
                         <a:srgbClr val="626669"/>
                       </a:solidFill>
@@ -14438,7 +14438,7 @@
                     <a:lnR w="10160">
                       <a:noFill/>
                     </a:lnR>
-                    <a:lnT w="10160">
+                    <a:lnT w="7620">
                       <a:solidFill>
                         <a:srgbClr val="626669"/>
                       </a:solidFill>
@@ -14485,7 +14485,7 @@
                     <a:lnR w="10160">
                       <a:noFill/>
                     </a:lnR>
-                    <a:lnT w="10160">
+                    <a:lnT w="7620">
                       <a:solidFill>
                         <a:srgbClr val="626669"/>
                       </a:solidFill>
@@ -14721,7 +14721,7 @@
                     <a:lnT w="10160">
                       <a:noFill/>
                     </a:lnT>
-                    <a:lnB w="10160">
+                    <a:lnB w="15240">
                       <a:solidFill>
                         <a:srgbClr val="626669"/>
                       </a:solidFill>
@@ -14768,7 +14768,7 @@
                     <a:lnT w="10160">
                       <a:noFill/>
                     </a:lnT>
-                    <a:lnB w="10160">
+                    <a:lnB w="15240">
                       <a:solidFill>
                         <a:srgbClr val="626669"/>
                       </a:solidFill>
@@ -15478,12 +15478,12 @@
                     <a:lnR w="10160">
                       <a:noFill/>
                     </a:lnR>
-                    <a:lnT w="10160">
+                    <a:lnT w="15240">
                       <a:solidFill>
                         <a:srgbClr val="626669"/>
                       </a:solidFill>
                     </a:lnT>
-                    <a:lnB w="10160">
+                    <a:lnB w="7620">
                       <a:solidFill>
                         <a:srgbClr val="626669"/>
                       </a:solidFill>
@@ -15527,12 +15527,12 @@
                     <a:lnR w="10160">
                       <a:noFill/>
                     </a:lnR>
-                    <a:lnT w="10160">
+                    <a:lnT w="15240">
                       <a:solidFill>
                         <a:srgbClr val="626669"/>
                       </a:solidFill>
                     </a:lnT>
-                    <a:lnB w="10160">
+                    <a:lnB w="7620">
                       <a:solidFill>
                         <a:srgbClr val="626669"/>
                       </a:solidFill>
@@ -15576,12 +15576,12 @@
                     <a:lnR w="10160">
                       <a:noFill/>
                     </a:lnR>
-                    <a:lnT w="10160">
+                    <a:lnT w="15240">
                       <a:solidFill>
                         <a:srgbClr val="626669"/>
                       </a:solidFill>
                     </a:lnT>
-                    <a:lnB w="10160">
+                    <a:lnB w="7620">
                       <a:solidFill>
                         <a:srgbClr val="626669"/>
                       </a:solidFill>
@@ -15627,7 +15627,7 @@
                     <a:lnR w="10160">
                       <a:noFill/>
                     </a:lnR>
-                    <a:lnT w="10160">
+                    <a:lnT w="7620">
                       <a:solidFill>
                         <a:srgbClr val="626669"/>
                       </a:solidFill>
@@ -15674,7 +15674,7 @@
                     <a:lnR w="10160">
                       <a:noFill/>
                     </a:lnR>
-                    <a:lnT w="10160">
+                    <a:lnT w="7620">
                       <a:solidFill>
                         <a:srgbClr val="626669"/>
                       </a:solidFill>
@@ -15721,7 +15721,7 @@
                     <a:lnR w="10160">
                       <a:noFill/>
                     </a:lnR>
-                    <a:lnT w="10160">
+                    <a:lnT w="7620">
                       <a:solidFill>
                         <a:srgbClr val="626669"/>
                       </a:solidFill>
@@ -15773,7 +15773,7 @@
                     <a:lnT w="10160">
                       <a:noFill/>
                     </a:lnT>
-                    <a:lnB w="10160">
+                    <a:lnB w="15240">
                       <a:solidFill>
                         <a:srgbClr val="626669"/>
                       </a:solidFill>
@@ -15820,7 +15820,7 @@
                     <a:lnT w="10160">
                       <a:noFill/>
                     </a:lnT>
-                    <a:lnB w="10160">
+                    <a:lnB w="15240">
                       <a:solidFill>
                         <a:srgbClr val="626669"/>
                       </a:solidFill>
@@ -15867,7 +15867,7 @@
                     <a:lnT w="10160">
                       <a:noFill/>
                     </a:lnT>
-                    <a:lnB w="10160">
+                    <a:lnB w="15240">
                       <a:solidFill>
                         <a:srgbClr val="626669"/>
                       </a:solidFill>
@@ -16134,12 +16134,12 @@
                     <a:lnR w="10160">
                       <a:noFill/>
                     </a:lnR>
-                    <a:lnT w="10160">
+                    <a:lnT w="15240">
                       <a:solidFill>
                         <a:srgbClr val="626669"/>
                       </a:solidFill>
                     </a:lnT>
-                    <a:lnB w="10160">
+                    <a:lnB w="7620">
                       <a:solidFill>
                         <a:srgbClr val="626669"/>
                       </a:solidFill>
@@ -16183,12 +16183,12 @@
                     <a:lnR w="10160">
                       <a:noFill/>
                     </a:lnR>
-                    <a:lnT w="10160">
+                    <a:lnT w="15240">
                       <a:solidFill>
                         <a:srgbClr val="626669"/>
                       </a:solidFill>
                     </a:lnT>
-                    <a:lnB w="10160">
+                    <a:lnB w="7620">
                       <a:solidFill>
                         <a:srgbClr val="626669"/>
                       </a:solidFill>
@@ -16234,7 +16234,7 @@
                     <a:lnR w="10160">
                       <a:noFill/>
                     </a:lnR>
-                    <a:lnT w="10160">
+                    <a:lnT w="7620">
                       <a:solidFill>
                         <a:srgbClr val="626669"/>
                       </a:solidFill>
@@ -16281,7 +16281,7 @@
                     <a:lnR w="10160">
                       <a:noFill/>
                     </a:lnR>
-                    <a:lnT w="10160">
+                    <a:lnT w="7620">
                       <a:solidFill>
                         <a:srgbClr val="626669"/>
                       </a:solidFill>
@@ -16425,7 +16425,7 @@
                     <a:lnT w="10160">
                       <a:noFill/>
                     </a:lnT>
-                    <a:lnB w="10160">
+                    <a:lnB w="15240">
                       <a:solidFill>
                         <a:srgbClr val="626669"/>
                       </a:solidFill>
@@ -16472,7 +16472,7 @@
                     <a:lnT w="10160">
                       <a:noFill/>
                     </a:lnT>
-                    <a:lnB w="10160">
+                    <a:lnB w="15240">
                       <a:solidFill>
                         <a:srgbClr val="626669"/>
                       </a:solidFill>
@@ -17655,12 +17655,12 @@
                     <a:lnR w="10160">
                       <a:noFill/>
                     </a:lnR>
-                    <a:lnT w="10160">
+                    <a:lnT w="15240">
                       <a:solidFill>
                         <a:srgbClr val="626669"/>
                       </a:solidFill>
                     </a:lnT>
-                    <a:lnB w="10160">
+                    <a:lnB w="7620">
                       <a:solidFill>
                         <a:srgbClr val="626669"/>
                       </a:solidFill>
@@ -17704,12 +17704,12 @@
                     <a:lnR w="10160">
                       <a:noFill/>
                     </a:lnR>
-                    <a:lnT w="10160">
+                    <a:lnT w="15240">
                       <a:solidFill>
                         <a:srgbClr val="626669"/>
                       </a:solidFill>
                     </a:lnT>
-                    <a:lnB w="10160">
+                    <a:lnB w="7620">
                       <a:solidFill>
                         <a:srgbClr val="626669"/>
                       </a:solidFill>
@@ -17753,12 +17753,12 @@
                     <a:lnR w="10160">
                       <a:noFill/>
                     </a:lnR>
-                    <a:lnT w="10160">
+                    <a:lnT w="15240">
                       <a:solidFill>
                         <a:srgbClr val="626669"/>
                       </a:solidFill>
                     </a:lnT>
-                    <a:lnB w="10160">
+                    <a:lnB w="7620">
                       <a:solidFill>
                         <a:srgbClr val="626669"/>
                       </a:solidFill>
@@ -17804,7 +17804,7 @@
                     <a:lnR w="10160">
                       <a:noFill/>
                     </a:lnR>
-                    <a:lnT w="10160">
+                    <a:lnT w="7620">
                       <a:solidFill>
                         <a:srgbClr val="626669"/>
                       </a:solidFill>
@@ -17851,7 +17851,7 @@
                     <a:lnR w="10160">
                       <a:noFill/>
                     </a:lnR>
-                    <a:lnT w="10160">
+                    <a:lnT w="7620">
                       <a:solidFill>
                         <a:srgbClr val="626669"/>
                       </a:solidFill>
@@ -17898,7 +17898,7 @@
                     <a:lnR w="10160">
                       <a:noFill/>
                     </a:lnR>
-                    <a:lnT w="10160">
+                    <a:lnT w="7620">
                       <a:solidFill>
                         <a:srgbClr val="626669"/>
                       </a:solidFill>
@@ -18224,7 +18224,7 @@
                     <a:lnT w="10160">
                       <a:noFill/>
                     </a:lnT>
-                    <a:lnB w="10160">
+                    <a:lnB w="15240">
                       <a:solidFill>
                         <a:srgbClr val="626669"/>
                       </a:solidFill>
@@ -18271,7 +18271,7 @@
                     <a:lnT w="10160">
                       <a:noFill/>
                     </a:lnT>
-                    <a:lnB w="10160">
+                    <a:lnB w="15240">
                       <a:solidFill>
                         <a:srgbClr val="626669"/>
                       </a:solidFill>
@@ -18318,7 +18318,7 @@
                     <a:lnT w="10160">
                       <a:noFill/>
                     </a:lnT>
-                    <a:lnB w="10160">
+                    <a:lnB w="15240">
                       <a:solidFill>
                         <a:srgbClr val="626669"/>
                       </a:solidFill>
@@ -19428,12 +19428,12 @@
                     <a:lnR w="10160">
                       <a:noFill/>
                     </a:lnR>
-                    <a:lnT w="10160">
+                    <a:lnT w="15240">
                       <a:solidFill>
                         <a:srgbClr val="626669"/>
                       </a:solidFill>
                     </a:lnT>
-                    <a:lnB w="10160">
+                    <a:lnB w="7620">
                       <a:solidFill>
                         <a:srgbClr val="626669"/>
                       </a:solidFill>
@@ -19477,12 +19477,12 @@
                     <a:lnR w="10160">
                       <a:noFill/>
                     </a:lnR>
-                    <a:lnT w="10160">
+                    <a:lnT w="15240">
                       <a:solidFill>
                         <a:srgbClr val="626669"/>
                       </a:solidFill>
                     </a:lnT>
-                    <a:lnB w="10160">
+                    <a:lnB w="7620">
                       <a:solidFill>
                         <a:srgbClr val="626669"/>
                       </a:solidFill>
@@ -19528,7 +19528,7 @@
                     <a:lnR w="10160">
                       <a:noFill/>
                     </a:lnR>
-                    <a:lnT w="10160">
+                    <a:lnT w="7620">
                       <a:solidFill>
                         <a:srgbClr val="626669"/>
                       </a:solidFill>
@@ -19575,7 +19575,7 @@
                     <a:lnR w="10160">
                       <a:noFill/>
                     </a:lnR>
-                    <a:lnT w="10160">
+                    <a:lnT w="7620">
                       <a:solidFill>
                         <a:srgbClr val="626669"/>
                       </a:solidFill>
@@ -19719,7 +19719,7 @@
                     <a:lnT w="10160">
                       <a:noFill/>
                     </a:lnT>
-                    <a:lnB w="10160">
+                    <a:lnB w="15240">
                       <a:solidFill>
                         <a:srgbClr val="626669"/>
                       </a:solidFill>
@@ -19766,7 +19766,7 @@
                     <a:lnT w="10160">
                       <a:noFill/>
                     </a:lnT>
-                    <a:lnB w="10160">
+                    <a:lnB w="15240">
                       <a:solidFill>
                         <a:srgbClr val="626669"/>
                       </a:solidFill>
@@ -20137,12 +20137,12 @@
                     <a:lnR w="10160">
                       <a:noFill/>
                     </a:lnR>
-                    <a:lnT w="10160">
+                    <a:lnT w="15240">
                       <a:solidFill>
                         <a:srgbClr val="626669"/>
                       </a:solidFill>
                     </a:lnT>
-                    <a:lnB w="10160">
+                    <a:lnB w="7620">
                       <a:solidFill>
                         <a:srgbClr val="626669"/>
                       </a:solidFill>
@@ -20186,12 +20186,12 @@
                     <a:lnR w="10160">
                       <a:noFill/>
                     </a:lnR>
-                    <a:lnT w="10160">
+                    <a:lnT w="15240">
                       <a:solidFill>
                         <a:srgbClr val="626669"/>
                       </a:solidFill>
                     </a:lnT>
-                    <a:lnB w="10160">
+                    <a:lnB w="7620">
                       <a:solidFill>
                         <a:srgbClr val="626669"/>
                       </a:solidFill>
@@ -20235,12 +20235,12 @@
                     <a:lnR w="10160">
                       <a:noFill/>
                     </a:lnR>
-                    <a:lnT w="10160">
+                    <a:lnT w="15240">
                       <a:solidFill>
                         <a:srgbClr val="626669"/>
                       </a:solidFill>
                     </a:lnT>
-                    <a:lnB w="10160">
+                    <a:lnB w="7620">
                       <a:solidFill>
                         <a:srgbClr val="626669"/>
                       </a:solidFill>
@@ -20284,12 +20284,12 @@
                     <a:lnR w="10160">
                       <a:noFill/>
                     </a:lnR>
-                    <a:lnT w="10160">
+                    <a:lnT w="15240">
                       <a:solidFill>
                         <a:srgbClr val="626669"/>
                       </a:solidFill>
                     </a:lnT>
-                    <a:lnB w="10160">
+                    <a:lnB w="7620">
                       <a:solidFill>
                         <a:srgbClr val="626669"/>
                       </a:solidFill>
@@ -20335,7 +20335,7 @@
                     <a:lnR w="10160">
                       <a:noFill/>
                     </a:lnR>
-                    <a:lnT w="10160">
+                    <a:lnT w="7620">
                       <a:solidFill>
                         <a:srgbClr val="626669"/>
                       </a:solidFill>
@@ -20382,7 +20382,7 @@
                     <a:lnR w="10160">
                       <a:noFill/>
                     </a:lnR>
-                    <a:lnT w="10160">
+                    <a:lnT w="7620">
                       <a:solidFill>
                         <a:srgbClr val="626669"/>
                       </a:solidFill>
@@ -20429,7 +20429,7 @@
                     <a:lnR w="10160">
                       <a:noFill/>
                     </a:lnR>
-                    <a:lnT w="10160">
+                    <a:lnT w="7620">
                       <a:solidFill>
                         <a:srgbClr val="626669"/>
                       </a:solidFill>
@@ -20476,7 +20476,7 @@
                     <a:lnR w="10160">
                       <a:noFill/>
                     </a:lnR>
-                    <a:lnT w="10160">
+                    <a:lnT w="7620">
                       <a:solidFill>
                         <a:srgbClr val="626669"/>
                       </a:solidFill>
@@ -20710,7 +20710,7 @@
                     <a:lnT w="10160">
                       <a:noFill/>
                     </a:lnT>
-                    <a:lnB w="10160">
+                    <a:lnB w="15240">
                       <a:solidFill>
                         <a:srgbClr val="626669"/>
                       </a:solidFill>
@@ -20757,7 +20757,7 @@
                     <a:lnT w="10160">
                       <a:noFill/>
                     </a:lnT>
-                    <a:lnB w="10160">
+                    <a:lnB w="15240">
                       <a:solidFill>
                         <a:srgbClr val="626669"/>
                       </a:solidFill>
@@ -20804,7 +20804,7 @@
                     <a:lnT w="10160">
                       <a:noFill/>
                     </a:lnT>
-                    <a:lnB w="10160">
+                    <a:lnB w="15240">
                       <a:solidFill>
                         <a:srgbClr val="626669"/>
                       </a:solidFill>
@@ -20851,7 +20851,7 @@
                     <a:lnT w="10160">
                       <a:noFill/>
                     </a:lnT>
-                    <a:lnB w="10160">
+                    <a:lnB w="15240">
                       <a:solidFill>
                         <a:srgbClr val="626669"/>
                       </a:solidFill>
@@ -21118,12 +21118,12 @@
                     <a:lnR w="10160">
                       <a:noFill/>
                     </a:lnR>
-                    <a:lnT w="10160">
+                    <a:lnT w="15240">
                       <a:solidFill>
                         <a:srgbClr val="626669"/>
                       </a:solidFill>
                     </a:lnT>
-                    <a:lnB w="10160">
+                    <a:lnB w="7620">
                       <a:solidFill>
                         <a:srgbClr val="626669"/>
                       </a:solidFill>
@@ -21167,12 +21167,12 @@
                     <a:lnR w="10160">
                       <a:noFill/>
                     </a:lnR>
-                    <a:lnT w="10160">
+                    <a:lnT w="15240">
                       <a:solidFill>
                         <a:srgbClr val="626669"/>
                       </a:solidFill>
                     </a:lnT>
-                    <a:lnB w="10160">
+                    <a:lnB w="7620">
                       <a:solidFill>
                         <a:srgbClr val="626669"/>
                       </a:solidFill>
@@ -21218,7 +21218,7 @@
                     <a:lnR w="10160">
                       <a:noFill/>
                     </a:lnR>
-                    <a:lnT w="10160">
+                    <a:lnT w="7620">
                       <a:solidFill>
                         <a:srgbClr val="626669"/>
                       </a:solidFill>
@@ -21265,7 +21265,7 @@
                     <a:lnR w="10160">
                       <a:noFill/>
                     </a:lnR>
-                    <a:lnT w="10160">
+                    <a:lnT w="7620">
                       <a:solidFill>
                         <a:srgbClr val="626669"/>
                       </a:solidFill>
@@ -21409,7 +21409,7 @@
                     <a:lnT w="10160">
                       <a:noFill/>
                     </a:lnT>
-                    <a:lnB w="10160">
+                    <a:lnB w="15240">
                       <a:solidFill>
                         <a:srgbClr val="626669"/>
                       </a:solidFill>
@@ -21456,7 +21456,7 @@
                     <a:lnT w="10160">
                       <a:noFill/>
                     </a:lnT>
-                    <a:lnB w="10160">
+                    <a:lnB w="15240">
                       <a:solidFill>
                         <a:srgbClr val="626669"/>
                       </a:solidFill>
@@ -23069,12 +23069,12 @@
                     <a:lnR w="10160">
                       <a:noFill/>
                     </a:lnR>
-                    <a:lnT w="10160">
+                    <a:lnT w="15240">
                       <a:solidFill>
                         <a:srgbClr val="626669"/>
                       </a:solidFill>
                     </a:lnT>
-                    <a:lnB w="10160">
+                    <a:lnB w="7620">
                       <a:solidFill>
                         <a:srgbClr val="626669"/>
                       </a:solidFill>
@@ -23118,12 +23118,12 @@
                     <a:lnR w="10160">
                       <a:noFill/>
                     </a:lnR>
-                    <a:lnT w="10160">
+                    <a:lnT w="15240">
                       <a:solidFill>
                         <a:srgbClr val="626669"/>
                       </a:solidFill>
                     </a:lnT>
-                    <a:lnB w="10160">
+                    <a:lnB w="7620">
                       <a:solidFill>
                         <a:srgbClr val="626669"/>
                       </a:solidFill>
@@ -23169,7 +23169,7 @@
                     <a:lnR w="10160">
                       <a:noFill/>
                     </a:lnR>
-                    <a:lnT w="10160">
+                    <a:lnT w="7620">
                       <a:solidFill>
                         <a:srgbClr val="626669"/>
                       </a:solidFill>
@@ -23216,7 +23216,7 @@
                     <a:lnR w="10160">
                       <a:noFill/>
                     </a:lnR>
-                    <a:lnT w="10160">
+                    <a:lnT w="7620">
                       <a:solidFill>
                         <a:srgbClr val="626669"/>
                       </a:solidFill>
@@ -23452,7 +23452,7 @@
                     <a:lnT w="10160">
                       <a:noFill/>
                     </a:lnT>
-                    <a:lnB w="10160">
+                    <a:lnB w="15240">
                       <a:solidFill>
                         <a:srgbClr val="626669"/>
                       </a:solidFill>
@@ -23499,7 +23499,7 @@
                     <a:lnT w="10160">
                       <a:noFill/>
                     </a:lnT>
-                    <a:lnB w="10160">
+                    <a:lnB w="15240">
                       <a:solidFill>
                         <a:srgbClr val="626669"/>
                       </a:solidFill>
@@ -23766,12 +23766,12 @@
                     <a:lnR w="10160">
                       <a:noFill/>
                     </a:lnR>
-                    <a:lnT w="10160">
+                    <a:lnT w="15240">
                       <a:solidFill>
                         <a:srgbClr val="626669"/>
                       </a:solidFill>
                     </a:lnT>
-                    <a:lnB w="10160">
+                    <a:lnB w="7620">
                       <a:solidFill>
                         <a:srgbClr val="626669"/>
                       </a:solidFill>
@@ -23815,12 +23815,12 @@
                     <a:lnR w="10160">
                       <a:noFill/>
                     </a:lnR>
-                    <a:lnT w="10160">
+                    <a:lnT w="15240">
                       <a:solidFill>
                         <a:srgbClr val="626669"/>
                       </a:solidFill>
                     </a:lnT>
-                    <a:lnB w="10160">
+                    <a:lnB w="7620">
                       <a:solidFill>
                         <a:srgbClr val="626669"/>
                       </a:solidFill>
@@ -23866,7 +23866,7 @@
                     <a:lnR w="10160">
                       <a:noFill/>
                     </a:lnR>
-                    <a:lnT w="10160">
+                    <a:lnT w="7620">
                       <a:solidFill>
                         <a:srgbClr val="626669"/>
                       </a:solidFill>
@@ -23913,7 +23913,7 @@
                     <a:lnR w="10160">
                       <a:noFill/>
                     </a:lnR>
-                    <a:lnT w="10160">
+                    <a:lnT w="7620">
                       <a:solidFill>
                         <a:srgbClr val="626669"/>
                       </a:solidFill>
@@ -24057,7 +24057,7 @@
                     <a:lnT w="10160">
                       <a:noFill/>
                     </a:lnT>
-                    <a:lnB w="10160">
+                    <a:lnB w="15240">
                       <a:solidFill>
                         <a:srgbClr val="626669"/>
                       </a:solidFill>
@@ -24104,7 +24104,7 @@
                     <a:lnT w="10160">
                       <a:noFill/>
                     </a:lnT>
-                    <a:lnB w="10160">
+                    <a:lnB w="15240">
                       <a:solidFill>
                         <a:srgbClr val="626669"/>
                       </a:solidFill>
@@ -24959,12 +24959,12 @@
                     <a:lnR w="10160">
                       <a:noFill/>
                     </a:lnR>
-                    <a:lnT w="10160">
+                    <a:lnT w="15240">
                       <a:solidFill>
                         <a:srgbClr val="626669"/>
                       </a:solidFill>
                     </a:lnT>
-                    <a:lnB w="10160">
+                    <a:lnB w="7620">
                       <a:solidFill>
                         <a:srgbClr val="626669"/>
                       </a:solidFill>
@@ -25008,12 +25008,12 @@
                     <a:lnR w="10160">
                       <a:noFill/>
                     </a:lnR>
-                    <a:lnT w="10160">
+                    <a:lnT w="15240">
                       <a:solidFill>
                         <a:srgbClr val="626669"/>
                       </a:solidFill>
                     </a:lnT>
-                    <a:lnB w="10160">
+                    <a:lnB w="7620">
                       <a:solidFill>
                         <a:srgbClr val="626669"/>
                       </a:solidFill>
@@ -25059,7 +25059,7 @@
                     <a:lnR w="10160">
                       <a:noFill/>
                     </a:lnR>
-                    <a:lnT w="10160">
+                    <a:lnT w="7620">
                       <a:solidFill>
                         <a:srgbClr val="626669"/>
                       </a:solidFill>
@@ -25106,7 +25106,7 @@
                     <a:lnR w="10160">
                       <a:noFill/>
                     </a:lnR>
-                    <a:lnT w="10160">
+                    <a:lnT w="7620">
                       <a:solidFill>
                         <a:srgbClr val="626669"/>
                       </a:solidFill>
@@ -25342,7 +25342,7 @@
                     <a:lnT w="10160">
                       <a:noFill/>
                     </a:lnT>
-                    <a:lnB w="10160">
+                    <a:lnB w="15240">
                       <a:solidFill>
                         <a:srgbClr val="626669"/>
                       </a:solidFill>
@@ -25389,7 +25389,7 @@
                     <a:lnT w="10160">
                       <a:noFill/>
                     </a:lnT>
-                    <a:lnB w="10160">
+                    <a:lnB w="15240">
                       <a:solidFill>
                         <a:srgbClr val="626669"/>
                       </a:solidFill>
@@ -29586,12 +29586,12 @@
                     <a:lnR w="10160">
                       <a:noFill/>
                     </a:lnR>
-                    <a:lnT w="10160">
+                    <a:lnT w="15240">
                       <a:solidFill>
                         <a:srgbClr val="626669"/>
                       </a:solidFill>
                     </a:lnT>
-                    <a:lnB w="10160">
+                    <a:lnB w="7620">
                       <a:solidFill>
                         <a:srgbClr val="626669"/>
                       </a:solidFill>
@@ -29635,12 +29635,12 @@
                     <a:lnR w="10160">
                       <a:noFill/>
                     </a:lnR>
-                    <a:lnT w="10160">
+                    <a:lnT w="15240">
                       <a:solidFill>
                         <a:srgbClr val="626669"/>
                       </a:solidFill>
                     </a:lnT>
-                    <a:lnB w="10160">
+                    <a:lnB w="7620">
                       <a:solidFill>
                         <a:srgbClr val="626669"/>
                       </a:solidFill>
@@ -29686,7 +29686,7 @@
                     <a:lnR w="10160">
                       <a:noFill/>
                     </a:lnR>
-                    <a:lnT w="10160">
+                    <a:lnT w="7620">
                       <a:solidFill>
                         <a:srgbClr val="626669"/>
                       </a:solidFill>
@@ -29733,7 +29733,7 @@
                     <a:lnR w="10160">
                       <a:noFill/>
                     </a:lnR>
-                    <a:lnT w="10160">
+                    <a:lnT w="7620">
                       <a:solidFill>
                         <a:srgbClr val="626669"/>
                       </a:solidFill>
@@ -29877,7 +29877,7 @@
                     <a:lnT w="10160">
                       <a:noFill/>
                     </a:lnT>
-                    <a:lnB w="10160">
+                    <a:lnB w="15240">
                       <a:solidFill>
                         <a:srgbClr val="626669"/>
                       </a:solidFill>
@@ -29924,7 +29924,7 @@
                     <a:lnT w="10160">
                       <a:noFill/>
                     </a:lnT>
-                    <a:lnB w="10160">
+                    <a:lnB w="15240">
                       <a:solidFill>
                         <a:srgbClr val="626669"/>
                       </a:solidFill>
@@ -32601,12 +32601,12 @@
                     <a:lnR w="10160">
                       <a:noFill/>
                     </a:lnR>
-                    <a:lnT w="10160">
+                    <a:lnT w="15240">
                       <a:solidFill>
                         <a:srgbClr val="626669"/>
                       </a:solidFill>
                     </a:lnT>
-                    <a:lnB w="10160">
+                    <a:lnB w="7620">
                       <a:solidFill>
                         <a:srgbClr val="626669"/>
                       </a:solidFill>
@@ -32650,12 +32650,12 @@
                     <a:lnR w="10160">
                       <a:noFill/>
                     </a:lnR>
-                    <a:lnT w="10160">
+                    <a:lnT w="15240">
                       <a:solidFill>
                         <a:srgbClr val="626669"/>
                       </a:solidFill>
                     </a:lnT>
-                    <a:lnB w="10160">
+                    <a:lnB w="7620">
                       <a:solidFill>
                         <a:srgbClr val="626669"/>
                       </a:solidFill>
@@ -32701,7 +32701,7 @@
                     <a:lnR w="10160">
                       <a:noFill/>
                     </a:lnR>
-                    <a:lnT w="10160">
+                    <a:lnT w="7620">
                       <a:solidFill>
                         <a:srgbClr val="626669"/>
                       </a:solidFill>
@@ -32748,7 +32748,7 @@
                     <a:lnR w="10160">
                       <a:noFill/>
                     </a:lnR>
-                    <a:lnT w="10160">
+                    <a:lnT w="7620">
                       <a:solidFill>
                         <a:srgbClr val="626669"/>
                       </a:solidFill>
@@ -32984,7 +32984,7 @@
                     <a:lnT w="10160">
                       <a:noFill/>
                     </a:lnT>
-                    <a:lnB w="10160">
+                    <a:lnB w="15240">
                       <a:solidFill>
                         <a:srgbClr val="626669"/>
                       </a:solidFill>
@@ -33031,7 +33031,7 @@
                     <a:lnT w="10160">
                       <a:noFill/>
                     </a:lnT>
-                    <a:lnB w="10160">
+                    <a:lnB w="15240">
                       <a:solidFill>
                         <a:srgbClr val="626669"/>
                       </a:solidFill>
@@ -33904,12 +33904,12 @@
                     <a:lnR w="10160">
                       <a:noFill/>
                     </a:lnR>
-                    <a:lnT w="10160">
+                    <a:lnT w="15240">
                       <a:solidFill>
                         <a:srgbClr val="626669"/>
                       </a:solidFill>
                     </a:lnT>
-                    <a:lnB w="10160">
+                    <a:lnB w="7620">
                       <a:solidFill>
                         <a:srgbClr val="626669"/>
                       </a:solidFill>
@@ -33953,12 +33953,12 @@
                     <a:lnR w="10160">
                       <a:noFill/>
                     </a:lnR>
-                    <a:lnT w="10160">
+                    <a:lnT w="15240">
                       <a:solidFill>
                         <a:srgbClr val="626669"/>
                       </a:solidFill>
                     </a:lnT>
-                    <a:lnB w="10160">
+                    <a:lnB w="7620">
                       <a:solidFill>
                         <a:srgbClr val="626669"/>
                       </a:solidFill>
@@ -34004,7 +34004,7 @@
                     <a:lnR w="10160">
                       <a:noFill/>
                     </a:lnR>
-                    <a:lnT w="10160">
+                    <a:lnT w="7620">
                       <a:solidFill>
                         <a:srgbClr val="626669"/>
                       </a:solidFill>
@@ -34051,7 +34051,7 @@
                     <a:lnR w="10160">
                       <a:noFill/>
                     </a:lnR>
-                    <a:lnT w="10160">
+                    <a:lnT w="7620">
                       <a:solidFill>
                         <a:srgbClr val="626669"/>
                       </a:solidFill>
@@ -34287,7 +34287,7 @@
                     <a:lnT w="10160">
                       <a:noFill/>
                     </a:lnT>
-                    <a:lnB w="10160">
+                    <a:lnB w="15240">
                       <a:solidFill>
                         <a:srgbClr val="626669"/>
                       </a:solidFill>
@@ -34334,7 +34334,7 @@
                     <a:lnT w="10160">
                       <a:noFill/>
                     </a:lnT>
-                    <a:lnB w="10160">
+                    <a:lnB w="15240">
                       <a:solidFill>
                         <a:srgbClr val="626669"/>
                       </a:solidFill>
@@ -34904,12 +34904,12 @@
                     <a:lnR w="10160">
                       <a:noFill/>
                     </a:lnR>
-                    <a:lnT w="10160">
+                    <a:lnT w="15240">
                       <a:solidFill>
                         <a:srgbClr val="626669"/>
                       </a:solidFill>
                     </a:lnT>
-                    <a:lnB w="10160">
+                    <a:lnB w="7620">
                       <a:solidFill>
                         <a:srgbClr val="626669"/>
                       </a:solidFill>
@@ -34953,12 +34953,12 @@
                     <a:lnR w="10160">
                       <a:noFill/>
                     </a:lnR>
-                    <a:lnT w="10160">
+                    <a:lnT w="15240">
                       <a:solidFill>
                         <a:srgbClr val="626669"/>
                       </a:solidFill>
                     </a:lnT>
-                    <a:lnB w="10160">
+                    <a:lnB w="7620">
                       <a:solidFill>
                         <a:srgbClr val="626669"/>
                       </a:solidFill>
@@ -35004,7 +35004,7 @@
                     <a:lnR w="10160">
                       <a:noFill/>
                     </a:lnR>
-                    <a:lnT w="10160">
+                    <a:lnT w="7620">
                       <a:solidFill>
                         <a:srgbClr val="626669"/>
                       </a:solidFill>
@@ -35051,7 +35051,7 @@
                     <a:lnR w="10160">
                       <a:noFill/>
                     </a:lnR>
-                    <a:lnT w="10160">
+                    <a:lnT w="7620">
                       <a:solidFill>
                         <a:srgbClr val="626669"/>
                       </a:solidFill>
@@ -35195,7 +35195,7 @@
                     <a:lnT w="10160">
                       <a:noFill/>
                     </a:lnT>
-                    <a:lnB w="10160">
+                    <a:lnB w="15240">
                       <a:solidFill>
                         <a:srgbClr val="626669"/>
                       </a:solidFill>
@@ -35242,7 +35242,7 @@
                     <a:lnT w="10160">
                       <a:noFill/>
                     </a:lnT>
-                    <a:lnB w="10160">
+                    <a:lnB w="15240">
                       <a:solidFill>
                         <a:srgbClr val="626669"/>
                       </a:solidFill>
@@ -35995,12 +35995,12 @@
                     <a:lnR w="10160">
                       <a:noFill/>
                     </a:lnR>
-                    <a:lnT w="10160">
+                    <a:lnT w="15240">
                       <a:solidFill>
                         <a:srgbClr val="626669"/>
                       </a:solidFill>
                     </a:lnT>
-                    <a:lnB w="10160">
+                    <a:lnB w="7620">
                       <a:solidFill>
                         <a:srgbClr val="626669"/>
                       </a:solidFill>
@@ -36044,12 +36044,12 @@
                     <a:lnR w="10160">
                       <a:noFill/>
                     </a:lnR>
-                    <a:lnT w="10160">
+                    <a:lnT w="15240">
                       <a:solidFill>
                         <a:srgbClr val="626669"/>
                       </a:solidFill>
                     </a:lnT>
-                    <a:lnB w="10160">
+                    <a:lnB w="7620">
                       <a:solidFill>
                         <a:srgbClr val="626669"/>
                       </a:solidFill>
@@ -36095,7 +36095,7 @@
                     <a:lnR w="10160">
                       <a:noFill/>
                     </a:lnR>
-                    <a:lnT w="10160">
+                    <a:lnT w="7620">
                       <a:solidFill>
                         <a:srgbClr val="626669"/>
                       </a:solidFill>
@@ -36142,7 +36142,7 @@
                     <a:lnR w="10160">
                       <a:noFill/>
                     </a:lnR>
-                    <a:lnT w="10160">
+                    <a:lnT w="7620">
                       <a:solidFill>
                         <a:srgbClr val="626669"/>
                       </a:solidFill>
@@ -36378,7 +36378,7 @@
                     <a:lnT w="10160">
                       <a:noFill/>
                     </a:lnT>
-                    <a:lnB w="10160">
+                    <a:lnB w="15240">
                       <a:solidFill>
                         <a:srgbClr val="626669"/>
                       </a:solidFill>
@@ -36425,7 +36425,7 @@
                     <a:lnT w="10160">
                       <a:noFill/>
                     </a:lnT>
-                    <a:lnB w="10160">
+                    <a:lnB w="15240">
                       <a:solidFill>
                         <a:srgbClr val="626669"/>
                       </a:solidFill>
@@ -40230,12 +40230,12 @@
                     <a:lnR w="10160">
                       <a:noFill/>
                     </a:lnR>
-                    <a:lnT w="10160">
+                    <a:lnT w="15240">
                       <a:solidFill>
                         <a:srgbClr val="626669"/>
                       </a:solidFill>
                     </a:lnT>
-                    <a:lnB w="10160">
+                    <a:lnB w="7620">
                       <a:solidFill>
                         <a:srgbClr val="626669"/>
                       </a:solidFill>
@@ -40282,12 +40282,12 @@
                     <a:lnR w="10160">
                       <a:noFill/>
                     </a:lnR>
-                    <a:lnT w="10160">
+                    <a:lnT w="15240">
                       <a:solidFill>
                         <a:srgbClr val="626669"/>
                       </a:solidFill>
                     </a:lnT>
-                    <a:lnB w="10160">
+                    <a:lnB w="7620">
                       <a:solidFill>
                         <a:srgbClr val="626669"/>
                       </a:solidFill>
@@ -40336,7 +40336,7 @@
                     <a:lnR w="10160">
                       <a:noFill/>
                     </a:lnR>
-                    <a:lnT w="10160">
+                    <a:lnT w="7620">
                       <a:solidFill>
                         <a:srgbClr val="626669"/>
                       </a:solidFill>
@@ -40386,7 +40386,7 @@
                     <a:lnR w="10160">
                       <a:noFill/>
                     </a:lnR>
-                    <a:lnT w="10160">
+                    <a:lnT w="7620">
                       <a:solidFill>
                         <a:srgbClr val="626669"/>
                       </a:solidFill>
@@ -40833,7 +40833,7 @@
                     <a:lnT w="10160">
                       <a:noFill/>
                     </a:lnT>
-                    <a:lnB w="10160">
+                    <a:lnB w="15240">
                       <a:solidFill>
                         <a:srgbClr val="626669"/>
                       </a:solidFill>
@@ -40883,7 +40883,7 @@
                     <a:lnT w="10160">
                       <a:noFill/>
                     </a:lnT>
-                    <a:lnB w="10160">
+                    <a:lnB w="15240">
                       <a:solidFill>
                         <a:srgbClr val="626669"/>
                       </a:solidFill>
@@ -41211,12 +41211,12 @@
                     <a:lnR w="10160">
                       <a:noFill/>
                     </a:lnR>
-                    <a:lnT w="10160">
+                    <a:lnT w="15240">
                       <a:solidFill>
                         <a:srgbClr val="626669"/>
                       </a:solidFill>
                     </a:lnT>
-                    <a:lnB w="10160">
+                    <a:lnB w="7620">
                       <a:solidFill>
                         <a:srgbClr val="626669"/>
                       </a:solidFill>
@@ -41263,12 +41263,12 @@
                     <a:lnR w="10160">
                       <a:noFill/>
                     </a:lnR>
-                    <a:lnT w="10160">
+                    <a:lnT w="15240">
                       <a:solidFill>
                         <a:srgbClr val="626669"/>
                       </a:solidFill>
                     </a:lnT>
-                    <a:lnB w="10160">
+                    <a:lnB w="7620">
                       <a:solidFill>
                         <a:srgbClr val="626669"/>
                       </a:solidFill>
@@ -41317,7 +41317,7 @@
                     <a:lnR w="10160">
                       <a:noFill/>
                     </a:lnR>
-                    <a:lnT w="10160">
+                    <a:lnT w="7620">
                       <a:solidFill>
                         <a:srgbClr val="626669"/>
                       </a:solidFill>
@@ -41367,7 +41367,7 @@
                     <a:lnR w="10160">
                       <a:noFill/>
                     </a:lnR>
-                    <a:lnT w="10160">
+                    <a:lnT w="7620">
                       <a:solidFill>
                         <a:srgbClr val="626669"/>
                       </a:solidFill>
@@ -41814,7 +41814,7 @@
                     <a:lnT w="10160">
                       <a:noFill/>
                     </a:lnT>
-                    <a:lnB w="10160">
+                    <a:lnB w="15240">
                       <a:solidFill>
                         <a:srgbClr val="626669"/>
                       </a:solidFill>
@@ -41864,7 +41864,7 @@
                     <a:lnT w="10160">
                       <a:noFill/>
                     </a:lnT>
-                    <a:lnB w="10160">
+                    <a:lnB w="15240">
                       <a:solidFill>
                         <a:srgbClr val="626669"/>
                       </a:solidFill>
@@ -42192,12 +42192,12 @@
                     <a:lnR w="10160">
                       <a:noFill/>
                     </a:lnR>
-                    <a:lnT w="10160">
+                    <a:lnT w="15240">
                       <a:solidFill>
                         <a:srgbClr val="626669"/>
                       </a:solidFill>
                     </a:lnT>
-                    <a:lnB w="10160">
+                    <a:lnB w="7620">
                       <a:solidFill>
                         <a:srgbClr val="626669"/>
                       </a:solidFill>
@@ -42244,12 +42244,12 @@
                     <a:lnR w="10160">
                       <a:noFill/>
                     </a:lnR>
-                    <a:lnT w="10160">
+                    <a:lnT w="15240">
                       <a:solidFill>
                         <a:srgbClr val="626669"/>
                       </a:solidFill>
                     </a:lnT>
-                    <a:lnB w="10160">
+                    <a:lnB w="7620">
                       <a:solidFill>
                         <a:srgbClr val="626669"/>
                       </a:solidFill>
@@ -42298,7 +42298,7 @@
                     <a:lnR w="10160">
                       <a:noFill/>
                     </a:lnR>
-                    <a:lnT w="10160">
+                    <a:lnT w="7620">
                       <a:solidFill>
                         <a:srgbClr val="626669"/>
                       </a:solidFill>
@@ -42348,7 +42348,7 @@
                     <a:lnR w="10160">
                       <a:noFill/>
                     </a:lnR>
-                    <a:lnT w="10160">
+                    <a:lnT w="7620">
                       <a:solidFill>
                         <a:srgbClr val="626669"/>
                       </a:solidFill>
@@ -42795,7 +42795,7 @@
                     <a:lnT w="10160">
                       <a:noFill/>
                     </a:lnT>
-                    <a:lnB w="10160">
+                    <a:lnB w="15240">
                       <a:solidFill>
                         <a:srgbClr val="626669"/>
                       </a:solidFill>
@@ -42845,7 +42845,7 @@
                     <a:lnT w="10160">
                       <a:noFill/>
                     </a:lnT>
-                    <a:lnB w="10160">
+                    <a:lnB w="15240">
                       <a:solidFill>
                         <a:srgbClr val="626669"/>
                       </a:solidFill>
@@ -43173,12 +43173,12 @@
                     <a:lnR w="10160">
                       <a:noFill/>
                     </a:lnR>
-                    <a:lnT w="10160">
+                    <a:lnT w="15240">
                       <a:solidFill>
                         <a:srgbClr val="626669"/>
                       </a:solidFill>
                     </a:lnT>
-                    <a:lnB w="10160">
+                    <a:lnB w="7620">
                       <a:solidFill>
                         <a:srgbClr val="626669"/>
                       </a:solidFill>
@@ -43225,12 +43225,12 @@
                     <a:lnR w="10160">
                       <a:noFill/>
                     </a:lnR>
-                    <a:lnT w="10160">
+                    <a:lnT w="15240">
                       <a:solidFill>
                         <a:srgbClr val="626669"/>
                       </a:solidFill>
                     </a:lnT>
-                    <a:lnB w="10160">
+                    <a:lnB w="7620">
                       <a:solidFill>
                         <a:srgbClr val="626669"/>
                       </a:solidFill>
@@ -43279,7 +43279,7 @@
                     <a:lnR w="10160">
                       <a:noFill/>
                     </a:lnR>
-                    <a:lnT w="10160">
+                    <a:lnT w="7620">
                       <a:solidFill>
                         <a:srgbClr val="626669"/>
                       </a:solidFill>
@@ -43329,7 +43329,7 @@
                     <a:lnR w="10160">
                       <a:noFill/>
                     </a:lnR>
-                    <a:lnT w="10160">
+                    <a:lnT w="7620">
                       <a:solidFill>
                         <a:srgbClr val="626669"/>
                       </a:solidFill>
@@ -43776,7 +43776,7 @@
                     <a:lnT w="10160">
                       <a:noFill/>
                     </a:lnT>
-                    <a:lnB w="10160">
+                    <a:lnB w="15240">
                       <a:solidFill>
                         <a:srgbClr val="626669"/>
                       </a:solidFill>
@@ -43826,7 +43826,7 @@
                     <a:lnT w="10160">
                       <a:noFill/>
                     </a:lnT>
-                    <a:lnB w="10160">
+                    <a:lnB w="15240">
                       <a:solidFill>
                         <a:srgbClr val="626669"/>
                       </a:solidFill>
@@ -44154,12 +44154,12 @@
                     <a:lnR w="10160">
                       <a:noFill/>
                     </a:lnR>
-                    <a:lnT w="10160">
+                    <a:lnT w="15240">
                       <a:solidFill>
                         <a:srgbClr val="626669"/>
                       </a:solidFill>
                     </a:lnT>
-                    <a:lnB w="10160">
+                    <a:lnB w="7620">
                       <a:solidFill>
                         <a:srgbClr val="626669"/>
                       </a:solidFill>
@@ -44206,12 +44206,12 @@
                     <a:lnR w="10160">
                       <a:noFill/>
                     </a:lnR>
-                    <a:lnT w="10160">
+                    <a:lnT w="15240">
                       <a:solidFill>
                         <a:srgbClr val="626669"/>
                       </a:solidFill>
                     </a:lnT>
-                    <a:lnB w="10160">
+                    <a:lnB w="7620">
                       <a:solidFill>
                         <a:srgbClr val="626669"/>
                       </a:solidFill>
@@ -44260,7 +44260,7 @@
                     <a:lnR w="10160">
                       <a:noFill/>
                     </a:lnR>
-                    <a:lnT w="10160">
+                    <a:lnT w="7620">
                       <a:solidFill>
                         <a:srgbClr val="626669"/>
                       </a:solidFill>
@@ -44310,7 +44310,7 @@
                     <a:lnR w="10160">
                       <a:noFill/>
                     </a:lnR>
-                    <a:lnT w="10160">
+                    <a:lnT w="7620">
                       <a:solidFill>
                         <a:srgbClr val="626669"/>
                       </a:solidFill>
@@ -44757,7 +44757,7 @@
                     <a:lnT w="10160">
                       <a:noFill/>
                     </a:lnT>
-                    <a:lnB w="10160">
+                    <a:lnB w="15240">
                       <a:solidFill>
                         <a:srgbClr val="626669"/>
                       </a:solidFill>
@@ -44807,7 +44807,7 @@
                     <a:lnT w="10160">
                       <a:noFill/>
                     </a:lnT>
-                    <a:lnB w="10160">
+                    <a:lnB w="15240">
                       <a:solidFill>
                         <a:srgbClr val="626669"/>
                       </a:solidFill>
@@ -45135,12 +45135,12 @@
                     <a:lnR w="10160">
                       <a:noFill/>
                     </a:lnR>
-                    <a:lnT w="10160">
+                    <a:lnT w="15240">
                       <a:solidFill>
                         <a:srgbClr val="626669"/>
                       </a:solidFill>
                     </a:lnT>
-                    <a:lnB w="10160">
+                    <a:lnB w="7620">
                       <a:solidFill>
                         <a:srgbClr val="626669"/>
                       </a:solidFill>
@@ -45187,12 +45187,12 @@
                     <a:lnR w="10160">
                       <a:noFill/>
                     </a:lnR>
-                    <a:lnT w="10160">
+                    <a:lnT w="15240">
                       <a:solidFill>
                         <a:srgbClr val="626669"/>
                       </a:solidFill>
                     </a:lnT>
-                    <a:lnB w="10160">
+                    <a:lnB w="7620">
                       <a:solidFill>
                         <a:srgbClr val="626669"/>
                       </a:solidFill>
@@ -45241,7 +45241,7 @@
                     <a:lnR w="10160">
                       <a:noFill/>
                     </a:lnR>
-                    <a:lnT w="10160">
+                    <a:lnT w="7620">
                       <a:solidFill>
                         <a:srgbClr val="626669"/>
                       </a:solidFill>
@@ -45291,7 +45291,7 @@
                     <a:lnR w="10160">
                       <a:noFill/>
                     </a:lnR>
-                    <a:lnT w="10160">
+                    <a:lnT w="7620">
                       <a:solidFill>
                         <a:srgbClr val="626669"/>
                       </a:solidFill>
@@ -45738,7 +45738,7 @@
                     <a:lnT w="10160">
                       <a:noFill/>
                     </a:lnT>
-                    <a:lnB w="10160">
+                    <a:lnB w="15240">
                       <a:solidFill>
                         <a:srgbClr val="626669"/>
                       </a:solidFill>
@@ -45788,7 +45788,7 @@
                     <a:lnT w="10160">
                       <a:noFill/>
                     </a:lnT>
-                    <a:lnB w="10160">
+                    <a:lnB w="15240">
                       <a:solidFill>
                         <a:srgbClr val="626669"/>
                       </a:solidFill>
@@ -46116,12 +46116,12 @@
                     <a:lnR w="10160">
                       <a:noFill/>
                     </a:lnR>
-                    <a:lnT w="10160">
+                    <a:lnT w="15240">
                       <a:solidFill>
                         <a:srgbClr val="626669"/>
                       </a:solidFill>
                     </a:lnT>
-                    <a:lnB w="10160">
+                    <a:lnB w="7620">
                       <a:solidFill>
                         <a:srgbClr val="626669"/>
                       </a:solidFill>
@@ -46168,12 +46168,12 @@
                     <a:lnR w="10160">
                       <a:noFill/>
                     </a:lnR>
-                    <a:lnT w="10160">
+                    <a:lnT w="15240">
                       <a:solidFill>
                         <a:srgbClr val="626669"/>
                       </a:solidFill>
                     </a:lnT>
-                    <a:lnB w="10160">
+                    <a:lnB w="7620">
                       <a:solidFill>
                         <a:srgbClr val="626669"/>
                       </a:solidFill>
@@ -46222,7 +46222,7 @@
                     <a:lnR w="10160">
                       <a:noFill/>
                     </a:lnR>
-                    <a:lnT w="10160">
+                    <a:lnT w="7620">
                       <a:solidFill>
                         <a:srgbClr val="626669"/>
                       </a:solidFill>
@@ -46272,7 +46272,7 @@
                     <a:lnR w="10160">
                       <a:noFill/>
                     </a:lnR>
-                    <a:lnT w="10160">
+                    <a:lnT w="7620">
                       <a:solidFill>
                         <a:srgbClr val="626669"/>
                       </a:solidFill>
@@ -46425,7 +46425,7 @@
                     <a:lnT w="10160">
                       <a:noFill/>
                     </a:lnT>
-                    <a:lnB w="10160">
+                    <a:lnB w="15240">
                       <a:solidFill>
                         <a:srgbClr val="626669"/>
                       </a:solidFill>
@@ -46475,7 +46475,7 @@
                     <a:lnT w="10160">
                       <a:noFill/>
                     </a:lnT>
-                    <a:lnB w="10160">
+                    <a:lnB w="15240">
                       <a:solidFill>
                         <a:srgbClr val="626669"/>
                       </a:solidFill>

--- a/slides/datasets-in-10-minutes-fineweb.pptx
+++ b/slides/datasets-in-10-minutes-fineweb.pptx
@@ -14235,11 +14235,11 @@
                           <a:ea typeface="Noto Sans CJK JP"/>
                           <a:cs typeface="Noto Sans"/>
                         </a:rPr>
-                        <a:t>出来事の続き・物理的 / 社会的常識</a:t>
+                        <a:t>出来事の続きと、物理・社会に関する常識</a:t>
                       </a:r>
                     </a:p>
                   </a:txBody>
-                  <a:tcPr marL="82296" marR="82296" marT="36576" marB="36576" anchor="ctr">
+                  <a:tcPr marL="82296" marR="82296" marT="0" marB="73152" anchor="ctr">
                     <a:lnL w="10160">
                       <a:noFill/>
                     </a:lnL>
@@ -17163,7 +17163,7 @@
 </p:sld>
 </file>
 
-<file path=ppt/slides/slide36.xml><?xml version="1.0" encoding="utf-8"?>
+<file path=ppt/slides/slide35.xml><?xml version="1.0" encoding="utf-8"?>
 <p:sld xmlns:a="http://schemas.openxmlformats.org/drawingml/2006/main" xmlns:p="http://schemas.openxmlformats.org/presentationml/2006/main" xmlns:r="http://schemas.openxmlformats.org/officeDocument/2006/relationships">
   <p:cSld>
     <p:spTree>
@@ -17265,7 +17265,7 @@
 </p:sld>
 </file>
 
-<file path=ppt/slides/slide37.xml><?xml version="1.0" encoding="utf-8"?>
+<file path=ppt/slides/slide36.xml><?xml version="1.0" encoding="utf-8"?>
 <p:sld xmlns:a="http://schemas.openxmlformats.org/drawingml/2006/main" xmlns:p="http://schemas.openxmlformats.org/presentationml/2006/main" xmlns:r="http://schemas.openxmlformats.org/officeDocument/2006/relationships">
   <p:cSld>
     <p:spTree>
@@ -18340,6 +18340,402 @@
 </p:sld>
 </file>
 
+<file path=ppt/slides/slide37.xml><?xml version="1.0" encoding="utf-8"?>
+<p:sld xmlns:a="http://schemas.openxmlformats.org/drawingml/2006/main" xmlns:p="http://schemas.openxmlformats.org/presentationml/2006/main" xmlns:r="http://schemas.openxmlformats.org/officeDocument/2006/relationships">
+  <p:cSld>
+    <p:spTree>
+      <p:nvGrpSpPr>
+        <p:cNvPr id="1" name=""/>
+        <p:cNvGrpSpPr/>
+        <p:nvPr/>
+      </p:nvGrpSpPr>
+      <p:grpSpPr/>
+      <p:sp>
+        <p:nvSpPr>
+          <p:cNvPr id="2" name="Title 1"/>
+          <p:cNvSpPr>
+            <a:spLocks noGrp="1"/>
+          </p:cNvSpPr>
+          <p:nvPr>
+            <p:ph type="title"/>
+          </p:nvPr>
+        </p:nvSpPr>
+        <p:spPr>
+          <a:xfrm>
+            <a:off x="548640" y="786384"/>
+            <a:ext cx="8046720" cy="502920"/>
+          </a:xfrm>
+        </p:spPr>
+        <p:txBody>
+          <a:bodyPr wrap="square" lIns="0" rIns="0" tIns="0" bIns="0"/>
+          <a:lstStyle/>
+          <a:p>
+            <a:pPr algn="l">
+              <a:lnSpc>
+                <a:spcPct val="112000"/>
+              </a:lnSpc>
+              <a:spcAft>
+                <a:spcPts val="0"/>
+              </a:spcAft>
+              <a:buNone/>
+            </a:pPr>
+            <a:r>
+              <a:rPr sz="2800" b="1" lang="ja-JP">
+                <a:solidFill>
+                  <a:srgbClr val="303437"/>
+                </a:solidFill>
+                <a:latin typeface="Noto Sans"/>
+                <a:ea typeface="Noto Sans CJK JP"/>
+                <a:cs typeface="Noto Sans"/>
+              </a:rPr>
+              <a:t>C4・RefinedWeb・FineWeb2の開発方針</a:t>
+            </a:r>
+          </a:p>
+        </p:txBody>
+      </p:sp>
+      <p:sp>
+        <p:nvSpPr>
+          <p:cNvPr id="3" name="Text Placeholder 2"/>
+          <p:cNvSpPr>
+            <a:spLocks noGrp="1"/>
+          </p:cNvSpPr>
+          <p:nvPr>
+            <p:ph type="body" idx="1"/>
+          </p:nvPr>
+        </p:nvSpPr>
+        <p:spPr>
+          <a:xfrm>
+            <a:off x="548640" y="1508760"/>
+            <a:ext cx="8046720" cy="2971800"/>
+          </a:xfrm>
+        </p:spPr>
+        <p:txBody>
+          <a:bodyPr wrap="square" lIns="0" rIns="0" tIns="0" bIns="0"/>
+          <a:lstStyle/>
+          <a:p>
+            <a:pPr lvl="0" marL="457200" indent="-355600">
+              <a:lnSpc>
+                <a:spcPct val="115000"/>
+              </a:lnSpc>
+              <a:spcAft>
+                <a:spcPts val="1500"/>
+              </a:spcAft>
+              <a:buSzPct val="66500"/>
+              <a:buFont typeface="Noto Sans CJK JP"/>
+              <a:buChar char="●"/>
+              <a:defRPr sz="2000" lang="ja-JP">
+                <a:latin typeface="Noto Sans"/>
+                <a:ea typeface="Noto Sans CJK JP"/>
+              </a:defRPr>
+            </a:pPr>
+            <a:r>
+              <a:rPr sz="2000" b="0" lang="ja-JP">
+                <a:solidFill>
+                  <a:srgbClr val="303437"/>
+                </a:solidFill>
+                <a:latin typeface="Noto Sans"/>
+                <a:ea typeface="Noto Sans CJK JP"/>
+                <a:cs typeface="Noto Sans"/>
+              </a:rPr>
+              <a:t>C4（2020）は、言語モデルT5の学習用にCommon Crawlから構築した英語Webコーパスである [1]。</a:t>
+            </a:r>
+          </a:p>
+          <a:p>
+            <a:pPr lvl="0" marL="457200" indent="-355600">
+              <a:lnSpc>
+                <a:spcPct val="115000"/>
+              </a:lnSpc>
+              <a:spcAft>
+                <a:spcPts val="1500"/>
+              </a:spcAft>
+              <a:buSzPct val="66500"/>
+              <a:buFont typeface="Noto Sans CJK JP"/>
+              <a:buChar char="●"/>
+              <a:defRPr sz="2000" lang="ja-JP">
+                <a:latin typeface="Noto Sans"/>
+                <a:ea typeface="Noto Sans CJK JP"/>
+              </a:defRPr>
+            </a:pPr>
+            <a:r>
+              <a:rPr sz="2000" b="0" lang="ja-JP">
+                <a:solidFill>
+                  <a:srgbClr val="303437"/>
+                </a:solidFill>
+                <a:latin typeface="Noto Sans"/>
+                <a:ea typeface="Noto Sans CJK JP"/>
+                <a:cs typeface="Noto Sans"/>
+              </a:rPr>
+              <a:t>RefinedWeb（2023）は、選別・重複除去したWeb文書で学習し、書籍等を混ぜたデータとの性能差を検証した [2]。</a:t>
+            </a:r>
+          </a:p>
+          <a:p>
+            <a:pPr lvl="0" marL="457200" indent="-355600">
+              <a:lnSpc>
+                <a:spcPct val="115000"/>
+              </a:lnSpc>
+              <a:spcAft>
+                <a:spcPts val="1500"/>
+              </a:spcAft>
+              <a:buSzPct val="66500"/>
+              <a:buFont typeface="Noto Sans CJK JP"/>
+              <a:buChar char="●"/>
+              <a:defRPr sz="2000" lang="ja-JP">
+                <a:latin typeface="Noto Sans"/>
+                <a:ea typeface="Noto Sans CJK JP"/>
+              </a:defRPr>
+            </a:pPr>
+            <a:r>
+              <a:rPr sz="2000" b="0" lang="ja-JP">
+                <a:solidFill>
+                  <a:srgbClr val="303437"/>
+                </a:solidFill>
+                <a:latin typeface="Noto Sans"/>
+                <a:ea typeface="Noto Sans CJK JP"/>
+                <a:cs typeface="Noto Sans"/>
+              </a:rPr>
+              <a:t>FineWeb2（2025）は、言語ごとに選別条件を調整し、多言語コーパスへ拡張した [3]。</a:t>
+            </a:r>
+          </a:p>
+        </p:txBody>
+      </p:sp>
+      <p:sp>
+        <p:nvSpPr>
+          <p:cNvPr id="4" name="Title 3"/>
+          <p:cNvSpPr>
+            <a:spLocks noGrp="1"/>
+          </p:cNvSpPr>
+          <p:nvPr>
+            <p:ph type="title" idx="2"/>
+          </p:nvPr>
+        </p:nvSpPr>
+        <p:spPr/>
+        <p:txBody>
+          <a:bodyPr wrap="square" lIns="0" rIns="0" tIns="0" bIns="0" anchor="ctr"/>
+          <a:lstStyle/>
+          <a:p>
+            <a:pPr algn="l">
+              <a:lnSpc>
+                <a:spcPct val="100000"/>
+              </a:lnSpc>
+              <a:spcBef>
+                <a:spcPts val="0"/>
+              </a:spcBef>
+              <a:spcAft>
+                <a:spcPts val="0"/>
+              </a:spcAft>
+              <a:buNone/>
+            </a:pPr>
+            <a:r>
+              <a:rPr sz="1400" b="1" lang="ja-JP">
+                <a:solidFill>
+                  <a:srgbClr val="FFFEF8"/>
+                </a:solidFill>
+                <a:latin typeface="Noto Sans"/>
+                <a:ea typeface="Noto Sans CJK JP"/>
+                <a:cs typeface="Noto Sans"/>
+              </a:rPr>
+              <a:t>4. Webコーパスの利用動向と入手方法</a:t>
+            </a:r>
+          </a:p>
+        </p:txBody>
+      </p:sp>
+      <p:sp>
+        <p:nvSpPr>
+          <p:cNvPr id="5" name="TextBox 4"/>
+          <p:cNvSpPr txBox="1"/>
+          <p:nvPr/>
+        </p:nvSpPr>
+        <p:spPr>
+          <a:xfrm>
+            <a:off x="548640" y="4462272"/>
+            <a:ext cx="8046720" cy="155448"/>
+          </a:xfrm>
+          <a:prstGeom prst="rect">
+            <a:avLst/>
+          </a:prstGeom>
+          <a:noFill/>
+        </p:spPr>
+        <p:txBody>
+          <a:bodyPr wrap="none" lIns="0" rIns="0" tIns="0" bIns="0">
+            <a:spAutoFit/>
+          </a:bodyPr>
+          <a:lstStyle/>
+          <a:p>
+            <a:r>
+              <a:rPr sz="800" b="0" lang="ja-JP">
+                <a:solidFill>
+                  <a:srgbClr val="626669"/>
+                </a:solidFill>
+                <a:latin typeface="Noto Sans"/>
+                <a:ea typeface="Noto Sans CJK JP"/>
+                <a:cs typeface="Noto Sans"/>
+              </a:rPr>
+              <a:t>[1] Colin Raffel et al. (2020). Exploring the Limits of Transfer Learning with a Unified Text-to-Text Transformer. JMLR.  </a:t>
+            </a:r>
+            <a:r>
+              <a:rPr sz="800" b="0" lang="en-US">
+                <a:solidFill>
+                  <a:srgbClr val="626669"/>
+                </a:solidFill>
+                <a:latin typeface="Noto Sans"/>
+                <a:ea typeface="Noto Sans CJK JP"/>
+                <a:cs typeface="Noto Sans"/>
+                <a:hlinkClick r:id="rId2"/>
+              </a:rPr>
+              <a:t>https://arxiv.org/abs/1910.10683</a:t>
+            </a:r>
+          </a:p>
+        </p:txBody>
+      </p:sp>
+      <p:sp>
+        <p:nvSpPr>
+          <p:cNvPr id="6" name="TextBox 5"/>
+          <p:cNvSpPr txBox="1"/>
+          <p:nvPr/>
+        </p:nvSpPr>
+        <p:spPr>
+          <a:xfrm>
+            <a:off x="548640" y="4617720"/>
+            <a:ext cx="8046720" cy="155448"/>
+          </a:xfrm>
+          <a:prstGeom prst="rect">
+            <a:avLst/>
+          </a:prstGeom>
+          <a:noFill/>
+        </p:spPr>
+        <p:txBody>
+          <a:bodyPr wrap="square" lIns="0" rIns="0" tIns="0" bIns="0">
+            <a:spAutoFit/>
+          </a:bodyPr>
+          <a:lstStyle/>
+          <a:p>
+            <a:pPr algn="l">
+              <a:lnSpc>
+                <a:spcPct val="112000"/>
+              </a:lnSpc>
+              <a:spcAft>
+                <a:spcPts val="0"/>
+              </a:spcAft>
+              <a:buNone/>
+            </a:pPr>
+            <a:r>
+              <a:rPr sz="800" b="0" lang="ja-JP">
+                <a:solidFill>
+                  <a:srgbClr val="626669"/>
+                </a:solidFill>
+                <a:latin typeface="Noto Sans"/>
+                <a:ea typeface="Noto Sans CJK JP"/>
+                <a:cs typeface="Noto Sans"/>
+              </a:rPr>
+              <a:t>[2] Guilherme Penedo et al. (2023). The RefinedWeb Dataset for Falcon LLM: Outperforming Curated Corpora with Web Data, and Web Data Only. arXiv.</a:t>
+            </a:r>
+          </a:p>
+        </p:txBody>
+      </p:sp>
+      <p:sp>
+        <p:nvSpPr>
+          <p:cNvPr id="7" name="TextBox 6"/>
+          <p:cNvSpPr txBox="1"/>
+          <p:nvPr/>
+        </p:nvSpPr>
+        <p:spPr>
+          <a:xfrm>
+            <a:off x="548640" y="4773168"/>
+            <a:ext cx="8046720" cy="155448"/>
+          </a:xfrm>
+          <a:prstGeom prst="rect">
+            <a:avLst/>
+          </a:prstGeom>
+          <a:noFill/>
+        </p:spPr>
+        <p:txBody>
+          <a:bodyPr wrap="none" lIns="0" rIns="0" tIns="0" bIns="0">
+            <a:spAutoFit/>
+          </a:bodyPr>
+          <a:lstStyle/>
+          <a:p>
+            <a:r>
+              <a:rPr sz="800" b="0" lang="ja-JP">
+                <a:solidFill>
+                  <a:srgbClr val="626669"/>
+                </a:solidFill>
+                <a:latin typeface="Noto Sans"/>
+                <a:ea typeface="Noto Sans CJK JP"/>
+                <a:cs typeface="Noto Sans"/>
+              </a:rPr>
+              <a:t>  </a:t>
+            </a:r>
+            <a:r>
+              <a:rPr sz="800" b="0" lang="en-US">
+                <a:solidFill>
+                  <a:srgbClr val="626669"/>
+                </a:solidFill>
+                <a:latin typeface="Noto Sans"/>
+                <a:ea typeface="Noto Sans CJK JP"/>
+                <a:cs typeface="Noto Sans"/>
+                <a:hlinkClick r:id="rId3"/>
+              </a:rPr>
+              <a:t>https://arxiv.org/abs/2306.01116</a:t>
+            </a:r>
+          </a:p>
+        </p:txBody>
+      </p:sp>
+      <p:sp>
+        <p:nvSpPr>
+          <p:cNvPr id="8" name="TextBox 7"/>
+          <p:cNvSpPr txBox="1"/>
+          <p:nvPr/>
+        </p:nvSpPr>
+        <p:spPr>
+          <a:xfrm>
+            <a:off x="548640" y="4928616"/>
+            <a:ext cx="8046720" cy="155448"/>
+          </a:xfrm>
+          <a:prstGeom prst="rect">
+            <a:avLst/>
+          </a:prstGeom>
+          <a:noFill/>
+        </p:spPr>
+        <p:txBody>
+          <a:bodyPr wrap="none" lIns="0" rIns="0" tIns="0" bIns="0">
+            <a:spAutoFit/>
+          </a:bodyPr>
+          <a:lstStyle/>
+          <a:p>
+            <a:r>
+              <a:rPr sz="800" b="0" lang="ja-JP">
+                <a:solidFill>
+                  <a:srgbClr val="626669"/>
+                </a:solidFill>
+                <a:latin typeface="Noto Sans"/>
+                <a:ea typeface="Noto Sans CJK JP"/>
+                <a:cs typeface="Noto Sans"/>
+              </a:rPr>
+              <a:t>[3] FineWeb2 — README  </a:t>
+            </a:r>
+            <a:r>
+              <a:rPr sz="800" b="0" lang="en-US">
+                <a:solidFill>
+                  <a:srgbClr val="626669"/>
+                </a:solidFill>
+                <a:latin typeface="Noto Sans"/>
+                <a:ea typeface="Noto Sans CJK JP"/>
+                <a:cs typeface="Noto Sans"/>
+                <a:hlinkClick r:id="rId4"/>
+              </a:rPr>
+              <a:t>https://github.com/huggingface/fineweb-2</a:t>
+            </a:r>
+          </a:p>
+        </p:txBody>
+      </p:sp>
+    </p:spTree>
+  </p:cSld>
+  <p:clrMapOvr>
+    <a:masterClrMapping/>
+  </p:clrMapOvr>
+</p:sld>
+</file>
+
 <file path=ppt/slides/slide38.xml><?xml version="1.0" encoding="utf-8"?>
 <p:sld xmlns:a="http://schemas.openxmlformats.org/drawingml/2006/main" xmlns:p="http://schemas.openxmlformats.org/presentationml/2006/main" xmlns:r="http://schemas.openxmlformats.org/officeDocument/2006/relationships">
   <p:cSld>
@@ -18388,7 +18784,7 @@
                 <a:ea typeface="Noto Sans CJK JP"/>
                 <a:cs typeface="Noto Sans"/>
               </a:rPr>
-              <a:t>C4・RefinedWeb・FineWeb2の開発方針</a:t>
+              <a:t>FineWeb系列を利用した公開モデル</a:t>
             </a:r>
           </a:p>
         </p:txBody>
@@ -18420,16 +18816,16 @@
               <a:spcAft>
                 <a:spcPts val="1500"/>
               </a:spcAft>
-              <a:buSzPct val="66500"/>
+              <a:buSzPct val="60455"/>
               <a:buFont typeface="Noto Sans CJK JP"/>
               <a:buChar char="●"/>
-              <a:defRPr sz="2000" lang="ja-JP">
+              <a:defRPr sz="2200" lang="ja-JP">
                 <a:latin typeface="Noto Sans"/>
                 <a:ea typeface="Noto Sans CJK JP"/>
               </a:defRPr>
             </a:pPr>
             <a:r>
-              <a:rPr sz="2000" b="0" lang="ja-JP">
+              <a:rPr sz="2200" b="0" lang="ja-JP">
                 <a:solidFill>
                   <a:srgbClr val="303437"/>
                 </a:solidFill>
@@ -18437,7 +18833,7 @@
                 <a:ea typeface="Noto Sans CJK JP"/>
                 <a:cs typeface="Noto Sans"/>
               </a:rPr>
-              <a:t>C4（2020）は、言語モデルT5の学習用にCommon Crawlから構築した英語Webコーパスである [1]。</a:t>
+              <a:t>SmolLM（2024）は、重複除去したFineWeb-Eduの220Bトークンを、合成教材・Pythonコードと混合した [1]。</a:t>
             </a:r>
           </a:p>
           <a:p>
@@ -18448,16 +18844,16 @@
               <a:spcAft>
                 <a:spcPts val="1500"/>
               </a:spcAft>
-              <a:buSzPct val="66500"/>
+              <a:buSzPct val="60455"/>
               <a:buFont typeface="Noto Sans CJK JP"/>
               <a:buChar char="●"/>
-              <a:defRPr sz="2000" lang="ja-JP">
+              <a:defRPr sz="2200" lang="ja-JP">
                 <a:latin typeface="Noto Sans"/>
                 <a:ea typeface="Noto Sans CJK JP"/>
               </a:defRPr>
             </a:pPr>
             <a:r>
-              <a:rPr sz="2000" b="0" lang="ja-JP">
+              <a:rPr sz="2200" b="0" lang="ja-JP">
                 <a:solidFill>
                   <a:srgbClr val="303437"/>
                 </a:solidFill>
@@ -18465,35 +18861,7 @@
                 <a:ea typeface="Noto Sans CJK JP"/>
                 <a:cs typeface="Noto Sans"/>
               </a:rPr>
-              <a:t>RefinedWeb（2023）は、選別・重複除去したWeb文書で学習し、書籍等を混ぜたデータとの性能差を検証した [2]。</a:t>
-            </a:r>
-          </a:p>
-          <a:p>
-            <a:pPr lvl="0" marL="457200" indent="-355600">
-              <a:lnSpc>
-                <a:spcPct val="115000"/>
-              </a:lnSpc>
-              <a:spcAft>
-                <a:spcPts val="1500"/>
-              </a:spcAft>
-              <a:buSzPct val="66500"/>
-              <a:buFont typeface="Noto Sans CJK JP"/>
-              <a:buChar char="●"/>
-              <a:defRPr sz="2000" lang="ja-JP">
-                <a:latin typeface="Noto Sans"/>
-                <a:ea typeface="Noto Sans CJK JP"/>
-              </a:defRPr>
-            </a:pPr>
-            <a:r>
-              <a:rPr sz="2000" b="0" lang="ja-JP">
-                <a:solidFill>
-                  <a:srgbClr val="303437"/>
-                </a:solidFill>
-                <a:latin typeface="Noto Sans"/>
-                <a:ea typeface="Noto Sans CJK JP"/>
-                <a:cs typeface="Noto Sans"/>
-              </a:rPr>
-              <a:t>FineWeb2（2025）は、言語ごとに選別条件を調整し、多言語コーパスへ拡張した [3]。</a:t>
+              <a:t>SmolLM3（2025）の公式記事には、FineWeb-Eduでの構成比較と、FineWeb2を含む事前学習の記録がある [2]。</a:t>
             </a:r>
           </a:p>
         </p:txBody>
@@ -18542,99 +18910,6 @@
       <p:sp>
         <p:nvSpPr>
           <p:cNvPr id="5" name="TextBox 4"/>
-          <p:cNvSpPr txBox="1"/>
-          <p:nvPr/>
-        </p:nvSpPr>
-        <p:spPr>
-          <a:xfrm>
-            <a:off x="548640" y="4462272"/>
-            <a:ext cx="8046720" cy="155448"/>
-          </a:xfrm>
-          <a:prstGeom prst="rect">
-            <a:avLst/>
-          </a:prstGeom>
-          <a:noFill/>
-        </p:spPr>
-        <p:txBody>
-          <a:bodyPr wrap="none" lIns="0" rIns="0" tIns="0" bIns="0">
-            <a:spAutoFit/>
-          </a:bodyPr>
-          <a:lstStyle/>
-          <a:p>
-            <a:r>
-              <a:rPr sz="800" b="0" lang="ja-JP">
-                <a:solidFill>
-                  <a:srgbClr val="626669"/>
-                </a:solidFill>
-                <a:latin typeface="Noto Sans"/>
-                <a:ea typeface="Noto Sans CJK JP"/>
-                <a:cs typeface="Noto Sans"/>
-              </a:rPr>
-              <a:t>[1] Colin Raffel et al. (2020). Exploring the Limits of Transfer Learning with a Unified Text-to-Text Transformer. JMLR.  </a:t>
-            </a:r>
-            <a:r>
-              <a:rPr sz="800" b="0" lang="en-US">
-                <a:solidFill>
-                  <a:srgbClr val="626669"/>
-                </a:solidFill>
-                <a:latin typeface="Noto Sans"/>
-                <a:ea typeface="Noto Sans CJK JP"/>
-                <a:cs typeface="Noto Sans"/>
-                <a:hlinkClick r:id="rId2"/>
-              </a:rPr>
-              <a:t>https://arxiv.org/abs/1910.10683</a:t>
-            </a:r>
-          </a:p>
-        </p:txBody>
-      </p:sp>
-      <p:sp>
-        <p:nvSpPr>
-          <p:cNvPr id="6" name="TextBox 5"/>
-          <p:cNvSpPr txBox="1"/>
-          <p:nvPr/>
-        </p:nvSpPr>
-        <p:spPr>
-          <a:xfrm>
-            <a:off x="548640" y="4617720"/>
-            <a:ext cx="8046720" cy="155448"/>
-          </a:xfrm>
-          <a:prstGeom prst="rect">
-            <a:avLst/>
-          </a:prstGeom>
-          <a:noFill/>
-        </p:spPr>
-        <p:txBody>
-          <a:bodyPr wrap="square" lIns="0" rIns="0" tIns="0" bIns="0">
-            <a:spAutoFit/>
-          </a:bodyPr>
-          <a:lstStyle/>
-          <a:p>
-            <a:pPr algn="l">
-              <a:lnSpc>
-                <a:spcPct val="112000"/>
-              </a:lnSpc>
-              <a:spcAft>
-                <a:spcPts val="0"/>
-              </a:spcAft>
-              <a:buNone/>
-            </a:pPr>
-            <a:r>
-              <a:rPr sz="800" b="0" lang="ja-JP">
-                <a:solidFill>
-                  <a:srgbClr val="626669"/>
-                </a:solidFill>
-                <a:latin typeface="Noto Sans"/>
-                <a:ea typeface="Noto Sans CJK JP"/>
-                <a:cs typeface="Noto Sans"/>
-              </a:rPr>
-              <a:t>[2] Guilherme Penedo et al. (2023). The RefinedWeb Dataset for Falcon LLM: Outperforming Curated Corpora with Web Data, and Web Data Only. arXiv.</a:t>
-            </a:r>
-          </a:p>
-        </p:txBody>
-      </p:sp>
-      <p:sp>
-        <p:nvSpPr>
-          <p:cNvPr id="7" name="TextBox 6"/>
           <p:cNvSpPr txBox="1"/>
           <p:nvPr/>
         </p:nvSpPr>
@@ -18663,7 +18938,7 @@
                 <a:ea typeface="Noto Sans CJK JP"/>
                 <a:cs typeface="Noto Sans"/>
               </a:rPr>
-              <a:t>  </a:t>
+              <a:t>[1] SmolLM公式記事  </a:t>
             </a:r>
             <a:r>
               <a:rPr sz="800" b="0" lang="en-US">
@@ -18673,16 +18948,16 @@
                 <a:latin typeface="Noto Sans"/>
                 <a:ea typeface="Noto Sans CJK JP"/>
                 <a:cs typeface="Noto Sans"/>
-                <a:hlinkClick r:id="rId3"/>
-              </a:rPr>
-              <a:t>https://arxiv.org/abs/2306.01116</a:t>
-            </a:r>
-          </a:p>
-        </p:txBody>
-      </p:sp>
-      <p:sp>
-        <p:nvSpPr>
-          <p:cNvPr id="8" name="TextBox 7"/>
+                <a:hlinkClick r:id="rId2"/>
+              </a:rPr>
+              <a:t>https://huggingface.co/blog/smollm</a:t>
+            </a:r>
+          </a:p>
+        </p:txBody>
+      </p:sp>
+      <p:sp>
+        <p:nvSpPr>
+          <p:cNvPr id="6" name="TextBox 5"/>
           <p:cNvSpPr txBox="1"/>
           <p:nvPr/>
         </p:nvSpPr>
@@ -18711,7 +18986,7 @@
                 <a:ea typeface="Noto Sans CJK JP"/>
                 <a:cs typeface="Noto Sans"/>
               </a:rPr>
-              <a:t>[3] FineWeb2 — README  </a:t>
+              <a:t>[2] SmolLM3公式記事  </a:t>
             </a:r>
             <a:r>
               <a:rPr sz="800" b="0" lang="en-US">
@@ -18721,9 +18996,9 @@
                 <a:latin typeface="Noto Sans"/>
                 <a:ea typeface="Noto Sans CJK JP"/>
                 <a:cs typeface="Noto Sans"/>
-                <a:hlinkClick r:id="rId4"/>
-              </a:rPr>
-              <a:t>https://github.com/huggingface/fineweb-2</a:t>
+                <a:hlinkClick r:id="rId3"/>
+              </a:rPr>
+              <a:t>https://huggingface.co/blog/smollm3</a:t>
             </a:r>
           </a:p>
         </p:txBody>
@@ -18737,383 +19012,6 @@
 </file>
 
 <file path=ppt/slides/slide39.xml><?xml version="1.0" encoding="utf-8"?>
-<p:sld xmlns:a="http://schemas.openxmlformats.org/drawingml/2006/main" xmlns:p="http://schemas.openxmlformats.org/presentationml/2006/main" xmlns:r="http://schemas.openxmlformats.org/officeDocument/2006/relationships">
-  <p:cSld>
-    <p:spTree>
-      <p:nvGrpSpPr>
-        <p:cNvPr id="1" name=""/>
-        <p:cNvGrpSpPr/>
-        <p:nvPr/>
-      </p:nvGrpSpPr>
-      <p:grpSpPr/>
-      <p:sp>
-        <p:nvSpPr>
-          <p:cNvPr id="2" name="Title 1"/>
-          <p:cNvSpPr>
-            <a:spLocks noGrp="1"/>
-          </p:cNvSpPr>
-          <p:nvPr>
-            <p:ph type="title"/>
-          </p:nvPr>
-        </p:nvSpPr>
-        <p:spPr>
-          <a:xfrm>
-            <a:off x="548640" y="786384"/>
-            <a:ext cx="8046720" cy="502920"/>
-          </a:xfrm>
-        </p:spPr>
-        <p:txBody>
-          <a:bodyPr wrap="square" lIns="0" rIns="0" tIns="0" bIns="0"/>
-          <a:lstStyle/>
-          <a:p>
-            <a:pPr algn="l">
-              <a:lnSpc>
-                <a:spcPct val="112000"/>
-              </a:lnSpc>
-              <a:spcAft>
-                <a:spcPts val="0"/>
-              </a:spcAft>
-              <a:buNone/>
-            </a:pPr>
-            <a:r>
-              <a:rPr sz="2800" b="1" lang="ja-JP">
-                <a:solidFill>
-                  <a:srgbClr val="303437"/>
-                </a:solidFill>
-                <a:latin typeface="Noto Sans"/>
-                <a:ea typeface="Noto Sans CJK JP"/>
-                <a:cs typeface="Noto Sans"/>
-              </a:rPr>
-              <a:t>FineWeb系列を利用した公開モデル</a:t>
-            </a:r>
-          </a:p>
-        </p:txBody>
-      </p:sp>
-      <p:sp>
-        <p:nvSpPr>
-          <p:cNvPr id="3" name="Text Placeholder 2"/>
-          <p:cNvSpPr>
-            <a:spLocks noGrp="1"/>
-          </p:cNvSpPr>
-          <p:nvPr>
-            <p:ph type="body" idx="1"/>
-          </p:nvPr>
-        </p:nvSpPr>
-        <p:spPr>
-          <a:xfrm>
-            <a:off x="548640" y="1508760"/>
-            <a:ext cx="8046720" cy="2971800"/>
-          </a:xfrm>
-        </p:spPr>
-        <p:txBody>
-          <a:bodyPr wrap="square" lIns="0" rIns="0" tIns="0" bIns="0"/>
-          <a:lstStyle/>
-          <a:p>
-            <a:pPr lvl="0" marL="457200" indent="-355600">
-              <a:lnSpc>
-                <a:spcPct val="115000"/>
-              </a:lnSpc>
-              <a:spcAft>
-                <a:spcPts val="1500"/>
-              </a:spcAft>
-              <a:buSzPct val="60455"/>
-              <a:buFont typeface="Noto Sans CJK JP"/>
-              <a:buChar char="●"/>
-              <a:defRPr sz="2200" lang="ja-JP">
-                <a:latin typeface="Noto Sans"/>
-                <a:ea typeface="Noto Sans CJK JP"/>
-              </a:defRPr>
-            </a:pPr>
-            <a:r>
-              <a:rPr sz="2200" b="0" lang="ja-JP">
-                <a:solidFill>
-                  <a:srgbClr val="303437"/>
-                </a:solidFill>
-                <a:latin typeface="Noto Sans"/>
-                <a:ea typeface="Noto Sans CJK JP"/>
-                <a:cs typeface="Noto Sans"/>
-              </a:rPr>
-              <a:t>SmolLM（2024）は、重複除去したFineWeb-Eduの220Bトークンを、合成教材・Pythonコードと混合した [1]。</a:t>
-            </a:r>
-          </a:p>
-          <a:p>
-            <a:pPr lvl="0" marL="457200" indent="-355600">
-              <a:lnSpc>
-                <a:spcPct val="115000"/>
-              </a:lnSpc>
-              <a:spcAft>
-                <a:spcPts val="1500"/>
-              </a:spcAft>
-              <a:buSzPct val="60455"/>
-              <a:buFont typeface="Noto Sans CJK JP"/>
-              <a:buChar char="●"/>
-              <a:defRPr sz="2200" lang="ja-JP">
-                <a:latin typeface="Noto Sans"/>
-                <a:ea typeface="Noto Sans CJK JP"/>
-              </a:defRPr>
-            </a:pPr>
-            <a:r>
-              <a:rPr sz="2200" b="0" lang="ja-JP">
-                <a:solidFill>
-                  <a:srgbClr val="303437"/>
-                </a:solidFill>
-                <a:latin typeface="Noto Sans"/>
-                <a:ea typeface="Noto Sans CJK JP"/>
-                <a:cs typeface="Noto Sans"/>
-              </a:rPr>
-              <a:t>SmolLM3（2025）の公式記事には、FineWeb-Eduでの構成比較と、FineWeb2を含む事前学習の記録がある [2]。</a:t>
-            </a:r>
-          </a:p>
-        </p:txBody>
-      </p:sp>
-      <p:sp>
-        <p:nvSpPr>
-          <p:cNvPr id="4" name="Title 3"/>
-          <p:cNvSpPr>
-            <a:spLocks noGrp="1"/>
-          </p:cNvSpPr>
-          <p:nvPr>
-            <p:ph type="title" idx="2"/>
-          </p:nvPr>
-        </p:nvSpPr>
-        <p:spPr/>
-        <p:txBody>
-          <a:bodyPr wrap="square" lIns="0" rIns="0" tIns="0" bIns="0" anchor="ctr"/>
-          <a:lstStyle/>
-          <a:p>
-            <a:pPr algn="l">
-              <a:lnSpc>
-                <a:spcPct val="100000"/>
-              </a:lnSpc>
-              <a:spcBef>
-                <a:spcPts val="0"/>
-              </a:spcBef>
-              <a:spcAft>
-                <a:spcPts val="0"/>
-              </a:spcAft>
-              <a:buNone/>
-            </a:pPr>
-            <a:r>
-              <a:rPr sz="1400" b="1" lang="ja-JP">
-                <a:solidFill>
-                  <a:srgbClr val="FFFEF8"/>
-                </a:solidFill>
-                <a:latin typeface="Noto Sans"/>
-                <a:ea typeface="Noto Sans CJK JP"/>
-                <a:cs typeface="Noto Sans"/>
-              </a:rPr>
-              <a:t>4. Webコーパスの利用動向と入手方法</a:t>
-            </a:r>
-          </a:p>
-        </p:txBody>
-      </p:sp>
-      <p:sp>
-        <p:nvSpPr>
-          <p:cNvPr id="5" name="TextBox 4"/>
-          <p:cNvSpPr txBox="1"/>
-          <p:nvPr/>
-        </p:nvSpPr>
-        <p:spPr>
-          <a:xfrm>
-            <a:off x="548640" y="4773168"/>
-            <a:ext cx="8046720" cy="155448"/>
-          </a:xfrm>
-          <a:prstGeom prst="rect">
-            <a:avLst/>
-          </a:prstGeom>
-          <a:noFill/>
-        </p:spPr>
-        <p:txBody>
-          <a:bodyPr wrap="none" lIns="0" rIns="0" tIns="0" bIns="0">
-            <a:spAutoFit/>
-          </a:bodyPr>
-          <a:lstStyle/>
-          <a:p>
-            <a:r>
-              <a:rPr sz="800" b="0" lang="ja-JP">
-                <a:solidFill>
-                  <a:srgbClr val="626669"/>
-                </a:solidFill>
-                <a:latin typeface="Noto Sans"/>
-                <a:ea typeface="Noto Sans CJK JP"/>
-                <a:cs typeface="Noto Sans"/>
-              </a:rPr>
-              <a:t>[1] SmolLM公式記事  </a:t>
-            </a:r>
-            <a:r>
-              <a:rPr sz="800" b="0" lang="en-US">
-                <a:solidFill>
-                  <a:srgbClr val="626669"/>
-                </a:solidFill>
-                <a:latin typeface="Noto Sans"/>
-                <a:ea typeface="Noto Sans CJK JP"/>
-                <a:cs typeface="Noto Sans"/>
-                <a:hlinkClick r:id="rId2"/>
-              </a:rPr>
-              <a:t>https://huggingface.co/blog/smollm</a:t>
-            </a:r>
-          </a:p>
-        </p:txBody>
-      </p:sp>
-      <p:sp>
-        <p:nvSpPr>
-          <p:cNvPr id="6" name="TextBox 5"/>
-          <p:cNvSpPr txBox="1"/>
-          <p:nvPr/>
-        </p:nvSpPr>
-        <p:spPr>
-          <a:xfrm>
-            <a:off x="548640" y="4928616"/>
-            <a:ext cx="8046720" cy="155448"/>
-          </a:xfrm>
-          <a:prstGeom prst="rect">
-            <a:avLst/>
-          </a:prstGeom>
-          <a:noFill/>
-        </p:spPr>
-        <p:txBody>
-          <a:bodyPr wrap="none" lIns="0" rIns="0" tIns="0" bIns="0">
-            <a:spAutoFit/>
-          </a:bodyPr>
-          <a:lstStyle/>
-          <a:p>
-            <a:r>
-              <a:rPr sz="800" b="0" lang="ja-JP">
-                <a:solidFill>
-                  <a:srgbClr val="626669"/>
-                </a:solidFill>
-                <a:latin typeface="Noto Sans"/>
-                <a:ea typeface="Noto Sans CJK JP"/>
-                <a:cs typeface="Noto Sans"/>
-              </a:rPr>
-              <a:t>[2] SmolLM3公式記事  </a:t>
-            </a:r>
-            <a:r>
-              <a:rPr sz="800" b="0" lang="en-US">
-                <a:solidFill>
-                  <a:srgbClr val="626669"/>
-                </a:solidFill>
-                <a:latin typeface="Noto Sans"/>
-                <a:ea typeface="Noto Sans CJK JP"/>
-                <a:cs typeface="Noto Sans"/>
-                <a:hlinkClick r:id="rId3"/>
-              </a:rPr>
-              <a:t>https://huggingface.co/blog/smollm3</a:t>
-            </a:r>
-          </a:p>
-        </p:txBody>
-      </p:sp>
-    </p:spTree>
-  </p:cSld>
-  <p:clrMapOvr>
-    <a:masterClrMapping/>
-  </p:clrMapOvr>
-</p:sld>
-</file>
-
-<file path=ppt/slides/slide4.xml><?xml version="1.0" encoding="utf-8"?>
-<p:sld xmlns:a="http://schemas.openxmlformats.org/drawingml/2006/main" xmlns:p="http://schemas.openxmlformats.org/presentationml/2006/main" xmlns:r="http://schemas.openxmlformats.org/officeDocument/2006/relationships">
-  <p:cSld>
-    <p:spTree>
-      <p:nvGrpSpPr>
-        <p:cNvPr id="1" name=""/>
-        <p:cNvGrpSpPr/>
-        <p:nvPr/>
-      </p:nvGrpSpPr>
-      <p:grpSpPr/>
-      <p:sp>
-        <p:nvSpPr>
-          <p:cNvPr id="2" name="Title 1"/>
-          <p:cNvSpPr>
-            <a:spLocks noGrp="1"/>
-          </p:cNvSpPr>
-          <p:nvPr>
-            <p:ph type="title"/>
-          </p:nvPr>
-        </p:nvSpPr>
-        <p:spPr>
-          <a:xfrm>
-            <a:off x="548640" y="2428321"/>
-            <a:ext cx="8046720" cy="731520"/>
-          </a:xfrm>
-        </p:spPr>
-        <p:txBody>
-          <a:bodyPr wrap="square" lIns="0" rIns="0" tIns="0" bIns="0" anchor="ctr"/>
-          <a:lstStyle/>
-          <a:p>
-            <a:pPr algn="ctr">
-              <a:lnSpc>
-                <a:spcPct val="112000"/>
-              </a:lnSpc>
-              <a:spcAft>
-                <a:spcPts val="0"/>
-              </a:spcAft>
-              <a:buNone/>
-            </a:pPr>
-            <a:r>
-              <a:rPr sz="3700" b="1" lang="ja-JP">
-                <a:solidFill>
-                  <a:srgbClr val="303437"/>
-                </a:solidFill>
-                <a:latin typeface="Noto Sans"/>
-                <a:ea typeface="Noto Sans CJK JP"/>
-                <a:cs typeface="Noto Sans"/>
-              </a:rPr>
-              <a:t>1. FineWebの目的と収録文書</a:t>
-            </a:r>
-          </a:p>
-        </p:txBody>
-      </p:sp>
-      <p:sp>
-        <p:nvSpPr>
-          <p:cNvPr id="3" name="Title 2"/>
-          <p:cNvSpPr>
-            <a:spLocks noGrp="1"/>
-          </p:cNvSpPr>
-          <p:nvPr>
-            <p:ph type="title" idx="2"/>
-          </p:nvPr>
-        </p:nvSpPr>
-        <p:spPr/>
-        <p:txBody>
-          <a:bodyPr wrap="square" lIns="0" rIns="0" tIns="0" bIns="0" anchor="ctr"/>
-          <a:lstStyle/>
-          <a:p>
-            <a:pPr algn="l">
-              <a:lnSpc>
-                <a:spcPct val="100000"/>
-              </a:lnSpc>
-              <a:spcBef>
-                <a:spcPts val="0"/>
-              </a:spcBef>
-              <a:spcAft>
-                <a:spcPts val="0"/>
-              </a:spcAft>
-              <a:buNone/>
-            </a:pPr>
-            <a:r>
-              <a:rPr sz="1400" b="1" lang="ja-JP">
-                <a:solidFill>
-                  <a:srgbClr val="FFFEF8"/>
-                </a:solidFill>
-                <a:latin typeface="Noto Sans"/>
-                <a:ea typeface="Noto Sans CJK JP"/>
-                <a:cs typeface="Noto Sans"/>
-              </a:rPr>
-              <a:t>1. FineWebの目的と収録文書</a:t>
-            </a:r>
-          </a:p>
-        </p:txBody>
-      </p:sp>
-    </p:spTree>
-  </p:cSld>
-  <p:clrMapOvr>
-    <a:masterClrMapping/>
-  </p:clrMapOvr>
-</p:sld>
-</file>
-
-<file path=ppt/slides/slide40.xml><?xml version="1.0" encoding="utf-8"?>
 <p:sld xmlns:a="http://schemas.openxmlformats.org/drawingml/2006/main" xmlns:p="http://schemas.openxmlformats.org/presentationml/2006/main" xmlns:r="http://schemas.openxmlformats.org/officeDocument/2006/relationships">
   <p:cSld>
     <p:spTree>
@@ -19718,7 +19616,109 @@
 </p:sld>
 </file>
 
-<file path=ppt/slides/slide41.xml><?xml version="1.0" encoding="utf-8"?>
+<file path=ppt/slides/slide4.xml><?xml version="1.0" encoding="utf-8"?>
+<p:sld xmlns:a="http://schemas.openxmlformats.org/drawingml/2006/main" xmlns:p="http://schemas.openxmlformats.org/presentationml/2006/main" xmlns:r="http://schemas.openxmlformats.org/officeDocument/2006/relationships">
+  <p:cSld>
+    <p:spTree>
+      <p:nvGrpSpPr>
+        <p:cNvPr id="1" name=""/>
+        <p:cNvGrpSpPr/>
+        <p:nvPr/>
+      </p:nvGrpSpPr>
+      <p:grpSpPr/>
+      <p:sp>
+        <p:nvSpPr>
+          <p:cNvPr id="2" name="Title 1"/>
+          <p:cNvSpPr>
+            <a:spLocks noGrp="1"/>
+          </p:cNvSpPr>
+          <p:nvPr>
+            <p:ph type="title"/>
+          </p:nvPr>
+        </p:nvSpPr>
+        <p:spPr>
+          <a:xfrm>
+            <a:off x="548640" y="2428321"/>
+            <a:ext cx="8046720" cy="731520"/>
+          </a:xfrm>
+        </p:spPr>
+        <p:txBody>
+          <a:bodyPr wrap="square" lIns="0" rIns="0" tIns="0" bIns="0" anchor="ctr"/>
+          <a:lstStyle/>
+          <a:p>
+            <a:pPr algn="ctr">
+              <a:lnSpc>
+                <a:spcPct val="112000"/>
+              </a:lnSpc>
+              <a:spcAft>
+                <a:spcPts val="0"/>
+              </a:spcAft>
+              <a:buNone/>
+            </a:pPr>
+            <a:r>
+              <a:rPr sz="3700" b="1" lang="ja-JP">
+                <a:solidFill>
+                  <a:srgbClr val="303437"/>
+                </a:solidFill>
+                <a:latin typeface="Noto Sans"/>
+                <a:ea typeface="Noto Sans CJK JP"/>
+                <a:cs typeface="Noto Sans"/>
+              </a:rPr>
+              <a:t>1. FineWebの目的と収録文書</a:t>
+            </a:r>
+          </a:p>
+        </p:txBody>
+      </p:sp>
+      <p:sp>
+        <p:nvSpPr>
+          <p:cNvPr id="3" name="Title 2"/>
+          <p:cNvSpPr>
+            <a:spLocks noGrp="1"/>
+          </p:cNvSpPr>
+          <p:nvPr>
+            <p:ph type="title" idx="2"/>
+          </p:nvPr>
+        </p:nvSpPr>
+        <p:spPr/>
+        <p:txBody>
+          <a:bodyPr wrap="square" lIns="0" rIns="0" tIns="0" bIns="0" anchor="ctr"/>
+          <a:lstStyle/>
+          <a:p>
+            <a:pPr algn="l">
+              <a:lnSpc>
+                <a:spcPct val="100000"/>
+              </a:lnSpc>
+              <a:spcBef>
+                <a:spcPts val="0"/>
+              </a:spcBef>
+              <a:spcAft>
+                <a:spcPts val="0"/>
+              </a:spcAft>
+              <a:buNone/>
+            </a:pPr>
+            <a:r>
+              <a:rPr sz="1400" b="1" lang="ja-JP">
+                <a:solidFill>
+                  <a:srgbClr val="FFFEF8"/>
+                </a:solidFill>
+                <a:latin typeface="Noto Sans"/>
+                <a:ea typeface="Noto Sans CJK JP"/>
+                <a:cs typeface="Noto Sans"/>
+              </a:rPr>
+              <a:t>1. FineWebの目的と収録文書</a:t>
+            </a:r>
+          </a:p>
+        </p:txBody>
+      </p:sp>
+    </p:spTree>
+  </p:cSld>
+  <p:clrMapOvr>
+    <a:masterClrMapping/>
+  </p:clrMapOvr>
+</p:sld>
+</file>
+
+<file path=ppt/slides/slide40.xml><?xml version="1.0" encoding="utf-8"?>
 <p:sld xmlns:a="http://schemas.openxmlformats.org/drawingml/2006/main" xmlns:p="http://schemas.openxmlformats.org/presentationml/2006/main" xmlns:r="http://schemas.openxmlformats.org/officeDocument/2006/relationships">
   <p:cSld>
     <p:spTree>
@@ -20701,7 +20701,7 @@
 </p:sld>
 </file>
 
-<file path=ppt/slides/slide42.xml><?xml version="1.0" encoding="utf-8"?>
+<file path=ppt/slides/slide41.xml><?xml version="1.0" encoding="utf-8"?>
 <p:sld xmlns:a="http://schemas.openxmlformats.org/drawingml/2006/main" xmlns:p="http://schemas.openxmlformats.org/presentationml/2006/main" xmlns:r="http://schemas.openxmlformats.org/officeDocument/2006/relationships">
   <p:cSld>
     <p:spTree>
@@ -21176,11 +21176,11 @@
                           <a:ea typeface="Noto Sans CJK JP"/>
                           <a:cs typeface="Noto Sans"/>
                         </a:rPr>
-                        <a:t>小規模に取り出したトークン量のサンプル</a:t>
+                        <a:t>指定のトークン量を取り出した小規模データ</a:t>
                       </a:r>
                     </a:p>
                   </a:txBody>
-                  <a:tcPr marL="82296" marR="82296" marT="36576" marB="36576" anchor="ctr">
+                  <a:tcPr marL="82296" marR="82296" marT="0" marB="73152" anchor="ctr">
                     <a:lnL w="10160">
                       <a:noFill/>
                     </a:lnL>
@@ -21306,7 +21306,7 @@
 </p:sld>
 </file>
 
-<file path=ppt/slides/slide43.xml><?xml version="1.0" encoding="utf-8"?>
+<file path=ppt/slides/slide42.xml><?xml version="1.0" encoding="utf-8"?>
 <p:sld xmlns:a="http://schemas.openxmlformats.org/drawingml/2006/main" xmlns:p="http://schemas.openxmlformats.org/presentationml/2006/main" xmlns:r="http://schemas.openxmlformats.org/officeDocument/2006/relationships">
   <p:cSld>
     <p:spTree>
@@ -21744,6 +21744,233 @@
 </p:sld>
 </file>
 
+<file path=ppt/slides/slide43.xml><?xml version="1.0" encoding="utf-8"?>
+<p:sld xmlns:a="http://schemas.openxmlformats.org/drawingml/2006/main" xmlns:p="http://schemas.openxmlformats.org/presentationml/2006/main" xmlns:r="http://schemas.openxmlformats.org/officeDocument/2006/relationships">
+  <p:cSld>
+    <p:spTree>
+      <p:nvGrpSpPr>
+        <p:cNvPr id="1" name=""/>
+        <p:cNvGrpSpPr/>
+        <p:nvPr/>
+      </p:nvGrpSpPr>
+      <p:grpSpPr/>
+      <p:sp>
+        <p:nvSpPr>
+          <p:cNvPr id="2" name="Title 1"/>
+          <p:cNvSpPr>
+            <a:spLocks noGrp="1"/>
+          </p:cNvSpPr>
+          <p:nvPr>
+            <p:ph type="title"/>
+          </p:nvPr>
+        </p:nvSpPr>
+        <p:spPr>
+          <a:xfrm>
+            <a:off x="548640" y="786384"/>
+            <a:ext cx="8046720" cy="502920"/>
+          </a:xfrm>
+        </p:spPr>
+        <p:txBody>
+          <a:bodyPr wrap="square" lIns="0" rIns="0" tIns="0" bIns="0"/>
+          <a:lstStyle/>
+          <a:p>
+            <a:pPr algn="l">
+              <a:lnSpc>
+                <a:spcPct val="112000"/>
+              </a:lnSpc>
+              <a:spcAft>
+                <a:spcPts val="0"/>
+              </a:spcAft>
+              <a:buNone/>
+            </a:pPr>
+            <a:r>
+              <a:rPr sz="2800" b="1" lang="ja-JP">
+                <a:solidFill>
+                  <a:srgbClr val="303437"/>
+                </a:solidFill>
+                <a:latin typeface="Noto Sans"/>
+                <a:ea typeface="Noto Sans CJK JP"/>
+                <a:cs typeface="Noto Sans"/>
+              </a:rPr>
+              <a:t>データセットの利用条件と原文の権利</a:t>
+            </a:r>
+          </a:p>
+        </p:txBody>
+      </p:sp>
+      <p:sp>
+        <p:nvSpPr>
+          <p:cNvPr id="3" name="Text Placeholder 2"/>
+          <p:cNvSpPr>
+            <a:spLocks noGrp="1"/>
+          </p:cNvSpPr>
+          <p:nvPr>
+            <p:ph type="body" idx="1"/>
+          </p:nvPr>
+        </p:nvSpPr>
+        <p:spPr>
+          <a:xfrm>
+            <a:off x="548640" y="1508760"/>
+            <a:ext cx="8046720" cy="2971800"/>
+          </a:xfrm>
+        </p:spPr>
+        <p:txBody>
+          <a:bodyPr wrap="square" lIns="0" rIns="0" tIns="0" bIns="0"/>
+          <a:lstStyle/>
+          <a:p>
+            <a:pPr lvl="0" marL="457200" indent="-355600">
+              <a:lnSpc>
+                <a:spcPct val="115000"/>
+              </a:lnSpc>
+              <a:spcAft>
+                <a:spcPts val="1500"/>
+              </a:spcAft>
+              <a:buSzPct val="57826"/>
+              <a:buFont typeface="Noto Sans CJK JP"/>
+              <a:buChar char="●"/>
+              <a:defRPr sz="2300" lang="ja-JP">
+                <a:latin typeface="Noto Sans"/>
+                <a:ea typeface="Noto Sans CJK JP"/>
+              </a:defRPr>
+            </a:pPr>
+            <a:r>
+              <a:rPr sz="2300" b="0" lang="ja-JP">
+                <a:solidFill>
+                  <a:srgbClr val="303437"/>
+                </a:solidFill>
+                <a:latin typeface="Noto Sans"/>
+                <a:ea typeface="Noto Sans CJK JP"/>
+                <a:cs typeface="Noto Sans"/>
+              </a:rPr>
+              <a:t>データセットはODC-By 1.0で公開され、Common Crawlの利用規約にも従う [1]。</a:t>
+            </a:r>
+          </a:p>
+          <a:p>
+            <a:pPr lvl="0" marL="457200" indent="-355600">
+              <a:lnSpc>
+                <a:spcPct val="115000"/>
+              </a:lnSpc>
+              <a:spcAft>
+                <a:spcPts val="1500"/>
+              </a:spcAft>
+              <a:buSzPct val="57826"/>
+              <a:buFont typeface="Noto Sans CJK JP"/>
+              <a:buChar char="●"/>
+              <a:defRPr sz="2300" lang="ja-JP">
+                <a:latin typeface="Noto Sans"/>
+                <a:ea typeface="Noto Sans CJK JP"/>
+              </a:defRPr>
+            </a:pPr>
+            <a:r>
+              <a:rPr sz="2300" b="0" lang="ja-JP">
+                <a:solidFill>
+                  <a:srgbClr val="303437"/>
+                </a:solidFill>
+                <a:latin typeface="Noto Sans"/>
+                <a:ea typeface="Noto Sans CJK JP"/>
+                <a:cs typeface="Noto Sans"/>
+              </a:rPr>
+              <a:t>データベースのライセンスと、各Web文書の著作権・利用条件は分けて確認する。</a:t>
+            </a:r>
+          </a:p>
+        </p:txBody>
+      </p:sp>
+      <p:sp>
+        <p:nvSpPr>
+          <p:cNvPr id="4" name="Title 3"/>
+          <p:cNvSpPr>
+            <a:spLocks noGrp="1"/>
+          </p:cNvSpPr>
+          <p:nvPr>
+            <p:ph type="title" idx="2"/>
+          </p:nvPr>
+        </p:nvSpPr>
+        <p:spPr/>
+        <p:txBody>
+          <a:bodyPr wrap="square" lIns="0" rIns="0" tIns="0" bIns="0" anchor="ctr"/>
+          <a:lstStyle/>
+          <a:p>
+            <a:pPr algn="l">
+              <a:lnSpc>
+                <a:spcPct val="100000"/>
+              </a:lnSpc>
+              <a:spcBef>
+                <a:spcPts val="0"/>
+              </a:spcBef>
+              <a:spcAft>
+                <a:spcPts val="0"/>
+              </a:spcAft>
+              <a:buNone/>
+            </a:pPr>
+            <a:r>
+              <a:rPr sz="1400" b="1" lang="ja-JP">
+                <a:solidFill>
+                  <a:srgbClr val="FFFEF8"/>
+                </a:solidFill>
+                <a:latin typeface="Noto Sans"/>
+                <a:ea typeface="Noto Sans CJK JP"/>
+                <a:cs typeface="Noto Sans"/>
+              </a:rPr>
+              <a:t>4. Webコーパスの利用動向と入手方法</a:t>
+            </a:r>
+          </a:p>
+        </p:txBody>
+      </p:sp>
+      <p:sp>
+        <p:nvSpPr>
+          <p:cNvPr id="5" name="TextBox 4"/>
+          <p:cNvSpPr txBox="1"/>
+          <p:nvPr/>
+        </p:nvSpPr>
+        <p:spPr>
+          <a:xfrm>
+            <a:off x="548640" y="4928616"/>
+            <a:ext cx="8046720" cy="155448"/>
+          </a:xfrm>
+          <a:prstGeom prst="rect">
+            <a:avLst/>
+          </a:prstGeom>
+          <a:noFill/>
+        </p:spPr>
+        <p:txBody>
+          <a:bodyPr wrap="none" lIns="0" rIns="0" tIns="0" bIns="0">
+            <a:spAutoFit/>
+          </a:bodyPr>
+          <a:lstStyle/>
+          <a:p>
+            <a:r>
+              <a:rPr sz="800" b="0" lang="ja-JP">
+                <a:solidFill>
+                  <a:srgbClr val="626669"/>
+                </a:solidFill>
+                <a:latin typeface="Noto Sans"/>
+                <a:ea typeface="Noto Sans CJK JP"/>
+                <a:cs typeface="Noto Sans"/>
+              </a:rPr>
+              <a:t>[1] FineWeb data card / Licensing Information  </a:t>
+            </a:r>
+            <a:r>
+              <a:rPr sz="800" b="0" lang="en-US">
+                <a:solidFill>
+                  <a:srgbClr val="626669"/>
+                </a:solidFill>
+                <a:latin typeface="Noto Sans"/>
+                <a:ea typeface="Noto Sans CJK JP"/>
+                <a:cs typeface="Noto Sans"/>
+                <a:hlinkClick r:id="rId2"/>
+              </a:rPr>
+              <a:t>https://huggingface.co/datasets/HuggingFaceFW/fineweb</a:t>
+            </a:r>
+          </a:p>
+        </p:txBody>
+      </p:sp>
+    </p:spTree>
+  </p:cSld>
+  <p:clrMapOvr>
+    <a:masterClrMapping/>
+  </p:clrMapOvr>
+</p:sld>
+</file>
+
 <file path=ppt/slides/slide44.xml><?xml version="1.0" encoding="utf-8"?>
 <p:sld xmlns:a="http://schemas.openxmlformats.org/drawingml/2006/main" xmlns:p="http://schemas.openxmlformats.org/presentationml/2006/main" xmlns:r="http://schemas.openxmlformats.org/officeDocument/2006/relationships">
   <p:cSld>
@@ -21792,7 +22019,7 @@
                 <a:ea typeface="Noto Sans CJK JP"/>
                 <a:cs typeface="Noto Sans"/>
               </a:rPr>
-              <a:t>データセットの利用条件と原文の権利</a:t>
+              <a:t>FineWebの目的・規模と教育的価値による選別</a:t>
             </a:r>
           </a:p>
         </p:txBody>
@@ -21841,7 +22068,7 @@
                 <a:ea typeface="Noto Sans CJK JP"/>
                 <a:cs typeface="Noto Sans"/>
               </a:rPr>
-              <a:t>データセットはODC-By 1.0で公開され、Common Crawlの利用規約にも従う [1]。</a:t>
+              <a:t>英語Webの本文を選別・重複除去し、次トークン予測のための大規模な事前学習データとして公開した。</a:t>
             </a:r>
           </a:p>
           <a:p>
@@ -21869,7 +22096,35 @@
                 <a:ea typeface="Noto Sans CJK JP"/>
                 <a:cs typeface="Noto Sans"/>
               </a:rPr>
-              <a:t>データベースのライセンスと、各Web文書の著作権・利用条件は分けて確認する。</a:t>
+              <a:t>データと処理の比較実験を公開した点が特徴。初版15兆、現行カードは約18.5兆トークンを示す。</a:t>
+            </a:r>
+          </a:p>
+          <a:p>
+            <a:pPr lvl="0" marL="457200" indent="-355600">
+              <a:lnSpc>
+                <a:spcPct val="115000"/>
+              </a:lnSpc>
+              <a:spcAft>
+                <a:spcPts val="1500"/>
+              </a:spcAft>
+              <a:buSzPct val="57826"/>
+              <a:buFont typeface="Noto Sans CJK JP"/>
+              <a:buChar char="●"/>
+              <a:defRPr sz="2300" lang="ja-JP">
+                <a:latin typeface="Noto Sans"/>
+                <a:ea typeface="Noto Sans CJK JP"/>
+              </a:defRPr>
+            </a:pPr>
+            <a:r>
+              <a:rPr sz="2300" b="0" lang="ja-JP">
+                <a:solidFill>
+                  <a:srgbClr val="303437"/>
+                </a:solidFill>
+                <a:latin typeface="Noto Sans"/>
+                <a:ea typeface="Noto Sans CJK JP"/>
+                <a:cs typeface="Noto Sans"/>
+              </a:rPr>
+              <a:t>FineWeb-Eduは教育的価値で文書を選別し、知識・推論の得点と話題の構成比を変える。</a:t>
             </a:r>
           </a:p>
         </p:txBody>
@@ -21918,6 +22173,54 @@
       <p:sp>
         <p:nvSpPr>
           <p:cNvPr id="5" name="TextBox 4"/>
+          <p:cNvSpPr txBox="1"/>
+          <p:nvPr/>
+        </p:nvSpPr>
+        <p:spPr>
+          <a:xfrm>
+            <a:off x="548640" y="4773168"/>
+            <a:ext cx="8046720" cy="155448"/>
+          </a:xfrm>
+          <a:prstGeom prst="rect">
+            <a:avLst/>
+          </a:prstGeom>
+          <a:noFill/>
+        </p:spPr>
+        <p:txBody>
+          <a:bodyPr wrap="none" lIns="0" rIns="0" tIns="0" bIns="0">
+            <a:spAutoFit/>
+          </a:bodyPr>
+          <a:lstStyle/>
+          <a:p>
+            <a:r>
+              <a:rPr sz="800" b="0" lang="ja-JP">
+                <a:solidFill>
+                  <a:srgbClr val="626669"/>
+                </a:solidFill>
+                <a:latin typeface="Noto Sans"/>
+                <a:ea typeface="Noto Sans CJK JP"/>
+                <a:cs typeface="Noto Sans"/>
+              </a:rPr>
+              <a:t>[1] Guilherme Penedo et al. (2024). The FineWeb Datasets: Decanting the Web for the Finest Text Data at Scale. NeurIPS.  </a:t>
+            </a:r>
+            <a:r>
+              <a:rPr sz="800" b="0" lang="en-US">
+                <a:solidFill>
+                  <a:srgbClr val="626669"/>
+                </a:solidFill>
+                <a:latin typeface="Noto Sans"/>
+                <a:ea typeface="Noto Sans CJK JP"/>
+                <a:cs typeface="Noto Sans"/>
+                <a:hlinkClick r:id="rId2"/>
+              </a:rPr>
+              <a:t>https://arxiv.org/abs/2406.17557</a:t>
+            </a:r>
+          </a:p>
+        </p:txBody>
+      </p:sp>
+      <p:sp>
+        <p:nvSpPr>
+          <p:cNvPr id="6" name="TextBox 5"/>
           <p:cNvSpPr txBox="1"/>
           <p:nvPr/>
         </p:nvSpPr>
@@ -21946,7 +22249,7 @@
                 <a:ea typeface="Noto Sans CJK JP"/>
                 <a:cs typeface="Noto Sans"/>
               </a:rPr>
-              <a:t>[1] FineWeb data card / Licensing Information  </a:t>
+              <a:t>[2] FineWeb data card  </a:t>
             </a:r>
             <a:r>
               <a:rPr sz="800" b="0" lang="en-US">
@@ -21956,7 +22259,7 @@
                 <a:latin typeface="Noto Sans"/>
                 <a:ea typeface="Noto Sans CJK JP"/>
                 <a:cs typeface="Noto Sans"/>
-                <a:hlinkClick r:id="rId2"/>
+                <a:hlinkClick r:id="rId3"/>
               </a:rPr>
               <a:t>https://huggingface.co/datasets/HuggingFaceFW/fineweb</a:t>
             </a:r>
@@ -21993,15 +22296,15 @@
         </p:nvSpPr>
         <p:spPr>
           <a:xfrm>
-            <a:off x="548640" y="786384"/>
-            <a:ext cx="8046720" cy="502920"/>
+            <a:off x="548640" y="2407043"/>
+            <a:ext cx="8046720" cy="731520"/>
           </a:xfrm>
         </p:spPr>
         <p:txBody>
-          <a:bodyPr wrap="square" lIns="0" rIns="0" tIns="0" bIns="0"/>
-          <a:lstStyle/>
-          <a:p>
-            <a:pPr algn="l">
+          <a:bodyPr wrap="square" lIns="0" rIns="0" tIns="0" bIns="0" anchor="ctr"/>
+          <a:lstStyle/>
+          <a:p>
+            <a:pPr algn="ctr">
               <a:lnSpc>
                 <a:spcPct val="112000"/>
               </a:lnSpc>
@@ -22011,7 +22314,7 @@
               <a:buNone/>
             </a:pPr>
             <a:r>
-              <a:rPr sz="2800" b="1" lang="ja-JP">
+              <a:rPr sz="3700" b="1" lang="ja-JP">
                 <a:solidFill>
                   <a:srgbClr val="303437"/>
                 </a:solidFill>
@@ -22019,119 +22322,14 @@
                 <a:ea typeface="Noto Sans CJK JP"/>
                 <a:cs typeface="Noto Sans"/>
               </a:rPr>
-              <a:t>FineWebの目的・規模と教育的価値による選別</a:t>
-            </a:r>
-          </a:p>
-        </p:txBody>
-      </p:sp>
-      <p:sp>
-        <p:nvSpPr>
-          <p:cNvPr id="3" name="Text Placeholder 2"/>
-          <p:cNvSpPr>
-            <a:spLocks noGrp="1"/>
-          </p:cNvSpPr>
-          <p:nvPr>
-            <p:ph type="body" idx="1"/>
-          </p:nvPr>
-        </p:nvSpPr>
-        <p:spPr>
-          <a:xfrm>
-            <a:off x="548640" y="1508760"/>
-            <a:ext cx="8046720" cy="2971800"/>
-          </a:xfrm>
-        </p:spPr>
-        <p:txBody>
-          <a:bodyPr wrap="square" lIns="0" rIns="0" tIns="0" bIns="0"/>
-          <a:lstStyle/>
-          <a:p>
-            <a:pPr lvl="0" marL="457200" indent="-355600">
-              <a:lnSpc>
-                <a:spcPct val="115000"/>
-              </a:lnSpc>
-              <a:spcAft>
-                <a:spcPts val="1500"/>
-              </a:spcAft>
-              <a:buSzPct val="57826"/>
-              <a:buFont typeface="Noto Sans CJK JP"/>
-              <a:buChar char="●"/>
-              <a:defRPr sz="2300" lang="ja-JP">
-                <a:latin typeface="Noto Sans"/>
-                <a:ea typeface="Noto Sans CJK JP"/>
-              </a:defRPr>
-            </a:pPr>
-            <a:r>
-              <a:rPr sz="2300" b="0" lang="ja-JP">
-                <a:solidFill>
-                  <a:srgbClr val="303437"/>
-                </a:solidFill>
-                <a:latin typeface="Noto Sans"/>
-                <a:ea typeface="Noto Sans CJK JP"/>
-                <a:cs typeface="Noto Sans"/>
-              </a:rPr>
-              <a:t>英語Webの本文を選別・重複除去し、次トークン予測のための大規模な事前学習データとして公開した。</a:t>
-            </a:r>
-          </a:p>
-          <a:p>
-            <a:pPr lvl="0" marL="457200" indent="-355600">
-              <a:lnSpc>
-                <a:spcPct val="115000"/>
-              </a:lnSpc>
-              <a:spcAft>
-                <a:spcPts val="1500"/>
-              </a:spcAft>
-              <a:buSzPct val="57826"/>
-              <a:buFont typeface="Noto Sans CJK JP"/>
-              <a:buChar char="●"/>
-              <a:defRPr sz="2300" lang="ja-JP">
-                <a:latin typeface="Noto Sans"/>
-                <a:ea typeface="Noto Sans CJK JP"/>
-              </a:defRPr>
-            </a:pPr>
-            <a:r>
-              <a:rPr sz="2300" b="0" lang="ja-JP">
-                <a:solidFill>
-                  <a:srgbClr val="303437"/>
-                </a:solidFill>
-                <a:latin typeface="Noto Sans"/>
-                <a:ea typeface="Noto Sans CJK JP"/>
-                <a:cs typeface="Noto Sans"/>
-              </a:rPr>
-              <a:t>データと処理の比較実験を公開した点が特徴。初版15兆、現行カードは約18.5兆トークンを示す。</a:t>
-            </a:r>
-          </a:p>
-          <a:p>
-            <a:pPr lvl="0" marL="457200" indent="-355600">
-              <a:lnSpc>
-                <a:spcPct val="115000"/>
-              </a:lnSpc>
-              <a:spcAft>
-                <a:spcPts val="1500"/>
-              </a:spcAft>
-              <a:buSzPct val="57826"/>
-              <a:buFont typeface="Noto Sans CJK JP"/>
-              <a:buChar char="●"/>
-              <a:defRPr sz="2300" lang="ja-JP">
-                <a:latin typeface="Noto Sans"/>
-                <a:ea typeface="Noto Sans CJK JP"/>
-              </a:defRPr>
-            </a:pPr>
-            <a:r>
-              <a:rPr sz="2300" b="0" lang="ja-JP">
-                <a:solidFill>
-                  <a:srgbClr val="303437"/>
-                </a:solidFill>
-                <a:latin typeface="Noto Sans"/>
-                <a:ea typeface="Noto Sans CJK JP"/>
-                <a:cs typeface="Noto Sans"/>
-              </a:rPr>
-              <a:t>FineWeb-Eduは教育的価値で文書を選別し、知識・推論の得点と話題の構成比を変える。</a:t>
-            </a:r>
-          </a:p>
-        </p:txBody>
-      </p:sp>
-      <p:sp>
-        <p:nvSpPr>
-          <p:cNvPr id="4" name="Title 3"/>
+              <a:t>Appendix</a:t>
+            </a:r>
+          </a:p>
+        </p:txBody>
+      </p:sp>
+      <p:sp>
+        <p:nvSpPr>
+          <p:cNvPr id="3" name="Title 2"/>
           <p:cNvSpPr>
             <a:spLocks noGrp="1"/>
           </p:cNvSpPr>
@@ -22165,103 +22363,7 @@
                 <a:ea typeface="Noto Sans CJK JP"/>
                 <a:cs typeface="Noto Sans"/>
               </a:rPr>
-              <a:t>4. Webコーパスの利用動向と入手方法</a:t>
-            </a:r>
-          </a:p>
-        </p:txBody>
-      </p:sp>
-      <p:sp>
-        <p:nvSpPr>
-          <p:cNvPr id="5" name="TextBox 4"/>
-          <p:cNvSpPr txBox="1"/>
-          <p:nvPr/>
-        </p:nvSpPr>
-        <p:spPr>
-          <a:xfrm>
-            <a:off x="548640" y="4773168"/>
-            <a:ext cx="8046720" cy="155448"/>
-          </a:xfrm>
-          <a:prstGeom prst="rect">
-            <a:avLst/>
-          </a:prstGeom>
-          <a:noFill/>
-        </p:spPr>
-        <p:txBody>
-          <a:bodyPr wrap="none" lIns="0" rIns="0" tIns="0" bIns="0">
-            <a:spAutoFit/>
-          </a:bodyPr>
-          <a:lstStyle/>
-          <a:p>
-            <a:r>
-              <a:rPr sz="800" b="0" lang="ja-JP">
-                <a:solidFill>
-                  <a:srgbClr val="626669"/>
-                </a:solidFill>
-                <a:latin typeface="Noto Sans"/>
-                <a:ea typeface="Noto Sans CJK JP"/>
-                <a:cs typeface="Noto Sans"/>
-              </a:rPr>
-              <a:t>[1] Guilherme Penedo et al. (2024). The FineWeb Datasets: Decanting the Web for the Finest Text Data at Scale. NeurIPS.  </a:t>
-            </a:r>
-            <a:r>
-              <a:rPr sz="800" b="0" lang="en-US">
-                <a:solidFill>
-                  <a:srgbClr val="626669"/>
-                </a:solidFill>
-                <a:latin typeface="Noto Sans"/>
-                <a:ea typeface="Noto Sans CJK JP"/>
-                <a:cs typeface="Noto Sans"/>
-                <a:hlinkClick r:id="rId2"/>
-              </a:rPr>
-              <a:t>https://arxiv.org/abs/2406.17557</a:t>
-            </a:r>
-          </a:p>
-        </p:txBody>
-      </p:sp>
-      <p:sp>
-        <p:nvSpPr>
-          <p:cNvPr id="6" name="TextBox 5"/>
-          <p:cNvSpPr txBox="1"/>
-          <p:nvPr/>
-        </p:nvSpPr>
-        <p:spPr>
-          <a:xfrm>
-            <a:off x="548640" y="4928616"/>
-            <a:ext cx="8046720" cy="155448"/>
-          </a:xfrm>
-          <a:prstGeom prst="rect">
-            <a:avLst/>
-          </a:prstGeom>
-          <a:noFill/>
-        </p:spPr>
-        <p:txBody>
-          <a:bodyPr wrap="none" lIns="0" rIns="0" tIns="0" bIns="0">
-            <a:spAutoFit/>
-          </a:bodyPr>
-          <a:lstStyle/>
-          <a:p>
-            <a:r>
-              <a:rPr sz="800" b="0" lang="ja-JP">
-                <a:solidFill>
-                  <a:srgbClr val="626669"/>
-                </a:solidFill>
-                <a:latin typeface="Noto Sans"/>
-                <a:ea typeface="Noto Sans CJK JP"/>
-                <a:cs typeface="Noto Sans"/>
-              </a:rPr>
-              <a:t>[2] FineWeb data card  </a:t>
-            </a:r>
-            <a:r>
-              <a:rPr sz="800" b="0" lang="en-US">
-                <a:solidFill>
-                  <a:srgbClr val="626669"/>
-                </a:solidFill>
-                <a:latin typeface="Noto Sans"/>
-                <a:ea typeface="Noto Sans CJK JP"/>
-                <a:cs typeface="Noto Sans"/>
-                <a:hlinkClick r:id="rId3"/>
-              </a:rPr>
-              <a:t>https://huggingface.co/datasets/HuggingFaceFW/fineweb</a:t>
+              <a:t>Appendix</a:t>
             </a:r>
           </a:p>
         </p:txBody>
@@ -22296,15 +22398,15 @@
         </p:nvSpPr>
         <p:spPr>
           <a:xfrm>
-            <a:off x="548640" y="2407043"/>
-            <a:ext cx="8046720" cy="731520"/>
+            <a:off x="548640" y="786384"/>
+            <a:ext cx="8046720" cy="502920"/>
           </a:xfrm>
         </p:spPr>
         <p:txBody>
-          <a:bodyPr wrap="square" lIns="0" rIns="0" tIns="0" bIns="0" anchor="ctr"/>
-          <a:lstStyle/>
-          <a:p>
-            <a:pPr algn="ctr">
+          <a:bodyPr wrap="square" lIns="0" rIns="0" tIns="0" bIns="0"/>
+          <a:lstStyle/>
+          <a:p>
+            <a:pPr algn="l">
               <a:lnSpc>
                 <a:spcPct val="112000"/>
               </a:lnSpc>
@@ -22314,7 +22416,7 @@
               <a:buNone/>
             </a:pPr>
             <a:r>
-              <a:rPr sz="3700" b="1" lang="ja-JP">
+              <a:rPr sz="2800" b="1" lang="ja-JP">
                 <a:solidFill>
                   <a:srgbClr val="303437"/>
                 </a:solidFill>
@@ -22322,14 +22424,160 @@
                 <a:ea typeface="Noto Sans CJK JP"/>
                 <a:cs typeface="Noto Sans"/>
               </a:rPr>
-              <a:t>Appendix</a:t>
-            </a:r>
-          </a:p>
-        </p:txBody>
-      </p:sp>
-      <p:sp>
-        <p:nvSpPr>
-          <p:cNvPr id="3" name="Title 2"/>
+              <a:t/>
+            </a:r>
+          </a:p>
+        </p:txBody>
+      </p:sp>
+      <p:sp>
+        <p:nvSpPr>
+          <p:cNvPr id="3" name="Text Placeholder 2"/>
+          <p:cNvSpPr>
+            <a:spLocks noGrp="1"/>
+          </p:cNvSpPr>
+          <p:nvPr>
+            <p:ph type="body" idx="1"/>
+          </p:nvPr>
+        </p:nvSpPr>
+        <p:spPr>
+          <a:xfrm>
+            <a:off x="1051560" y="1172896"/>
+            <a:ext cx="7315200" cy="3566160"/>
+          </a:xfrm>
+        </p:spPr>
+        <p:txBody>
+          <a:bodyPr lIns="0" rIns="0" tIns="0" bIns="0"/>
+          <a:lstStyle/>
+          <a:p>
+            <a:pPr lvl="0" marL="558800" indent="-457200">
+              <a:spcAft>
+                <a:spcPts val="1200"/>
+              </a:spcAft>
+              <a:buSzPct val="100000"/>
+              <a:buFont typeface="Noto Sans CJK JP"/>
+              <a:buAutoNum type="arabicPeriod" startAt="1"/>
+              <a:defRPr sz="3000" lang="ja-JP">
+                <a:latin typeface="Noto Sans"/>
+                <a:ea typeface="Noto Sans CJK JP"/>
+              </a:defRPr>
+            </a:pPr>
+            <a:r>
+              <a:rPr sz="3000" b="1" lang="ja-JP">
+                <a:solidFill>
+                  <a:srgbClr val="303437"/>
+                </a:solidFill>
+                <a:latin typeface="Noto Sans"/>
+                <a:ea typeface="Noto Sans CJK JP"/>
+                <a:cs typeface="Noto Sans"/>
+              </a:rPr>
+              <a:t>配布文書の構造と長さの集計</a:t>
+            </a:r>
+          </a:p>
+          <a:p>
+            <a:pPr lvl="0" marL="558800" indent="-457200">
+              <a:spcAft>
+                <a:spcPts val="1200"/>
+              </a:spcAft>
+              <a:buSzPct val="100000"/>
+              <a:buFont typeface="Noto Sans CJK JP"/>
+              <a:buAutoNum type="arabicPeriod" startAt="2"/>
+              <a:defRPr sz="3000" lang="ja-JP">
+                <a:latin typeface="Noto Sans"/>
+                <a:ea typeface="Noto Sans CJK JP"/>
+              </a:defRPr>
+            </a:pPr>
+            <a:r>
+              <a:rPr sz="3000" b="1" lang="ja-JP">
+                <a:solidFill>
+                  <a:srgbClr val="303437"/>
+                </a:solidFill>
+                <a:latin typeface="Noto Sans"/>
+                <a:ea typeface="Noto Sans CJK JP"/>
+                <a:cs typeface="Noto Sans"/>
+              </a:rPr>
+              <a:t>収録されたWeb文書の追加例</a:t>
+            </a:r>
+          </a:p>
+          <a:p>
+            <a:pPr lvl="0" marL="558800" indent="-457200">
+              <a:spcAft>
+                <a:spcPts val="1200"/>
+              </a:spcAft>
+              <a:buSzPct val="100000"/>
+              <a:buFont typeface="Noto Sans CJK JP"/>
+              <a:buAutoNum type="arabicPeriod" startAt="3"/>
+              <a:defRPr sz="3000" lang="ja-JP">
+                <a:latin typeface="Noto Sans"/>
+                <a:ea typeface="Noto Sans CJK JP"/>
+              </a:defRPr>
+            </a:pPr>
+            <a:r>
+              <a:rPr sz="3000" b="1" lang="ja-JP">
+                <a:solidFill>
+                  <a:srgbClr val="303437"/>
+                </a:solidFill>
+                <a:latin typeface="Noto Sans"/>
+                <a:ea typeface="Noto Sans CJK JP"/>
+                <a:cs typeface="Noto Sans"/>
+              </a:rPr>
+              <a:t>文書選別・話題分布と評価実験の詳細</a:t>
+            </a:r>
+          </a:p>
+          <a:p>
+            <a:pPr lvl="0" marL="558800" indent="-457200">
+              <a:spcAft>
+                <a:spcPts val="1200"/>
+              </a:spcAft>
+              <a:buSzPct val="100000"/>
+              <a:buFont typeface="Noto Sans CJK JP"/>
+              <a:buAutoNum type="arabicPeriod" startAt="4"/>
+              <a:defRPr sz="3000" lang="ja-JP">
+                <a:latin typeface="Noto Sans"/>
+                <a:ea typeface="Noto Sans CJK JP"/>
+              </a:defRPr>
+            </a:pPr>
+            <a:r>
+              <a:rPr sz="3000" b="1" lang="ja-JP">
+                <a:solidFill>
+                  <a:srgbClr val="303437"/>
+                </a:solidFill>
+                <a:latin typeface="Noto Sans"/>
+                <a:ea typeface="Noto Sans CJK JP"/>
+                <a:cs typeface="Noto Sans"/>
+              </a:rPr>
+              <a:t>配布データの仕様と開発体制</a:t>
+            </a:r>
+          </a:p>
+          <a:p>
+            <a:pPr lvl="0" marL="558800" indent="-457200">
+              <a:spcAft>
+                <a:spcPts val="1200"/>
+              </a:spcAft>
+              <a:buSzPct val="100000"/>
+              <a:buFont typeface="Noto Sans CJK JP"/>
+              <a:buAutoNum type="arabicPeriod" startAt="5"/>
+              <a:defRPr sz="3000" lang="ja-JP">
+                <a:latin typeface="Noto Sans"/>
+                <a:ea typeface="Noto Sans CJK JP"/>
+              </a:defRPr>
+            </a:pPr>
+            <a:r>
+              <a:rPr sz="3000" b="1" lang="ja-JP">
+                <a:solidFill>
+                  <a:srgbClr val="303437"/>
+                </a:solidFill>
+                <a:latin typeface="Noto Sans"/>
+                <a:ea typeface="Noto Sans CJK JP"/>
+                <a:cs typeface="Noto Sans"/>
+              </a:rPr>
+              <a:t>読後の研究に関連する文献</a:t>
+            </a:r>
+          </a:p>
+        </p:txBody>
+      </p:sp>
+      <p:sp>
+        <p:nvSpPr>
+          <p:cNvPr id="4" name="Title 3"/>
           <p:cNvSpPr>
             <a:spLocks noGrp="1"/>
           </p:cNvSpPr>
@@ -22363,7 +22611,7 @@
                 <a:ea typeface="Noto Sans CJK JP"/>
                 <a:cs typeface="Noto Sans"/>
               </a:rPr>
-              <a:t>Appendix</a:t>
+              <a:t>Appendix: 目次</a:t>
             </a:r>
           </a:p>
         </p:txBody>
@@ -22377,254 +22625,6 @@
 </file>
 
 <file path=ppt/slides/slide47.xml><?xml version="1.0" encoding="utf-8"?>
-<p:sld xmlns:a="http://schemas.openxmlformats.org/drawingml/2006/main" xmlns:p="http://schemas.openxmlformats.org/presentationml/2006/main" xmlns:r="http://schemas.openxmlformats.org/officeDocument/2006/relationships">
-  <p:cSld>
-    <p:spTree>
-      <p:nvGrpSpPr>
-        <p:cNvPr id="1" name=""/>
-        <p:cNvGrpSpPr/>
-        <p:nvPr/>
-      </p:nvGrpSpPr>
-      <p:grpSpPr/>
-      <p:sp>
-        <p:nvSpPr>
-          <p:cNvPr id="2" name="Title 1"/>
-          <p:cNvSpPr>
-            <a:spLocks noGrp="1"/>
-          </p:cNvSpPr>
-          <p:nvPr>
-            <p:ph type="title"/>
-          </p:nvPr>
-        </p:nvSpPr>
-        <p:spPr>
-          <a:xfrm>
-            <a:off x="548640" y="786384"/>
-            <a:ext cx="8046720" cy="502920"/>
-          </a:xfrm>
-        </p:spPr>
-        <p:txBody>
-          <a:bodyPr wrap="square" lIns="0" rIns="0" tIns="0" bIns="0"/>
-          <a:lstStyle/>
-          <a:p>
-            <a:pPr algn="l">
-              <a:lnSpc>
-                <a:spcPct val="112000"/>
-              </a:lnSpc>
-              <a:spcAft>
-                <a:spcPts val="0"/>
-              </a:spcAft>
-              <a:buNone/>
-            </a:pPr>
-            <a:r>
-              <a:rPr sz="2800" b="1" lang="ja-JP">
-                <a:solidFill>
-                  <a:srgbClr val="303437"/>
-                </a:solidFill>
-                <a:latin typeface="Noto Sans"/>
-                <a:ea typeface="Noto Sans CJK JP"/>
-                <a:cs typeface="Noto Sans"/>
-              </a:rPr>
-              <a:t/>
-            </a:r>
-          </a:p>
-        </p:txBody>
-      </p:sp>
-      <p:sp>
-        <p:nvSpPr>
-          <p:cNvPr id="3" name="Text Placeholder 2"/>
-          <p:cNvSpPr>
-            <a:spLocks noGrp="1"/>
-          </p:cNvSpPr>
-          <p:nvPr>
-            <p:ph type="body" idx="1"/>
-          </p:nvPr>
-        </p:nvSpPr>
-        <p:spPr>
-          <a:xfrm>
-            <a:off x="1051560" y="1172896"/>
-            <a:ext cx="7315200" cy="3566160"/>
-          </a:xfrm>
-        </p:spPr>
-        <p:txBody>
-          <a:bodyPr lIns="0" rIns="0" tIns="0" bIns="0"/>
-          <a:lstStyle/>
-          <a:p>
-            <a:pPr lvl="0" marL="558800" indent="-457200">
-              <a:spcAft>
-                <a:spcPts val="1200"/>
-              </a:spcAft>
-              <a:buSzPct val="100000"/>
-              <a:buFont typeface="Noto Sans CJK JP"/>
-              <a:buAutoNum type="arabicPeriod" startAt="1"/>
-              <a:defRPr sz="3000" lang="ja-JP">
-                <a:latin typeface="Noto Sans"/>
-                <a:ea typeface="Noto Sans CJK JP"/>
-              </a:defRPr>
-            </a:pPr>
-            <a:r>
-              <a:rPr sz="3000" b="1" lang="ja-JP">
-                <a:solidFill>
-                  <a:srgbClr val="303437"/>
-                </a:solidFill>
-                <a:latin typeface="Noto Sans"/>
-                <a:ea typeface="Noto Sans CJK JP"/>
-                <a:cs typeface="Noto Sans"/>
-              </a:rPr>
-              <a:t>配布文書の構造と長さの集計</a:t>
-            </a:r>
-          </a:p>
-          <a:p>
-            <a:pPr lvl="0" marL="558800" indent="-457200">
-              <a:spcAft>
-                <a:spcPts val="1200"/>
-              </a:spcAft>
-              <a:buSzPct val="100000"/>
-              <a:buFont typeface="Noto Sans CJK JP"/>
-              <a:buAutoNum type="arabicPeriod" startAt="2"/>
-              <a:defRPr sz="3000" lang="ja-JP">
-                <a:latin typeface="Noto Sans"/>
-                <a:ea typeface="Noto Sans CJK JP"/>
-              </a:defRPr>
-            </a:pPr>
-            <a:r>
-              <a:rPr sz="3000" b="1" lang="ja-JP">
-                <a:solidFill>
-                  <a:srgbClr val="303437"/>
-                </a:solidFill>
-                <a:latin typeface="Noto Sans"/>
-                <a:ea typeface="Noto Sans CJK JP"/>
-                <a:cs typeface="Noto Sans"/>
-              </a:rPr>
-              <a:t>収録されたWeb文書の追加例</a:t>
-            </a:r>
-          </a:p>
-          <a:p>
-            <a:pPr lvl="0" marL="558800" indent="-457200">
-              <a:spcAft>
-                <a:spcPts val="1200"/>
-              </a:spcAft>
-              <a:buSzPct val="100000"/>
-              <a:buFont typeface="Noto Sans CJK JP"/>
-              <a:buAutoNum type="arabicPeriod" startAt="3"/>
-              <a:defRPr sz="3000" lang="ja-JP">
-                <a:latin typeface="Noto Sans"/>
-                <a:ea typeface="Noto Sans CJK JP"/>
-              </a:defRPr>
-            </a:pPr>
-            <a:r>
-              <a:rPr sz="3000" b="1" lang="ja-JP">
-                <a:solidFill>
-                  <a:srgbClr val="303437"/>
-                </a:solidFill>
-                <a:latin typeface="Noto Sans"/>
-                <a:ea typeface="Noto Sans CJK JP"/>
-                <a:cs typeface="Noto Sans"/>
-              </a:rPr>
-              <a:t>文書選別・話題分布と評価実験の詳細</a:t>
-            </a:r>
-          </a:p>
-          <a:p>
-            <a:pPr lvl="0" marL="558800" indent="-457200">
-              <a:spcAft>
-                <a:spcPts val="1200"/>
-              </a:spcAft>
-              <a:buSzPct val="100000"/>
-              <a:buFont typeface="Noto Sans CJK JP"/>
-              <a:buAutoNum type="arabicPeriod" startAt="4"/>
-              <a:defRPr sz="3000" lang="ja-JP">
-                <a:latin typeface="Noto Sans"/>
-                <a:ea typeface="Noto Sans CJK JP"/>
-              </a:defRPr>
-            </a:pPr>
-            <a:r>
-              <a:rPr sz="3000" b="1" lang="ja-JP">
-                <a:solidFill>
-                  <a:srgbClr val="303437"/>
-                </a:solidFill>
-                <a:latin typeface="Noto Sans"/>
-                <a:ea typeface="Noto Sans CJK JP"/>
-                <a:cs typeface="Noto Sans"/>
-              </a:rPr>
-              <a:t>配布データの仕様と開発体制</a:t>
-            </a:r>
-          </a:p>
-          <a:p>
-            <a:pPr lvl="0" marL="558800" indent="-457200">
-              <a:spcAft>
-                <a:spcPts val="1200"/>
-              </a:spcAft>
-              <a:buSzPct val="100000"/>
-              <a:buFont typeface="Noto Sans CJK JP"/>
-              <a:buAutoNum type="arabicPeriod" startAt="5"/>
-              <a:defRPr sz="3000" lang="ja-JP">
-                <a:latin typeface="Noto Sans"/>
-                <a:ea typeface="Noto Sans CJK JP"/>
-              </a:defRPr>
-            </a:pPr>
-            <a:r>
-              <a:rPr sz="3000" b="1" lang="ja-JP">
-                <a:solidFill>
-                  <a:srgbClr val="303437"/>
-                </a:solidFill>
-                <a:latin typeface="Noto Sans"/>
-                <a:ea typeface="Noto Sans CJK JP"/>
-                <a:cs typeface="Noto Sans"/>
-              </a:rPr>
-              <a:t>読後の研究に関連する文献</a:t>
-            </a:r>
-          </a:p>
-        </p:txBody>
-      </p:sp>
-      <p:sp>
-        <p:nvSpPr>
-          <p:cNvPr id="4" name="Title 3"/>
-          <p:cNvSpPr>
-            <a:spLocks noGrp="1"/>
-          </p:cNvSpPr>
-          <p:nvPr>
-            <p:ph type="title" idx="2"/>
-          </p:nvPr>
-        </p:nvSpPr>
-        <p:spPr/>
-        <p:txBody>
-          <a:bodyPr wrap="square" lIns="0" rIns="0" tIns="0" bIns="0" anchor="ctr"/>
-          <a:lstStyle/>
-          <a:p>
-            <a:pPr algn="l">
-              <a:lnSpc>
-                <a:spcPct val="100000"/>
-              </a:lnSpc>
-              <a:spcBef>
-                <a:spcPts val="0"/>
-              </a:spcBef>
-              <a:spcAft>
-                <a:spcPts val="0"/>
-              </a:spcAft>
-              <a:buNone/>
-            </a:pPr>
-            <a:r>
-              <a:rPr sz="1400" b="1" lang="ja-JP">
-                <a:solidFill>
-                  <a:srgbClr val="FFFEF8"/>
-                </a:solidFill>
-                <a:latin typeface="Noto Sans"/>
-                <a:ea typeface="Noto Sans CJK JP"/>
-                <a:cs typeface="Noto Sans"/>
-              </a:rPr>
-              <a:t>Appendix: 目次</a:t>
-            </a:r>
-          </a:p>
-        </p:txBody>
-      </p:sp>
-    </p:spTree>
-  </p:cSld>
-  <p:clrMapOvr>
-    <a:masterClrMapping/>
-  </p:clrMapOvr>
-</p:sld>
-</file>
-
-<file path=ppt/slides/slide48.xml><?xml version="1.0" encoding="utf-8"?>
 <p:sld xmlns:a="http://schemas.openxmlformats.org/drawingml/2006/main" xmlns:p="http://schemas.openxmlformats.org/presentationml/2006/main" xmlns:r="http://schemas.openxmlformats.org/officeDocument/2006/relationships">
   <p:cSld>
     <p:spTree>
@@ -23300,7 +23300,7 @@
 </p:sld>
 </file>
 
-<file path=ppt/slides/slide49.xml><?xml version="1.0" encoding="utf-8"?>
+<file path=ppt/slides/slide48.xml><?xml version="1.0" encoding="utf-8"?>
 <p:sld xmlns:a="http://schemas.openxmlformats.org/drawingml/2006/main" xmlns:p="http://schemas.openxmlformats.org/presentationml/2006/main" xmlns:r="http://schemas.openxmlformats.org/officeDocument/2006/relationships">
   <p:cSld>
     <p:spTree>
@@ -23953,6 +23953,291 @@
 </p:sld>
 </file>
 
+<file path=ppt/slides/slide49.xml><?xml version="1.0" encoding="utf-8"?>
+<p:sld xmlns:a="http://schemas.openxmlformats.org/drawingml/2006/main" xmlns:p="http://schemas.openxmlformats.org/presentationml/2006/main" xmlns:r="http://schemas.openxmlformats.org/officeDocument/2006/relationships">
+  <p:cSld>
+    <p:spTree>
+      <p:nvGrpSpPr>
+        <p:cNvPr id="1" name=""/>
+        <p:cNvGrpSpPr/>
+        <p:nvPr/>
+      </p:nvGrpSpPr>
+      <p:grpSpPr/>
+      <p:sp>
+        <p:nvSpPr>
+          <p:cNvPr id="2" name="Title 1"/>
+          <p:cNvSpPr>
+            <a:spLocks noGrp="1"/>
+          </p:cNvSpPr>
+          <p:nvPr>
+            <p:ph type="title"/>
+          </p:nvPr>
+        </p:nvSpPr>
+        <p:spPr>
+          <a:xfrm>
+            <a:off x="548640" y="1662867"/>
+            <a:ext cx="8046720" cy="731520"/>
+          </a:xfrm>
+        </p:spPr>
+        <p:txBody>
+          <a:bodyPr wrap="square" lIns="0" rIns="0" tIns="0" bIns="0" anchor="ctr"/>
+          <a:lstStyle/>
+          <a:p>
+            <a:pPr algn="ctr">
+              <a:lnSpc>
+                <a:spcPct val="112000"/>
+              </a:lnSpc>
+              <a:spcAft>
+                <a:spcPts val="0"/>
+              </a:spcAft>
+              <a:buNone/>
+            </a:pPr>
+            <a:r>
+              <a:rPr sz="3700" b="1" lang="ja-JP">
+                <a:solidFill>
+                  <a:srgbClr val="303437"/>
+                </a:solidFill>
+                <a:latin typeface="Noto Sans"/>
+                <a:ea typeface="Noto Sans CJK JP"/>
+                <a:cs typeface="Noto Sans"/>
+              </a:rPr>
+              <a:t>100文書の部分集合の分析</a:t>
+            </a:r>
+          </a:p>
+        </p:txBody>
+      </p:sp>
+      <p:sp>
+        <p:nvSpPr>
+          <p:cNvPr id="3" name="Title 2"/>
+          <p:cNvSpPr>
+            <a:spLocks noGrp="1"/>
+          </p:cNvSpPr>
+          <p:nvPr>
+            <p:ph type="title" idx="2"/>
+          </p:nvPr>
+        </p:nvSpPr>
+        <p:spPr/>
+        <p:txBody>
+          <a:bodyPr wrap="square" lIns="0" rIns="0" tIns="0" bIns="0" anchor="ctr"/>
+          <a:lstStyle/>
+          <a:p>
+            <a:pPr algn="l">
+              <a:lnSpc>
+                <a:spcPct val="100000"/>
+              </a:lnSpc>
+              <a:spcBef>
+                <a:spcPts val="0"/>
+              </a:spcBef>
+              <a:spcAft>
+                <a:spcPts val="0"/>
+              </a:spcAft>
+              <a:buNone/>
+            </a:pPr>
+            <a:r>
+              <a:rPr sz="1400" b="1" lang="ja-JP">
+                <a:solidFill>
+                  <a:srgbClr val="FFFEF8"/>
+                </a:solidFill>
+                <a:latin typeface="Noto Sans"/>
+                <a:ea typeface="Noto Sans CJK JP"/>
+                <a:cs typeface="Noto Sans"/>
+              </a:rPr>
+              <a:t>Appendix 1. 配布文書の構造と長さの集計</a:t>
+            </a:r>
+          </a:p>
+        </p:txBody>
+      </p:sp>
+      <p:sp>
+        <p:nvSpPr>
+          <p:cNvPr id="4" name="TextBox 3"/>
+          <p:cNvSpPr txBox="1"/>
+          <p:nvPr/>
+        </p:nvSpPr>
+        <p:spPr>
+          <a:xfrm>
+            <a:off x="548640" y="2714427"/>
+            <a:ext cx="8046720" cy="365760"/>
+          </a:xfrm>
+          <a:prstGeom prst="rect">
+            <a:avLst/>
+          </a:prstGeom>
+          <a:noFill/>
+        </p:spPr>
+        <p:txBody>
+          <a:bodyPr wrap="square" lIns="0" rIns="0" tIns="0" bIns="0">
+            <a:spAutoFit/>
+          </a:bodyPr>
+          <a:lstStyle/>
+          <a:p>
+            <a:pPr algn="ctr">
+              <a:lnSpc>
+                <a:spcPct val="112000"/>
+              </a:lnSpc>
+              <a:spcAft>
+                <a:spcPts val="0"/>
+              </a:spcAft>
+              <a:buNone/>
+            </a:pPr>
+            <a:r>
+              <a:rPr sz="2100" b="0" lang="ja-JP">
+                <a:solidFill>
+                  <a:srgbClr val="303437"/>
+                </a:solidFill>
+                <a:latin typeface="Noto Sans"/>
+                <a:ea typeface="Noto Sans CJK JP"/>
+                <a:cs typeface="Noto Sans"/>
+              </a:rPr>
+              <a:t>sample-10BTの先頭100文書を対象とする</a:t>
+            </a:r>
+          </a:p>
+        </p:txBody>
+      </p:sp>
+      <p:sp>
+        <p:nvSpPr>
+          <p:cNvPr id="5" name="TextBox 4"/>
+          <p:cNvSpPr txBox="1"/>
+          <p:nvPr/>
+        </p:nvSpPr>
+        <p:spPr>
+          <a:xfrm>
+            <a:off x="548640" y="3125907"/>
+            <a:ext cx="8046720" cy="365760"/>
+          </a:xfrm>
+          <a:prstGeom prst="rect">
+            <a:avLst/>
+          </a:prstGeom>
+          <a:noFill/>
+        </p:spPr>
+        <p:txBody>
+          <a:bodyPr wrap="square" lIns="0" rIns="0" tIns="0" bIns="0">
+            <a:spAutoFit/>
+          </a:bodyPr>
+          <a:lstStyle/>
+          <a:p>
+            <a:pPr algn="ctr">
+              <a:lnSpc>
+                <a:spcPct val="112000"/>
+              </a:lnSpc>
+              <a:spcAft>
+                <a:spcPts val="0"/>
+              </a:spcAft>
+              <a:buNone/>
+            </a:pPr>
+            <a:r>
+              <a:rPr sz="2100" b="0" lang="ja-JP">
+                <a:solidFill>
+                  <a:srgbClr val="303437"/>
+                </a:solidFill>
+                <a:latin typeface="Noto Sans"/>
+                <a:ea typeface="Noto Sans CJK JP"/>
+                <a:cs typeface="Noto Sans"/>
+              </a:rPr>
+              <a:t>収録クロールはCC-MAIN-2013-20</a:t>
+            </a:r>
+          </a:p>
+        </p:txBody>
+      </p:sp>
+      <p:sp>
+        <p:nvSpPr>
+          <p:cNvPr id="6" name="TextBox 5"/>
+          <p:cNvSpPr txBox="1"/>
+          <p:nvPr/>
+        </p:nvSpPr>
+        <p:spPr>
+          <a:xfrm>
+            <a:off x="548640" y="3537387"/>
+            <a:ext cx="8046720" cy="365760"/>
+          </a:xfrm>
+          <a:prstGeom prst="rect">
+            <a:avLst/>
+          </a:prstGeom>
+          <a:noFill/>
+        </p:spPr>
+        <p:txBody>
+          <a:bodyPr wrap="square" lIns="0" rIns="0" tIns="0" bIns="0">
+            <a:spAutoFit/>
+          </a:bodyPr>
+          <a:lstStyle/>
+          <a:p>
+            <a:pPr algn="ctr">
+              <a:lnSpc>
+                <a:spcPct val="112000"/>
+              </a:lnSpc>
+              <a:spcAft>
+                <a:spcPts val="0"/>
+              </a:spcAft>
+              <a:buNone/>
+            </a:pPr>
+            <a:r>
+              <a:rPr sz="2100" b="0" lang="ja-JP">
+                <a:solidFill>
+                  <a:srgbClr val="303437"/>
+                </a:solidFill>
+                <a:latin typeface="Noto Sans"/>
+                <a:ea typeface="Noto Sans CJK JP"/>
+                <a:cs typeface="Noto Sans"/>
+              </a:rPr>
+              <a:t>文書の長さと、収録された文章の例を確認する</a:t>
+            </a:r>
+          </a:p>
+        </p:txBody>
+      </p:sp>
+      <p:sp>
+        <p:nvSpPr>
+          <p:cNvPr id="7" name="TextBox 6"/>
+          <p:cNvSpPr txBox="1"/>
+          <p:nvPr/>
+        </p:nvSpPr>
+        <p:spPr>
+          <a:xfrm>
+            <a:off x="548640" y="4928616"/>
+            <a:ext cx="8046720" cy="155448"/>
+          </a:xfrm>
+          <a:prstGeom prst="rect">
+            <a:avLst/>
+          </a:prstGeom>
+          <a:noFill/>
+        </p:spPr>
+        <p:txBody>
+          <a:bodyPr wrap="none" lIns="0" rIns="0" tIns="0" bIns="0">
+            <a:spAutoFit/>
+          </a:bodyPr>
+          <a:lstStyle/>
+          <a:p>
+            <a:r>
+              <a:rPr sz="800" b="0" lang="ja-JP">
+                <a:solidFill>
+                  <a:srgbClr val="626669"/>
+                </a:solidFill>
+                <a:latin typeface="Noto Sans"/>
+                <a:ea typeface="Noto Sans CJK JP"/>
+                <a:cs typeface="Noto Sans"/>
+              </a:rPr>
+              <a:t>[1] FineWeb dataset viewer / sample-10BT, rows 0–99  </a:t>
+            </a:r>
+            <a:r>
+              <a:rPr sz="800" b="0" lang="en-US">
+                <a:solidFill>
+                  <a:srgbClr val="626669"/>
+                </a:solidFill>
+                <a:latin typeface="Noto Sans"/>
+                <a:ea typeface="Noto Sans CJK JP"/>
+                <a:cs typeface="Noto Sans"/>
+                <a:hlinkClick r:id="rId2"/>
+              </a:rPr>
+              <a:t>https://huggingface.co/datasets/HuggingFaceFW/fineweb/viewer/sample-10BT/train</a:t>
+            </a:r>
+          </a:p>
+        </p:txBody>
+      </p:sp>
+    </p:spTree>
+  </p:cSld>
+  <p:clrMapOvr>
+    <a:masterClrMapping/>
+  </p:clrMapOvr>
+</p:sld>
+</file>
+
 <file path=ppt/slides/slide5.xml><?xml version="1.0" encoding="utf-8"?>
 <p:sld xmlns:a="http://schemas.openxmlformats.org/drawingml/2006/main" xmlns:p="http://schemas.openxmlformats.org/presentationml/2006/main" xmlns:r="http://schemas.openxmlformats.org/officeDocument/2006/relationships">
   <p:cSld>
@@ -24209,291 +24494,6 @@
 </file>
 
 <file path=ppt/slides/slide50.xml><?xml version="1.0" encoding="utf-8"?>
-<p:sld xmlns:a="http://schemas.openxmlformats.org/drawingml/2006/main" xmlns:p="http://schemas.openxmlformats.org/presentationml/2006/main" xmlns:r="http://schemas.openxmlformats.org/officeDocument/2006/relationships">
-  <p:cSld>
-    <p:spTree>
-      <p:nvGrpSpPr>
-        <p:cNvPr id="1" name=""/>
-        <p:cNvGrpSpPr/>
-        <p:nvPr/>
-      </p:nvGrpSpPr>
-      <p:grpSpPr/>
-      <p:sp>
-        <p:nvSpPr>
-          <p:cNvPr id="2" name="Title 1"/>
-          <p:cNvSpPr>
-            <a:spLocks noGrp="1"/>
-          </p:cNvSpPr>
-          <p:nvPr>
-            <p:ph type="title"/>
-          </p:nvPr>
-        </p:nvSpPr>
-        <p:spPr>
-          <a:xfrm>
-            <a:off x="548640" y="1662867"/>
-            <a:ext cx="8046720" cy="731520"/>
-          </a:xfrm>
-        </p:spPr>
-        <p:txBody>
-          <a:bodyPr wrap="square" lIns="0" rIns="0" tIns="0" bIns="0" anchor="ctr"/>
-          <a:lstStyle/>
-          <a:p>
-            <a:pPr algn="ctr">
-              <a:lnSpc>
-                <a:spcPct val="112000"/>
-              </a:lnSpc>
-              <a:spcAft>
-                <a:spcPts val="0"/>
-              </a:spcAft>
-              <a:buNone/>
-            </a:pPr>
-            <a:r>
-              <a:rPr sz="3700" b="1" lang="ja-JP">
-                <a:solidFill>
-                  <a:srgbClr val="303437"/>
-                </a:solidFill>
-                <a:latin typeface="Noto Sans"/>
-                <a:ea typeface="Noto Sans CJK JP"/>
-                <a:cs typeface="Noto Sans"/>
-              </a:rPr>
-              <a:t>100文書の部分集合の分析</a:t>
-            </a:r>
-          </a:p>
-        </p:txBody>
-      </p:sp>
-      <p:sp>
-        <p:nvSpPr>
-          <p:cNvPr id="3" name="Title 2"/>
-          <p:cNvSpPr>
-            <a:spLocks noGrp="1"/>
-          </p:cNvSpPr>
-          <p:nvPr>
-            <p:ph type="title" idx="2"/>
-          </p:nvPr>
-        </p:nvSpPr>
-        <p:spPr/>
-        <p:txBody>
-          <a:bodyPr wrap="square" lIns="0" rIns="0" tIns="0" bIns="0" anchor="ctr"/>
-          <a:lstStyle/>
-          <a:p>
-            <a:pPr algn="l">
-              <a:lnSpc>
-                <a:spcPct val="100000"/>
-              </a:lnSpc>
-              <a:spcBef>
-                <a:spcPts val="0"/>
-              </a:spcBef>
-              <a:spcAft>
-                <a:spcPts val="0"/>
-              </a:spcAft>
-              <a:buNone/>
-            </a:pPr>
-            <a:r>
-              <a:rPr sz="1400" b="1" lang="ja-JP">
-                <a:solidFill>
-                  <a:srgbClr val="FFFEF8"/>
-                </a:solidFill>
-                <a:latin typeface="Noto Sans"/>
-                <a:ea typeface="Noto Sans CJK JP"/>
-                <a:cs typeface="Noto Sans"/>
-              </a:rPr>
-              <a:t>Appendix 1. 配布文書の構造と長さの集計</a:t>
-            </a:r>
-          </a:p>
-        </p:txBody>
-      </p:sp>
-      <p:sp>
-        <p:nvSpPr>
-          <p:cNvPr id="4" name="TextBox 3"/>
-          <p:cNvSpPr txBox="1"/>
-          <p:nvPr/>
-        </p:nvSpPr>
-        <p:spPr>
-          <a:xfrm>
-            <a:off x="548640" y="2714427"/>
-            <a:ext cx="8046720" cy="365760"/>
-          </a:xfrm>
-          <a:prstGeom prst="rect">
-            <a:avLst/>
-          </a:prstGeom>
-          <a:noFill/>
-        </p:spPr>
-        <p:txBody>
-          <a:bodyPr wrap="square" lIns="0" rIns="0" tIns="0" bIns="0">
-            <a:spAutoFit/>
-          </a:bodyPr>
-          <a:lstStyle/>
-          <a:p>
-            <a:pPr algn="ctr">
-              <a:lnSpc>
-                <a:spcPct val="112000"/>
-              </a:lnSpc>
-              <a:spcAft>
-                <a:spcPts val="0"/>
-              </a:spcAft>
-              <a:buNone/>
-            </a:pPr>
-            <a:r>
-              <a:rPr sz="2100" b="0" lang="ja-JP">
-                <a:solidFill>
-                  <a:srgbClr val="303437"/>
-                </a:solidFill>
-                <a:latin typeface="Noto Sans"/>
-                <a:ea typeface="Noto Sans CJK JP"/>
-                <a:cs typeface="Noto Sans"/>
-              </a:rPr>
-              <a:t>sample-10BTの先頭100文書を対象とする</a:t>
-            </a:r>
-          </a:p>
-        </p:txBody>
-      </p:sp>
-      <p:sp>
-        <p:nvSpPr>
-          <p:cNvPr id="5" name="TextBox 4"/>
-          <p:cNvSpPr txBox="1"/>
-          <p:nvPr/>
-        </p:nvSpPr>
-        <p:spPr>
-          <a:xfrm>
-            <a:off x="548640" y="3125907"/>
-            <a:ext cx="8046720" cy="365760"/>
-          </a:xfrm>
-          <a:prstGeom prst="rect">
-            <a:avLst/>
-          </a:prstGeom>
-          <a:noFill/>
-        </p:spPr>
-        <p:txBody>
-          <a:bodyPr wrap="square" lIns="0" rIns="0" tIns="0" bIns="0">
-            <a:spAutoFit/>
-          </a:bodyPr>
-          <a:lstStyle/>
-          <a:p>
-            <a:pPr algn="ctr">
-              <a:lnSpc>
-                <a:spcPct val="112000"/>
-              </a:lnSpc>
-              <a:spcAft>
-                <a:spcPts val="0"/>
-              </a:spcAft>
-              <a:buNone/>
-            </a:pPr>
-            <a:r>
-              <a:rPr sz="2100" b="0" lang="ja-JP">
-                <a:solidFill>
-                  <a:srgbClr val="303437"/>
-                </a:solidFill>
-                <a:latin typeface="Noto Sans"/>
-                <a:ea typeface="Noto Sans CJK JP"/>
-                <a:cs typeface="Noto Sans"/>
-              </a:rPr>
-              <a:t>収録クロールはCC-MAIN-2013-20</a:t>
-            </a:r>
-          </a:p>
-        </p:txBody>
-      </p:sp>
-      <p:sp>
-        <p:nvSpPr>
-          <p:cNvPr id="6" name="TextBox 5"/>
-          <p:cNvSpPr txBox="1"/>
-          <p:nvPr/>
-        </p:nvSpPr>
-        <p:spPr>
-          <a:xfrm>
-            <a:off x="548640" y="3537387"/>
-            <a:ext cx="8046720" cy="365760"/>
-          </a:xfrm>
-          <a:prstGeom prst="rect">
-            <a:avLst/>
-          </a:prstGeom>
-          <a:noFill/>
-        </p:spPr>
-        <p:txBody>
-          <a:bodyPr wrap="square" lIns="0" rIns="0" tIns="0" bIns="0">
-            <a:spAutoFit/>
-          </a:bodyPr>
-          <a:lstStyle/>
-          <a:p>
-            <a:pPr algn="ctr">
-              <a:lnSpc>
-                <a:spcPct val="112000"/>
-              </a:lnSpc>
-              <a:spcAft>
-                <a:spcPts val="0"/>
-              </a:spcAft>
-              <a:buNone/>
-            </a:pPr>
-            <a:r>
-              <a:rPr sz="2100" b="0" lang="ja-JP">
-                <a:solidFill>
-                  <a:srgbClr val="303437"/>
-                </a:solidFill>
-                <a:latin typeface="Noto Sans"/>
-                <a:ea typeface="Noto Sans CJK JP"/>
-                <a:cs typeface="Noto Sans"/>
-              </a:rPr>
-              <a:t>文書の長さと、収録された文章の例を確認する</a:t>
-            </a:r>
-          </a:p>
-        </p:txBody>
-      </p:sp>
-      <p:sp>
-        <p:nvSpPr>
-          <p:cNvPr id="7" name="TextBox 6"/>
-          <p:cNvSpPr txBox="1"/>
-          <p:nvPr/>
-        </p:nvSpPr>
-        <p:spPr>
-          <a:xfrm>
-            <a:off x="548640" y="4928616"/>
-            <a:ext cx="8046720" cy="155448"/>
-          </a:xfrm>
-          <a:prstGeom prst="rect">
-            <a:avLst/>
-          </a:prstGeom>
-          <a:noFill/>
-        </p:spPr>
-        <p:txBody>
-          <a:bodyPr wrap="none" lIns="0" rIns="0" tIns="0" bIns="0">
-            <a:spAutoFit/>
-          </a:bodyPr>
-          <a:lstStyle/>
-          <a:p>
-            <a:r>
-              <a:rPr sz="800" b="0" lang="ja-JP">
-                <a:solidFill>
-                  <a:srgbClr val="626669"/>
-                </a:solidFill>
-                <a:latin typeface="Noto Sans"/>
-                <a:ea typeface="Noto Sans CJK JP"/>
-                <a:cs typeface="Noto Sans"/>
-              </a:rPr>
-              <a:t>[1] FineWeb dataset viewer / sample-10BT, rows 0–99  </a:t>
-            </a:r>
-            <a:r>
-              <a:rPr sz="800" b="0" lang="en-US">
-                <a:solidFill>
-                  <a:srgbClr val="626669"/>
-                </a:solidFill>
-                <a:latin typeface="Noto Sans"/>
-                <a:ea typeface="Noto Sans CJK JP"/>
-                <a:cs typeface="Noto Sans"/>
-                <a:hlinkClick r:id="rId2"/>
-              </a:rPr>
-              <a:t>https://huggingface.co/datasets/HuggingFaceFW/fineweb/viewer/sample-10BT/train</a:t>
-            </a:r>
-          </a:p>
-        </p:txBody>
-      </p:sp>
-    </p:spTree>
-  </p:cSld>
-  <p:clrMapOvr>
-    <a:masterClrMapping/>
-  </p:clrMapOvr>
-</p:sld>
-</file>
-
-<file path=ppt/slides/slide51.xml><?xml version="1.0" encoding="utf-8"?>
 <p:sld xmlns:a="http://schemas.openxmlformats.org/drawingml/2006/main" xmlns:p="http://schemas.openxmlformats.org/presentationml/2006/main" xmlns:r="http://schemas.openxmlformats.org/officeDocument/2006/relationships">
   <p:cSld>
     <p:spTree>
@@ -25190,7 +25190,7 @@
 </p:sld>
 </file>
 
-<file path=ppt/slides/slide52.xml><?xml version="1.0" encoding="utf-8"?>
+<file path=ppt/slides/slide51.xml><?xml version="1.0" encoding="utf-8"?>
 <p:sld xmlns:a="http://schemas.openxmlformats.org/drawingml/2006/main" xmlns:p="http://schemas.openxmlformats.org/presentationml/2006/main" xmlns:r="http://schemas.openxmlformats.org/officeDocument/2006/relationships">
   <p:cSld>
     <p:spTree>
@@ -25364,7 +25364,7 @@
 </p:sld>
 </file>
 
-<file path=ppt/slides/slide53.xml><?xml version="1.0" encoding="utf-8"?>
+<file path=ppt/slides/slide52.xml><?xml version="1.0" encoding="utf-8"?>
 <p:sld xmlns:a="http://schemas.openxmlformats.org/drawingml/2006/main" xmlns:p="http://schemas.openxmlformats.org/presentationml/2006/main" xmlns:r="http://schemas.openxmlformats.org/officeDocument/2006/relationships">
   <p:cSld>
     <p:spTree>
@@ -25828,7 +25828,7 @@
 </p:sld>
 </file>
 
-<file path=ppt/slides/slide54.xml><?xml version="1.0" encoding="utf-8"?>
+<file path=ppt/slides/slide53.xml><?xml version="1.0" encoding="utf-8"?>
 <p:sld xmlns:a="http://schemas.openxmlformats.org/drawingml/2006/main" xmlns:p="http://schemas.openxmlformats.org/presentationml/2006/main" xmlns:r="http://schemas.openxmlformats.org/officeDocument/2006/relationships">
   <p:cSld>
     <p:spTree>
@@ -26292,7 +26292,7 @@
 </p:sld>
 </file>
 
-<file path=ppt/slides/slide55.xml><?xml version="1.0" encoding="utf-8"?>
+<file path=ppt/slides/slide54.xml><?xml version="1.0" encoding="utf-8"?>
 <p:sld xmlns:a="http://schemas.openxmlformats.org/drawingml/2006/main" xmlns:p="http://schemas.openxmlformats.org/presentationml/2006/main" xmlns:r="http://schemas.openxmlformats.org/officeDocument/2006/relationships">
   <p:cSld>
     <p:spTree>
@@ -26778,7 +26778,7 @@
 </p:sld>
 </file>
 
-<file path=ppt/slides/slide56.xml><?xml version="1.0" encoding="utf-8"?>
+<file path=ppt/slides/slide55.xml><?xml version="1.0" encoding="utf-8"?>
 <p:sld xmlns:a="http://schemas.openxmlformats.org/drawingml/2006/main" xmlns:p="http://schemas.openxmlformats.org/presentationml/2006/main" xmlns:r="http://schemas.openxmlformats.org/officeDocument/2006/relationships">
   <p:cSld>
     <p:spTree>
@@ -27220,7 +27220,7 @@
 </p:sld>
 </file>
 
-<file path=ppt/slides/slide57.xml><?xml version="1.0" encoding="utf-8"?>
+<file path=ppt/slides/slide56.xml><?xml version="1.0" encoding="utf-8"?>
 <p:sld xmlns:a="http://schemas.openxmlformats.org/drawingml/2006/main" xmlns:p="http://schemas.openxmlformats.org/presentationml/2006/main" xmlns:r="http://schemas.openxmlformats.org/officeDocument/2006/relationships">
   <p:cSld>
     <p:spTree>
@@ -27684,7 +27684,7 @@
 </p:sld>
 </file>
 
-<file path=ppt/slides/slide58.xml><?xml version="1.0" encoding="utf-8"?>
+<file path=ppt/slides/slide57.xml><?xml version="1.0" encoding="utf-8"?>
 <p:sld xmlns:a="http://schemas.openxmlformats.org/drawingml/2006/main" xmlns:p="http://schemas.openxmlformats.org/presentationml/2006/main" xmlns:r="http://schemas.openxmlformats.org/officeDocument/2006/relationships">
   <p:cSld>
     <p:spTree>
@@ -28170,7 +28170,7 @@
 </p:sld>
 </file>
 
-<file path=ppt/slides/slide59.xml><?xml version="1.0" encoding="utf-8"?>
+<file path=ppt/slides/slide58.xml><?xml version="1.0" encoding="utf-8"?>
 <p:sld xmlns:a="http://schemas.openxmlformats.org/drawingml/2006/main" xmlns:p="http://schemas.openxmlformats.org/presentationml/2006/main" xmlns:r="http://schemas.openxmlformats.org/officeDocument/2006/relationships">
   <p:cSld>
     <p:spTree>
@@ -28600,6 +28600,514 @@
                 <a:hlinkClick r:id="rId3"/>
               </a:rPr>
               <a:t>http://www.fdin.org.uk/2012/01/kraft-launches-new-philadelphia-with-cadbury/</a:t>
+            </a:r>
+          </a:p>
+        </p:txBody>
+      </p:sp>
+    </p:spTree>
+  </p:cSld>
+  <p:clrMapOvr>
+    <a:masterClrMapping/>
+  </p:clrMapOvr>
+</p:sld>
+</file>
+
+<file path=ppt/slides/slide59.xml><?xml version="1.0" encoding="utf-8"?>
+<p:sld xmlns:a="http://schemas.openxmlformats.org/drawingml/2006/main" xmlns:p="http://schemas.openxmlformats.org/presentationml/2006/main" xmlns:r="http://schemas.openxmlformats.org/officeDocument/2006/relationships">
+  <p:cSld>
+    <p:spTree>
+      <p:nvGrpSpPr>
+        <p:cNvPr id="1" name=""/>
+        <p:cNvGrpSpPr/>
+        <p:nvPr/>
+      </p:nvGrpSpPr>
+      <p:grpSpPr/>
+      <p:sp>
+        <p:nvSpPr>
+          <p:cNvPr id="2" name="Title 1"/>
+          <p:cNvSpPr>
+            <a:spLocks noGrp="1"/>
+          </p:cNvSpPr>
+          <p:nvPr>
+            <p:ph type="title"/>
+          </p:nvPr>
+        </p:nvSpPr>
+        <p:spPr>
+          <a:xfrm>
+            <a:off x="548640" y="786384"/>
+            <a:ext cx="8046720" cy="502920"/>
+          </a:xfrm>
+        </p:spPr>
+        <p:txBody>
+          <a:bodyPr wrap="square" lIns="0" rIns="0" tIns="0" bIns="0"/>
+          <a:lstStyle/>
+          <a:p>
+            <a:pPr algn="l">
+              <a:lnSpc>
+                <a:spcPct val="112000"/>
+              </a:lnSpc>
+              <a:spcAft>
+                <a:spcPts val="0"/>
+              </a:spcAft>
+              <a:buNone/>
+            </a:pPr>
+            <a:r>
+              <a:rPr sz="2800" b="1" lang="ja-JP">
+                <a:solidFill>
+                  <a:srgbClr val="303437"/>
+                </a:solidFill>
+                <a:latin typeface="Noto Sans"/>
+                <a:ea typeface="Noto Sans CJK JP"/>
+                <a:cs typeface="Noto Sans"/>
+              </a:rPr>
+              <a:t>追加例6：飲食店の衛生検査記録</a:t>
+            </a:r>
+          </a:p>
+        </p:txBody>
+      </p:sp>
+      <p:sp>
+        <p:nvSpPr>
+          <p:cNvPr id="3" name="Title 2"/>
+          <p:cNvSpPr>
+            <a:spLocks noGrp="1"/>
+          </p:cNvSpPr>
+          <p:nvPr>
+            <p:ph type="title" idx="2"/>
+          </p:nvPr>
+        </p:nvSpPr>
+        <p:spPr/>
+        <p:txBody>
+          <a:bodyPr wrap="square" lIns="0" rIns="0" tIns="0" bIns="0" anchor="ctr"/>
+          <a:lstStyle/>
+          <a:p>
+            <a:pPr algn="l">
+              <a:lnSpc>
+                <a:spcPct val="100000"/>
+              </a:lnSpc>
+              <a:spcBef>
+                <a:spcPts val="0"/>
+              </a:spcBef>
+              <a:spcAft>
+                <a:spcPts val="0"/>
+              </a:spcAft>
+              <a:buNone/>
+            </a:pPr>
+            <a:r>
+              <a:rPr sz="1400" b="1" lang="ja-JP">
+                <a:solidFill>
+                  <a:srgbClr val="FFFEF8"/>
+                </a:solidFill>
+                <a:latin typeface="Noto Sans"/>
+                <a:ea typeface="Noto Sans CJK JP"/>
+                <a:cs typeface="Noto Sans"/>
+              </a:rPr>
+              <a:t>Appendix 2. 収録されたWeb文書の追加例</a:t>
+            </a:r>
+          </a:p>
+        </p:txBody>
+      </p:sp>
+      <p:sp>
+        <p:nvSpPr>
+          <p:cNvPr id="4" name="TextBox 3"/>
+          <p:cNvSpPr txBox="1"/>
+          <p:nvPr/>
+        </p:nvSpPr>
+        <p:spPr>
+          <a:xfrm>
+            <a:off x="548640" y="1399032"/>
+            <a:ext cx="8046720" cy="210312"/>
+          </a:xfrm>
+          <a:prstGeom prst="rect">
+            <a:avLst/>
+          </a:prstGeom>
+          <a:noFill/>
+        </p:spPr>
+        <p:txBody>
+          <a:bodyPr wrap="square" lIns="0" rIns="0" tIns="0" bIns="0">
+            <a:spAutoFit/>
+          </a:bodyPr>
+          <a:lstStyle/>
+          <a:p>
+            <a:pPr algn="l">
+              <a:lnSpc>
+                <a:spcPct val="112000"/>
+              </a:lnSpc>
+              <a:spcAft>
+                <a:spcPts val="0"/>
+              </a:spcAft>
+              <a:buNone/>
+            </a:pPr>
+            <a:r>
+              <a:rPr sz="1200" b="0" lang="ja-JP">
+                <a:solidFill>
+                  <a:srgbClr val="626669"/>
+                </a:solidFill>
+                <a:latin typeface="Noto Sans"/>
+                <a:ea typeface="Noto Sans CJK JP"/>
+                <a:cs typeface="Noto Sans"/>
+              </a:rPr>
+              <a:t>配布テキストからの抜粋（英語）</a:t>
+            </a:r>
+          </a:p>
+        </p:txBody>
+      </p:sp>
+      <p:sp>
+        <p:nvSpPr>
+          <p:cNvPr id="5" name="Rectangle 4"/>
+          <p:cNvSpPr/>
+          <p:nvPr/>
+        </p:nvSpPr>
+        <p:spPr>
+          <a:xfrm>
+            <a:off x="548640" y="1771194"/>
+            <a:ext cx="8046720" cy="1435785"/>
+          </a:xfrm>
+          <a:prstGeom prst="rect">
+            <a:avLst/>
+          </a:prstGeom>
+          <a:solidFill>
+            <a:srgbClr val="EBEDEB"/>
+          </a:solidFill>
+          <a:ln>
+            <a:noFill/>
+          </a:ln>
+          <a:effectLst/>
+        </p:spPr>
+        <p:style>
+          <a:lnRef idx="1">
+            <a:schemeClr val="accent1"/>
+          </a:lnRef>
+          <a:fillRef idx="3">
+            <a:schemeClr val="accent1"/>
+          </a:fillRef>
+          <a:effectRef idx="0">
+            <a:schemeClr val="accent1"/>
+          </a:effectRef>
+          <a:fontRef idx="minor">
+            <a:schemeClr val="lt1"/>
+          </a:fontRef>
+        </p:style>
+        <p:txBody>
+          <a:bodyPr rtlCol="0" anchor="ctr"/>
+          <a:lstStyle/>
+          <a:p>
+            <a:pPr algn="ctr"/>
+          </a:p>
+        </p:txBody>
+      </p:sp>
+      <p:sp>
+        <p:nvSpPr>
+          <p:cNvPr id="6" name="TextBox 5"/>
+          <p:cNvSpPr txBox="1"/>
+          <p:nvPr/>
+        </p:nvSpPr>
+        <p:spPr>
+          <a:xfrm>
+            <a:off x="722376" y="1856231"/>
+            <a:ext cx="7699248" cy="1828800"/>
+          </a:xfrm>
+          <a:prstGeom prst="rect">
+            <a:avLst/>
+          </a:prstGeom>
+          <a:noFill/>
+        </p:spPr>
+        <p:txBody>
+          <a:bodyPr wrap="square" lIns="0" rIns="0" tIns="0" bIns="0">
+            <a:spAutoFit/>
+          </a:bodyPr>
+          <a:lstStyle/>
+          <a:p>
+            <a:pPr algn="l">
+              <a:lnSpc>
+                <a:spcPct val="112000"/>
+              </a:lnSpc>
+              <a:spcAft>
+                <a:spcPts val="0"/>
+              </a:spcAft>
+              <a:buNone/>
+            </a:pPr>
+            <a:r>
+              <a:rPr sz="1800" b="0" lang="en-US">
+                <a:solidFill>
+                  <a:srgbClr val="303437"/>
+                </a:solidFill>
+                <a:latin typeface="Noto Sans"/>
+                <a:ea typeface="Noto Sans CJK JP"/>
+                <a:cs typeface="Noto Sans"/>
+              </a:rPr>
+              <a:t>|Facility Type:||Full Service Restaurant|</a:t>
+            </a:r>
+          </a:p>
+          <a:p>
+            <a:pPr algn="l">
+              <a:lnSpc>
+                <a:spcPct val="112000"/>
+              </a:lnSpc>
+              <a:spcAft>
+                <a:spcPts val="0"/>
+              </a:spcAft>
+              <a:buNone/>
+            </a:pPr>
+            <a:r>
+              <a:rPr sz="1800" b="0" lang="en-US">
+                <a:solidFill>
+                  <a:srgbClr val="303437"/>
+                </a:solidFill>
+                <a:latin typeface="Noto Sans"/>
+                <a:ea typeface="Noto Sans CJK JP"/>
+                <a:cs typeface="Noto Sans"/>
+              </a:rPr>
+              <a:t>|Inspection date:||March 27, 2012|</a:t>
+            </a:r>
+          </a:p>
+          <a:p>
+            <a:pPr algn="l">
+              <a:lnSpc>
+                <a:spcPct val="112000"/>
+              </a:lnSpc>
+              <a:spcAft>
+                <a:spcPts val="0"/>
+              </a:spcAft>
+              <a:buNone/>
+            </a:pPr>
+            <a:r>
+              <a:rPr sz="1800" b="0" lang="en-US">
+                <a:solidFill>
+                  <a:srgbClr val="303437"/>
+                </a:solidFill>
+                <a:latin typeface="Noto Sans"/>
+                <a:ea typeface="Noto Sans CJK JP"/>
+                <a:cs typeface="Noto Sans"/>
+              </a:rPr>
+              <a:t>|Number of critical violations:||3|</a:t>
+            </a:r>
+          </a:p>
+          <a:p>
+            <a:pPr algn="l">
+              <a:lnSpc>
+                <a:spcPct val="112000"/>
+              </a:lnSpc>
+              <a:spcAft>
+                <a:spcPts val="0"/>
+              </a:spcAft>
+              <a:buNone/>
+            </a:pPr>
+            <a:r>
+              <a:rPr sz="1800" b="0" lang="en-US">
+                <a:solidFill>
+                  <a:srgbClr val="303437"/>
+                </a:solidFill>
+                <a:latin typeface="Noto Sans"/>
+                <a:ea typeface="Noto Sans CJK JP"/>
+                <a:cs typeface="Noto Sans"/>
+              </a:rPr>
+              <a:t>|Number of non-critical violations:||3|</a:t>
+            </a:r>
+          </a:p>
+        </p:txBody>
+      </p:sp>
+      <p:sp>
+        <p:nvSpPr>
+          <p:cNvPr id="7" name="TextBox 6"/>
+          <p:cNvSpPr txBox="1"/>
+          <p:nvPr/>
+        </p:nvSpPr>
+        <p:spPr>
+          <a:xfrm>
+            <a:off x="548640" y="3384780"/>
+            <a:ext cx="8046720" cy="868680"/>
+          </a:xfrm>
+          <a:prstGeom prst="rect">
+            <a:avLst/>
+          </a:prstGeom>
+          <a:noFill/>
+        </p:spPr>
+        <p:txBody>
+          <a:bodyPr wrap="square" lIns="0" rIns="0" tIns="0" bIns="0">
+            <a:spAutoFit/>
+          </a:bodyPr>
+          <a:lstStyle/>
+          <a:p>
+            <a:pPr algn="l">
+              <a:lnSpc>
+                <a:spcPct val="112000"/>
+              </a:lnSpc>
+              <a:spcAft>
+                <a:spcPts val="0"/>
+              </a:spcAft>
+              <a:buNone/>
+            </a:pPr>
+            <a:r>
+              <a:rPr sz="2100" b="0" lang="ja-JP">
+                <a:solidFill>
+                  <a:srgbClr val="303437"/>
+                </a:solidFill>
+                <a:latin typeface="Noto Sans"/>
+                <a:ea typeface="Noto Sans CJK JP"/>
+                <a:cs typeface="Noto Sans"/>
+              </a:rPr>
+              <a:t>表を抽出した縦棒や、違反件数・検査日が残る。自然な段落文以外の構造もある [1]。</a:t>
+            </a:r>
+          </a:p>
+        </p:txBody>
+      </p:sp>
+      <p:sp>
+        <p:nvSpPr>
+          <p:cNvPr id="8" name="TextBox 7"/>
+          <p:cNvSpPr txBox="1"/>
+          <p:nvPr/>
+        </p:nvSpPr>
+        <p:spPr>
+          <a:xfrm>
+            <a:off x="548640" y="4773168"/>
+            <a:ext cx="8046720" cy="164592"/>
+          </a:xfrm>
+          <a:prstGeom prst="rect">
+            <a:avLst/>
+          </a:prstGeom>
+          <a:noFill/>
+        </p:spPr>
+        <p:txBody>
+          <a:bodyPr wrap="square" lIns="0" rIns="0" tIns="0" bIns="0">
+            <a:spAutoFit/>
+          </a:bodyPr>
+          <a:lstStyle/>
+          <a:p>
+            <a:pPr algn="l">
+              <a:lnSpc>
+                <a:spcPct val="112000"/>
+              </a:lnSpc>
+              <a:spcAft>
+                <a:spcPts val="0"/>
+              </a:spcAft>
+              <a:buNone/>
+            </a:pPr>
+            <a:r>
+              <a:rPr sz="800" b="0" lang="ja-JP">
+                <a:solidFill>
+                  <a:srgbClr val="626669"/>
+                </a:solidFill>
+                <a:latin typeface="Noto Sans"/>
+                <a:ea typeface="Noto Sans CJK JP"/>
+                <a:cs typeface="Noto Sans"/>
+              </a:rPr>
+              <a:t>row 8 / &lt;urn:uuid:4ad1d60f-e986-44b4-8b58-e833a6dddba8&gt; / 786 GPT-2 tokens</a:t>
+            </a:r>
+          </a:p>
+        </p:txBody>
+      </p:sp>
+      <p:sp>
+        <p:nvSpPr>
+          <p:cNvPr id="9" name="TextBox 8"/>
+          <p:cNvSpPr txBox="1"/>
+          <p:nvPr/>
+        </p:nvSpPr>
+        <p:spPr>
+          <a:xfrm>
+            <a:off x="548640" y="4928616"/>
+            <a:ext cx="8046720" cy="155448"/>
+          </a:xfrm>
+          <a:prstGeom prst="rect">
+            <a:avLst/>
+          </a:prstGeom>
+          <a:noFill/>
+        </p:spPr>
+        <p:txBody>
+          <a:bodyPr wrap="none" lIns="0" rIns="0" tIns="0" bIns="0">
+            <a:spAutoFit/>
+          </a:bodyPr>
+          <a:lstStyle/>
+          <a:p>
+            <a:r>
+              <a:rPr sz="800" b="0" lang="ja-JP">
+                <a:solidFill>
+                  <a:srgbClr val="626669"/>
+                </a:solidFill>
+                <a:latin typeface="Noto Sans"/>
+                <a:ea typeface="Noto Sans CJK JP"/>
+                <a:cs typeface="Noto Sans"/>
+              </a:rPr>
+              <a:t>[1] FineWeb / sample-10BT  </a:t>
+            </a:r>
+            <a:r>
+              <a:rPr sz="800" b="0" lang="en-US">
+                <a:solidFill>
+                  <a:srgbClr val="626669"/>
+                </a:solidFill>
+                <a:latin typeface="Noto Sans"/>
+                <a:ea typeface="Noto Sans CJK JP"/>
+                <a:cs typeface="Noto Sans"/>
+                <a:hlinkClick r:id="rId2"/>
+              </a:rPr>
+              <a:t>https://huggingface.co/datasets/HuggingFaceFW/fineweb</a:t>
+            </a:r>
+          </a:p>
+        </p:txBody>
+      </p:sp>
+      <p:sp>
+        <p:nvSpPr>
+          <p:cNvPr id="10" name="TextBox 9"/>
+          <p:cNvSpPr txBox="1"/>
+          <p:nvPr/>
+        </p:nvSpPr>
+        <p:spPr>
+          <a:xfrm>
+            <a:off x="548640" y="4590288"/>
+            <a:ext cx="8046720" cy="164592"/>
+          </a:xfrm>
+          <a:prstGeom prst="rect">
+            <a:avLst/>
+          </a:prstGeom>
+          <a:noFill/>
+        </p:spPr>
+        <p:txBody>
+          <a:bodyPr wrap="square" lIns="0" rIns="0" tIns="0" bIns="0">
+            <a:spAutoFit/>
+          </a:bodyPr>
+          <a:lstStyle/>
+          <a:p>
+            <a:pPr algn="l">
+              <a:lnSpc>
+                <a:spcPct val="112000"/>
+              </a:lnSpc>
+              <a:spcAft>
+                <a:spcPts val="0"/>
+              </a:spcAft>
+              <a:buNone/>
+            </a:pPr>
+            <a:r>
+              <a:rPr sz="800" b="0" lang="ja-JP">
+                <a:solidFill>
+                  <a:srgbClr val="303437"/>
+                </a:solidFill>
+                <a:latin typeface="Noto Sans"/>
+                <a:ea typeface="Noto Sans CJK JP"/>
+                <a:cs typeface="Noto Sans"/>
+              </a:rPr>
+              <a:t/>
+            </a:r>
+            <a:r>
+              <a:rPr sz="800" b="0" lang="ja-JP">
+                <a:solidFill>
+                  <a:srgbClr val="626669"/>
+                </a:solidFill>
+                <a:latin typeface="Noto Sans"/>
+                <a:ea typeface="Noto Sans CJK JP"/>
+                <a:cs typeface="Noto Sans"/>
+              </a:rPr>
+              <a:t>元ページ  </a:t>
+            </a:r>
+            <a:r>
+              <a:rPr sz="800" b="0" lang="ja-JP">
+                <a:solidFill>
+                  <a:srgbClr val="626669"/>
+                </a:solidFill>
+                <a:latin typeface="Noto Sans"/>
+                <a:ea typeface="Noto Sans CJK JP"/>
+                <a:cs typeface="Noto Sans"/>
+                <a:hlinkClick r:id="rId3"/>
+              </a:rPr>
+              <a:t>http://www.healthspace.com/Clients/VDH/Fairfax/Fairfax_Website.nsf/Food-InspectionDetails?OpenView&amp;R…</a:t>
             </a:r>
           </a:p>
         </p:txBody>
@@ -29265,7 +29773,7 @@
                 <a:ea typeface="Noto Sans CJK JP"/>
                 <a:cs typeface="Noto Sans"/>
               </a:rPr>
-              <a:t>追加例6：飲食店の衛生検査記録</a:t>
+              <a:t>追加例7：アトリエのイベント案内</a:t>
             </a:r>
           </a:p>
         </p:txBody>
@@ -29440,7 +29948,7 @@
                 <a:ea typeface="Noto Sans CJK JP"/>
                 <a:cs typeface="Noto Sans"/>
               </a:rPr>
-              <a:t>|Facility Type:||Full Service Restaurant|</a:t>
+              <a:t>News of the Week</a:t>
             </a:r>
           </a:p>
           <a:p>
@@ -29462,7 +29970,7 @@
                 <a:ea typeface="Noto Sans CJK JP"/>
                 <a:cs typeface="Noto Sans"/>
               </a:rPr>
-              <a:t>|Inspection date:||March 27, 2012|</a:t>
+              <a:t>Barrie Spring Studio Tour</a:t>
             </a:r>
           </a:p>
           <a:p>
@@ -29484,7 +29992,7 @@
                 <a:ea typeface="Noto Sans CJK JP"/>
                 <a:cs typeface="Noto Sans"/>
               </a:rPr>
-              <a:t>|Number of critical violations:||3|</a:t>
+              <a:t>April 27th &amp; 28th</a:t>
             </a:r>
           </a:p>
           <a:p>
@@ -29506,7 +30014,7 @@
                 <a:ea typeface="Noto Sans CJK JP"/>
                 <a:cs typeface="Noto Sans"/>
               </a:rPr>
-              <a:t>|Number of non-critical violations:||3|</a:t>
+              <a:t>10:00 til 4:00 pm</a:t>
             </a:r>
           </a:p>
         </p:txBody>
@@ -29551,7 +30059,7 @@
                 <a:ea typeface="Noto Sans CJK JP"/>
                 <a:cs typeface="Noto Sans"/>
               </a:rPr>
-              <a:t>表を抽出した縦棒や、違反件数・検査日が残る。自然な段落文以外の構造もある [1]。</a:t>
+              <a:t>日時・場所・販売の案内を含む。局地的・時限的な情報もWebデータの一部になる [1]。</a:t>
             </a:r>
           </a:p>
         </p:txBody>
@@ -29596,7 +30104,7 @@
                 <a:ea typeface="Noto Sans CJK JP"/>
                 <a:cs typeface="Noto Sans"/>
               </a:rPr>
-              <a:t>row 8 / &lt;urn:uuid:4ad1d60f-e986-44b4-8b58-e833a6dddba8&gt; / 786 GPT-2 tokens</a:t>
+              <a:t>row 9 / &lt;urn:uuid:7bc4fe2c-c860-45d0-91f4-7cb5d3800e66&gt; / 415 GPT-2 tokens</a:t>
             </a:r>
           </a:p>
         </p:txBody>
@@ -29712,7 +30220,7 @@
                 <a:cs typeface="Noto Sans"/>
                 <a:hlinkClick r:id="rId3"/>
               </a:rPr>
-              <a:t>http://www.healthspace.com/Clients/VDH/Fairfax/Fairfax_Website.nsf/Food-InspectionDetails?OpenView&amp;R…</a:t>
+              <a:t>http://www.jillpricestudios.ca/artist/website/size/big</a:t>
             </a:r>
           </a:p>
         </p:txBody>
@@ -29773,7 +30281,471 @@
                 <a:ea typeface="Noto Sans CJK JP"/>
                 <a:cs typeface="Noto Sans"/>
               </a:rPr>
-              <a:t>追加例7：アトリエのイベント案内</a:t>
+              <a:t>追加例8：医療費不正への注意喚起</a:t>
+            </a:r>
+          </a:p>
+        </p:txBody>
+      </p:sp>
+      <p:sp>
+        <p:nvSpPr>
+          <p:cNvPr id="3" name="Title 2"/>
+          <p:cNvSpPr>
+            <a:spLocks noGrp="1"/>
+          </p:cNvSpPr>
+          <p:nvPr>
+            <p:ph type="title" idx="2"/>
+          </p:nvPr>
+        </p:nvSpPr>
+        <p:spPr/>
+        <p:txBody>
+          <a:bodyPr wrap="square" lIns="0" rIns="0" tIns="0" bIns="0" anchor="ctr"/>
+          <a:lstStyle/>
+          <a:p>
+            <a:pPr algn="l">
+              <a:lnSpc>
+                <a:spcPct val="100000"/>
+              </a:lnSpc>
+              <a:spcBef>
+                <a:spcPts val="0"/>
+              </a:spcBef>
+              <a:spcAft>
+                <a:spcPts val="0"/>
+              </a:spcAft>
+              <a:buNone/>
+            </a:pPr>
+            <a:r>
+              <a:rPr sz="1400" b="1" lang="ja-JP">
+                <a:solidFill>
+                  <a:srgbClr val="FFFEF8"/>
+                </a:solidFill>
+                <a:latin typeface="Noto Sans"/>
+                <a:ea typeface="Noto Sans CJK JP"/>
+                <a:cs typeface="Noto Sans"/>
+              </a:rPr>
+              <a:t>Appendix 2. 収録されたWeb文書の追加例</a:t>
+            </a:r>
+          </a:p>
+        </p:txBody>
+      </p:sp>
+      <p:sp>
+        <p:nvSpPr>
+          <p:cNvPr id="4" name="TextBox 3"/>
+          <p:cNvSpPr txBox="1"/>
+          <p:nvPr/>
+        </p:nvSpPr>
+        <p:spPr>
+          <a:xfrm>
+            <a:off x="548640" y="1399032"/>
+            <a:ext cx="8046720" cy="210312"/>
+          </a:xfrm>
+          <a:prstGeom prst="rect">
+            <a:avLst/>
+          </a:prstGeom>
+          <a:noFill/>
+        </p:spPr>
+        <p:txBody>
+          <a:bodyPr wrap="square" lIns="0" rIns="0" tIns="0" bIns="0">
+            <a:spAutoFit/>
+          </a:bodyPr>
+          <a:lstStyle/>
+          <a:p>
+            <a:pPr algn="l">
+              <a:lnSpc>
+                <a:spcPct val="112000"/>
+              </a:lnSpc>
+              <a:spcAft>
+                <a:spcPts val="0"/>
+              </a:spcAft>
+              <a:buNone/>
+            </a:pPr>
+            <a:r>
+              <a:rPr sz="1200" b="0" lang="ja-JP">
+                <a:solidFill>
+                  <a:srgbClr val="626669"/>
+                </a:solidFill>
+                <a:latin typeface="Noto Sans"/>
+                <a:ea typeface="Noto Sans CJK JP"/>
+                <a:cs typeface="Noto Sans"/>
+              </a:rPr>
+              <a:t>配布テキストからの抜粋（英語）</a:t>
+            </a:r>
+          </a:p>
+        </p:txBody>
+      </p:sp>
+      <p:sp>
+        <p:nvSpPr>
+          <p:cNvPr id="5" name="Rectangle 4"/>
+          <p:cNvSpPr/>
+          <p:nvPr/>
+        </p:nvSpPr>
+        <p:spPr>
+          <a:xfrm>
+            <a:off x="548640" y="1771194"/>
+            <a:ext cx="8046720" cy="1742871"/>
+          </a:xfrm>
+          <a:prstGeom prst="rect">
+            <a:avLst/>
+          </a:prstGeom>
+          <a:solidFill>
+            <a:srgbClr val="EBEDEB"/>
+          </a:solidFill>
+          <a:ln>
+            <a:noFill/>
+          </a:ln>
+          <a:effectLst/>
+        </p:spPr>
+        <p:style>
+          <a:lnRef idx="1">
+            <a:schemeClr val="accent1"/>
+          </a:lnRef>
+          <a:fillRef idx="3">
+            <a:schemeClr val="accent1"/>
+          </a:fillRef>
+          <a:effectRef idx="0">
+            <a:schemeClr val="accent1"/>
+          </a:effectRef>
+          <a:fontRef idx="minor">
+            <a:schemeClr val="lt1"/>
+          </a:fontRef>
+        </p:style>
+        <p:txBody>
+          <a:bodyPr rtlCol="0" anchor="ctr"/>
+          <a:lstStyle/>
+          <a:p>
+            <a:pPr algn="ctr"/>
+          </a:p>
+        </p:txBody>
+      </p:sp>
+      <p:sp>
+        <p:nvSpPr>
+          <p:cNvPr id="6" name="TextBox 5"/>
+          <p:cNvSpPr txBox="1"/>
+          <p:nvPr/>
+        </p:nvSpPr>
+        <p:spPr>
+          <a:xfrm>
+            <a:off x="722376" y="1856231"/>
+            <a:ext cx="7699248" cy="1828800"/>
+          </a:xfrm>
+          <a:prstGeom prst="rect">
+            <a:avLst/>
+          </a:prstGeom>
+          <a:noFill/>
+        </p:spPr>
+        <p:txBody>
+          <a:bodyPr wrap="square" lIns="0" rIns="0" tIns="0" bIns="0">
+            <a:spAutoFit/>
+          </a:bodyPr>
+          <a:lstStyle/>
+          <a:p>
+            <a:pPr algn="l">
+              <a:lnSpc>
+                <a:spcPct val="112000"/>
+              </a:lnSpc>
+              <a:spcAft>
+                <a:spcPts val="0"/>
+              </a:spcAft>
+              <a:buNone/>
+            </a:pPr>
+            <a:r>
+              <a:rPr sz="1800" b="0" lang="en-US">
+                <a:solidFill>
+                  <a:srgbClr val="303437"/>
+                </a:solidFill>
+                <a:latin typeface="Noto Sans"/>
+                <a:ea typeface="Noto Sans CJK JP"/>
+                <a:cs typeface="Noto Sans"/>
+              </a:rPr>
+              <a:t>Tips for Preventing Medicare Fraud</a:t>
+            </a:r>
+          </a:p>
+          <a:p>
+            <a:pPr algn="l">
+              <a:lnSpc>
+                <a:spcPct val="112000"/>
+              </a:lnSpc>
+              <a:spcAft>
+                <a:spcPts val="0"/>
+              </a:spcAft>
+              <a:buNone/>
+            </a:pPr>
+            <a:r>
+              <a:rPr sz="1800" b="0" lang="en-US">
+                <a:solidFill>
+                  <a:srgbClr val="303437"/>
+                </a:solidFill>
+                <a:latin typeface="Noto Sans"/>
+                <a:ea typeface="Noto Sans CJK JP"/>
+                <a:cs typeface="Noto Sans"/>
+              </a:rPr>
+              <a:t>The Department of Health and Human Services (HHS) Office of the Inspector General (OIG) has created a new web site to provide tips for preventing Medicare fraud and medical identity theft. See HHS news release.</a:t>
+            </a:r>
+          </a:p>
+        </p:txBody>
+      </p:sp>
+      <p:sp>
+        <p:nvSpPr>
+          <p:cNvPr id="7" name="TextBox 6"/>
+          <p:cNvSpPr txBox="1"/>
+          <p:nvPr/>
+        </p:nvSpPr>
+        <p:spPr>
+          <a:xfrm>
+            <a:off x="548640" y="3691866"/>
+            <a:ext cx="8046720" cy="868680"/>
+          </a:xfrm>
+          <a:prstGeom prst="rect">
+            <a:avLst/>
+          </a:prstGeom>
+          <a:noFill/>
+        </p:spPr>
+        <p:txBody>
+          <a:bodyPr wrap="square" lIns="0" rIns="0" tIns="0" bIns="0">
+            <a:spAutoFit/>
+          </a:bodyPr>
+          <a:lstStyle/>
+          <a:p>
+            <a:pPr algn="l">
+              <a:lnSpc>
+                <a:spcPct val="112000"/>
+              </a:lnSpc>
+              <a:spcAft>
+                <a:spcPts val="0"/>
+              </a:spcAft>
+              <a:buNone/>
+            </a:pPr>
+            <a:r>
+              <a:rPr sz="2100" b="0" lang="ja-JP">
+                <a:solidFill>
+                  <a:srgbClr val="303437"/>
+                </a:solidFill>
+                <a:latin typeface="Noto Sans"/>
+                <a:ea typeface="Noto Sans CJK JP"/>
+                <a:cs typeface="Noto Sans"/>
+              </a:rPr>
+              <a:t>行政の公開情報を紹介する短文。リンク先への案内が主な内容になる文書もある [1]。</a:t>
+            </a:r>
+          </a:p>
+        </p:txBody>
+      </p:sp>
+      <p:sp>
+        <p:nvSpPr>
+          <p:cNvPr id="8" name="TextBox 7"/>
+          <p:cNvSpPr txBox="1"/>
+          <p:nvPr/>
+        </p:nvSpPr>
+        <p:spPr>
+          <a:xfrm>
+            <a:off x="548640" y="4773168"/>
+            <a:ext cx="8046720" cy="164592"/>
+          </a:xfrm>
+          <a:prstGeom prst="rect">
+            <a:avLst/>
+          </a:prstGeom>
+          <a:noFill/>
+        </p:spPr>
+        <p:txBody>
+          <a:bodyPr wrap="square" lIns="0" rIns="0" tIns="0" bIns="0">
+            <a:spAutoFit/>
+          </a:bodyPr>
+          <a:lstStyle/>
+          <a:p>
+            <a:pPr algn="l">
+              <a:lnSpc>
+                <a:spcPct val="112000"/>
+              </a:lnSpc>
+              <a:spcAft>
+                <a:spcPts val="0"/>
+              </a:spcAft>
+              <a:buNone/>
+            </a:pPr>
+            <a:r>
+              <a:rPr sz="800" b="0" lang="ja-JP">
+                <a:solidFill>
+                  <a:srgbClr val="626669"/>
+                </a:solidFill>
+                <a:latin typeface="Noto Sans"/>
+                <a:ea typeface="Noto Sans CJK JP"/>
+                <a:cs typeface="Noto Sans"/>
+              </a:rPr>
+              <a:t>row 19 / &lt;urn:uuid:957006ac-2ad8-43d0-8919-52d5a4373d10&gt; / 91 GPT-2 tokens</a:t>
+            </a:r>
+          </a:p>
+        </p:txBody>
+      </p:sp>
+      <p:sp>
+        <p:nvSpPr>
+          <p:cNvPr id="9" name="TextBox 8"/>
+          <p:cNvSpPr txBox="1"/>
+          <p:nvPr/>
+        </p:nvSpPr>
+        <p:spPr>
+          <a:xfrm>
+            <a:off x="548640" y="4928616"/>
+            <a:ext cx="8046720" cy="155448"/>
+          </a:xfrm>
+          <a:prstGeom prst="rect">
+            <a:avLst/>
+          </a:prstGeom>
+          <a:noFill/>
+        </p:spPr>
+        <p:txBody>
+          <a:bodyPr wrap="none" lIns="0" rIns="0" tIns="0" bIns="0">
+            <a:spAutoFit/>
+          </a:bodyPr>
+          <a:lstStyle/>
+          <a:p>
+            <a:r>
+              <a:rPr sz="800" b="0" lang="ja-JP">
+                <a:solidFill>
+                  <a:srgbClr val="626669"/>
+                </a:solidFill>
+                <a:latin typeface="Noto Sans"/>
+                <a:ea typeface="Noto Sans CJK JP"/>
+                <a:cs typeface="Noto Sans"/>
+              </a:rPr>
+              <a:t>[1] FineWeb / sample-10BT  </a:t>
+            </a:r>
+            <a:r>
+              <a:rPr sz="800" b="0" lang="en-US">
+                <a:solidFill>
+                  <a:srgbClr val="626669"/>
+                </a:solidFill>
+                <a:latin typeface="Noto Sans"/>
+                <a:ea typeface="Noto Sans CJK JP"/>
+                <a:cs typeface="Noto Sans"/>
+                <a:hlinkClick r:id="rId2"/>
+              </a:rPr>
+              <a:t>https://huggingface.co/datasets/HuggingFaceFW/fineweb</a:t>
+            </a:r>
+          </a:p>
+        </p:txBody>
+      </p:sp>
+      <p:sp>
+        <p:nvSpPr>
+          <p:cNvPr id="10" name="TextBox 9"/>
+          <p:cNvSpPr txBox="1"/>
+          <p:nvPr/>
+        </p:nvSpPr>
+        <p:spPr>
+          <a:xfrm>
+            <a:off x="548640" y="4590288"/>
+            <a:ext cx="8046720" cy="164592"/>
+          </a:xfrm>
+          <a:prstGeom prst="rect">
+            <a:avLst/>
+          </a:prstGeom>
+          <a:noFill/>
+        </p:spPr>
+        <p:txBody>
+          <a:bodyPr wrap="square" lIns="0" rIns="0" tIns="0" bIns="0">
+            <a:spAutoFit/>
+          </a:bodyPr>
+          <a:lstStyle/>
+          <a:p>
+            <a:pPr algn="l">
+              <a:lnSpc>
+                <a:spcPct val="112000"/>
+              </a:lnSpc>
+              <a:spcAft>
+                <a:spcPts val="0"/>
+              </a:spcAft>
+              <a:buNone/>
+            </a:pPr>
+            <a:r>
+              <a:rPr sz="800" b="0" lang="ja-JP">
+                <a:solidFill>
+                  <a:srgbClr val="303437"/>
+                </a:solidFill>
+                <a:latin typeface="Noto Sans"/>
+                <a:ea typeface="Noto Sans CJK JP"/>
+                <a:cs typeface="Noto Sans"/>
+              </a:rPr>
+              <a:t/>
+            </a:r>
+            <a:r>
+              <a:rPr sz="800" b="0" lang="ja-JP">
+                <a:solidFill>
+                  <a:srgbClr val="626669"/>
+                </a:solidFill>
+                <a:latin typeface="Noto Sans"/>
+                <a:ea typeface="Noto Sans CJK JP"/>
+                <a:cs typeface="Noto Sans"/>
+              </a:rPr>
+              <a:t>元ページ  </a:t>
+            </a:r>
+            <a:r>
+              <a:rPr sz="800" b="0" lang="ja-JP">
+                <a:solidFill>
+                  <a:srgbClr val="626669"/>
+                </a:solidFill>
+                <a:latin typeface="Noto Sans"/>
+                <a:ea typeface="Noto Sans CJK JP"/>
+                <a:cs typeface="Noto Sans"/>
+                <a:hlinkClick r:id="rId3"/>
+              </a:rPr>
+              <a:t>http://aota.org/Consumers/Ethics/Fraud.aspx</a:t>
+            </a:r>
+          </a:p>
+        </p:txBody>
+      </p:sp>
+    </p:spTree>
+  </p:cSld>
+  <p:clrMapOvr>
+    <a:masterClrMapping/>
+  </p:clrMapOvr>
+</p:sld>
+</file>
+
+<file path=ppt/slides/slide62.xml><?xml version="1.0" encoding="utf-8"?>
+<p:sld xmlns:a="http://schemas.openxmlformats.org/drawingml/2006/main" xmlns:p="http://schemas.openxmlformats.org/presentationml/2006/main" xmlns:r="http://schemas.openxmlformats.org/officeDocument/2006/relationships">
+  <p:cSld>
+    <p:spTree>
+      <p:nvGrpSpPr>
+        <p:cNvPr id="1" name=""/>
+        <p:cNvGrpSpPr/>
+        <p:nvPr/>
+      </p:nvGrpSpPr>
+      <p:grpSpPr/>
+      <p:sp>
+        <p:nvSpPr>
+          <p:cNvPr id="2" name="Title 1"/>
+          <p:cNvSpPr>
+            <a:spLocks noGrp="1"/>
+          </p:cNvSpPr>
+          <p:nvPr>
+            <p:ph type="title"/>
+          </p:nvPr>
+        </p:nvSpPr>
+        <p:spPr>
+          <a:xfrm>
+            <a:off x="548640" y="786384"/>
+            <a:ext cx="8046720" cy="502920"/>
+          </a:xfrm>
+        </p:spPr>
+        <p:txBody>
+          <a:bodyPr wrap="square" lIns="0" rIns="0" tIns="0" bIns="0"/>
+          <a:lstStyle/>
+          <a:p>
+            <a:pPr algn="l">
+              <a:lnSpc>
+                <a:spcPct val="112000"/>
+              </a:lnSpc>
+              <a:spcAft>
+                <a:spcPts val="0"/>
+              </a:spcAft>
+              <a:buNone/>
+            </a:pPr>
+            <a:r>
+              <a:rPr sz="2800" b="1" lang="ja-JP">
+                <a:solidFill>
+                  <a:srgbClr val="303437"/>
+                </a:solidFill>
+                <a:latin typeface="Noto Sans"/>
+                <a:ea typeface="Noto Sans CJK JP"/>
+                <a:cs typeface="Noto Sans"/>
+              </a:rPr>
+              <a:t>追加例9：Perlのプロファイラの不具合調査</a:t>
             </a:r>
           </a:p>
         </p:txBody>
@@ -29948,7 +30920,7 @@
                 <a:ea typeface="Noto Sans CJK JP"/>
                 <a:cs typeface="Noto Sans"/>
               </a:rPr>
-              <a:t>News of the Week</a:t>
+              <a:t>I’ve a new release of NYTProf ready to upload but I’m stuck.</a:t>
             </a:r>
           </a:p>
           <a:p>
@@ -29970,7 +30942,7 @@
                 <a:ea typeface="Noto Sans CJK JP"/>
                 <a:cs typeface="Noto Sans"/>
               </a:rPr>
-              <a:t>Barrie Spring Studio Tour</a:t>
+              <a:t>The CPAN Testers service is reporting a failure on a number of systems but I can’t reproduce it locally or work out the cause.</a:t>
             </a:r>
           </a:p>
           <a:p>
@@ -29992,29 +30964,7 @@
                 <a:ea typeface="Noto Sans CJK JP"/>
                 <a:cs typeface="Noto Sans"/>
               </a:rPr>
-              <a:t>April 27th &amp; 28th</a:t>
-            </a:r>
-          </a:p>
-          <a:p>
-            <a:pPr algn="l">
-              <a:lnSpc>
-                <a:spcPct val="112000"/>
-              </a:lnSpc>
-              <a:spcAft>
-                <a:spcPts val="0"/>
-              </a:spcAft>
-              <a:buNone/>
-            </a:pPr>
-            <a:r>
-              <a:rPr sz="1800" b="0" lang="en-US">
-                <a:solidFill>
-                  <a:srgbClr val="303437"/>
-                </a:solidFill>
-                <a:latin typeface="Noto Sans"/>
-                <a:ea typeface="Noto Sans CJK JP"/>
-                <a:cs typeface="Noto Sans"/>
-              </a:rPr>
-              <a:t>10:00 til 4:00 pm</a:t>
+              <a:t>Can you reproduce the failure with Devel::NYTProf 2.07_94?</a:t>
             </a:r>
           </a:p>
         </p:txBody>
@@ -30059,7 +31009,7 @@
                 <a:ea typeface="Noto Sans CJK JP"/>
                 <a:cs typeface="Noto Sans"/>
               </a:rPr>
-              <a:t>日時・場所・販売の案内を含む。局地的・時限的な情報もWebデータの一部になる [1]。</a:t>
+              <a:t>プログラムのバージョン、再現条件、調査への協力依頼を含む技術的な文章 [1]。</a:t>
             </a:r>
           </a:p>
         </p:txBody>
@@ -30104,7 +31054,7 @@
                 <a:ea typeface="Noto Sans CJK JP"/>
                 <a:cs typeface="Noto Sans"/>
               </a:rPr>
-              <a:t>row 9 / &lt;urn:uuid:7bc4fe2c-c860-45d0-91f4-7cb5d3800e66&gt; / 415 GPT-2 tokens</a:t>
+              <a:t>row 21 / &lt;urn:uuid:095340b9-8a67-45ac-afb3-250bec8e3efd&gt; / 351 GPT-2 tokens</a:t>
             </a:r>
           </a:p>
         </p:txBody>
@@ -30220,471 +31170,7 @@
                 <a:cs typeface="Noto Sans"/>
                 <a:hlinkClick r:id="rId3"/>
               </a:rPr>
-              <a:t>http://www.jillpricestudios.ca/artist/website/size/big</a:t>
-            </a:r>
-          </a:p>
-        </p:txBody>
-      </p:sp>
-    </p:spTree>
-  </p:cSld>
-  <p:clrMapOvr>
-    <a:masterClrMapping/>
-  </p:clrMapOvr>
-</p:sld>
-</file>
-
-<file path=ppt/slides/slide62.xml><?xml version="1.0" encoding="utf-8"?>
-<p:sld xmlns:a="http://schemas.openxmlformats.org/drawingml/2006/main" xmlns:p="http://schemas.openxmlformats.org/presentationml/2006/main" xmlns:r="http://schemas.openxmlformats.org/officeDocument/2006/relationships">
-  <p:cSld>
-    <p:spTree>
-      <p:nvGrpSpPr>
-        <p:cNvPr id="1" name=""/>
-        <p:cNvGrpSpPr/>
-        <p:nvPr/>
-      </p:nvGrpSpPr>
-      <p:grpSpPr/>
-      <p:sp>
-        <p:nvSpPr>
-          <p:cNvPr id="2" name="Title 1"/>
-          <p:cNvSpPr>
-            <a:spLocks noGrp="1"/>
-          </p:cNvSpPr>
-          <p:nvPr>
-            <p:ph type="title"/>
-          </p:nvPr>
-        </p:nvSpPr>
-        <p:spPr>
-          <a:xfrm>
-            <a:off x="548640" y="786384"/>
-            <a:ext cx="8046720" cy="502920"/>
-          </a:xfrm>
-        </p:spPr>
-        <p:txBody>
-          <a:bodyPr wrap="square" lIns="0" rIns="0" tIns="0" bIns="0"/>
-          <a:lstStyle/>
-          <a:p>
-            <a:pPr algn="l">
-              <a:lnSpc>
-                <a:spcPct val="112000"/>
-              </a:lnSpc>
-              <a:spcAft>
-                <a:spcPts val="0"/>
-              </a:spcAft>
-              <a:buNone/>
-            </a:pPr>
-            <a:r>
-              <a:rPr sz="2800" b="1" lang="ja-JP">
-                <a:solidFill>
-                  <a:srgbClr val="303437"/>
-                </a:solidFill>
-                <a:latin typeface="Noto Sans"/>
-                <a:ea typeface="Noto Sans CJK JP"/>
-                <a:cs typeface="Noto Sans"/>
-              </a:rPr>
-              <a:t>追加例8：医療費不正への注意喚起</a:t>
-            </a:r>
-          </a:p>
-        </p:txBody>
-      </p:sp>
-      <p:sp>
-        <p:nvSpPr>
-          <p:cNvPr id="3" name="Title 2"/>
-          <p:cNvSpPr>
-            <a:spLocks noGrp="1"/>
-          </p:cNvSpPr>
-          <p:nvPr>
-            <p:ph type="title" idx="2"/>
-          </p:nvPr>
-        </p:nvSpPr>
-        <p:spPr/>
-        <p:txBody>
-          <a:bodyPr wrap="square" lIns="0" rIns="0" tIns="0" bIns="0" anchor="ctr"/>
-          <a:lstStyle/>
-          <a:p>
-            <a:pPr algn="l">
-              <a:lnSpc>
-                <a:spcPct val="100000"/>
-              </a:lnSpc>
-              <a:spcBef>
-                <a:spcPts val="0"/>
-              </a:spcBef>
-              <a:spcAft>
-                <a:spcPts val="0"/>
-              </a:spcAft>
-              <a:buNone/>
-            </a:pPr>
-            <a:r>
-              <a:rPr sz="1400" b="1" lang="ja-JP">
-                <a:solidFill>
-                  <a:srgbClr val="FFFEF8"/>
-                </a:solidFill>
-                <a:latin typeface="Noto Sans"/>
-                <a:ea typeface="Noto Sans CJK JP"/>
-                <a:cs typeface="Noto Sans"/>
-              </a:rPr>
-              <a:t>Appendix 2. 収録されたWeb文書の追加例</a:t>
-            </a:r>
-          </a:p>
-        </p:txBody>
-      </p:sp>
-      <p:sp>
-        <p:nvSpPr>
-          <p:cNvPr id="4" name="TextBox 3"/>
-          <p:cNvSpPr txBox="1"/>
-          <p:nvPr/>
-        </p:nvSpPr>
-        <p:spPr>
-          <a:xfrm>
-            <a:off x="548640" y="1399032"/>
-            <a:ext cx="8046720" cy="210312"/>
-          </a:xfrm>
-          <a:prstGeom prst="rect">
-            <a:avLst/>
-          </a:prstGeom>
-          <a:noFill/>
-        </p:spPr>
-        <p:txBody>
-          <a:bodyPr wrap="square" lIns="0" rIns="0" tIns="0" bIns="0">
-            <a:spAutoFit/>
-          </a:bodyPr>
-          <a:lstStyle/>
-          <a:p>
-            <a:pPr algn="l">
-              <a:lnSpc>
-                <a:spcPct val="112000"/>
-              </a:lnSpc>
-              <a:spcAft>
-                <a:spcPts val="0"/>
-              </a:spcAft>
-              <a:buNone/>
-            </a:pPr>
-            <a:r>
-              <a:rPr sz="1200" b="0" lang="ja-JP">
-                <a:solidFill>
-                  <a:srgbClr val="626669"/>
-                </a:solidFill>
-                <a:latin typeface="Noto Sans"/>
-                <a:ea typeface="Noto Sans CJK JP"/>
-                <a:cs typeface="Noto Sans"/>
-              </a:rPr>
-              <a:t>配布テキストからの抜粋（英語）</a:t>
-            </a:r>
-          </a:p>
-        </p:txBody>
-      </p:sp>
-      <p:sp>
-        <p:nvSpPr>
-          <p:cNvPr id="5" name="Rectangle 4"/>
-          <p:cNvSpPr/>
-          <p:nvPr/>
-        </p:nvSpPr>
-        <p:spPr>
-          <a:xfrm>
-            <a:off x="548640" y="1771194"/>
-            <a:ext cx="8046720" cy="1742871"/>
-          </a:xfrm>
-          <a:prstGeom prst="rect">
-            <a:avLst/>
-          </a:prstGeom>
-          <a:solidFill>
-            <a:srgbClr val="EBEDEB"/>
-          </a:solidFill>
-          <a:ln>
-            <a:noFill/>
-          </a:ln>
-          <a:effectLst/>
-        </p:spPr>
-        <p:style>
-          <a:lnRef idx="1">
-            <a:schemeClr val="accent1"/>
-          </a:lnRef>
-          <a:fillRef idx="3">
-            <a:schemeClr val="accent1"/>
-          </a:fillRef>
-          <a:effectRef idx="0">
-            <a:schemeClr val="accent1"/>
-          </a:effectRef>
-          <a:fontRef idx="minor">
-            <a:schemeClr val="lt1"/>
-          </a:fontRef>
-        </p:style>
-        <p:txBody>
-          <a:bodyPr rtlCol="0" anchor="ctr"/>
-          <a:lstStyle/>
-          <a:p>
-            <a:pPr algn="ctr"/>
-          </a:p>
-        </p:txBody>
-      </p:sp>
-      <p:sp>
-        <p:nvSpPr>
-          <p:cNvPr id="6" name="TextBox 5"/>
-          <p:cNvSpPr txBox="1"/>
-          <p:nvPr/>
-        </p:nvSpPr>
-        <p:spPr>
-          <a:xfrm>
-            <a:off x="722376" y="1856231"/>
-            <a:ext cx="7699248" cy="1828800"/>
-          </a:xfrm>
-          <a:prstGeom prst="rect">
-            <a:avLst/>
-          </a:prstGeom>
-          <a:noFill/>
-        </p:spPr>
-        <p:txBody>
-          <a:bodyPr wrap="square" lIns="0" rIns="0" tIns="0" bIns="0">
-            <a:spAutoFit/>
-          </a:bodyPr>
-          <a:lstStyle/>
-          <a:p>
-            <a:pPr algn="l">
-              <a:lnSpc>
-                <a:spcPct val="112000"/>
-              </a:lnSpc>
-              <a:spcAft>
-                <a:spcPts val="0"/>
-              </a:spcAft>
-              <a:buNone/>
-            </a:pPr>
-            <a:r>
-              <a:rPr sz="1800" b="0" lang="en-US">
-                <a:solidFill>
-                  <a:srgbClr val="303437"/>
-                </a:solidFill>
-                <a:latin typeface="Noto Sans"/>
-                <a:ea typeface="Noto Sans CJK JP"/>
-                <a:cs typeface="Noto Sans"/>
-              </a:rPr>
-              <a:t>Tips for Preventing Medicare Fraud</a:t>
-            </a:r>
-          </a:p>
-          <a:p>
-            <a:pPr algn="l">
-              <a:lnSpc>
-                <a:spcPct val="112000"/>
-              </a:lnSpc>
-              <a:spcAft>
-                <a:spcPts val="0"/>
-              </a:spcAft>
-              <a:buNone/>
-            </a:pPr>
-            <a:r>
-              <a:rPr sz="1800" b="0" lang="en-US">
-                <a:solidFill>
-                  <a:srgbClr val="303437"/>
-                </a:solidFill>
-                <a:latin typeface="Noto Sans"/>
-                <a:ea typeface="Noto Sans CJK JP"/>
-                <a:cs typeface="Noto Sans"/>
-              </a:rPr>
-              <a:t>The Department of Health and Human Services (HHS) Office of the Inspector General (OIG) has created a new web site to provide tips for preventing Medicare fraud and medical identity theft. See HHS news release.</a:t>
-            </a:r>
-          </a:p>
-        </p:txBody>
-      </p:sp>
-      <p:sp>
-        <p:nvSpPr>
-          <p:cNvPr id="7" name="TextBox 6"/>
-          <p:cNvSpPr txBox="1"/>
-          <p:nvPr/>
-        </p:nvSpPr>
-        <p:spPr>
-          <a:xfrm>
-            <a:off x="548640" y="3691866"/>
-            <a:ext cx="8046720" cy="868680"/>
-          </a:xfrm>
-          <a:prstGeom prst="rect">
-            <a:avLst/>
-          </a:prstGeom>
-          <a:noFill/>
-        </p:spPr>
-        <p:txBody>
-          <a:bodyPr wrap="square" lIns="0" rIns="0" tIns="0" bIns="0">
-            <a:spAutoFit/>
-          </a:bodyPr>
-          <a:lstStyle/>
-          <a:p>
-            <a:pPr algn="l">
-              <a:lnSpc>
-                <a:spcPct val="112000"/>
-              </a:lnSpc>
-              <a:spcAft>
-                <a:spcPts val="0"/>
-              </a:spcAft>
-              <a:buNone/>
-            </a:pPr>
-            <a:r>
-              <a:rPr sz="2100" b="0" lang="ja-JP">
-                <a:solidFill>
-                  <a:srgbClr val="303437"/>
-                </a:solidFill>
-                <a:latin typeface="Noto Sans"/>
-                <a:ea typeface="Noto Sans CJK JP"/>
-                <a:cs typeface="Noto Sans"/>
-              </a:rPr>
-              <a:t>行政の公開情報を紹介する短文。リンク先への案内が主な内容になる文書もある [1]。</a:t>
-            </a:r>
-          </a:p>
-        </p:txBody>
-      </p:sp>
-      <p:sp>
-        <p:nvSpPr>
-          <p:cNvPr id="8" name="TextBox 7"/>
-          <p:cNvSpPr txBox="1"/>
-          <p:nvPr/>
-        </p:nvSpPr>
-        <p:spPr>
-          <a:xfrm>
-            <a:off x="548640" y="4773168"/>
-            <a:ext cx="8046720" cy="164592"/>
-          </a:xfrm>
-          <a:prstGeom prst="rect">
-            <a:avLst/>
-          </a:prstGeom>
-          <a:noFill/>
-        </p:spPr>
-        <p:txBody>
-          <a:bodyPr wrap="square" lIns="0" rIns="0" tIns="0" bIns="0">
-            <a:spAutoFit/>
-          </a:bodyPr>
-          <a:lstStyle/>
-          <a:p>
-            <a:pPr algn="l">
-              <a:lnSpc>
-                <a:spcPct val="112000"/>
-              </a:lnSpc>
-              <a:spcAft>
-                <a:spcPts val="0"/>
-              </a:spcAft>
-              <a:buNone/>
-            </a:pPr>
-            <a:r>
-              <a:rPr sz="800" b="0" lang="ja-JP">
-                <a:solidFill>
-                  <a:srgbClr val="626669"/>
-                </a:solidFill>
-                <a:latin typeface="Noto Sans"/>
-                <a:ea typeface="Noto Sans CJK JP"/>
-                <a:cs typeface="Noto Sans"/>
-              </a:rPr>
-              <a:t>row 19 / &lt;urn:uuid:957006ac-2ad8-43d0-8919-52d5a4373d10&gt; / 91 GPT-2 tokens</a:t>
-            </a:r>
-          </a:p>
-        </p:txBody>
-      </p:sp>
-      <p:sp>
-        <p:nvSpPr>
-          <p:cNvPr id="9" name="TextBox 8"/>
-          <p:cNvSpPr txBox="1"/>
-          <p:nvPr/>
-        </p:nvSpPr>
-        <p:spPr>
-          <a:xfrm>
-            <a:off x="548640" y="4928616"/>
-            <a:ext cx="8046720" cy="155448"/>
-          </a:xfrm>
-          <a:prstGeom prst="rect">
-            <a:avLst/>
-          </a:prstGeom>
-          <a:noFill/>
-        </p:spPr>
-        <p:txBody>
-          <a:bodyPr wrap="none" lIns="0" rIns="0" tIns="0" bIns="0">
-            <a:spAutoFit/>
-          </a:bodyPr>
-          <a:lstStyle/>
-          <a:p>
-            <a:r>
-              <a:rPr sz="800" b="0" lang="ja-JP">
-                <a:solidFill>
-                  <a:srgbClr val="626669"/>
-                </a:solidFill>
-                <a:latin typeface="Noto Sans"/>
-                <a:ea typeface="Noto Sans CJK JP"/>
-                <a:cs typeface="Noto Sans"/>
-              </a:rPr>
-              <a:t>[1] FineWeb / sample-10BT  </a:t>
-            </a:r>
-            <a:r>
-              <a:rPr sz="800" b="0" lang="en-US">
-                <a:solidFill>
-                  <a:srgbClr val="626669"/>
-                </a:solidFill>
-                <a:latin typeface="Noto Sans"/>
-                <a:ea typeface="Noto Sans CJK JP"/>
-                <a:cs typeface="Noto Sans"/>
-                <a:hlinkClick r:id="rId2"/>
-              </a:rPr>
-              <a:t>https://huggingface.co/datasets/HuggingFaceFW/fineweb</a:t>
-            </a:r>
-          </a:p>
-        </p:txBody>
-      </p:sp>
-      <p:sp>
-        <p:nvSpPr>
-          <p:cNvPr id="10" name="TextBox 9"/>
-          <p:cNvSpPr txBox="1"/>
-          <p:nvPr/>
-        </p:nvSpPr>
-        <p:spPr>
-          <a:xfrm>
-            <a:off x="548640" y="4590288"/>
-            <a:ext cx="8046720" cy="164592"/>
-          </a:xfrm>
-          <a:prstGeom prst="rect">
-            <a:avLst/>
-          </a:prstGeom>
-          <a:noFill/>
-        </p:spPr>
-        <p:txBody>
-          <a:bodyPr wrap="square" lIns="0" rIns="0" tIns="0" bIns="0">
-            <a:spAutoFit/>
-          </a:bodyPr>
-          <a:lstStyle/>
-          <a:p>
-            <a:pPr algn="l">
-              <a:lnSpc>
-                <a:spcPct val="112000"/>
-              </a:lnSpc>
-              <a:spcAft>
-                <a:spcPts val="0"/>
-              </a:spcAft>
-              <a:buNone/>
-            </a:pPr>
-            <a:r>
-              <a:rPr sz="800" b="0" lang="ja-JP">
-                <a:solidFill>
-                  <a:srgbClr val="303437"/>
-                </a:solidFill>
-                <a:latin typeface="Noto Sans"/>
-                <a:ea typeface="Noto Sans CJK JP"/>
-                <a:cs typeface="Noto Sans"/>
-              </a:rPr>
-              <a:t/>
-            </a:r>
-            <a:r>
-              <a:rPr sz="800" b="0" lang="ja-JP">
-                <a:solidFill>
-                  <a:srgbClr val="626669"/>
-                </a:solidFill>
-                <a:latin typeface="Noto Sans"/>
-                <a:ea typeface="Noto Sans CJK JP"/>
-                <a:cs typeface="Noto Sans"/>
-              </a:rPr>
-              <a:t>元ページ  </a:t>
-            </a:r>
-            <a:r>
-              <a:rPr sz="800" b="0" lang="ja-JP">
-                <a:solidFill>
-                  <a:srgbClr val="626669"/>
-                </a:solidFill>
-                <a:latin typeface="Noto Sans"/>
-                <a:ea typeface="Noto Sans CJK JP"/>
-                <a:cs typeface="Noto Sans"/>
-                <a:hlinkClick r:id="rId3"/>
-              </a:rPr>
-              <a:t>http://aota.org/Consumers/Ethics/Fraud.aspx</a:t>
+              <a:t>http://blog.timbunce.org/2009/01/28/can-you-reproduce-this-nytprof-failure/?like=1&amp;_wpnonce=9501e873bf</a:t>
             </a:r>
           </a:p>
         </p:txBody>
@@ -30698,492 +31184,6 @@
 </file>
 
 <file path=ppt/slides/slide63.xml><?xml version="1.0" encoding="utf-8"?>
-<p:sld xmlns:a="http://schemas.openxmlformats.org/drawingml/2006/main" xmlns:p="http://schemas.openxmlformats.org/presentationml/2006/main" xmlns:r="http://schemas.openxmlformats.org/officeDocument/2006/relationships">
-  <p:cSld>
-    <p:spTree>
-      <p:nvGrpSpPr>
-        <p:cNvPr id="1" name=""/>
-        <p:cNvGrpSpPr/>
-        <p:nvPr/>
-      </p:nvGrpSpPr>
-      <p:grpSpPr/>
-      <p:sp>
-        <p:nvSpPr>
-          <p:cNvPr id="2" name="Title 1"/>
-          <p:cNvSpPr>
-            <a:spLocks noGrp="1"/>
-          </p:cNvSpPr>
-          <p:nvPr>
-            <p:ph type="title"/>
-          </p:nvPr>
-        </p:nvSpPr>
-        <p:spPr>
-          <a:xfrm>
-            <a:off x="548640" y="786384"/>
-            <a:ext cx="8046720" cy="502920"/>
-          </a:xfrm>
-        </p:spPr>
-        <p:txBody>
-          <a:bodyPr wrap="square" lIns="0" rIns="0" tIns="0" bIns="0"/>
-          <a:lstStyle/>
-          <a:p>
-            <a:pPr algn="l">
-              <a:lnSpc>
-                <a:spcPct val="112000"/>
-              </a:lnSpc>
-              <a:spcAft>
-                <a:spcPts val="0"/>
-              </a:spcAft>
-              <a:buNone/>
-            </a:pPr>
-            <a:r>
-              <a:rPr sz="2800" b="1" lang="ja-JP">
-                <a:solidFill>
-                  <a:srgbClr val="303437"/>
-                </a:solidFill>
-                <a:latin typeface="Noto Sans"/>
-                <a:ea typeface="Noto Sans CJK JP"/>
-                <a:cs typeface="Noto Sans"/>
-              </a:rPr>
-              <a:t>追加例9：Perlのプロファイラの不具合調査</a:t>
-            </a:r>
-          </a:p>
-        </p:txBody>
-      </p:sp>
-      <p:sp>
-        <p:nvSpPr>
-          <p:cNvPr id="3" name="Title 2"/>
-          <p:cNvSpPr>
-            <a:spLocks noGrp="1"/>
-          </p:cNvSpPr>
-          <p:nvPr>
-            <p:ph type="title" idx="2"/>
-          </p:nvPr>
-        </p:nvSpPr>
-        <p:spPr/>
-        <p:txBody>
-          <a:bodyPr wrap="square" lIns="0" rIns="0" tIns="0" bIns="0" anchor="ctr"/>
-          <a:lstStyle/>
-          <a:p>
-            <a:pPr algn="l">
-              <a:lnSpc>
-                <a:spcPct val="100000"/>
-              </a:lnSpc>
-              <a:spcBef>
-                <a:spcPts val="0"/>
-              </a:spcBef>
-              <a:spcAft>
-                <a:spcPts val="0"/>
-              </a:spcAft>
-              <a:buNone/>
-            </a:pPr>
-            <a:r>
-              <a:rPr sz="1400" b="1" lang="ja-JP">
-                <a:solidFill>
-                  <a:srgbClr val="FFFEF8"/>
-                </a:solidFill>
-                <a:latin typeface="Noto Sans"/>
-                <a:ea typeface="Noto Sans CJK JP"/>
-                <a:cs typeface="Noto Sans"/>
-              </a:rPr>
-              <a:t>Appendix 2. 収録されたWeb文書の追加例</a:t>
-            </a:r>
-          </a:p>
-        </p:txBody>
-      </p:sp>
-      <p:sp>
-        <p:nvSpPr>
-          <p:cNvPr id="4" name="TextBox 3"/>
-          <p:cNvSpPr txBox="1"/>
-          <p:nvPr/>
-        </p:nvSpPr>
-        <p:spPr>
-          <a:xfrm>
-            <a:off x="548640" y="1399032"/>
-            <a:ext cx="8046720" cy="210312"/>
-          </a:xfrm>
-          <a:prstGeom prst="rect">
-            <a:avLst/>
-          </a:prstGeom>
-          <a:noFill/>
-        </p:spPr>
-        <p:txBody>
-          <a:bodyPr wrap="square" lIns="0" rIns="0" tIns="0" bIns="0">
-            <a:spAutoFit/>
-          </a:bodyPr>
-          <a:lstStyle/>
-          <a:p>
-            <a:pPr algn="l">
-              <a:lnSpc>
-                <a:spcPct val="112000"/>
-              </a:lnSpc>
-              <a:spcAft>
-                <a:spcPts val="0"/>
-              </a:spcAft>
-              <a:buNone/>
-            </a:pPr>
-            <a:r>
-              <a:rPr sz="1200" b="0" lang="ja-JP">
-                <a:solidFill>
-                  <a:srgbClr val="626669"/>
-                </a:solidFill>
-                <a:latin typeface="Noto Sans"/>
-                <a:ea typeface="Noto Sans CJK JP"/>
-                <a:cs typeface="Noto Sans"/>
-              </a:rPr>
-              <a:t>配布テキストからの抜粋（英語）</a:t>
-            </a:r>
-          </a:p>
-        </p:txBody>
-      </p:sp>
-      <p:sp>
-        <p:nvSpPr>
-          <p:cNvPr id="5" name="Rectangle 4"/>
-          <p:cNvSpPr/>
-          <p:nvPr/>
-        </p:nvSpPr>
-        <p:spPr>
-          <a:xfrm>
-            <a:off x="548640" y="1771194"/>
-            <a:ext cx="8046720" cy="1435785"/>
-          </a:xfrm>
-          <a:prstGeom prst="rect">
-            <a:avLst/>
-          </a:prstGeom>
-          <a:solidFill>
-            <a:srgbClr val="EBEDEB"/>
-          </a:solidFill>
-          <a:ln>
-            <a:noFill/>
-          </a:ln>
-          <a:effectLst/>
-        </p:spPr>
-        <p:style>
-          <a:lnRef idx="1">
-            <a:schemeClr val="accent1"/>
-          </a:lnRef>
-          <a:fillRef idx="3">
-            <a:schemeClr val="accent1"/>
-          </a:fillRef>
-          <a:effectRef idx="0">
-            <a:schemeClr val="accent1"/>
-          </a:effectRef>
-          <a:fontRef idx="minor">
-            <a:schemeClr val="lt1"/>
-          </a:fontRef>
-        </p:style>
-        <p:txBody>
-          <a:bodyPr rtlCol="0" anchor="ctr"/>
-          <a:lstStyle/>
-          <a:p>
-            <a:pPr algn="ctr"/>
-          </a:p>
-        </p:txBody>
-      </p:sp>
-      <p:sp>
-        <p:nvSpPr>
-          <p:cNvPr id="6" name="TextBox 5"/>
-          <p:cNvSpPr txBox="1"/>
-          <p:nvPr/>
-        </p:nvSpPr>
-        <p:spPr>
-          <a:xfrm>
-            <a:off x="722376" y="1856231"/>
-            <a:ext cx="7699248" cy="1828800"/>
-          </a:xfrm>
-          <a:prstGeom prst="rect">
-            <a:avLst/>
-          </a:prstGeom>
-          <a:noFill/>
-        </p:spPr>
-        <p:txBody>
-          <a:bodyPr wrap="square" lIns="0" rIns="0" tIns="0" bIns="0">
-            <a:spAutoFit/>
-          </a:bodyPr>
-          <a:lstStyle/>
-          <a:p>
-            <a:pPr algn="l">
-              <a:lnSpc>
-                <a:spcPct val="112000"/>
-              </a:lnSpc>
-              <a:spcAft>
-                <a:spcPts val="0"/>
-              </a:spcAft>
-              <a:buNone/>
-            </a:pPr>
-            <a:r>
-              <a:rPr sz="1800" b="0" lang="en-US">
-                <a:solidFill>
-                  <a:srgbClr val="303437"/>
-                </a:solidFill>
-                <a:latin typeface="Noto Sans"/>
-                <a:ea typeface="Noto Sans CJK JP"/>
-                <a:cs typeface="Noto Sans"/>
-              </a:rPr>
-              <a:t>I’ve a new release of NYTProf ready to upload but I’m stuck.</a:t>
-            </a:r>
-          </a:p>
-          <a:p>
-            <a:pPr algn="l">
-              <a:lnSpc>
-                <a:spcPct val="112000"/>
-              </a:lnSpc>
-              <a:spcAft>
-                <a:spcPts val="0"/>
-              </a:spcAft>
-              <a:buNone/>
-            </a:pPr>
-            <a:r>
-              <a:rPr sz="1800" b="0" lang="en-US">
-                <a:solidFill>
-                  <a:srgbClr val="303437"/>
-                </a:solidFill>
-                <a:latin typeface="Noto Sans"/>
-                <a:ea typeface="Noto Sans CJK JP"/>
-                <a:cs typeface="Noto Sans"/>
-              </a:rPr>
-              <a:t>The CPAN Testers service is reporting a failure on a number of systems but I can’t reproduce it locally or work out the cause.</a:t>
-            </a:r>
-          </a:p>
-          <a:p>
-            <a:pPr algn="l">
-              <a:lnSpc>
-                <a:spcPct val="112000"/>
-              </a:lnSpc>
-              <a:spcAft>
-                <a:spcPts val="0"/>
-              </a:spcAft>
-              <a:buNone/>
-            </a:pPr>
-            <a:r>
-              <a:rPr sz="1800" b="0" lang="en-US">
-                <a:solidFill>
-                  <a:srgbClr val="303437"/>
-                </a:solidFill>
-                <a:latin typeface="Noto Sans"/>
-                <a:ea typeface="Noto Sans CJK JP"/>
-                <a:cs typeface="Noto Sans"/>
-              </a:rPr>
-              <a:t>Can you reproduce the failure with Devel::NYTProf 2.07_94?</a:t>
-            </a:r>
-          </a:p>
-        </p:txBody>
-      </p:sp>
-      <p:sp>
-        <p:nvSpPr>
-          <p:cNvPr id="7" name="TextBox 6"/>
-          <p:cNvSpPr txBox="1"/>
-          <p:nvPr/>
-        </p:nvSpPr>
-        <p:spPr>
-          <a:xfrm>
-            <a:off x="548640" y="3384780"/>
-            <a:ext cx="8046720" cy="868680"/>
-          </a:xfrm>
-          <a:prstGeom prst="rect">
-            <a:avLst/>
-          </a:prstGeom>
-          <a:noFill/>
-        </p:spPr>
-        <p:txBody>
-          <a:bodyPr wrap="square" lIns="0" rIns="0" tIns="0" bIns="0">
-            <a:spAutoFit/>
-          </a:bodyPr>
-          <a:lstStyle/>
-          <a:p>
-            <a:pPr algn="l">
-              <a:lnSpc>
-                <a:spcPct val="112000"/>
-              </a:lnSpc>
-              <a:spcAft>
-                <a:spcPts val="0"/>
-              </a:spcAft>
-              <a:buNone/>
-            </a:pPr>
-            <a:r>
-              <a:rPr sz="2100" b="0" lang="ja-JP">
-                <a:solidFill>
-                  <a:srgbClr val="303437"/>
-                </a:solidFill>
-                <a:latin typeface="Noto Sans"/>
-                <a:ea typeface="Noto Sans CJK JP"/>
-                <a:cs typeface="Noto Sans"/>
-              </a:rPr>
-              <a:t>プログラムのバージョン、再現条件、調査への協力依頼を含む技術的な文章 [1]。</a:t>
-            </a:r>
-          </a:p>
-        </p:txBody>
-      </p:sp>
-      <p:sp>
-        <p:nvSpPr>
-          <p:cNvPr id="8" name="TextBox 7"/>
-          <p:cNvSpPr txBox="1"/>
-          <p:nvPr/>
-        </p:nvSpPr>
-        <p:spPr>
-          <a:xfrm>
-            <a:off x="548640" y="4773168"/>
-            <a:ext cx="8046720" cy="164592"/>
-          </a:xfrm>
-          <a:prstGeom prst="rect">
-            <a:avLst/>
-          </a:prstGeom>
-          <a:noFill/>
-        </p:spPr>
-        <p:txBody>
-          <a:bodyPr wrap="square" lIns="0" rIns="0" tIns="0" bIns="0">
-            <a:spAutoFit/>
-          </a:bodyPr>
-          <a:lstStyle/>
-          <a:p>
-            <a:pPr algn="l">
-              <a:lnSpc>
-                <a:spcPct val="112000"/>
-              </a:lnSpc>
-              <a:spcAft>
-                <a:spcPts val="0"/>
-              </a:spcAft>
-              <a:buNone/>
-            </a:pPr>
-            <a:r>
-              <a:rPr sz="800" b="0" lang="ja-JP">
-                <a:solidFill>
-                  <a:srgbClr val="626669"/>
-                </a:solidFill>
-                <a:latin typeface="Noto Sans"/>
-                <a:ea typeface="Noto Sans CJK JP"/>
-                <a:cs typeface="Noto Sans"/>
-              </a:rPr>
-              <a:t>row 21 / &lt;urn:uuid:095340b9-8a67-45ac-afb3-250bec8e3efd&gt; / 351 GPT-2 tokens</a:t>
-            </a:r>
-          </a:p>
-        </p:txBody>
-      </p:sp>
-      <p:sp>
-        <p:nvSpPr>
-          <p:cNvPr id="9" name="TextBox 8"/>
-          <p:cNvSpPr txBox="1"/>
-          <p:nvPr/>
-        </p:nvSpPr>
-        <p:spPr>
-          <a:xfrm>
-            <a:off x="548640" y="4928616"/>
-            <a:ext cx="8046720" cy="155448"/>
-          </a:xfrm>
-          <a:prstGeom prst="rect">
-            <a:avLst/>
-          </a:prstGeom>
-          <a:noFill/>
-        </p:spPr>
-        <p:txBody>
-          <a:bodyPr wrap="none" lIns="0" rIns="0" tIns="0" bIns="0">
-            <a:spAutoFit/>
-          </a:bodyPr>
-          <a:lstStyle/>
-          <a:p>
-            <a:r>
-              <a:rPr sz="800" b="0" lang="ja-JP">
-                <a:solidFill>
-                  <a:srgbClr val="626669"/>
-                </a:solidFill>
-                <a:latin typeface="Noto Sans"/>
-                <a:ea typeface="Noto Sans CJK JP"/>
-                <a:cs typeface="Noto Sans"/>
-              </a:rPr>
-              <a:t>[1] FineWeb / sample-10BT  </a:t>
-            </a:r>
-            <a:r>
-              <a:rPr sz="800" b="0" lang="en-US">
-                <a:solidFill>
-                  <a:srgbClr val="626669"/>
-                </a:solidFill>
-                <a:latin typeface="Noto Sans"/>
-                <a:ea typeface="Noto Sans CJK JP"/>
-                <a:cs typeface="Noto Sans"/>
-                <a:hlinkClick r:id="rId2"/>
-              </a:rPr>
-              <a:t>https://huggingface.co/datasets/HuggingFaceFW/fineweb</a:t>
-            </a:r>
-          </a:p>
-        </p:txBody>
-      </p:sp>
-      <p:sp>
-        <p:nvSpPr>
-          <p:cNvPr id="10" name="TextBox 9"/>
-          <p:cNvSpPr txBox="1"/>
-          <p:nvPr/>
-        </p:nvSpPr>
-        <p:spPr>
-          <a:xfrm>
-            <a:off x="548640" y="4590288"/>
-            <a:ext cx="8046720" cy="164592"/>
-          </a:xfrm>
-          <a:prstGeom prst="rect">
-            <a:avLst/>
-          </a:prstGeom>
-          <a:noFill/>
-        </p:spPr>
-        <p:txBody>
-          <a:bodyPr wrap="square" lIns="0" rIns="0" tIns="0" bIns="0">
-            <a:spAutoFit/>
-          </a:bodyPr>
-          <a:lstStyle/>
-          <a:p>
-            <a:pPr algn="l">
-              <a:lnSpc>
-                <a:spcPct val="112000"/>
-              </a:lnSpc>
-              <a:spcAft>
-                <a:spcPts val="0"/>
-              </a:spcAft>
-              <a:buNone/>
-            </a:pPr>
-            <a:r>
-              <a:rPr sz="800" b="0" lang="ja-JP">
-                <a:solidFill>
-                  <a:srgbClr val="303437"/>
-                </a:solidFill>
-                <a:latin typeface="Noto Sans"/>
-                <a:ea typeface="Noto Sans CJK JP"/>
-                <a:cs typeface="Noto Sans"/>
-              </a:rPr>
-              <a:t/>
-            </a:r>
-            <a:r>
-              <a:rPr sz="800" b="0" lang="ja-JP">
-                <a:solidFill>
-                  <a:srgbClr val="626669"/>
-                </a:solidFill>
-                <a:latin typeface="Noto Sans"/>
-                <a:ea typeface="Noto Sans CJK JP"/>
-                <a:cs typeface="Noto Sans"/>
-              </a:rPr>
-              <a:t>元ページ  </a:t>
-            </a:r>
-            <a:r>
-              <a:rPr sz="800" b="0" lang="ja-JP">
-                <a:solidFill>
-                  <a:srgbClr val="626669"/>
-                </a:solidFill>
-                <a:latin typeface="Noto Sans"/>
-                <a:ea typeface="Noto Sans CJK JP"/>
-                <a:cs typeface="Noto Sans"/>
-                <a:hlinkClick r:id="rId3"/>
-              </a:rPr>
-              <a:t>http://blog.timbunce.org/2009/01/28/can-you-reproduce-this-nytprof-failure/?like=1&amp;_wpnonce=9501e873bf</a:t>
-            </a:r>
-          </a:p>
-        </p:txBody>
-      </p:sp>
-    </p:spTree>
-  </p:cSld>
-  <p:clrMapOvr>
-    <a:masterClrMapping/>
-  </p:clrMapOvr>
-</p:sld>
-</file>
-
-<file path=ppt/slides/slide64.xml><?xml version="1.0" encoding="utf-8"?>
 <p:sld xmlns:a="http://schemas.openxmlformats.org/drawingml/2006/main" xmlns:p="http://schemas.openxmlformats.org/presentationml/2006/main" xmlns:r="http://schemas.openxmlformats.org/officeDocument/2006/relationships">
   <p:cSld>
     <p:spTree>
@@ -31625,6 +31625,233 @@
 </p:sld>
 </file>
 
+<file path=ppt/slides/slide64.xml><?xml version="1.0" encoding="utf-8"?>
+<p:sld xmlns:a="http://schemas.openxmlformats.org/drawingml/2006/main" xmlns:p="http://schemas.openxmlformats.org/presentationml/2006/main" xmlns:r="http://schemas.openxmlformats.org/officeDocument/2006/relationships">
+  <p:cSld>
+    <p:spTree>
+      <p:nvGrpSpPr>
+        <p:cNvPr id="1" name=""/>
+        <p:cNvGrpSpPr/>
+        <p:nvPr/>
+      </p:nvGrpSpPr>
+      <p:grpSpPr/>
+      <p:sp>
+        <p:nvSpPr>
+          <p:cNvPr id="2" name="Title 1"/>
+          <p:cNvSpPr>
+            <a:spLocks noGrp="1"/>
+          </p:cNvSpPr>
+          <p:nvPr>
+            <p:ph type="title"/>
+          </p:nvPr>
+        </p:nvSpPr>
+        <p:spPr>
+          <a:xfrm>
+            <a:off x="548640" y="786384"/>
+            <a:ext cx="8046720" cy="502920"/>
+          </a:xfrm>
+        </p:spPr>
+        <p:txBody>
+          <a:bodyPr wrap="square" lIns="0" rIns="0" tIns="0" bIns="0"/>
+          <a:lstStyle/>
+          <a:p>
+            <a:pPr algn="l">
+              <a:lnSpc>
+                <a:spcPct val="112000"/>
+              </a:lnSpc>
+              <a:spcAft>
+                <a:spcPts val="0"/>
+              </a:spcAft>
+              <a:buNone/>
+            </a:pPr>
+            <a:r>
+              <a:rPr sz="2800" b="1" lang="ja-JP">
+                <a:solidFill>
+                  <a:srgbClr val="303437"/>
+                </a:solidFill>
+                <a:latin typeface="Noto Sans"/>
+                <a:ea typeface="Noto Sans CJK JP"/>
+                <a:cs typeface="Noto Sans"/>
+              </a:rPr>
+              <a:t>WARCとWETの形式と本文抽出方法</a:t>
+            </a:r>
+          </a:p>
+        </p:txBody>
+      </p:sp>
+      <p:sp>
+        <p:nvSpPr>
+          <p:cNvPr id="3" name="Text Placeholder 2"/>
+          <p:cNvSpPr>
+            <a:spLocks noGrp="1"/>
+          </p:cNvSpPr>
+          <p:nvPr>
+            <p:ph type="body" idx="1"/>
+          </p:nvPr>
+        </p:nvSpPr>
+        <p:spPr>
+          <a:xfrm>
+            <a:off x="548640" y="1508760"/>
+            <a:ext cx="8046720" cy="2971800"/>
+          </a:xfrm>
+        </p:spPr>
+        <p:txBody>
+          <a:bodyPr wrap="square" lIns="0" rIns="0" tIns="0" bIns="0"/>
+          <a:lstStyle/>
+          <a:p>
+            <a:pPr lvl="0" marL="457200" indent="-355600">
+              <a:lnSpc>
+                <a:spcPct val="115000"/>
+              </a:lnSpc>
+              <a:spcAft>
+                <a:spcPts val="1500"/>
+              </a:spcAft>
+              <a:buSzPct val="57826"/>
+              <a:buFont typeface="Noto Sans CJK JP"/>
+              <a:buChar char="●"/>
+              <a:defRPr sz="2300" lang="ja-JP">
+                <a:latin typeface="Noto Sans"/>
+                <a:ea typeface="Noto Sans CJK JP"/>
+              </a:defRPr>
+            </a:pPr>
+            <a:r>
+              <a:rPr sz="2300" b="0" lang="ja-JP">
+                <a:solidFill>
+                  <a:srgbClr val="303437"/>
+                </a:solidFill>
+                <a:latin typeface="Noto Sans"/>
+                <a:ea typeface="Noto Sans CJK JP"/>
+                <a:cs typeface="Noto Sans"/>
+              </a:rPr>
+              <a:t>WARCはHTMLやリクエストのメタデータを保持する。WETは抽出済みテキストである [1]。</a:t>
+            </a:r>
+          </a:p>
+          <a:p>
+            <a:pPr lvl="0" marL="457200" indent="-355600">
+              <a:lnSpc>
+                <a:spcPct val="115000"/>
+              </a:lnSpc>
+              <a:spcAft>
+                <a:spcPts val="1500"/>
+              </a:spcAft>
+              <a:buSzPct val="57826"/>
+              <a:buFont typeface="Noto Sans CJK JP"/>
+              <a:buChar char="●"/>
+              <a:defRPr sz="2300" lang="ja-JP">
+                <a:latin typeface="Noto Sans"/>
+                <a:ea typeface="Noto Sans CJK JP"/>
+              </a:defRPr>
+            </a:pPr>
+            <a:r>
+              <a:rPr sz="2300" b="0" lang="ja-JP">
+                <a:solidFill>
+                  <a:srgbClr val="303437"/>
+                </a:solidFill>
+                <a:latin typeface="Noto Sans"/>
+                <a:ea typeface="Noto Sans CJK JP"/>
+                <a:cs typeface="Noto Sans"/>
+              </a:rPr>
+              <a:t>原著はWETにメニューなどが多く残ることを確認し、WARCからTrafilaturaで本文を抽出した。</a:t>
+            </a:r>
+          </a:p>
+        </p:txBody>
+      </p:sp>
+      <p:sp>
+        <p:nvSpPr>
+          <p:cNvPr id="4" name="Title 3"/>
+          <p:cNvSpPr>
+            <a:spLocks noGrp="1"/>
+          </p:cNvSpPr>
+          <p:nvPr>
+            <p:ph type="title" idx="2"/>
+          </p:nvPr>
+        </p:nvSpPr>
+        <p:spPr/>
+        <p:txBody>
+          <a:bodyPr wrap="square" lIns="0" rIns="0" tIns="0" bIns="0" anchor="ctr"/>
+          <a:lstStyle/>
+          <a:p>
+            <a:pPr algn="l">
+              <a:lnSpc>
+                <a:spcPct val="100000"/>
+              </a:lnSpc>
+              <a:spcBef>
+                <a:spcPts val="0"/>
+              </a:spcBef>
+              <a:spcAft>
+                <a:spcPts val="0"/>
+              </a:spcAft>
+              <a:buNone/>
+            </a:pPr>
+            <a:r>
+              <a:rPr sz="1400" b="1" lang="ja-JP">
+                <a:solidFill>
+                  <a:srgbClr val="FFFEF8"/>
+                </a:solidFill>
+                <a:latin typeface="Noto Sans"/>
+                <a:ea typeface="Noto Sans CJK JP"/>
+                <a:cs typeface="Noto Sans"/>
+              </a:rPr>
+              <a:t>Appendix 3. 文書選別・話題分布と評価実験の詳細</a:t>
+            </a:r>
+          </a:p>
+        </p:txBody>
+      </p:sp>
+      <p:sp>
+        <p:nvSpPr>
+          <p:cNvPr id="5" name="TextBox 4"/>
+          <p:cNvSpPr txBox="1"/>
+          <p:nvPr/>
+        </p:nvSpPr>
+        <p:spPr>
+          <a:xfrm>
+            <a:off x="548640" y="4928616"/>
+            <a:ext cx="8046720" cy="155448"/>
+          </a:xfrm>
+          <a:prstGeom prst="rect">
+            <a:avLst/>
+          </a:prstGeom>
+          <a:noFill/>
+        </p:spPr>
+        <p:txBody>
+          <a:bodyPr wrap="none" lIns="0" rIns="0" tIns="0" bIns="0">
+            <a:spAutoFit/>
+          </a:bodyPr>
+          <a:lstStyle/>
+          <a:p>
+            <a:r>
+              <a:rPr sz="800" b="0" lang="ja-JP">
+                <a:solidFill>
+                  <a:srgbClr val="626669"/>
+                </a:solidFill>
+                <a:latin typeface="Noto Sans"/>
+                <a:ea typeface="Noto Sans CJK JP"/>
+                <a:cs typeface="Noto Sans"/>
+              </a:rPr>
+              <a:t>[1] Guilherme Penedo et al. (2024). The FineWeb Datasets: Decanting the Web for the Finest Text Data at Scale. NeurIPS. §3.2–3.3  </a:t>
+            </a:r>
+            <a:r>
+              <a:rPr sz="800" b="0" lang="en-US">
+                <a:solidFill>
+                  <a:srgbClr val="626669"/>
+                </a:solidFill>
+                <a:latin typeface="Noto Sans"/>
+                <a:ea typeface="Noto Sans CJK JP"/>
+                <a:cs typeface="Noto Sans"/>
+                <a:hlinkClick r:id="rId2"/>
+              </a:rPr>
+              <a:t>https://arxiv.org/abs/2406.17557</a:t>
+            </a:r>
+          </a:p>
+        </p:txBody>
+      </p:sp>
+    </p:spTree>
+  </p:cSld>
+  <p:clrMapOvr>
+    <a:masterClrMapping/>
+  </p:clrMapOvr>
+</p:sld>
+</file>
+
 <file path=ppt/slides/slide65.xml><?xml version="1.0" encoding="utf-8"?>
 <p:sld xmlns:a="http://schemas.openxmlformats.org/drawingml/2006/main" xmlns:p="http://schemas.openxmlformats.org/presentationml/2006/main" xmlns:r="http://schemas.openxmlformats.org/officeDocument/2006/relationships">
   <p:cSld>
@@ -31673,7 +31900,7 @@
                 <a:ea typeface="Noto Sans CJK JP"/>
                 <a:cs typeface="Noto Sans"/>
               </a:rPr>
-              <a:t>WARCとWETの形式と本文抽出方法</a:t>
+              <a:t>MinHashの設定と近似の意味</a:t>
             </a:r>
           </a:p>
         </p:txBody>
@@ -31705,16 +31932,16 @@
               <a:spcAft>
                 <a:spcPts val="1500"/>
               </a:spcAft>
-              <a:buSzPct val="57826"/>
+              <a:buSzPct val="60455"/>
               <a:buFont typeface="Noto Sans CJK JP"/>
               <a:buChar char="●"/>
-              <a:defRPr sz="2300" lang="ja-JP">
+              <a:defRPr sz="2200" lang="ja-JP">
                 <a:latin typeface="Noto Sans"/>
                 <a:ea typeface="Noto Sans CJK JP"/>
               </a:defRPr>
             </a:pPr>
             <a:r>
-              <a:rPr sz="2300" b="0" lang="ja-JP">
+              <a:rPr sz="2200" b="0" lang="ja-JP">
                 <a:solidFill>
                   <a:srgbClr val="303437"/>
                 </a:solidFill>
@@ -31722,7 +31949,7 @@
                 <a:ea typeface="Noto Sans CJK JP"/>
                 <a:cs typeface="Noto Sans"/>
               </a:rPr>
-              <a:t>WARCはHTMLやリクエストのメタデータを保持する。WETは抽出済みテキストである [1]。</a:t>
+              <a:t>文書を英単語の5-gramへ分け、112個のハッシュを14組×8個にまとめる [1]。</a:t>
             </a:r>
           </a:p>
           <a:p>
@@ -31733,16 +31960,16 @@
               <a:spcAft>
                 <a:spcPts val="1500"/>
               </a:spcAft>
-              <a:buSzPct val="57826"/>
+              <a:buSzPct val="60455"/>
               <a:buFont typeface="Noto Sans CJK JP"/>
               <a:buChar char="●"/>
-              <a:defRPr sz="2300" lang="ja-JP">
+              <a:defRPr sz="2200" lang="ja-JP">
                 <a:latin typeface="Noto Sans"/>
                 <a:ea typeface="Noto Sans CJK JP"/>
               </a:defRPr>
             </a:pPr>
             <a:r>
-              <a:rPr sz="2300" b="0" lang="ja-JP">
+              <a:rPr sz="2200" b="0" lang="ja-JP">
                 <a:solidFill>
                   <a:srgbClr val="303437"/>
                 </a:solidFill>
@@ -31750,7 +31977,35 @@
                 <a:ea typeface="Noto Sans CJK JP"/>
                 <a:cs typeface="Noto Sans"/>
               </a:rPr>
-              <a:t>原著はWETにメニューなどが多く残ることを確認し、WARCからTrafilaturaで本文を抽出した。</a:t>
+              <a:t>どれかの組で8個が一致した文書を結び、推移的なクラスタを作る。各クラスタから1件を残す。</a:t>
+            </a:r>
+          </a:p>
+          <a:p>
+            <a:pPr lvl="0" marL="457200" indent="-355600">
+              <a:lnSpc>
+                <a:spcPct val="115000"/>
+              </a:lnSpc>
+              <a:spcAft>
+                <a:spcPts val="1500"/>
+              </a:spcAft>
+              <a:buSzPct val="60455"/>
+              <a:buFont typeface="Noto Sans CJK JP"/>
+              <a:buChar char="●"/>
+              <a:defRPr sz="2200" lang="ja-JP">
+                <a:latin typeface="Noto Sans"/>
+                <a:ea typeface="Noto Sans CJK JP"/>
+              </a:defRPr>
+            </a:pPr>
+            <a:r>
+              <a:rPr sz="2200" b="0" lang="ja-JP">
+                <a:solidFill>
+                  <a:srgbClr val="303437"/>
+                </a:solidFill>
+                <a:latin typeface="Noto Sans"/>
+                <a:ea typeface="Noto Sans CJK JP"/>
+                <a:cs typeface="Noto Sans"/>
+              </a:rPr>
+              <a:t>約75%以上似た文書を狙う確率的な方式である [1]。</a:t>
             </a:r>
           </a:p>
         </p:txBody>
@@ -31827,7 +32082,7 @@
                 <a:ea typeface="Noto Sans CJK JP"/>
                 <a:cs typeface="Noto Sans"/>
               </a:rPr>
-              <a:t>[1] Guilherme Penedo et al. (2024). The FineWeb Datasets: Decanting the Web for the Finest Text Data at Scale. NeurIPS. §3.2–3.3  </a:t>
+              <a:t>[1] Hugging Face, FineWebの公開処理コード — MinhashDedupSignature  </a:t>
             </a:r>
             <a:r>
               <a:rPr sz="800" b="0" lang="en-US">
@@ -31839,7 +32094,7 @@
                 <a:cs typeface="Noto Sans"/>
                 <a:hlinkClick r:id="rId2"/>
               </a:rPr>
-              <a:t>https://arxiv.org/abs/2406.17557</a:t>
+              <a:t>https://github.com/huggingface/datatrove/blob/main/examples/fineweb.py</a:t>
             </a:r>
           </a:p>
         </p:txBody>
@@ -31853,261 +32108,6 @@
 </file>
 
 <file path=ppt/slides/slide66.xml><?xml version="1.0" encoding="utf-8"?>
-<p:sld xmlns:a="http://schemas.openxmlformats.org/drawingml/2006/main" xmlns:p="http://schemas.openxmlformats.org/presentationml/2006/main" xmlns:r="http://schemas.openxmlformats.org/officeDocument/2006/relationships">
-  <p:cSld>
-    <p:spTree>
-      <p:nvGrpSpPr>
-        <p:cNvPr id="1" name=""/>
-        <p:cNvGrpSpPr/>
-        <p:nvPr/>
-      </p:nvGrpSpPr>
-      <p:grpSpPr/>
-      <p:sp>
-        <p:nvSpPr>
-          <p:cNvPr id="2" name="Title 1"/>
-          <p:cNvSpPr>
-            <a:spLocks noGrp="1"/>
-          </p:cNvSpPr>
-          <p:nvPr>
-            <p:ph type="title"/>
-          </p:nvPr>
-        </p:nvSpPr>
-        <p:spPr>
-          <a:xfrm>
-            <a:off x="548640" y="786384"/>
-            <a:ext cx="8046720" cy="502920"/>
-          </a:xfrm>
-        </p:spPr>
-        <p:txBody>
-          <a:bodyPr wrap="square" lIns="0" rIns="0" tIns="0" bIns="0"/>
-          <a:lstStyle/>
-          <a:p>
-            <a:pPr algn="l">
-              <a:lnSpc>
-                <a:spcPct val="112000"/>
-              </a:lnSpc>
-              <a:spcAft>
-                <a:spcPts val="0"/>
-              </a:spcAft>
-              <a:buNone/>
-            </a:pPr>
-            <a:r>
-              <a:rPr sz="2800" b="1" lang="ja-JP">
-                <a:solidFill>
-                  <a:srgbClr val="303437"/>
-                </a:solidFill>
-                <a:latin typeface="Noto Sans"/>
-                <a:ea typeface="Noto Sans CJK JP"/>
-                <a:cs typeface="Noto Sans"/>
-              </a:rPr>
-              <a:t>MinHashの設定と近似の意味</a:t>
-            </a:r>
-          </a:p>
-        </p:txBody>
-      </p:sp>
-      <p:sp>
-        <p:nvSpPr>
-          <p:cNvPr id="3" name="Text Placeholder 2"/>
-          <p:cNvSpPr>
-            <a:spLocks noGrp="1"/>
-          </p:cNvSpPr>
-          <p:nvPr>
-            <p:ph type="body" idx="1"/>
-          </p:nvPr>
-        </p:nvSpPr>
-        <p:spPr>
-          <a:xfrm>
-            <a:off x="548640" y="1508760"/>
-            <a:ext cx="8046720" cy="2971800"/>
-          </a:xfrm>
-        </p:spPr>
-        <p:txBody>
-          <a:bodyPr wrap="square" lIns="0" rIns="0" tIns="0" bIns="0"/>
-          <a:lstStyle/>
-          <a:p>
-            <a:pPr lvl="0" marL="457200" indent="-355600">
-              <a:lnSpc>
-                <a:spcPct val="115000"/>
-              </a:lnSpc>
-              <a:spcAft>
-                <a:spcPts val="1500"/>
-              </a:spcAft>
-              <a:buSzPct val="60455"/>
-              <a:buFont typeface="Noto Sans CJK JP"/>
-              <a:buChar char="●"/>
-              <a:defRPr sz="2200" lang="ja-JP">
-                <a:latin typeface="Noto Sans"/>
-                <a:ea typeface="Noto Sans CJK JP"/>
-              </a:defRPr>
-            </a:pPr>
-            <a:r>
-              <a:rPr sz="2200" b="0" lang="ja-JP">
-                <a:solidFill>
-                  <a:srgbClr val="303437"/>
-                </a:solidFill>
-                <a:latin typeface="Noto Sans"/>
-                <a:ea typeface="Noto Sans CJK JP"/>
-                <a:cs typeface="Noto Sans"/>
-              </a:rPr>
-              <a:t>文書を英単語の5-gramへ分け、112個のハッシュを14組×8個にまとめる [1]。</a:t>
-            </a:r>
-          </a:p>
-          <a:p>
-            <a:pPr lvl="0" marL="457200" indent="-355600">
-              <a:lnSpc>
-                <a:spcPct val="115000"/>
-              </a:lnSpc>
-              <a:spcAft>
-                <a:spcPts val="1500"/>
-              </a:spcAft>
-              <a:buSzPct val="60455"/>
-              <a:buFont typeface="Noto Sans CJK JP"/>
-              <a:buChar char="●"/>
-              <a:defRPr sz="2200" lang="ja-JP">
-                <a:latin typeface="Noto Sans"/>
-                <a:ea typeface="Noto Sans CJK JP"/>
-              </a:defRPr>
-            </a:pPr>
-            <a:r>
-              <a:rPr sz="2200" b="0" lang="ja-JP">
-                <a:solidFill>
-                  <a:srgbClr val="303437"/>
-                </a:solidFill>
-                <a:latin typeface="Noto Sans"/>
-                <a:ea typeface="Noto Sans CJK JP"/>
-                <a:cs typeface="Noto Sans"/>
-              </a:rPr>
-              <a:t>どれかの組で8個が一致した文書を結び、推移的なクラスタを作る。各クラスタから1件を残す。</a:t>
-            </a:r>
-          </a:p>
-          <a:p>
-            <a:pPr lvl="0" marL="457200" indent="-355600">
-              <a:lnSpc>
-                <a:spcPct val="115000"/>
-              </a:lnSpc>
-              <a:spcAft>
-                <a:spcPts val="1500"/>
-              </a:spcAft>
-              <a:buSzPct val="60455"/>
-              <a:buFont typeface="Noto Sans CJK JP"/>
-              <a:buChar char="●"/>
-              <a:defRPr sz="2200" lang="ja-JP">
-                <a:latin typeface="Noto Sans"/>
-                <a:ea typeface="Noto Sans CJK JP"/>
-              </a:defRPr>
-            </a:pPr>
-            <a:r>
-              <a:rPr sz="2200" b="0" lang="ja-JP">
-                <a:solidFill>
-                  <a:srgbClr val="303437"/>
-                </a:solidFill>
-                <a:latin typeface="Noto Sans"/>
-                <a:ea typeface="Noto Sans CJK JP"/>
-                <a:cs typeface="Noto Sans"/>
-              </a:rPr>
-              <a:t>約75%以上似た文書を狙う確率的な方式である [1]。</a:t>
-            </a:r>
-          </a:p>
-        </p:txBody>
-      </p:sp>
-      <p:sp>
-        <p:nvSpPr>
-          <p:cNvPr id="4" name="Title 3"/>
-          <p:cNvSpPr>
-            <a:spLocks noGrp="1"/>
-          </p:cNvSpPr>
-          <p:nvPr>
-            <p:ph type="title" idx="2"/>
-          </p:nvPr>
-        </p:nvSpPr>
-        <p:spPr/>
-        <p:txBody>
-          <a:bodyPr wrap="square" lIns="0" rIns="0" tIns="0" bIns="0" anchor="ctr"/>
-          <a:lstStyle/>
-          <a:p>
-            <a:pPr algn="l">
-              <a:lnSpc>
-                <a:spcPct val="100000"/>
-              </a:lnSpc>
-              <a:spcBef>
-                <a:spcPts val="0"/>
-              </a:spcBef>
-              <a:spcAft>
-                <a:spcPts val="0"/>
-              </a:spcAft>
-              <a:buNone/>
-            </a:pPr>
-            <a:r>
-              <a:rPr sz="1400" b="1" lang="ja-JP">
-                <a:solidFill>
-                  <a:srgbClr val="FFFEF8"/>
-                </a:solidFill>
-                <a:latin typeface="Noto Sans"/>
-                <a:ea typeface="Noto Sans CJK JP"/>
-                <a:cs typeface="Noto Sans"/>
-              </a:rPr>
-              <a:t>Appendix 3. 文書選別・話題分布と評価実験の詳細</a:t>
-            </a:r>
-          </a:p>
-        </p:txBody>
-      </p:sp>
-      <p:sp>
-        <p:nvSpPr>
-          <p:cNvPr id="5" name="TextBox 4"/>
-          <p:cNvSpPr txBox="1"/>
-          <p:nvPr/>
-        </p:nvSpPr>
-        <p:spPr>
-          <a:xfrm>
-            <a:off x="548640" y="4928616"/>
-            <a:ext cx="8046720" cy="155448"/>
-          </a:xfrm>
-          <a:prstGeom prst="rect">
-            <a:avLst/>
-          </a:prstGeom>
-          <a:noFill/>
-        </p:spPr>
-        <p:txBody>
-          <a:bodyPr wrap="none" lIns="0" rIns="0" tIns="0" bIns="0">
-            <a:spAutoFit/>
-          </a:bodyPr>
-          <a:lstStyle/>
-          <a:p>
-            <a:r>
-              <a:rPr sz="800" b="0" lang="ja-JP">
-                <a:solidFill>
-                  <a:srgbClr val="626669"/>
-                </a:solidFill>
-                <a:latin typeface="Noto Sans"/>
-                <a:ea typeface="Noto Sans CJK JP"/>
-                <a:cs typeface="Noto Sans"/>
-              </a:rPr>
-              <a:t>[1] Hugging Face, FineWebの公開処理コード — MinhashDedupSignature  </a:t>
-            </a:r>
-            <a:r>
-              <a:rPr sz="800" b="0" lang="en-US">
-                <a:solidFill>
-                  <a:srgbClr val="626669"/>
-                </a:solidFill>
-                <a:latin typeface="Noto Sans"/>
-                <a:ea typeface="Noto Sans CJK JP"/>
-                <a:cs typeface="Noto Sans"/>
-                <a:hlinkClick r:id="rId2"/>
-              </a:rPr>
-              <a:t>https://github.com/huggingface/datatrove/blob/main/examples/fineweb.py</a:t>
-            </a:r>
-          </a:p>
-        </p:txBody>
-      </p:sp>
-    </p:spTree>
-  </p:cSld>
-  <p:clrMapOvr>
-    <a:masterClrMapping/>
-  </p:clrMapOvr>
-</p:sld>
-</file>
-
-<file path=ppt/slides/slide67.xml><?xml version="1.0" encoding="utf-8"?>
 <p:sld xmlns:a="http://schemas.openxmlformats.org/drawingml/2006/main" xmlns:p="http://schemas.openxmlformats.org/presentationml/2006/main" xmlns:r="http://schemas.openxmlformats.org/officeDocument/2006/relationships">
   <p:cSld>
     <p:spTree>
@@ -32852,7 +32852,7 @@
 </p:sld>
 </file>
 
-<file path=ppt/slides/slide68.xml><?xml version="1.0" encoding="utf-8"?>
+<file path=ppt/slides/slide67.xml><?xml version="1.0" encoding="utf-8"?>
 <p:sld xmlns:a="http://schemas.openxmlformats.org/drawingml/2006/main" xmlns:p="http://schemas.openxmlformats.org/presentationml/2006/main" xmlns:r="http://schemas.openxmlformats.org/officeDocument/2006/relationships">
   <p:cSld>
     <p:spTree>
@@ -33127,7 +33127,7 @@
 </p:sld>
 </file>
 
-<file path=ppt/slides/slide69.xml><?xml version="1.0" encoding="utf-8"?>
+<file path=ppt/slides/slide68.xml><?xml version="1.0" encoding="utf-8"?>
 <p:sld xmlns:a="http://schemas.openxmlformats.org/drawingml/2006/main" xmlns:p="http://schemas.openxmlformats.org/presentationml/2006/main" xmlns:r="http://schemas.openxmlformats.org/officeDocument/2006/relationships">
   <p:cSld>
     <p:spTree>
@@ -33963,7 +33963,7 @@
         </p:nvSpPr>
         <p:spPr>
           <a:xfrm>
-            <a:off x="548640" y="4495800"/>
+            <a:off x="548640" y="4533900"/>
             <a:ext cx="8046720" cy="165100"/>
           </a:xfrm>
           <a:prstGeom prst="rect">
@@ -34108,310 +34108,7 @@
 </p:sld>
 </file>
 
-<file path=ppt/slides/slide7.xml><?xml version="1.0" encoding="utf-8"?>
-<p:sld xmlns:a="http://schemas.openxmlformats.org/drawingml/2006/main" xmlns:p="http://schemas.openxmlformats.org/presentationml/2006/main" xmlns:r="http://schemas.openxmlformats.org/officeDocument/2006/relationships">
-  <p:cSld>
-    <p:spTree>
-      <p:nvGrpSpPr>
-        <p:cNvPr id="1" name=""/>
-        <p:cNvGrpSpPr/>
-        <p:nvPr/>
-      </p:nvGrpSpPr>
-      <p:grpSpPr/>
-      <p:sp>
-        <p:nvSpPr>
-          <p:cNvPr id="2" name="Title 1"/>
-          <p:cNvSpPr>
-            <a:spLocks noGrp="1"/>
-          </p:cNvSpPr>
-          <p:nvPr>
-            <p:ph type="title"/>
-          </p:nvPr>
-        </p:nvSpPr>
-        <p:spPr>
-          <a:xfrm>
-            <a:off x="548640" y="786384"/>
-            <a:ext cx="8046720" cy="502920"/>
-          </a:xfrm>
-        </p:spPr>
-        <p:txBody>
-          <a:bodyPr wrap="square" lIns="0" rIns="0" tIns="0" bIns="0"/>
-          <a:lstStyle/>
-          <a:p>
-            <a:pPr algn="l">
-              <a:lnSpc>
-                <a:spcPct val="112000"/>
-              </a:lnSpc>
-              <a:spcAft>
-                <a:spcPts val="0"/>
-              </a:spcAft>
-              <a:buNone/>
-            </a:pPr>
-            <a:r>
-              <a:rPr sz="2800" b="1" lang="ja-JP">
-                <a:solidFill>
-                  <a:srgbClr val="303437"/>
-                </a:solidFill>
-                <a:latin typeface="Noto Sans"/>
-                <a:ea typeface="Noto Sans CJK JP"/>
-                <a:cs typeface="Noto Sans"/>
-              </a:rPr>
-              <a:t>Web文書を用いた次トークン予測</a:t>
-            </a:r>
-          </a:p>
-        </p:txBody>
-      </p:sp>
-      <p:sp>
-        <p:nvSpPr>
-          <p:cNvPr id="3" name="Text Placeholder 2"/>
-          <p:cNvSpPr>
-            <a:spLocks noGrp="1"/>
-          </p:cNvSpPr>
-          <p:nvPr>
-            <p:ph type="body" idx="1"/>
-          </p:nvPr>
-        </p:nvSpPr>
-        <p:spPr>
-          <a:xfrm>
-            <a:off x="548640" y="1508760"/>
-            <a:ext cx="8046720" cy="2971800"/>
-          </a:xfrm>
-        </p:spPr>
-        <p:txBody>
-          <a:bodyPr wrap="square" lIns="0" rIns="0" tIns="0" bIns="0"/>
-          <a:lstStyle/>
-          <a:p>
-            <a:pPr lvl="0" marL="457200" indent="-355600">
-              <a:lnSpc>
-                <a:spcPct val="115000"/>
-              </a:lnSpc>
-              <a:spcAft>
-                <a:spcPts val="1500"/>
-              </a:spcAft>
-              <a:buSzPct val="60455"/>
-              <a:buFont typeface="Noto Sans CJK JP"/>
-              <a:buChar char="●"/>
-              <a:defRPr sz="2200" lang="ja-JP">
-                <a:latin typeface="Noto Sans"/>
-                <a:ea typeface="Noto Sans CJK JP"/>
-              </a:defRPr>
-            </a:pPr>
-            <a:r>
-              <a:rPr sz="2200" b="0" lang="ja-JP">
-                <a:solidFill>
-                  <a:srgbClr val="303437"/>
-                </a:solidFill>
-                <a:latin typeface="Noto Sans"/>
-                <a:ea typeface="Noto Sans CJK JP"/>
-                <a:cs typeface="Noto Sans"/>
-              </a:rPr>
-              <a:t>文章を細かなトークンへ区切り、前の部分から次のトークンの確率を学ぶ [1]。</a:t>
-            </a:r>
-          </a:p>
-          <a:p>
-            <a:pPr lvl="0" marL="457200" indent="-355600">
-              <a:lnSpc>
-                <a:spcPct val="115000"/>
-              </a:lnSpc>
-              <a:spcAft>
-                <a:spcPts val="1500"/>
-              </a:spcAft>
-              <a:buSzPct val="60455"/>
-              <a:buFont typeface="Noto Sans CJK JP"/>
-              <a:buChar char="●"/>
-              <a:defRPr sz="2200" lang="ja-JP">
-                <a:latin typeface="Noto Sans"/>
-                <a:ea typeface="Noto Sans CJK JP"/>
-              </a:defRPr>
-            </a:pPr>
-            <a:r>
-              <a:rPr sz="2200" b="0" lang="ja-JP">
-                <a:solidFill>
-                  <a:srgbClr val="303437"/>
-                </a:solidFill>
-                <a:latin typeface="Noto Sans"/>
-                <a:ea typeface="Noto Sans CJK JP"/>
-                <a:cs typeface="Noto Sans"/>
-              </a:rPr>
-              <a:t>実データの「Michigan unemployment claims workers …」も、先頭から順に予測の対象になる。</a:t>
-            </a:r>
-          </a:p>
-          <a:p>
-            <a:pPr lvl="0" marL="457200" indent="-355600">
-              <a:lnSpc>
-                <a:spcPct val="115000"/>
-              </a:lnSpc>
-              <a:spcAft>
-                <a:spcPts val="1500"/>
-              </a:spcAft>
-              <a:buSzPct val="60455"/>
-              <a:buFont typeface="Noto Sans CJK JP"/>
-              <a:buChar char="●"/>
-              <a:defRPr sz="2200" lang="ja-JP">
-                <a:latin typeface="Noto Sans"/>
-                <a:ea typeface="Noto Sans CJK JP"/>
-              </a:defRPr>
-            </a:pPr>
-            <a:r>
-              <a:rPr sz="2200" b="0" lang="ja-JP">
-                <a:solidFill>
-                  <a:srgbClr val="303437"/>
-                </a:solidFill>
-                <a:latin typeface="Noto Sans"/>
-                <a:ea typeface="Noto Sans CJK JP"/>
-                <a:cs typeface="Noto Sans"/>
-              </a:rPr>
-              <a:t>配布token_countはGPT-2で数える [2]。</a:t>
-            </a:r>
-          </a:p>
-        </p:txBody>
-      </p:sp>
-      <p:sp>
-        <p:nvSpPr>
-          <p:cNvPr id="4" name="Title 3"/>
-          <p:cNvSpPr>
-            <a:spLocks noGrp="1"/>
-          </p:cNvSpPr>
-          <p:nvPr>
-            <p:ph type="title" idx="2"/>
-          </p:nvPr>
-        </p:nvSpPr>
-        <p:spPr/>
-        <p:txBody>
-          <a:bodyPr wrap="square" lIns="0" rIns="0" tIns="0" bIns="0" anchor="ctr"/>
-          <a:lstStyle/>
-          <a:p>
-            <a:pPr algn="l">
-              <a:lnSpc>
-                <a:spcPct val="100000"/>
-              </a:lnSpc>
-              <a:spcBef>
-                <a:spcPts val="0"/>
-              </a:spcBef>
-              <a:spcAft>
-                <a:spcPts val="0"/>
-              </a:spcAft>
-              <a:buNone/>
-            </a:pPr>
-            <a:r>
-              <a:rPr sz="1400" b="1" lang="ja-JP">
-                <a:solidFill>
-                  <a:srgbClr val="FFFEF8"/>
-                </a:solidFill>
-                <a:latin typeface="Noto Sans"/>
-                <a:ea typeface="Noto Sans CJK JP"/>
-                <a:cs typeface="Noto Sans"/>
-              </a:rPr>
-              <a:t>1. FineWebの目的と収録文書</a:t>
-            </a:r>
-          </a:p>
-        </p:txBody>
-      </p:sp>
-      <p:sp>
-        <p:nvSpPr>
-          <p:cNvPr id="5" name="TextBox 4"/>
-          <p:cNvSpPr txBox="1"/>
-          <p:nvPr/>
-        </p:nvSpPr>
-        <p:spPr>
-          <a:xfrm>
-            <a:off x="548640" y="4773168"/>
-            <a:ext cx="8046720" cy="155448"/>
-          </a:xfrm>
-          <a:prstGeom prst="rect">
-            <a:avLst/>
-          </a:prstGeom>
-          <a:noFill/>
-        </p:spPr>
-        <p:txBody>
-          <a:bodyPr wrap="none" lIns="0" rIns="0" tIns="0" bIns="0">
-            <a:spAutoFit/>
-          </a:bodyPr>
-          <a:lstStyle/>
-          <a:p>
-            <a:r>
-              <a:rPr sz="800" b="0" lang="ja-JP">
-                <a:solidFill>
-                  <a:srgbClr val="626669"/>
-                </a:solidFill>
-                <a:latin typeface="Noto Sans"/>
-                <a:ea typeface="Noto Sans CJK JP"/>
-                <a:cs typeface="Noto Sans"/>
-              </a:rPr>
-              <a:t>[1] Guilherme Penedo et al. (2024). The FineWeb Datasets: Decanting the Web for the Finest Text Data at Scale. NeurIPS. §2  </a:t>
-            </a:r>
-            <a:r>
-              <a:rPr sz="800" b="0" lang="en-US">
-                <a:solidFill>
-                  <a:srgbClr val="626669"/>
-                </a:solidFill>
-                <a:latin typeface="Noto Sans"/>
-                <a:ea typeface="Noto Sans CJK JP"/>
-                <a:cs typeface="Noto Sans"/>
-                <a:hlinkClick r:id="rId2"/>
-              </a:rPr>
-              <a:t>https://arxiv.org/abs/2406.17557</a:t>
-            </a:r>
-          </a:p>
-        </p:txBody>
-      </p:sp>
-      <p:sp>
-        <p:nvSpPr>
-          <p:cNvPr id="6" name="TextBox 5"/>
-          <p:cNvSpPr txBox="1"/>
-          <p:nvPr/>
-        </p:nvSpPr>
-        <p:spPr>
-          <a:xfrm>
-            <a:off x="548640" y="4928616"/>
-            <a:ext cx="8046720" cy="155448"/>
-          </a:xfrm>
-          <a:prstGeom prst="rect">
-            <a:avLst/>
-          </a:prstGeom>
-          <a:noFill/>
-        </p:spPr>
-        <p:txBody>
-          <a:bodyPr wrap="none" lIns="0" rIns="0" tIns="0" bIns="0">
-            <a:spAutoFit/>
-          </a:bodyPr>
-          <a:lstStyle/>
-          <a:p>
-            <a:r>
-              <a:rPr sz="800" b="0" lang="ja-JP">
-                <a:solidFill>
-                  <a:srgbClr val="626669"/>
-                </a:solidFill>
-                <a:latin typeface="Noto Sans"/>
-                <a:ea typeface="Noto Sans CJK JP"/>
-                <a:cs typeface="Noto Sans"/>
-              </a:rPr>
-              <a:t>[2] FineWeb / Data Fields  </a:t>
-            </a:r>
-            <a:r>
-              <a:rPr sz="800" b="0" lang="en-US">
-                <a:solidFill>
-                  <a:srgbClr val="626669"/>
-                </a:solidFill>
-                <a:latin typeface="Noto Sans"/>
-                <a:ea typeface="Noto Sans CJK JP"/>
-                <a:cs typeface="Noto Sans"/>
-                <a:hlinkClick r:id="rId3"/>
-              </a:rPr>
-              <a:t>https://huggingface.co/datasets/HuggingFaceFW/fineweb</a:t>
-            </a:r>
-          </a:p>
-        </p:txBody>
-      </p:sp>
-    </p:spTree>
-  </p:cSld>
-  <p:clrMapOvr>
-    <a:masterClrMapping/>
-  </p:clrMapOvr>
-</p:sld>
-</file>
-
-<file path=ppt/slides/slide70.xml><?xml version="1.0" encoding="utf-8"?>
+<file path=ppt/slides/slide69.xml><?xml version="1.0" encoding="utf-8"?>
 <p:sld xmlns:a="http://schemas.openxmlformats.org/drawingml/2006/main" xmlns:p="http://schemas.openxmlformats.org/presentationml/2006/main" xmlns:r="http://schemas.openxmlformats.org/officeDocument/2006/relationships">
   <p:cSld>
     <p:spTree>
@@ -35247,7 +34944,7 @@
         </p:nvSpPr>
         <p:spPr>
           <a:xfrm>
-            <a:off x="548640" y="4495800"/>
+            <a:off x="548640" y="4533900"/>
             <a:ext cx="8046720" cy="165100"/>
           </a:xfrm>
           <a:prstGeom prst="rect">
@@ -35392,7 +35089,310 @@
 </p:sld>
 </file>
 
-<file path=ppt/slides/slide71.xml><?xml version="1.0" encoding="utf-8"?>
+<file path=ppt/slides/slide7.xml><?xml version="1.0" encoding="utf-8"?>
+<p:sld xmlns:a="http://schemas.openxmlformats.org/drawingml/2006/main" xmlns:p="http://schemas.openxmlformats.org/presentationml/2006/main" xmlns:r="http://schemas.openxmlformats.org/officeDocument/2006/relationships">
+  <p:cSld>
+    <p:spTree>
+      <p:nvGrpSpPr>
+        <p:cNvPr id="1" name=""/>
+        <p:cNvGrpSpPr/>
+        <p:nvPr/>
+      </p:nvGrpSpPr>
+      <p:grpSpPr/>
+      <p:sp>
+        <p:nvSpPr>
+          <p:cNvPr id="2" name="Title 1"/>
+          <p:cNvSpPr>
+            <a:spLocks noGrp="1"/>
+          </p:cNvSpPr>
+          <p:nvPr>
+            <p:ph type="title"/>
+          </p:nvPr>
+        </p:nvSpPr>
+        <p:spPr>
+          <a:xfrm>
+            <a:off x="548640" y="786384"/>
+            <a:ext cx="8046720" cy="502920"/>
+          </a:xfrm>
+        </p:spPr>
+        <p:txBody>
+          <a:bodyPr wrap="square" lIns="0" rIns="0" tIns="0" bIns="0"/>
+          <a:lstStyle/>
+          <a:p>
+            <a:pPr algn="l">
+              <a:lnSpc>
+                <a:spcPct val="112000"/>
+              </a:lnSpc>
+              <a:spcAft>
+                <a:spcPts val="0"/>
+              </a:spcAft>
+              <a:buNone/>
+            </a:pPr>
+            <a:r>
+              <a:rPr sz="2800" b="1" lang="ja-JP">
+                <a:solidFill>
+                  <a:srgbClr val="303437"/>
+                </a:solidFill>
+                <a:latin typeface="Noto Sans"/>
+                <a:ea typeface="Noto Sans CJK JP"/>
+                <a:cs typeface="Noto Sans"/>
+              </a:rPr>
+              <a:t>Web文書を用いた次トークン予測</a:t>
+            </a:r>
+          </a:p>
+        </p:txBody>
+      </p:sp>
+      <p:sp>
+        <p:nvSpPr>
+          <p:cNvPr id="3" name="Text Placeholder 2"/>
+          <p:cNvSpPr>
+            <a:spLocks noGrp="1"/>
+          </p:cNvSpPr>
+          <p:nvPr>
+            <p:ph type="body" idx="1"/>
+          </p:nvPr>
+        </p:nvSpPr>
+        <p:spPr>
+          <a:xfrm>
+            <a:off x="548640" y="1508760"/>
+            <a:ext cx="8046720" cy="2971800"/>
+          </a:xfrm>
+        </p:spPr>
+        <p:txBody>
+          <a:bodyPr wrap="square" lIns="0" rIns="0" tIns="0" bIns="0"/>
+          <a:lstStyle/>
+          <a:p>
+            <a:pPr lvl="0" marL="457200" indent="-355600">
+              <a:lnSpc>
+                <a:spcPct val="115000"/>
+              </a:lnSpc>
+              <a:spcAft>
+                <a:spcPts val="1500"/>
+              </a:spcAft>
+              <a:buSzPct val="60455"/>
+              <a:buFont typeface="Noto Sans CJK JP"/>
+              <a:buChar char="●"/>
+              <a:defRPr sz="2200" lang="ja-JP">
+                <a:latin typeface="Noto Sans"/>
+                <a:ea typeface="Noto Sans CJK JP"/>
+              </a:defRPr>
+            </a:pPr>
+            <a:r>
+              <a:rPr sz="2200" b="0" lang="ja-JP">
+                <a:solidFill>
+                  <a:srgbClr val="303437"/>
+                </a:solidFill>
+                <a:latin typeface="Noto Sans"/>
+                <a:ea typeface="Noto Sans CJK JP"/>
+                <a:cs typeface="Noto Sans"/>
+              </a:rPr>
+              <a:t>文章を細かなトークンへ区切り、前の部分から次のトークンの確率を学ぶ [1]。</a:t>
+            </a:r>
+          </a:p>
+          <a:p>
+            <a:pPr lvl="0" marL="457200" indent="-355600">
+              <a:lnSpc>
+                <a:spcPct val="115000"/>
+              </a:lnSpc>
+              <a:spcAft>
+                <a:spcPts val="1500"/>
+              </a:spcAft>
+              <a:buSzPct val="60455"/>
+              <a:buFont typeface="Noto Sans CJK JP"/>
+              <a:buChar char="●"/>
+              <a:defRPr sz="2200" lang="ja-JP">
+                <a:latin typeface="Noto Sans"/>
+                <a:ea typeface="Noto Sans CJK JP"/>
+              </a:defRPr>
+            </a:pPr>
+            <a:r>
+              <a:rPr sz="2200" b="0" lang="ja-JP">
+                <a:solidFill>
+                  <a:srgbClr val="303437"/>
+                </a:solidFill>
+                <a:latin typeface="Noto Sans"/>
+                <a:ea typeface="Noto Sans CJK JP"/>
+                <a:cs typeface="Noto Sans"/>
+              </a:rPr>
+              <a:t>実データの「Michigan unemployment claims workers …」も、先頭から順に予測の対象になる。</a:t>
+            </a:r>
+          </a:p>
+          <a:p>
+            <a:pPr lvl="0" marL="457200" indent="-355600">
+              <a:lnSpc>
+                <a:spcPct val="115000"/>
+              </a:lnSpc>
+              <a:spcAft>
+                <a:spcPts val="1500"/>
+              </a:spcAft>
+              <a:buSzPct val="60455"/>
+              <a:buFont typeface="Noto Sans CJK JP"/>
+              <a:buChar char="●"/>
+              <a:defRPr sz="2200" lang="ja-JP">
+                <a:latin typeface="Noto Sans"/>
+                <a:ea typeface="Noto Sans CJK JP"/>
+              </a:defRPr>
+            </a:pPr>
+            <a:r>
+              <a:rPr sz="2200" b="0" lang="ja-JP">
+                <a:solidFill>
+                  <a:srgbClr val="303437"/>
+                </a:solidFill>
+                <a:latin typeface="Noto Sans"/>
+                <a:ea typeface="Noto Sans CJK JP"/>
+                <a:cs typeface="Noto Sans"/>
+              </a:rPr>
+              <a:t>配布token_countはGPT-2で数える [2]。</a:t>
+            </a:r>
+          </a:p>
+        </p:txBody>
+      </p:sp>
+      <p:sp>
+        <p:nvSpPr>
+          <p:cNvPr id="4" name="Title 3"/>
+          <p:cNvSpPr>
+            <a:spLocks noGrp="1"/>
+          </p:cNvSpPr>
+          <p:nvPr>
+            <p:ph type="title" idx="2"/>
+          </p:nvPr>
+        </p:nvSpPr>
+        <p:spPr/>
+        <p:txBody>
+          <a:bodyPr wrap="square" lIns="0" rIns="0" tIns="0" bIns="0" anchor="ctr"/>
+          <a:lstStyle/>
+          <a:p>
+            <a:pPr algn="l">
+              <a:lnSpc>
+                <a:spcPct val="100000"/>
+              </a:lnSpc>
+              <a:spcBef>
+                <a:spcPts val="0"/>
+              </a:spcBef>
+              <a:spcAft>
+                <a:spcPts val="0"/>
+              </a:spcAft>
+              <a:buNone/>
+            </a:pPr>
+            <a:r>
+              <a:rPr sz="1400" b="1" lang="ja-JP">
+                <a:solidFill>
+                  <a:srgbClr val="FFFEF8"/>
+                </a:solidFill>
+                <a:latin typeface="Noto Sans"/>
+                <a:ea typeface="Noto Sans CJK JP"/>
+                <a:cs typeface="Noto Sans"/>
+              </a:rPr>
+              <a:t>1. FineWebの目的と収録文書</a:t>
+            </a:r>
+          </a:p>
+        </p:txBody>
+      </p:sp>
+      <p:sp>
+        <p:nvSpPr>
+          <p:cNvPr id="5" name="TextBox 4"/>
+          <p:cNvSpPr txBox="1"/>
+          <p:nvPr/>
+        </p:nvSpPr>
+        <p:spPr>
+          <a:xfrm>
+            <a:off x="548640" y="4773168"/>
+            <a:ext cx="8046720" cy="155448"/>
+          </a:xfrm>
+          <a:prstGeom prst="rect">
+            <a:avLst/>
+          </a:prstGeom>
+          <a:noFill/>
+        </p:spPr>
+        <p:txBody>
+          <a:bodyPr wrap="none" lIns="0" rIns="0" tIns="0" bIns="0">
+            <a:spAutoFit/>
+          </a:bodyPr>
+          <a:lstStyle/>
+          <a:p>
+            <a:r>
+              <a:rPr sz="800" b="0" lang="ja-JP">
+                <a:solidFill>
+                  <a:srgbClr val="626669"/>
+                </a:solidFill>
+                <a:latin typeface="Noto Sans"/>
+                <a:ea typeface="Noto Sans CJK JP"/>
+                <a:cs typeface="Noto Sans"/>
+              </a:rPr>
+              <a:t>[1] Guilherme Penedo et al. (2024). The FineWeb Datasets: Decanting the Web for the Finest Text Data at Scale. NeurIPS. §2  </a:t>
+            </a:r>
+            <a:r>
+              <a:rPr sz="800" b="0" lang="en-US">
+                <a:solidFill>
+                  <a:srgbClr val="626669"/>
+                </a:solidFill>
+                <a:latin typeface="Noto Sans"/>
+                <a:ea typeface="Noto Sans CJK JP"/>
+                <a:cs typeface="Noto Sans"/>
+                <a:hlinkClick r:id="rId2"/>
+              </a:rPr>
+              <a:t>https://arxiv.org/abs/2406.17557</a:t>
+            </a:r>
+          </a:p>
+        </p:txBody>
+      </p:sp>
+      <p:sp>
+        <p:nvSpPr>
+          <p:cNvPr id="6" name="TextBox 5"/>
+          <p:cNvSpPr txBox="1"/>
+          <p:nvPr/>
+        </p:nvSpPr>
+        <p:spPr>
+          <a:xfrm>
+            <a:off x="548640" y="4928616"/>
+            <a:ext cx="8046720" cy="155448"/>
+          </a:xfrm>
+          <a:prstGeom prst="rect">
+            <a:avLst/>
+          </a:prstGeom>
+          <a:noFill/>
+        </p:spPr>
+        <p:txBody>
+          <a:bodyPr wrap="none" lIns="0" rIns="0" tIns="0" bIns="0">
+            <a:spAutoFit/>
+          </a:bodyPr>
+          <a:lstStyle/>
+          <a:p>
+            <a:r>
+              <a:rPr sz="800" b="0" lang="ja-JP">
+                <a:solidFill>
+                  <a:srgbClr val="626669"/>
+                </a:solidFill>
+                <a:latin typeface="Noto Sans"/>
+                <a:ea typeface="Noto Sans CJK JP"/>
+                <a:cs typeface="Noto Sans"/>
+              </a:rPr>
+              <a:t>[2] FineWeb / Data Fields  </a:t>
+            </a:r>
+            <a:r>
+              <a:rPr sz="800" b="0" lang="en-US">
+                <a:solidFill>
+                  <a:srgbClr val="626669"/>
+                </a:solidFill>
+                <a:latin typeface="Noto Sans"/>
+                <a:ea typeface="Noto Sans CJK JP"/>
+                <a:cs typeface="Noto Sans"/>
+                <a:hlinkClick r:id="rId3"/>
+              </a:rPr>
+              <a:t>https://huggingface.co/datasets/HuggingFaceFW/fineweb</a:t>
+            </a:r>
+          </a:p>
+        </p:txBody>
+      </p:sp>
+    </p:spTree>
+  </p:cSld>
+  <p:clrMapOvr>
+    <a:masterClrMapping/>
+  </p:clrMapOvr>
+</p:sld>
+</file>
+
+<file path=ppt/slides/slide70.xml><?xml version="1.0" encoding="utf-8"?>
 <p:sld xmlns:a="http://schemas.openxmlformats.org/drawingml/2006/main" xmlns:p="http://schemas.openxmlformats.org/presentationml/2006/main" xmlns:r="http://schemas.openxmlformats.org/officeDocument/2006/relationships">
   <p:cSld>
     <p:spTree>
@@ -36228,7 +36228,7 @@
         </p:nvSpPr>
         <p:spPr>
           <a:xfrm>
-            <a:off x="548640" y="4495800"/>
+            <a:off x="548640" y="4533900"/>
             <a:ext cx="8046720" cy="165100"/>
           </a:xfrm>
           <a:prstGeom prst="rect">
@@ -36373,7 +36373,7 @@
 </p:sld>
 </file>
 
-<file path=ppt/slides/slide72.xml><?xml version="1.0" encoding="utf-8"?>
+<file path=ppt/slides/slide71.xml><?xml version="1.0" encoding="utf-8"?>
 <p:sld xmlns:a="http://schemas.openxmlformats.org/drawingml/2006/main" xmlns:p="http://schemas.openxmlformats.org/presentationml/2006/main" xmlns:r="http://schemas.openxmlformats.org/officeDocument/2006/relationships">
   <p:cSld>
     <p:spTree>
@@ -37209,7 +37209,7 @@
         </p:nvSpPr>
         <p:spPr>
           <a:xfrm>
-            <a:off x="548640" y="4495800"/>
+            <a:off x="548640" y="4533900"/>
             <a:ext cx="8046720" cy="165100"/>
           </a:xfrm>
           <a:prstGeom prst="rect">
@@ -37354,7 +37354,7 @@
 </p:sld>
 </file>
 
-<file path=ppt/slides/slide73.xml><?xml version="1.0" encoding="utf-8"?>
+<file path=ppt/slides/slide72.xml><?xml version="1.0" encoding="utf-8"?>
 <p:sld xmlns:a="http://schemas.openxmlformats.org/drawingml/2006/main" xmlns:p="http://schemas.openxmlformats.org/presentationml/2006/main" xmlns:r="http://schemas.openxmlformats.org/officeDocument/2006/relationships">
   <p:cSld>
     <p:spTree>
@@ -38190,7 +38190,7 @@
         </p:nvSpPr>
         <p:spPr>
           <a:xfrm>
-            <a:off x="548640" y="4495800"/>
+            <a:off x="548640" y="4533900"/>
             <a:ext cx="8046720" cy="165100"/>
           </a:xfrm>
           <a:prstGeom prst="rect">
@@ -38335,7 +38335,7 @@
 </p:sld>
 </file>
 
-<file path=ppt/slides/slide74.xml><?xml version="1.0" encoding="utf-8"?>
+<file path=ppt/slides/slide73.xml><?xml version="1.0" encoding="utf-8"?>
 <p:sld xmlns:a="http://schemas.openxmlformats.org/drawingml/2006/main" xmlns:p="http://schemas.openxmlformats.org/presentationml/2006/main" xmlns:r="http://schemas.openxmlformats.org/officeDocument/2006/relationships">
   <p:cSld>
     <p:spTree>
@@ -39171,7 +39171,7 @@
         </p:nvSpPr>
         <p:spPr>
           <a:xfrm>
-            <a:off x="548640" y="4495800"/>
+            <a:off x="548640" y="4533900"/>
             <a:ext cx="8046720" cy="165100"/>
           </a:xfrm>
           <a:prstGeom prst="rect">
@@ -39316,7 +39316,7 @@
 </p:sld>
 </file>
 
-<file path=ppt/slides/slide75.xml><?xml version="1.0" encoding="utf-8"?>
+<file path=ppt/slides/slide74.xml><?xml version="1.0" encoding="utf-8"?>
 <p:sld xmlns:a="http://schemas.openxmlformats.org/drawingml/2006/main" xmlns:p="http://schemas.openxmlformats.org/presentationml/2006/main" xmlns:r="http://schemas.openxmlformats.org/officeDocument/2006/relationships">
   <p:cSld>
     <p:spTree>
@@ -40003,7 +40003,7 @@
 </p:sld>
 </file>
 
-<file path=ppt/slides/slide76.xml><?xml version="1.0" encoding="utf-8"?>
+<file path=ppt/slides/slide75.xml><?xml version="1.0" encoding="utf-8"?>
 <p:sld xmlns:a="http://schemas.openxmlformats.org/drawingml/2006/main" xmlns:p="http://schemas.openxmlformats.org/presentationml/2006/main" xmlns:r="http://schemas.openxmlformats.org/officeDocument/2006/relationships">
   <p:cSld>
     <p:spTree>
@@ -40258,7 +40258,7 @@
 </p:sld>
 </file>
 
-<file path=ppt/slides/slide77.xml><?xml version="1.0" encoding="utf-8"?>
+<file path=ppt/slides/slide76.xml><?xml version="1.0" encoding="utf-8"?>
 <p:sld xmlns:a="http://schemas.openxmlformats.org/drawingml/2006/main" xmlns:p="http://schemas.openxmlformats.org/presentationml/2006/main" xmlns:r="http://schemas.openxmlformats.org/officeDocument/2006/relationships">
   <p:cSld>
     <p:spTree>
@@ -40955,7 +40955,7 @@
 </p:sld>
 </file>
 
-<file path=ppt/slides/slide78.xml><?xml version="1.0" encoding="utf-8"?>
+<file path=ppt/slides/slide77.xml><?xml version="1.0" encoding="utf-8"?>
 <p:sld xmlns:a="http://schemas.openxmlformats.org/drawingml/2006/main" xmlns:p="http://schemas.openxmlformats.org/presentationml/2006/main" xmlns:r="http://schemas.openxmlformats.org/officeDocument/2006/relationships">
   <p:cSld>
     <p:spTree>
@@ -41608,7 +41608,7 @@
 </p:sld>
 </file>
 
-<file path=ppt/slides/slide79.xml><?xml version="1.0" encoding="utf-8"?>
+<file path=ppt/slides/slide78.xml><?xml version="1.0" encoding="utf-8"?>
 <p:sld xmlns:a="http://schemas.openxmlformats.org/drawingml/2006/main" xmlns:p="http://schemas.openxmlformats.org/presentationml/2006/main" xmlns:r="http://schemas.openxmlformats.org/officeDocument/2006/relationships">
   <p:cSld>
     <p:spTree>
@@ -42025,471 +42025,7 @@
 </p:sld>
 </file>
 
-<file path=ppt/slides/slide8.xml><?xml version="1.0" encoding="utf-8"?>
-<p:sld xmlns:a="http://schemas.openxmlformats.org/drawingml/2006/main" xmlns:p="http://schemas.openxmlformats.org/presentationml/2006/main" xmlns:r="http://schemas.openxmlformats.org/officeDocument/2006/relationships">
-  <p:cSld>
-    <p:spTree>
-      <p:nvGrpSpPr>
-        <p:cNvPr id="1" name=""/>
-        <p:cNvGrpSpPr/>
-        <p:nvPr/>
-      </p:nvGrpSpPr>
-      <p:grpSpPr/>
-      <p:sp>
-        <p:nvSpPr>
-          <p:cNvPr id="2" name="Title 1"/>
-          <p:cNvSpPr>
-            <a:spLocks noGrp="1"/>
-          </p:cNvSpPr>
-          <p:nvPr>
-            <p:ph type="title"/>
-          </p:nvPr>
-        </p:nvSpPr>
-        <p:spPr>
-          <a:xfrm>
-            <a:off x="548640" y="786384"/>
-            <a:ext cx="8046720" cy="502920"/>
-          </a:xfrm>
-        </p:spPr>
-        <p:txBody>
-          <a:bodyPr wrap="square" lIns="0" rIns="0" tIns="0" bIns="0"/>
-          <a:lstStyle/>
-          <a:p>
-            <a:pPr algn="l">
-              <a:lnSpc>
-                <a:spcPct val="112000"/>
-              </a:lnSpc>
-              <a:spcAft>
-                <a:spcPts val="0"/>
-              </a:spcAft>
-              <a:buNone/>
-            </a:pPr>
-            <a:r>
-              <a:rPr sz="2800" b="1" lang="ja-JP">
-                <a:solidFill>
-                  <a:srgbClr val="303437"/>
-                </a:solidFill>
-                <a:latin typeface="Noto Sans"/>
-                <a:ea typeface="Noto Sans CJK JP"/>
-                <a:cs typeface="Noto Sans"/>
-              </a:rPr>
-              <a:t>実例1：雇用を報じるニュース</a:t>
-            </a:r>
-          </a:p>
-        </p:txBody>
-      </p:sp>
-      <p:sp>
-        <p:nvSpPr>
-          <p:cNvPr id="3" name="Title 2"/>
-          <p:cNvSpPr>
-            <a:spLocks noGrp="1"/>
-          </p:cNvSpPr>
-          <p:nvPr>
-            <p:ph type="title" idx="2"/>
-          </p:nvPr>
-        </p:nvSpPr>
-        <p:spPr/>
-        <p:txBody>
-          <a:bodyPr wrap="square" lIns="0" rIns="0" tIns="0" bIns="0" anchor="ctr"/>
-          <a:lstStyle/>
-          <a:p>
-            <a:pPr algn="l">
-              <a:lnSpc>
-                <a:spcPct val="100000"/>
-              </a:lnSpc>
-              <a:spcBef>
-                <a:spcPts val="0"/>
-              </a:spcBef>
-              <a:spcAft>
-                <a:spcPts val="0"/>
-              </a:spcAft>
-              <a:buNone/>
-            </a:pPr>
-            <a:r>
-              <a:rPr sz="1400" b="1" lang="ja-JP">
-                <a:solidFill>
-                  <a:srgbClr val="FFFEF8"/>
-                </a:solidFill>
-                <a:latin typeface="Noto Sans"/>
-                <a:ea typeface="Noto Sans CJK JP"/>
-                <a:cs typeface="Noto Sans"/>
-              </a:rPr>
-              <a:t>1. FineWebの目的と収録文書</a:t>
-            </a:r>
-          </a:p>
-        </p:txBody>
-      </p:sp>
-      <p:sp>
-        <p:nvSpPr>
-          <p:cNvPr id="4" name="TextBox 3"/>
-          <p:cNvSpPr txBox="1"/>
-          <p:nvPr/>
-        </p:nvSpPr>
-        <p:spPr>
-          <a:xfrm>
-            <a:off x="548640" y="1399032"/>
-            <a:ext cx="8046720" cy="210312"/>
-          </a:xfrm>
-          <a:prstGeom prst="rect">
-            <a:avLst/>
-          </a:prstGeom>
-          <a:noFill/>
-        </p:spPr>
-        <p:txBody>
-          <a:bodyPr wrap="square" lIns="0" rIns="0" tIns="0" bIns="0">
-            <a:spAutoFit/>
-          </a:bodyPr>
-          <a:lstStyle/>
-          <a:p>
-            <a:pPr algn="l">
-              <a:lnSpc>
-                <a:spcPct val="112000"/>
-              </a:lnSpc>
-              <a:spcAft>
-                <a:spcPts val="0"/>
-              </a:spcAft>
-              <a:buNone/>
-            </a:pPr>
-            <a:r>
-              <a:rPr sz="1200" b="0" lang="ja-JP">
-                <a:solidFill>
-                  <a:srgbClr val="626669"/>
-                </a:solidFill>
-                <a:latin typeface="Noto Sans"/>
-                <a:ea typeface="Noto Sans CJK JP"/>
-                <a:cs typeface="Noto Sans"/>
-              </a:rPr>
-              <a:t>配布テキストからの抜粋（英語）</a:t>
-            </a:r>
-          </a:p>
-        </p:txBody>
-      </p:sp>
-      <p:sp>
-        <p:nvSpPr>
-          <p:cNvPr id="5" name="Rectangle 4"/>
-          <p:cNvSpPr/>
-          <p:nvPr/>
-        </p:nvSpPr>
-        <p:spPr>
-          <a:xfrm>
-            <a:off x="548640" y="1771194"/>
-            <a:ext cx="8046720" cy="1128712"/>
-          </a:xfrm>
-          <a:prstGeom prst="rect">
-            <a:avLst/>
-          </a:prstGeom>
-          <a:solidFill>
-            <a:srgbClr val="EBEDEB"/>
-          </a:solidFill>
-          <a:ln>
-            <a:noFill/>
-          </a:ln>
-          <a:effectLst/>
-        </p:spPr>
-        <p:style>
-          <a:lnRef idx="1">
-            <a:schemeClr val="accent1"/>
-          </a:lnRef>
-          <a:fillRef idx="3">
-            <a:schemeClr val="accent1"/>
-          </a:fillRef>
-          <a:effectRef idx="0">
-            <a:schemeClr val="accent1"/>
-          </a:effectRef>
-          <a:fontRef idx="minor">
-            <a:schemeClr val="lt1"/>
-          </a:fontRef>
-        </p:style>
-        <p:txBody>
-          <a:bodyPr rtlCol="0" anchor="ctr"/>
-          <a:lstStyle/>
-          <a:p>
-            <a:pPr algn="ctr"/>
-          </a:p>
-        </p:txBody>
-      </p:sp>
-      <p:sp>
-        <p:nvSpPr>
-          <p:cNvPr id="6" name="TextBox 5"/>
-          <p:cNvSpPr txBox="1"/>
-          <p:nvPr/>
-        </p:nvSpPr>
-        <p:spPr>
-          <a:xfrm>
-            <a:off x="722376" y="1856231"/>
-            <a:ext cx="7699248" cy="1828800"/>
-          </a:xfrm>
-          <a:prstGeom prst="rect">
-            <a:avLst/>
-          </a:prstGeom>
-          <a:noFill/>
-        </p:spPr>
-        <p:txBody>
-          <a:bodyPr wrap="square" lIns="0" rIns="0" tIns="0" bIns="0">
-            <a:spAutoFit/>
-          </a:bodyPr>
-          <a:lstStyle/>
-          <a:p>
-            <a:pPr algn="l">
-              <a:lnSpc>
-                <a:spcPct val="112000"/>
-              </a:lnSpc>
-              <a:spcAft>
-                <a:spcPts val="0"/>
-              </a:spcAft>
-              <a:buNone/>
-            </a:pPr>
-            <a:r>
-              <a:rPr sz="1800" b="0" lang="en-US">
-                <a:solidFill>
-                  <a:srgbClr val="303437"/>
-                </a:solidFill>
-                <a:latin typeface="Noto Sans"/>
-                <a:ea typeface="Noto Sans CJK JP"/>
-                <a:cs typeface="Noto Sans"/>
-              </a:rPr>
-              <a:t>Michigan unemployment claims workers are losing their jobs.</a:t>
-            </a:r>
-          </a:p>
-          <a:p>
-            <a:pPr algn="l">
-              <a:lnSpc>
-                <a:spcPct val="112000"/>
-              </a:lnSpc>
-              <a:spcAft>
-                <a:spcPts val="0"/>
-              </a:spcAft>
-              <a:buNone/>
-            </a:pPr>
-            <a:r>
-              <a:rPr sz="1800" b="0" lang="en-US">
-                <a:solidFill>
-                  <a:srgbClr val="303437"/>
-                </a:solidFill>
-                <a:latin typeface="Noto Sans"/>
-                <a:ea typeface="Noto Sans CJK JP"/>
-                <a:cs typeface="Noto Sans"/>
-              </a:rPr>
-              <a:t>NEW YORK (CNNMoney) -- Many jobless claims workers in the state of Michigan will soon be filing for unemployment themselves.</a:t>
-            </a:r>
-          </a:p>
-        </p:txBody>
-      </p:sp>
-      <p:sp>
-        <p:nvSpPr>
-          <p:cNvPr id="7" name="TextBox 6"/>
-          <p:cNvSpPr txBox="1"/>
-          <p:nvPr/>
-        </p:nvSpPr>
-        <p:spPr>
-          <a:xfrm>
-            <a:off x="548640" y="3077707"/>
-            <a:ext cx="8046720" cy="868680"/>
-          </a:xfrm>
-          <a:prstGeom prst="rect">
-            <a:avLst/>
-          </a:prstGeom>
-          <a:noFill/>
-        </p:spPr>
-        <p:txBody>
-          <a:bodyPr wrap="square" lIns="0" rIns="0" tIns="0" bIns="0">
-            <a:spAutoFit/>
-          </a:bodyPr>
-          <a:lstStyle/>
-          <a:p>
-            <a:pPr algn="l">
-              <a:lnSpc>
-                <a:spcPct val="112000"/>
-              </a:lnSpc>
-              <a:spcAft>
-                <a:spcPts val="0"/>
-              </a:spcAft>
-              <a:buNone/>
-            </a:pPr>
-            <a:r>
-              <a:rPr sz="2100" b="0" lang="ja-JP">
-                <a:solidFill>
-                  <a:srgbClr val="303437"/>
-                </a:solidFill>
-                <a:latin typeface="Noto Sans"/>
-                <a:ea typeface="Noto Sans CJK JP"/>
-                <a:cs typeface="Noto Sans"/>
-              </a:rPr>
-              <a:t>出来事や数量を述べる記事を学習する。同じ文書の後半には、関連記事や金利表も残っている [1]。</a:t>
-            </a:r>
-          </a:p>
-        </p:txBody>
-      </p:sp>
-      <p:sp>
-        <p:nvSpPr>
-          <p:cNvPr id="8" name="TextBox 7"/>
-          <p:cNvSpPr txBox="1"/>
-          <p:nvPr/>
-        </p:nvSpPr>
-        <p:spPr>
-          <a:xfrm>
-            <a:off x="548640" y="4773168"/>
-            <a:ext cx="8046720" cy="164592"/>
-          </a:xfrm>
-          <a:prstGeom prst="rect">
-            <a:avLst/>
-          </a:prstGeom>
-          <a:noFill/>
-        </p:spPr>
-        <p:txBody>
-          <a:bodyPr wrap="square" lIns="0" rIns="0" tIns="0" bIns="0">
-            <a:spAutoFit/>
-          </a:bodyPr>
-          <a:lstStyle/>
-          <a:p>
-            <a:pPr algn="l">
-              <a:lnSpc>
-                <a:spcPct val="112000"/>
-              </a:lnSpc>
-              <a:spcAft>
-                <a:spcPts val="0"/>
-              </a:spcAft>
-              <a:buNone/>
-            </a:pPr>
-            <a:r>
-              <a:rPr sz="800" b="0" lang="ja-JP">
-                <a:solidFill>
-                  <a:srgbClr val="626669"/>
-                </a:solidFill>
-                <a:latin typeface="Noto Sans"/>
-                <a:ea typeface="Noto Sans CJK JP"/>
-                <a:cs typeface="Noto Sans"/>
-              </a:rPr>
-              <a:t>row 16 / &lt;urn:uuid:67af6fe6-95e8-403c-821b-a7c16c3999bc&gt; / 647 GPT-2 tokens</a:t>
-            </a:r>
-          </a:p>
-        </p:txBody>
-      </p:sp>
-      <p:sp>
-        <p:nvSpPr>
-          <p:cNvPr id="9" name="TextBox 8"/>
-          <p:cNvSpPr txBox="1"/>
-          <p:nvPr/>
-        </p:nvSpPr>
-        <p:spPr>
-          <a:xfrm>
-            <a:off x="548640" y="4928616"/>
-            <a:ext cx="8046720" cy="155448"/>
-          </a:xfrm>
-          <a:prstGeom prst="rect">
-            <a:avLst/>
-          </a:prstGeom>
-          <a:noFill/>
-        </p:spPr>
-        <p:txBody>
-          <a:bodyPr wrap="none" lIns="0" rIns="0" tIns="0" bIns="0">
-            <a:spAutoFit/>
-          </a:bodyPr>
-          <a:lstStyle/>
-          <a:p>
-            <a:r>
-              <a:rPr sz="800" b="0" lang="ja-JP">
-                <a:solidFill>
-                  <a:srgbClr val="626669"/>
-                </a:solidFill>
-                <a:latin typeface="Noto Sans"/>
-                <a:ea typeface="Noto Sans CJK JP"/>
-                <a:cs typeface="Noto Sans"/>
-              </a:rPr>
-              <a:t>[1] FineWeb / sample-10BT  </a:t>
-            </a:r>
-            <a:r>
-              <a:rPr sz="800" b="0" lang="en-US">
-                <a:solidFill>
-                  <a:srgbClr val="626669"/>
-                </a:solidFill>
-                <a:latin typeface="Noto Sans"/>
-                <a:ea typeface="Noto Sans CJK JP"/>
-                <a:cs typeface="Noto Sans"/>
-                <a:hlinkClick r:id="rId2"/>
-              </a:rPr>
-              <a:t>https://huggingface.co/datasets/HuggingFaceFW/fineweb</a:t>
-            </a:r>
-          </a:p>
-        </p:txBody>
-      </p:sp>
-      <p:sp>
-        <p:nvSpPr>
-          <p:cNvPr id="10" name="TextBox 9"/>
-          <p:cNvSpPr txBox="1"/>
-          <p:nvPr/>
-        </p:nvSpPr>
-        <p:spPr>
-          <a:xfrm>
-            <a:off x="548640" y="4590288"/>
-            <a:ext cx="8046720" cy="164592"/>
-          </a:xfrm>
-          <a:prstGeom prst="rect">
-            <a:avLst/>
-          </a:prstGeom>
-          <a:noFill/>
-        </p:spPr>
-        <p:txBody>
-          <a:bodyPr wrap="square" lIns="0" rIns="0" tIns="0" bIns="0">
-            <a:spAutoFit/>
-          </a:bodyPr>
-          <a:lstStyle/>
-          <a:p>
-            <a:pPr algn="l">
-              <a:lnSpc>
-                <a:spcPct val="112000"/>
-              </a:lnSpc>
-              <a:spcAft>
-                <a:spcPts val="0"/>
-              </a:spcAft>
-              <a:buNone/>
-            </a:pPr>
-            <a:r>
-              <a:rPr sz="800" b="0" lang="ja-JP">
-                <a:solidFill>
-                  <a:srgbClr val="303437"/>
-                </a:solidFill>
-                <a:latin typeface="Noto Sans"/>
-                <a:ea typeface="Noto Sans CJK JP"/>
-                <a:cs typeface="Noto Sans"/>
-              </a:rPr>
-              <a:t/>
-            </a:r>
-            <a:r>
-              <a:rPr sz="800" b="0" lang="ja-JP">
-                <a:solidFill>
-                  <a:srgbClr val="626669"/>
-                </a:solidFill>
-                <a:latin typeface="Noto Sans"/>
-                <a:ea typeface="Noto Sans CJK JP"/>
-                <a:cs typeface="Noto Sans"/>
-              </a:rPr>
-              <a:t>元ページ  </a:t>
-            </a:r>
-            <a:r>
-              <a:rPr sz="800" b="0" lang="ja-JP">
-                <a:solidFill>
-                  <a:srgbClr val="626669"/>
-                </a:solidFill>
-                <a:latin typeface="Noto Sans"/>
-                <a:ea typeface="Noto Sans CJK JP"/>
-                <a:cs typeface="Noto Sans"/>
-                <a:hlinkClick r:id="rId3"/>
-              </a:rPr>
-              <a:t>http://money.cnn.com/2012/08/03/news/economy/michigan-unemployment/index.htm?section=money_topstories</a:t>
-            </a:r>
-          </a:p>
-        </p:txBody>
-      </p:sp>
-    </p:spTree>
-  </p:cSld>
-  <p:clrMapOvr>
-    <a:masterClrMapping/>
-  </p:clrMapOvr>
-</p:sld>
-</file>
-
-<file path=ppt/slides/slide80.xml><?xml version="1.0" encoding="utf-8"?>
+<file path=ppt/slides/slide79.xml><?xml version="1.0" encoding="utf-8"?>
 <p:sld xmlns:a="http://schemas.openxmlformats.org/drawingml/2006/main" xmlns:p="http://schemas.openxmlformats.org/presentationml/2006/main" xmlns:r="http://schemas.openxmlformats.org/officeDocument/2006/relationships">
   <p:cSld>
     <p:spTree>
@@ -43234,7 +42770,471 @@
 </p:sld>
 </file>
 
-<file path=ppt/slides/slide81.xml><?xml version="1.0" encoding="utf-8"?>
+<file path=ppt/slides/slide8.xml><?xml version="1.0" encoding="utf-8"?>
+<p:sld xmlns:a="http://schemas.openxmlformats.org/drawingml/2006/main" xmlns:p="http://schemas.openxmlformats.org/presentationml/2006/main" xmlns:r="http://schemas.openxmlformats.org/officeDocument/2006/relationships">
+  <p:cSld>
+    <p:spTree>
+      <p:nvGrpSpPr>
+        <p:cNvPr id="1" name=""/>
+        <p:cNvGrpSpPr/>
+        <p:nvPr/>
+      </p:nvGrpSpPr>
+      <p:grpSpPr/>
+      <p:sp>
+        <p:nvSpPr>
+          <p:cNvPr id="2" name="Title 1"/>
+          <p:cNvSpPr>
+            <a:spLocks noGrp="1"/>
+          </p:cNvSpPr>
+          <p:nvPr>
+            <p:ph type="title"/>
+          </p:nvPr>
+        </p:nvSpPr>
+        <p:spPr>
+          <a:xfrm>
+            <a:off x="548640" y="786384"/>
+            <a:ext cx="8046720" cy="502920"/>
+          </a:xfrm>
+        </p:spPr>
+        <p:txBody>
+          <a:bodyPr wrap="square" lIns="0" rIns="0" tIns="0" bIns="0"/>
+          <a:lstStyle/>
+          <a:p>
+            <a:pPr algn="l">
+              <a:lnSpc>
+                <a:spcPct val="112000"/>
+              </a:lnSpc>
+              <a:spcAft>
+                <a:spcPts val="0"/>
+              </a:spcAft>
+              <a:buNone/>
+            </a:pPr>
+            <a:r>
+              <a:rPr sz="2800" b="1" lang="ja-JP">
+                <a:solidFill>
+                  <a:srgbClr val="303437"/>
+                </a:solidFill>
+                <a:latin typeface="Noto Sans"/>
+                <a:ea typeface="Noto Sans CJK JP"/>
+                <a:cs typeface="Noto Sans"/>
+              </a:rPr>
+              <a:t>実例1：雇用を報じるニュース</a:t>
+            </a:r>
+          </a:p>
+        </p:txBody>
+      </p:sp>
+      <p:sp>
+        <p:nvSpPr>
+          <p:cNvPr id="3" name="Title 2"/>
+          <p:cNvSpPr>
+            <a:spLocks noGrp="1"/>
+          </p:cNvSpPr>
+          <p:nvPr>
+            <p:ph type="title" idx="2"/>
+          </p:nvPr>
+        </p:nvSpPr>
+        <p:spPr/>
+        <p:txBody>
+          <a:bodyPr wrap="square" lIns="0" rIns="0" tIns="0" bIns="0" anchor="ctr"/>
+          <a:lstStyle/>
+          <a:p>
+            <a:pPr algn="l">
+              <a:lnSpc>
+                <a:spcPct val="100000"/>
+              </a:lnSpc>
+              <a:spcBef>
+                <a:spcPts val="0"/>
+              </a:spcBef>
+              <a:spcAft>
+                <a:spcPts val="0"/>
+              </a:spcAft>
+              <a:buNone/>
+            </a:pPr>
+            <a:r>
+              <a:rPr sz="1400" b="1" lang="ja-JP">
+                <a:solidFill>
+                  <a:srgbClr val="FFFEF8"/>
+                </a:solidFill>
+                <a:latin typeface="Noto Sans"/>
+                <a:ea typeface="Noto Sans CJK JP"/>
+                <a:cs typeface="Noto Sans"/>
+              </a:rPr>
+              <a:t>1. FineWebの目的と収録文書</a:t>
+            </a:r>
+          </a:p>
+        </p:txBody>
+      </p:sp>
+      <p:sp>
+        <p:nvSpPr>
+          <p:cNvPr id="4" name="TextBox 3"/>
+          <p:cNvSpPr txBox="1"/>
+          <p:nvPr/>
+        </p:nvSpPr>
+        <p:spPr>
+          <a:xfrm>
+            <a:off x="548640" y="1399032"/>
+            <a:ext cx="8046720" cy="210312"/>
+          </a:xfrm>
+          <a:prstGeom prst="rect">
+            <a:avLst/>
+          </a:prstGeom>
+          <a:noFill/>
+        </p:spPr>
+        <p:txBody>
+          <a:bodyPr wrap="square" lIns="0" rIns="0" tIns="0" bIns="0">
+            <a:spAutoFit/>
+          </a:bodyPr>
+          <a:lstStyle/>
+          <a:p>
+            <a:pPr algn="l">
+              <a:lnSpc>
+                <a:spcPct val="112000"/>
+              </a:lnSpc>
+              <a:spcAft>
+                <a:spcPts val="0"/>
+              </a:spcAft>
+              <a:buNone/>
+            </a:pPr>
+            <a:r>
+              <a:rPr sz="1200" b="0" lang="ja-JP">
+                <a:solidFill>
+                  <a:srgbClr val="626669"/>
+                </a:solidFill>
+                <a:latin typeface="Noto Sans"/>
+                <a:ea typeface="Noto Sans CJK JP"/>
+                <a:cs typeface="Noto Sans"/>
+              </a:rPr>
+              <a:t>配布テキストからの抜粋（英語）</a:t>
+            </a:r>
+          </a:p>
+        </p:txBody>
+      </p:sp>
+      <p:sp>
+        <p:nvSpPr>
+          <p:cNvPr id="5" name="Rectangle 4"/>
+          <p:cNvSpPr/>
+          <p:nvPr/>
+        </p:nvSpPr>
+        <p:spPr>
+          <a:xfrm>
+            <a:off x="548640" y="1771194"/>
+            <a:ext cx="8046720" cy="1128712"/>
+          </a:xfrm>
+          <a:prstGeom prst="rect">
+            <a:avLst/>
+          </a:prstGeom>
+          <a:solidFill>
+            <a:srgbClr val="EBEDEB"/>
+          </a:solidFill>
+          <a:ln>
+            <a:noFill/>
+          </a:ln>
+          <a:effectLst/>
+        </p:spPr>
+        <p:style>
+          <a:lnRef idx="1">
+            <a:schemeClr val="accent1"/>
+          </a:lnRef>
+          <a:fillRef idx="3">
+            <a:schemeClr val="accent1"/>
+          </a:fillRef>
+          <a:effectRef idx="0">
+            <a:schemeClr val="accent1"/>
+          </a:effectRef>
+          <a:fontRef idx="minor">
+            <a:schemeClr val="lt1"/>
+          </a:fontRef>
+        </p:style>
+        <p:txBody>
+          <a:bodyPr rtlCol="0" anchor="ctr"/>
+          <a:lstStyle/>
+          <a:p>
+            <a:pPr algn="ctr"/>
+          </a:p>
+        </p:txBody>
+      </p:sp>
+      <p:sp>
+        <p:nvSpPr>
+          <p:cNvPr id="6" name="TextBox 5"/>
+          <p:cNvSpPr txBox="1"/>
+          <p:nvPr/>
+        </p:nvSpPr>
+        <p:spPr>
+          <a:xfrm>
+            <a:off x="722376" y="1856231"/>
+            <a:ext cx="7699248" cy="1828800"/>
+          </a:xfrm>
+          <a:prstGeom prst="rect">
+            <a:avLst/>
+          </a:prstGeom>
+          <a:noFill/>
+        </p:spPr>
+        <p:txBody>
+          <a:bodyPr wrap="square" lIns="0" rIns="0" tIns="0" bIns="0">
+            <a:spAutoFit/>
+          </a:bodyPr>
+          <a:lstStyle/>
+          <a:p>
+            <a:pPr algn="l">
+              <a:lnSpc>
+                <a:spcPct val="112000"/>
+              </a:lnSpc>
+              <a:spcAft>
+                <a:spcPts val="0"/>
+              </a:spcAft>
+              <a:buNone/>
+            </a:pPr>
+            <a:r>
+              <a:rPr sz="1800" b="0" lang="en-US">
+                <a:solidFill>
+                  <a:srgbClr val="303437"/>
+                </a:solidFill>
+                <a:latin typeface="Noto Sans"/>
+                <a:ea typeface="Noto Sans CJK JP"/>
+                <a:cs typeface="Noto Sans"/>
+              </a:rPr>
+              <a:t>Michigan unemployment claims workers are losing their jobs.</a:t>
+            </a:r>
+          </a:p>
+          <a:p>
+            <a:pPr algn="l">
+              <a:lnSpc>
+                <a:spcPct val="112000"/>
+              </a:lnSpc>
+              <a:spcAft>
+                <a:spcPts val="0"/>
+              </a:spcAft>
+              <a:buNone/>
+            </a:pPr>
+            <a:r>
+              <a:rPr sz="1800" b="0" lang="en-US">
+                <a:solidFill>
+                  <a:srgbClr val="303437"/>
+                </a:solidFill>
+                <a:latin typeface="Noto Sans"/>
+                <a:ea typeface="Noto Sans CJK JP"/>
+                <a:cs typeface="Noto Sans"/>
+              </a:rPr>
+              <a:t>NEW YORK (CNNMoney) -- Many jobless claims workers in the state of Michigan will soon be filing for unemployment themselves.</a:t>
+            </a:r>
+          </a:p>
+        </p:txBody>
+      </p:sp>
+      <p:sp>
+        <p:nvSpPr>
+          <p:cNvPr id="7" name="TextBox 6"/>
+          <p:cNvSpPr txBox="1"/>
+          <p:nvPr/>
+        </p:nvSpPr>
+        <p:spPr>
+          <a:xfrm>
+            <a:off x="548640" y="3077707"/>
+            <a:ext cx="8046720" cy="868680"/>
+          </a:xfrm>
+          <a:prstGeom prst="rect">
+            <a:avLst/>
+          </a:prstGeom>
+          <a:noFill/>
+        </p:spPr>
+        <p:txBody>
+          <a:bodyPr wrap="square" lIns="0" rIns="0" tIns="0" bIns="0">
+            <a:spAutoFit/>
+          </a:bodyPr>
+          <a:lstStyle/>
+          <a:p>
+            <a:pPr algn="l">
+              <a:lnSpc>
+                <a:spcPct val="112000"/>
+              </a:lnSpc>
+              <a:spcAft>
+                <a:spcPts val="0"/>
+              </a:spcAft>
+              <a:buNone/>
+            </a:pPr>
+            <a:r>
+              <a:rPr sz="2100" b="0" lang="ja-JP">
+                <a:solidFill>
+                  <a:srgbClr val="303437"/>
+                </a:solidFill>
+                <a:latin typeface="Noto Sans"/>
+                <a:ea typeface="Noto Sans CJK JP"/>
+                <a:cs typeface="Noto Sans"/>
+              </a:rPr>
+              <a:t>出来事や数量を述べる記事を学習する。同じ文書の後半には、関連記事や金利表も残っている [1]。</a:t>
+            </a:r>
+          </a:p>
+        </p:txBody>
+      </p:sp>
+      <p:sp>
+        <p:nvSpPr>
+          <p:cNvPr id="8" name="TextBox 7"/>
+          <p:cNvSpPr txBox="1"/>
+          <p:nvPr/>
+        </p:nvSpPr>
+        <p:spPr>
+          <a:xfrm>
+            <a:off x="548640" y="4773168"/>
+            <a:ext cx="8046720" cy="164592"/>
+          </a:xfrm>
+          <a:prstGeom prst="rect">
+            <a:avLst/>
+          </a:prstGeom>
+          <a:noFill/>
+        </p:spPr>
+        <p:txBody>
+          <a:bodyPr wrap="square" lIns="0" rIns="0" tIns="0" bIns="0">
+            <a:spAutoFit/>
+          </a:bodyPr>
+          <a:lstStyle/>
+          <a:p>
+            <a:pPr algn="l">
+              <a:lnSpc>
+                <a:spcPct val="112000"/>
+              </a:lnSpc>
+              <a:spcAft>
+                <a:spcPts val="0"/>
+              </a:spcAft>
+              <a:buNone/>
+            </a:pPr>
+            <a:r>
+              <a:rPr sz="800" b="0" lang="ja-JP">
+                <a:solidFill>
+                  <a:srgbClr val="626669"/>
+                </a:solidFill>
+                <a:latin typeface="Noto Sans"/>
+                <a:ea typeface="Noto Sans CJK JP"/>
+                <a:cs typeface="Noto Sans"/>
+              </a:rPr>
+              <a:t>row 16 / &lt;urn:uuid:67af6fe6-95e8-403c-821b-a7c16c3999bc&gt; / 647 GPT-2 tokens</a:t>
+            </a:r>
+          </a:p>
+        </p:txBody>
+      </p:sp>
+      <p:sp>
+        <p:nvSpPr>
+          <p:cNvPr id="9" name="TextBox 8"/>
+          <p:cNvSpPr txBox="1"/>
+          <p:nvPr/>
+        </p:nvSpPr>
+        <p:spPr>
+          <a:xfrm>
+            <a:off x="548640" y="4928616"/>
+            <a:ext cx="8046720" cy="155448"/>
+          </a:xfrm>
+          <a:prstGeom prst="rect">
+            <a:avLst/>
+          </a:prstGeom>
+          <a:noFill/>
+        </p:spPr>
+        <p:txBody>
+          <a:bodyPr wrap="none" lIns="0" rIns="0" tIns="0" bIns="0">
+            <a:spAutoFit/>
+          </a:bodyPr>
+          <a:lstStyle/>
+          <a:p>
+            <a:r>
+              <a:rPr sz="800" b="0" lang="ja-JP">
+                <a:solidFill>
+                  <a:srgbClr val="626669"/>
+                </a:solidFill>
+                <a:latin typeface="Noto Sans"/>
+                <a:ea typeface="Noto Sans CJK JP"/>
+                <a:cs typeface="Noto Sans"/>
+              </a:rPr>
+              <a:t>[1] FineWeb / sample-10BT  </a:t>
+            </a:r>
+            <a:r>
+              <a:rPr sz="800" b="0" lang="en-US">
+                <a:solidFill>
+                  <a:srgbClr val="626669"/>
+                </a:solidFill>
+                <a:latin typeface="Noto Sans"/>
+                <a:ea typeface="Noto Sans CJK JP"/>
+                <a:cs typeface="Noto Sans"/>
+                <a:hlinkClick r:id="rId2"/>
+              </a:rPr>
+              <a:t>https://huggingface.co/datasets/HuggingFaceFW/fineweb</a:t>
+            </a:r>
+          </a:p>
+        </p:txBody>
+      </p:sp>
+      <p:sp>
+        <p:nvSpPr>
+          <p:cNvPr id="10" name="TextBox 9"/>
+          <p:cNvSpPr txBox="1"/>
+          <p:nvPr/>
+        </p:nvSpPr>
+        <p:spPr>
+          <a:xfrm>
+            <a:off x="548640" y="4590288"/>
+            <a:ext cx="8046720" cy="164592"/>
+          </a:xfrm>
+          <a:prstGeom prst="rect">
+            <a:avLst/>
+          </a:prstGeom>
+          <a:noFill/>
+        </p:spPr>
+        <p:txBody>
+          <a:bodyPr wrap="square" lIns="0" rIns="0" tIns="0" bIns="0">
+            <a:spAutoFit/>
+          </a:bodyPr>
+          <a:lstStyle/>
+          <a:p>
+            <a:pPr algn="l">
+              <a:lnSpc>
+                <a:spcPct val="112000"/>
+              </a:lnSpc>
+              <a:spcAft>
+                <a:spcPts val="0"/>
+              </a:spcAft>
+              <a:buNone/>
+            </a:pPr>
+            <a:r>
+              <a:rPr sz="800" b="0" lang="ja-JP">
+                <a:solidFill>
+                  <a:srgbClr val="303437"/>
+                </a:solidFill>
+                <a:latin typeface="Noto Sans"/>
+                <a:ea typeface="Noto Sans CJK JP"/>
+                <a:cs typeface="Noto Sans"/>
+              </a:rPr>
+              <a:t/>
+            </a:r>
+            <a:r>
+              <a:rPr sz="800" b="0" lang="ja-JP">
+                <a:solidFill>
+                  <a:srgbClr val="626669"/>
+                </a:solidFill>
+                <a:latin typeface="Noto Sans"/>
+                <a:ea typeface="Noto Sans CJK JP"/>
+                <a:cs typeface="Noto Sans"/>
+              </a:rPr>
+              <a:t>元ページ  </a:t>
+            </a:r>
+            <a:r>
+              <a:rPr sz="800" b="0" lang="ja-JP">
+                <a:solidFill>
+                  <a:srgbClr val="626669"/>
+                </a:solidFill>
+                <a:latin typeface="Noto Sans"/>
+                <a:ea typeface="Noto Sans CJK JP"/>
+                <a:cs typeface="Noto Sans"/>
+                <a:hlinkClick r:id="rId3"/>
+              </a:rPr>
+              <a:t>http://money.cnn.com/2012/08/03/news/economy/michigan-unemployment/index.htm?section=money_topstories</a:t>
+            </a:r>
+          </a:p>
+        </p:txBody>
+      </p:sp>
+    </p:spTree>
+  </p:cSld>
+  <p:clrMapOvr>
+    <a:masterClrMapping/>
+  </p:clrMapOvr>
+</p:sld>
+</file>
+
+<file path=ppt/slides/slide80.xml><?xml version="1.0" encoding="utf-8"?>
 <p:sld xmlns:a="http://schemas.openxmlformats.org/drawingml/2006/main" xmlns:p="http://schemas.openxmlformats.org/presentationml/2006/main" xmlns:r="http://schemas.openxmlformats.org/officeDocument/2006/relationships">
   <p:cSld>
     <p:spTree>
@@ -43537,7 +43537,7 @@
 </p:sld>
 </file>
 
-<file path=ppt/slides/slide82.xml><?xml version="1.0" encoding="utf-8"?>
+<file path=ppt/slides/slide81.xml><?xml version="1.0" encoding="utf-8"?>
 <p:sld xmlns:a="http://schemas.openxmlformats.org/drawingml/2006/main" xmlns:p="http://schemas.openxmlformats.org/presentationml/2006/main" xmlns:r="http://schemas.openxmlformats.org/officeDocument/2006/relationships">
   <p:cSld>
     <p:spTree>
@@ -44066,7 +44066,7 @@
 </p:sld>
 </file>
 
-<file path=ppt/slides/slide83.xml><?xml version="1.0" encoding="utf-8"?>
+<file path=ppt/slides/slide82.xml><?xml version="1.0" encoding="utf-8"?>
 <p:sld xmlns:a="http://schemas.openxmlformats.org/drawingml/2006/main" xmlns:p="http://schemas.openxmlformats.org/presentationml/2006/main" xmlns:r="http://schemas.openxmlformats.org/officeDocument/2006/relationships">
   <p:cSld>
     <p:spTree>
@@ -44595,7 +44595,7 @@
 </p:sld>
 </file>
 
-<file path=ppt/slides/slide84.xml><?xml version="1.0" encoding="utf-8"?>
+<file path=ppt/slides/slide83.xml><?xml version="1.0" encoding="utf-8"?>
 <p:sld xmlns:a="http://schemas.openxmlformats.org/drawingml/2006/main" xmlns:p="http://schemas.openxmlformats.org/presentationml/2006/main" xmlns:r="http://schemas.openxmlformats.org/officeDocument/2006/relationships">
   <p:cSld>
     <p:spTree>
@@ -45124,7 +45124,7 @@
 </p:sld>
 </file>
 
-<file path=ppt/slides/slide85.xml><?xml version="1.0" encoding="utf-8"?>
+<file path=ppt/slides/slide84.xml><?xml version="1.0" encoding="utf-8"?>
 <p:sld xmlns:a="http://schemas.openxmlformats.org/drawingml/2006/main" xmlns:p="http://schemas.openxmlformats.org/presentationml/2006/main" xmlns:r="http://schemas.openxmlformats.org/officeDocument/2006/relationships">
   <p:cSld>
     <p:spTree>
@@ -45653,7 +45653,7 @@
 </p:sld>
 </file>
 
-<file path=ppt/slides/slide86.xml><?xml version="1.0" encoding="utf-8"?>
+<file path=ppt/slides/slide85.xml><?xml version="1.0" encoding="utf-8"?>
 <p:sld xmlns:a="http://schemas.openxmlformats.org/drawingml/2006/main" xmlns:p="http://schemas.openxmlformats.org/presentationml/2006/main" xmlns:r="http://schemas.openxmlformats.org/officeDocument/2006/relationships">
   <p:cSld>
     <p:spTree>

--- a/slides/datasets-in-10-minutes-fineweb.pptx
+++ b/slides/datasets-in-10-minutes-fineweb.pptx
@@ -9395,7 +9395,7 @@
                 <a:ea typeface="Noto Sans CJK JP"/>
                 <a:cs typeface="Noto Sans"/>
               </a:rPr>
-              <a:t>そこで、反復の多さや書式など、別の品質規則を重ねて適用する。</a:t>
+              <a:t>その上で、反復の多さや書式など、別の品質規則を重ねて適用する。</a:t>
             </a:r>
           </a:p>
         </p:txBody>
@@ -9622,7 +9622,7 @@
                 <a:ea typeface="Noto Sans CJK JP"/>
                 <a:cs typeface="Noto Sans"/>
               </a:rPr>
-              <a:t>既存のGopher・C4の規則を調整し、さらにFineWeb固有の規則を追加する。各規則の効果を学習実験で比べた。</a:t>
+              <a:t>既存のGopher・C4の規則を調整し、さらにFineWeb固有の規則を追加した。各規則の効果を学習実験で比べた。</a:t>
             </a:r>
           </a:p>
         </p:txBody>
@@ -10683,7 +10683,7 @@
                 <a:ea typeface="Noto Sans CJK JP"/>
                 <a:cs typeface="Noto Sans"/>
               </a:rPr>
-              <a:t>FineWebの公開範囲とトークン数</a:t>
+              <a:t>FineWebの公開区分とトークン数</a:t>
             </a:r>
           </a:p>
         </p:txBody>
@@ -10776,7 +10776,7 @@
                           <a:ea typeface="Noto Sans CJK JP"/>
                           <a:cs typeface="Noto Sans"/>
                         </a:rPr>
-                        <a:t>範囲</a:t>
+                        <a:t>区分</a:t>
                       </a:r>
                     </a:p>
                   </a:txBody>
@@ -12311,7 +12311,7 @@
                 <a:ea typeface="Noto Sans CJK JP"/>
                 <a:cs typeface="Noto Sans"/>
               </a:rPr>
-              <a:t>[2] FineWeb2公式リポジトリ  </a:t>
+              <a:t/>
             </a:r>
             <a:r>
               <a:rPr sz="800" b="0" lang="en-US">
@@ -12323,7 +12323,7 @@
                 <a:cs typeface="Noto Sans"/>
                 <a:hlinkClick r:id="rId3"/>
               </a:rPr>
-              <a:t>https://github.com/huggingface/fineweb-2</a:t>
+              <a:t/>
             </a:r>
           </a:p>
         </p:txBody>
@@ -13045,7 +13045,7 @@
                 <a:ea typeface="Noto Sans CJK JP"/>
                 <a:cs typeface="Noto Sans"/>
               </a:rPr>
-              <a:t>処理の比較は主に約1.8Bパラメータ・約28Bトークン。大きな比較は350Bトークンを使う。</a:t>
+              <a:t>処理の比較は主に約1.8Bパラメータ・約28Bトークンで行い、大規模な比較には350Bトークンを使う。</a:t>
             </a:r>
           </a:p>
         </p:txBody>
@@ -15228,7 +15228,7 @@
                           <a:ea typeface="Noto Sans CJK JP"/>
                           <a:cs typeface="Noto Sans"/>
                         </a:rPr>
-                        <a:t>原著v2の比較</a:t>
+                        <a:t>評価指標</a:t>
                       </a:r>
                     </a:p>
                   </a:txBody>
@@ -15683,7 +15683,7 @@
                 <a:ea typeface="Noto Sans CJK JP"/>
                 <a:cs typeface="Noto Sans"/>
               </a:rPr>
-              <a:t>原著v2の1.71Bモデル・350Bトークンの比較 [1]。</a:t>
+              <a:t>原著v2における1.71Bモデル・350Bトークンでの比較 [1]。</a:t>
             </a:r>
           </a:p>
         </p:txBody>
@@ -15884,7 +15884,7 @@
                           <a:ea typeface="Noto Sans CJK JP"/>
                           <a:cs typeface="Noto Sans"/>
                         </a:rPr>
-                        <a:t>原著v2の構成</a:t>
+                        <a:t>構成項目</a:t>
                       </a:r>
                     </a:p>
                   </a:txBody>
@@ -16080,7 +16080,7 @@
                           <a:ea typeface="Noto Sans CJK JP"/>
                           <a:cs typeface="Noto Sans"/>
                         </a:rPr>
-                        <a:t>文脈長 / 区切り方</a:t>
+                        <a:t>文脈長 / トークナイザー</a:t>
                       </a:r>
                     </a:p>
                   </a:txBody>
@@ -17061,7 +17061,7 @@
                 <a:ea typeface="Noto Sans CJK JP"/>
                 <a:cs typeface="Noto Sans"/>
               </a:rPr>
-              <a:t>図18は構成比の差の絶対値が0.5ポイント以上の39分類を示す [1]。</a:t>
+              <a:t>原著の図18は、構成比の差の絶対値が0.5ポイント以上の39分類を示す [1]。</a:t>
             </a:r>
           </a:p>
         </p:txBody>
@@ -17504,7 +17504,7 @@
                           <a:ea typeface="Noto Sans CJK JP"/>
                           <a:cs typeface="Noto Sans"/>
                         </a:rPr>
-                        <a:t>FineWebとの関係</a:t>
+                        <a:t>開発目的・位置付け</a:t>
                       </a:r>
                     </a:p>
                   </a:txBody>
@@ -18066,7 +18066,7 @@
                           <a:ea typeface="Noto Sans CJK JP"/>
                           <a:cs typeface="Noto Sans"/>
                         </a:rPr>
-                        <a:t>1,000超の言語へ処理を適応</a:t>
+                        <a:t>1,000超の言語へ処理を適用</a:t>
                       </a:r>
                     </a:p>
                   </a:txBody>
@@ -21176,7 +21176,7 @@
                           <a:ea typeface="Noto Sans CJK JP"/>
                           <a:cs typeface="Noto Sans"/>
                         </a:rPr>
-                        <a:t>小規模に取り出したトークン量のサンプル</a:t>
+                        <a:t>トークン量別の小規模サンプル</a:t>
                       </a:r>
                     </a:p>
                   </a:txBody>
@@ -22096,7 +22096,7 @@
                 <a:ea typeface="Noto Sans CJK JP"/>
                 <a:cs typeface="Noto Sans"/>
               </a:rPr>
-              <a:t>データと処理の比較実験を公開した点が特徴。初版15兆、現行カードは約18.5兆トークンを示す。</a:t>
+              <a:t>データと処理の比較実験も公開。初版は15兆、現行カードは約18.5兆トークンを示す。</a:t>
             </a:r>
           </a:p>
           <a:p>
@@ -23844,7 +23844,7 @@
                 <a:ea typeface="Noto Sans CJK JP"/>
                 <a:cs typeface="Noto Sans"/>
               </a:rPr>
-              <a:t>FineWeb-Eduには教育的価値のscore / int_scoreも付く [1, 2]。</a:t>
+              <a:t>FineWeb-Eduには教育的価値のscore / int_scoreも付与される [1, 2]。</a:t>
             </a:r>
           </a:p>
         </p:txBody>
@@ -26604,7 +26604,7 @@
                 <a:ea typeface="Noto Sans CJK JP"/>
                 <a:cs typeface="Noto Sans"/>
               </a:rPr>
-              <a:t>感情的な発言、固有名、顔文字が含まれる。会話的なWeb文も事前学習の対象になる [1]。</a:t>
+              <a:t>抜粋には感情的な発言や固有名が含まれる。会話的なWeb文も事前学習の対象になる [1]。</a:t>
             </a:r>
           </a:p>
         </p:txBody>
@@ -28438,7 +28438,7 @@
                 <a:ea typeface="Noto Sans CJK JP"/>
                 <a:cs typeface="Noto Sans"/>
               </a:rPr>
-              <a:t>チョコレートとチーズを組み合わせた商品について、ブランド名や発売の説明が載る [1]。</a:t>
+              <a:t>チョコレートとチーズを組み合わせた商品について、ブランド名や発売に関する説明が載る [1]。</a:t>
             </a:r>
           </a:p>
         </p:txBody>
@@ -31949,7 +31949,7 @@
                 <a:ea typeface="Noto Sans CJK JP"/>
                 <a:cs typeface="Noto Sans"/>
               </a:rPr>
-              <a:t>文書を英単語の5-gramへ分け、112個のハッシュを14組×8個にまとめる [1]。</a:t>
+              <a:t>文書を英単語の5-gramに分解し、112個のハッシュを14組×8個にまとめる [1]。</a:t>
             </a:r>
           </a:p>
           <a:p>
@@ -34261,7 +34261,7 @@
                 <a:ea typeface="Noto Sans CJK JP"/>
                 <a:cs typeface="Noto Sans"/>
               </a:rPr>
-              <a:t>配布token_countはGPT-2で数える [2]。</a:t>
+              <a:t>配布データのtoken_countはGPT-2で算出されている [2]。</a:t>
             </a:r>
           </a:p>
         </p:txBody>
@@ -40398,7 +40398,7 @@
                           <a:ea typeface="Noto Sans CJK JP"/>
                           <a:cs typeface="Noto Sans"/>
                         </a:rPr>
-                        <a:t>版 / 公開日</a:t>
+                        <a:t>バージョン / 公開日</a:t>
                       </a:r>
                     </a:p>
                   </a:txBody>
@@ -45348,7 +45348,7 @@
                 <a:ea typeface="Noto Sans CJK JP"/>
                 <a:cs typeface="Noto Sans"/>
               </a:rPr>
-              <a:t>FineWeb-Eduを合成教材とコードへ混ぜた、小規模言語モデルの開発記録。</a:t>
+              <a:t>FineWeb-Eduを合成教材やコードと混ぜた、小規模言語モデルの開発記録。</a:t>
             </a:r>
           </a:p>
         </p:txBody>

--- a/slides/datasets-in-10-minutes-fineweb.pptx
+++ b/slides/datasets-in-10-minutes-fineweb.pptx
@@ -9168,7 +9168,7 @@
                 <a:ea typeface="Noto Sans CJK JP"/>
                 <a:cs typeface="Noto Sans"/>
               </a:rPr>
-              <a:t>原著ではWETにメニューや定型文が多く残ることを確認し、WARCからTrafilaturaという本文抽出器で取り出した。</a:t>
+              <a:t>構築時にはWETにメニューや定型文が多く残ることを確認し、WARCからTrafilaturaという本文抽出器で取り出した。</a:t>
             </a:r>
           </a:p>
         </p:txBody>
@@ -10925,7 +10925,7 @@
                           <a:ea typeface="Noto Sans CJK JP"/>
                           <a:cs typeface="Noto Sans"/>
                         </a:rPr>
-                        <a:t>原著のFineWeb（2024）</a:t>
+                        <a:t>2024年のFineWeb</a:t>
                       </a:r>
                     </a:p>
                   </a:txBody>
@@ -11205,7 +11205,7 @@
                           <a:ea typeface="Noto Sans CJK JP"/>
                           <a:cs typeface="Noto Sans"/>
                         </a:rPr>
-                        <a:t>原著のFineWeb-Edu</a:t>
+                        <a:t>2024年のFineWeb-Edu</a:t>
                       </a:r>
                     </a:p>
                   </a:txBody>
@@ -11368,7 +11368,7 @@
                 <a:ea typeface="Noto Sans CJK JP"/>
                 <a:cs typeface="Noto Sans"/>
               </a:rPr>
-              <a:t>GPT-2で算定。原著は2013〜2024-04、現行設定は2025-06まで。Eduは原著の96クロールから選別 [1, 2]。</a:t>
+              <a:t>GPT-2で算定。論文の収集範囲は2013〜2024-04、現行設定は2025-06まで。Eduは同じ96クロールから選別 [1, 2]。</a:t>
             </a:r>
           </a:p>
         </p:txBody>
@@ -12321,7 +12321,6 @@
                 <a:latin typeface="Noto Sans"/>
                 <a:ea typeface="Noto Sans CJK JP"/>
                 <a:cs typeface="Noto Sans"/>
-                <a:hlinkClick r:id="rId3"/>
               </a:rPr>
               <a:t/>
             </a:r>
@@ -12433,7 +12432,7 @@
                 <a:ea typeface="Noto Sans CJK JP"/>
                 <a:cs typeface="Noto Sans"/>
               </a:rPr>
-              <a:t>46万文書をLLMで採点し、教育的な有用性の注釈を得る。原著は小中学校程度の知識を重視した [1]。</a:t>
+              <a:t>46万文書をLLMで採点し、教育的な有用性の注釈を得る。選別では小中学校程度の知識を重視した [1]。</a:t>
             </a:r>
           </a:p>
           <a:p>
@@ -13887,7 +13886,7 @@
                 <a:ea typeface="Noto Sans CJK JP"/>
                 <a:cs typeface="Noto Sans"/>
               </a:rPr>
-              <a:t>正解率 = 正解数 ÷ 設問数。この2問なら50%。原著では選択肢全文の尤度や長さ正規化を用い、複数課題を集計する [1]。</a:t>
+              <a:t>正解率 = 正解数 ÷ 設問数。この2問なら50%。公開時の評価では選択肢全文の尤度や長さ正規化を用い、複数課題を集計する [1]。</a:t>
             </a:r>
           </a:p>
         </p:txBody>
@@ -13996,7 +13995,7 @@
                 <a:ea typeface="Noto Sans CJK JP"/>
                 <a:cs typeface="Noto Sans"/>
               </a:rPr>
-              <a:t>原著で採用した知識・推論の評価課題</a:t>
+              <a:t>公開時に採用した知識・推論の評価課題</a:t>
             </a:r>
           </a:p>
         </p:txBody>
@@ -15683,7 +15682,7 @@
                 <a:ea typeface="Noto Sans CJK JP"/>
                 <a:cs typeface="Noto Sans"/>
               </a:rPr>
-              <a:t>原著v2における1.71Bモデル・350Bトークンでの比較 [1]。</a:t>
+              <a:t>論文バージョン2の1.71Bモデル・350Bトークンでの比較 [1]。</a:t>
             </a:r>
           </a:p>
         </p:txBody>
@@ -15792,7 +15791,7 @@
                 <a:ea typeface="Noto Sans CJK JP"/>
                 <a:cs typeface="Noto Sans"/>
               </a:rPr>
-              <a:t>原著の比較実験に用いたモデル構成</a:t>
+              <a:t>公開時の比較実験に用いたモデル構成</a:t>
             </a:r>
           </a:p>
         </p:txBody>
@@ -16798,7 +16797,7 @@
                 <a:ea typeface="Noto Sans CJK JP"/>
                 <a:cs typeface="Noto Sans"/>
               </a:rPr>
-              <a:t>原著掲載39分類から、増加側・減少側の上位3分類ずつを例示 [1]。</a:t>
+              <a:t>話題分析の39分類から、増加側・減少側の上位3分類ずつを例示 [1]。</a:t>
             </a:r>
           </a:p>
         </p:txBody>
@@ -17061,7 +17060,7 @@
                 <a:ea typeface="Noto Sans CJK JP"/>
                 <a:cs typeface="Noto Sans"/>
               </a:rPr>
-              <a:t>原著の図18は、構成比の差の絶対値が0.5ポイント以上の39分類を示す [1]。</a:t>
+              <a:t>Penedoら（2024）の図18は、構成比の差の絶対値が0.5ポイント以上の39分類を示す [1]。</a:t>
             </a:r>
           </a:p>
         </p:txBody>
@@ -31750,7 +31749,7 @@
                 <a:ea typeface="Noto Sans CJK JP"/>
                 <a:cs typeface="Noto Sans"/>
               </a:rPr>
-              <a:t>原著はWETにメニューなどが多く残ることを確認し、WARCからTrafilaturaで本文を抽出した。</a:t>
+              <a:t>構築時にはWETにメニューなどが多く残ることを確認し、WARCからTrafilaturaで本文を抽出した。</a:t>
             </a:r>
           </a:p>
         </p:txBody>
@@ -32247,7 +32246,7 @@
                           <a:ea typeface="Noto Sans CJK JP"/>
                           <a:cs typeface="Noto Sans"/>
                         </a:rPr>
-                        <a:t>原著v2の設定</a:t>
+                        <a:t>論文第2版の設定</a:t>
                       </a:r>
                     </a:p>
                   </a:txBody>
@@ -32743,7 +32742,7 @@
                 <a:ea typeface="Noto Sans CJK JP"/>
                 <a:cs typeface="Noto Sans"/>
               </a:rPr>
-              <a:t>原著は460k注釈、初期カードは500k表記 [1, 2]。</a:t>
+              <a:t>論文では460k件、初期カードでは500k件の注釈と表記 [1, 2]。</a:t>
             </a:r>
           </a:p>
         </p:txBody>
@@ -32900,7 +32899,7 @@
                 <a:ea typeface="Noto Sans CJK JP"/>
                 <a:cs typeface="Noto Sans"/>
               </a:rPr>
-              <a:t>初期公開CSVと原著v2の評価条件</a:t>
+              <a:t>初期公開CSVと論文バージョン2の評価条件</a:t>
             </a:r>
           </a:p>
         </p:txBody>
@@ -32977,7 +32976,7 @@
                 <a:ea typeface="Noto Sans CJK JP"/>
                 <a:cs typeface="Noto Sans"/>
               </a:rPr>
-              <a:t>FineWeb-EduのMMLU・ARC比較には、原著v2本文の丸め値を使用した [2]。</a:t>
+              <a:t>FineWeb-EduのMMLU・ARC比較には、論文バージョン2本文の丸め値を使用した [2]。</a:t>
             </a:r>
           </a:p>
         </p:txBody>
@@ -33276,7 +33275,7 @@
                           <a:ea typeface="Noto Sans CJK JP"/>
                           <a:cs typeface="Noto Sans"/>
                         </a:rPr>
-                        <a:t>話題（原著ラベルの和訳）</a:t>
+                        <a:t>話題（掲載ラベルの和訳）</a:t>
                       </a:r>
                     </a:p>
                   </a:txBody>
@@ -34257,7 +34256,7 @@
                           <a:ea typeface="Noto Sans CJK JP"/>
                           <a:cs typeface="Noto Sans"/>
                         </a:rPr>
-                        <a:t>話題（原著ラベルの和訳）</a:t>
+                        <a:t>話題（掲載ラベルの和訳）</a:t>
                       </a:r>
                     </a:p>
                   </a:txBody>
@@ -35541,7 +35540,7 @@
                           <a:ea typeface="Noto Sans CJK JP"/>
                           <a:cs typeface="Noto Sans"/>
                         </a:rPr>
-                        <a:t>話題（原著ラベルの和訳）</a:t>
+                        <a:t>話題（掲載ラベルの和訳）</a:t>
                       </a:r>
                     </a:p>
                   </a:txBody>
@@ -36522,7 +36521,7 @@
                           <a:ea typeface="Noto Sans CJK JP"/>
                           <a:cs typeface="Noto Sans"/>
                         </a:rPr>
-                        <a:t>話題（原著ラベルの和訳）</a:t>
+                        <a:t>話題（掲載ラベルの和訳）</a:t>
                       </a:r>
                     </a:p>
                   </a:txBody>
@@ -37503,7 +37502,7 @@
                           <a:ea typeface="Noto Sans CJK JP"/>
                           <a:cs typeface="Noto Sans"/>
                         </a:rPr>
-                        <a:t>話題（原著ラベルの和訳）</a:t>
+                        <a:t>話題（掲載ラベルの和訳）</a:t>
                       </a:r>
                     </a:p>
                   </a:txBody>
@@ -38484,7 +38483,7 @@
                           <a:ea typeface="Noto Sans CJK JP"/>
                           <a:cs typeface="Noto Sans"/>
                         </a:rPr>
-                        <a:t>話題（原著ラベルの和訳）</a:t>
+                        <a:t>話題（掲載ラベルの和訳）</a:t>
                       </a:r>
                     </a:p>
                   </a:txBody>
@@ -39465,7 +39464,7 @@
                           <a:ea typeface="Noto Sans CJK JP"/>
                           <a:cs typeface="Noto Sans"/>
                         </a:rPr>
-                        <a:t>話題（原著ラベルの和訳）</a:t>
+                        <a:t>話題（掲載ラベルの和訳）</a:t>
                       </a:r>
                     </a:p>
                   </a:txBody>
@@ -40100,7 +40099,7 @@
                 <a:ea typeface="Noto Sans CJK JP"/>
                 <a:cs typeface="Noto Sans"/>
               </a:rPr>
-              <a:t>原著の話題分析では、FineWebとEduから各50,000件を埋め込み、100個の密なクラスタを比較した [1]。</a:t>
+              <a:t>話題分析では、FineWebとEduから各50,000件を埋め込み、100個の密なクラスタを比較した [1]。</a:t>
             </a:r>
           </a:p>
           <a:p>
@@ -43331,7 +43330,7 @@
                 <a:ea typeface="Noto Sans CJK JP"/>
                 <a:cs typeface="Noto Sans"/>
               </a:rPr>
-              <a:t>Guilherme Penedoが第一著者、Thomas Wolfが最終著者。原著の所属表記はHugging Face [1]。</a:t>
+              <a:t>Guilherme Penedoが第一著者、Thomas Wolfが最終著者。発表時の所属はHugging Face [1]。</a:t>
             </a:r>
           </a:p>
           <a:p>
@@ -43761,7 +43760,7 @@
                 <a:ea typeface="Noto Sans CJK JP"/>
                 <a:cs typeface="Noto Sans"/>
               </a:rPr>
-              <a:t>T5の原著。英語WebコーパスC4と、テキスト変換に統一した学習・評価を提案する。</a:t>
+              <a:t>英語WebコーパスC4と、テキスト変換に統一した学習・評価を提案する。</a:t>
             </a:r>
           </a:p>
         </p:txBody>
@@ -44290,7 +44289,7 @@
                 <a:ea typeface="Noto Sans CJK JP"/>
                 <a:cs typeface="Noto Sans"/>
               </a:rPr>
-              <a:t>FineWebとEduの原著。抽出・重複除去・品質選別の比較実験を報告する。</a:t>
+              <a:t>抽出・重複除去・品質選別の比較実験を報告する。</a:t>
             </a:r>
           </a:p>
         </p:txBody>

--- a/slides/datasets-in-10-minutes-fineweb.pptx
+++ b/slides/datasets-in-10-minutes-fineweb.pptx
@@ -13886,7 +13886,7 @@
                 <a:ea typeface="Noto Sans CJK JP"/>
                 <a:cs typeface="Noto Sans"/>
               </a:rPr>
-              <a:t>正解率 = 正解数 ÷ 設問数。この2問なら50%。公開時の評価では選択肢全文の尤度や長さ正規化を用い、複数課題を集計する [1]。</a:t>
+              <a:t>正解率 = 正解数 ÷ 設問数。この2問なら50%。モデル評価では選択肢全文の尤度や長さ正規化を用い、複数課題を集計する [1]。</a:t>
             </a:r>
           </a:p>
         </p:txBody>
@@ -13995,7 +13995,7 @@
                 <a:ea typeface="Noto Sans CJK JP"/>
                 <a:cs typeface="Noto Sans"/>
               </a:rPr>
-              <a:t>公開時に採用した知識・推論の評価課題</a:t>
+              <a:t>採用した知識・推論の評価課題</a:t>
             </a:r>
           </a:p>
         </p:txBody>
@@ -15791,7 +15791,7 @@
                 <a:ea typeface="Noto Sans CJK JP"/>
                 <a:cs typeface="Noto Sans"/>
               </a:rPr>
-              <a:t>公開時の比較実験に用いたモデル構成</a:t>
+              <a:t>比較実験に用いたモデル構成</a:t>
             </a:r>
           </a:p>
         </p:txBody>

--- a/slides/datasets-in-10-minutes-fineweb.pptx
+++ b/slides/datasets-in-10-minutes-fineweb.pptx
@@ -17060,7 +17060,7 @@
                 <a:ea typeface="Noto Sans CJK JP"/>
                 <a:cs typeface="Noto Sans"/>
               </a:rPr>
-              <a:t>Penedoら（2024）の図18は、構成比の差の絶対値が0.5ポイント以上の39分類を示す [1]。</a:t>
+              <a:t>公開された構成比の比較は、構成比の差の絶対値が0.5ポイント以上の39分類を示す [1]。</a:t>
             </a:r>
           </a:p>
         </p:txBody>
